--- a/slides/lecture03-assembly2.pptx
+++ b/slides/lecture03-assembly2.pptx
@@ -5,25 +5,30 @@
     <p:sldMasterId id="2147483648" r:id="rId1"/>
   </p:sldMasterIdLst>
   <p:notesMasterIdLst>
-    <p:notesMasterId r:id="rId18"/>
+    <p:notesMasterId r:id="rId23"/>
   </p:notesMasterIdLst>
   <p:sldIdLst>
     <p:sldId id="256" r:id="rId2"/>
     <p:sldId id="257" r:id="rId3"/>
     <p:sldId id="259" r:id="rId4"/>
-    <p:sldId id="260" r:id="rId5"/>
-    <p:sldId id="258" r:id="rId6"/>
-    <p:sldId id="261" r:id="rId7"/>
-    <p:sldId id="262" r:id="rId8"/>
-    <p:sldId id="263" r:id="rId9"/>
-    <p:sldId id="264" r:id="rId10"/>
-    <p:sldId id="270" r:id="rId11"/>
-    <p:sldId id="265" r:id="rId12"/>
-    <p:sldId id="266" r:id="rId13"/>
-    <p:sldId id="267" r:id="rId14"/>
-    <p:sldId id="268" r:id="rId15"/>
-    <p:sldId id="269" r:id="rId16"/>
-    <p:sldId id="271" r:id="rId17"/>
+    <p:sldId id="273" r:id="rId5"/>
+    <p:sldId id="274" r:id="rId6"/>
+    <p:sldId id="275" r:id="rId7"/>
+    <p:sldId id="276" r:id="rId8"/>
+    <p:sldId id="277" r:id="rId9"/>
+    <p:sldId id="260" r:id="rId10"/>
+    <p:sldId id="258" r:id="rId11"/>
+    <p:sldId id="261" r:id="rId12"/>
+    <p:sldId id="262" r:id="rId13"/>
+    <p:sldId id="263" r:id="rId14"/>
+    <p:sldId id="264" r:id="rId15"/>
+    <p:sldId id="270" r:id="rId16"/>
+    <p:sldId id="265" r:id="rId17"/>
+    <p:sldId id="266" r:id="rId18"/>
+    <p:sldId id="267" r:id="rId19"/>
+    <p:sldId id="268" r:id="rId20"/>
+    <p:sldId id="269" r:id="rId21"/>
+    <p:sldId id="271" r:id="rId22"/>
   </p:sldIdLst>
   <p:sldSz cx="12192000" cy="6858000"/>
   <p:notesSz cx="6858000" cy="9144000"/>
@@ -212,7 +217,7 @@
           <a:p>
             <a:fld id="{55C9657E-FDB3-4206-AA4E-9AE2AAB0A71C}" type="datetimeFigureOut">
               <a:rPr lang="LID4096" smtClean="0"/>
-              <a:t>01/25/2026</a:t>
+              <a:t>01/26/2026</a:t>
             </a:fld>
             <a:endParaRPr lang="LID4096"/>
           </a:p>
@@ -564,6 +569,1260 @@
 </p:notes>
 </file>
 
+<file path=ppt/notesSlides/notesSlide2.xml><?xml version="1.0" encoding="utf-8"?>
+<p:notes xmlns:a="http://schemas.openxmlformats.org/drawingml/2006/main" xmlns:r="http://schemas.openxmlformats.org/officeDocument/2006/relationships" xmlns:p="http://schemas.openxmlformats.org/presentationml/2006/main">
+  <p:cSld>
+    <p:spTree>
+      <p:nvGrpSpPr>
+        <p:cNvPr id="1" name=""/>
+        <p:cNvGrpSpPr/>
+        <p:nvPr/>
+      </p:nvGrpSpPr>
+      <p:grpSpPr>
+        <a:xfrm>
+          <a:off x="0" y="0"/>
+          <a:ext cx="0" cy="0"/>
+          <a:chOff x="0" y="0"/>
+          <a:chExt cx="0" cy="0"/>
+        </a:xfrm>
+      </p:grpSpPr>
+      <p:sp>
+        <p:nvSpPr>
+          <p:cNvPr id="2" name="Slide Image Placeholder 1"/>
+          <p:cNvSpPr>
+            <a:spLocks noGrp="1" noRot="1" noChangeAspect="1"/>
+          </p:cNvSpPr>
+          <p:nvPr>
+            <p:ph type="sldImg"/>
+          </p:nvPr>
+        </p:nvSpPr>
+        <p:spPr/>
+      </p:sp>
+      <p:sp>
+        <p:nvSpPr>
+          <p:cNvPr id="3" name="Notes Placeholder 2"/>
+          <p:cNvSpPr>
+            <a:spLocks noGrp="1"/>
+          </p:cNvSpPr>
+          <p:nvPr>
+            <p:ph type="body" idx="1"/>
+          </p:nvPr>
+        </p:nvSpPr>
+        <p:spPr/>
+        <p:txBody>
+          <a:bodyPr/>
+          <a:lstStyle/>
+          <a:p>
+            <a:r>
+              <a:rPr lang="en-US" dirty="0"/>
+              <a:t>Vi </a:t>
+            </a:r>
+            <a:r>
+              <a:rPr lang="en-US" dirty="0" err="1"/>
+              <a:t>skall</a:t>
+            </a:r>
+            <a:r>
+              <a:rPr lang="en-US" dirty="0"/>
+              <a:t> prata om </a:t>
+            </a:r>
+            <a:r>
+              <a:rPr lang="en-US" dirty="0" err="1"/>
+              <a:t>funktioner</a:t>
+            </a:r>
+            <a:r>
+              <a:rPr lang="en-US" dirty="0"/>
+              <a:t>.</a:t>
+            </a:r>
+          </a:p>
+          <a:p>
+            <a:r>
+              <a:rPr lang="en-US" dirty="0"/>
+              <a:t>Prata </a:t>
+            </a:r>
+            <a:r>
+              <a:rPr lang="en-US" dirty="0" err="1"/>
+              <a:t>igenom</a:t>
+            </a:r>
+            <a:r>
+              <a:rPr lang="en-US" dirty="0"/>
+              <a:t> </a:t>
+            </a:r>
+            <a:r>
+              <a:rPr lang="en-US" dirty="0" err="1"/>
+              <a:t>grundexemplet</a:t>
+            </a:r>
+            <a:r>
+              <a:rPr lang="en-US" dirty="0"/>
+              <a:t>. main l</a:t>
+            </a:r>
+            <a:r>
+              <a:rPr lang="sv-SE" dirty="0" err="1"/>
+              <a:t>äser</a:t>
+            </a:r>
+            <a:r>
+              <a:rPr lang="sv-SE" dirty="0"/>
+              <a:t> två värden från minnet och behöver köra en funktion för att få reda på det minsta. </a:t>
+            </a:r>
+          </a:p>
+          <a:p>
+            <a:r>
+              <a:rPr lang="sv-SE" dirty="0"/>
+              <a:t>Varför kan vi inte bara säga BRA? (</a:t>
+            </a:r>
+            <a:r>
+              <a:rPr lang="sv-SE" dirty="0" err="1"/>
+              <a:t>returaddress</a:t>
+            </a:r>
+            <a:r>
+              <a:rPr lang="sv-SE" dirty="0"/>
+              <a:t>)</a:t>
+            </a:r>
+          </a:p>
+          <a:p>
+            <a:r>
+              <a:rPr lang="en-US" dirty="0"/>
+              <a:t>&lt;click&gt; Vi </a:t>
+            </a:r>
+            <a:r>
+              <a:rPr lang="en-US" dirty="0" err="1"/>
+              <a:t>kollar</a:t>
+            </a:r>
+            <a:r>
+              <a:rPr lang="en-US" dirty="0"/>
+              <a:t> </a:t>
+            </a:r>
+            <a:r>
+              <a:rPr lang="en-US" dirty="0" err="1"/>
+              <a:t>i</a:t>
+            </a:r>
+            <a:r>
+              <a:rPr lang="en-US" dirty="0"/>
+              <a:t> </a:t>
+            </a:r>
+            <a:r>
+              <a:rPr lang="en-US" dirty="0" err="1"/>
+              <a:t>quickguiden</a:t>
+            </a:r>
+            <a:r>
+              <a:rPr lang="en-US" dirty="0"/>
+              <a:t> och </a:t>
+            </a:r>
+            <a:r>
+              <a:rPr lang="en-US" dirty="0" err="1"/>
+              <a:t>hittar</a:t>
+            </a:r>
+            <a:r>
+              <a:rPr lang="en-US" dirty="0"/>
+              <a:t> den h</a:t>
+            </a:r>
+            <a:r>
+              <a:rPr lang="sv-SE" dirty="0"/>
+              <a:t>är instruktionen (</a:t>
+            </a:r>
+            <a:r>
+              <a:rPr lang="sv-SE" dirty="0" err="1"/>
+              <a:t>jump</a:t>
+            </a:r>
+            <a:r>
+              <a:rPr lang="sv-SE" dirty="0"/>
+              <a:t> an </a:t>
+            </a:r>
+            <a:r>
+              <a:rPr lang="sv-SE" dirty="0" err="1"/>
+              <a:t>link</a:t>
+            </a:r>
+            <a:r>
+              <a:rPr lang="sv-SE" dirty="0"/>
+              <a:t>)</a:t>
+            </a:r>
+          </a:p>
+          <a:p>
+            <a:r>
+              <a:rPr lang="sv-SE" dirty="0"/>
+              <a:t>"Link" betyder spara </a:t>
+            </a:r>
+            <a:r>
+              <a:rPr lang="sv-SE" dirty="0" err="1"/>
+              <a:t>returaddress</a:t>
+            </a:r>
+            <a:r>
+              <a:rPr lang="sv-SE" dirty="0"/>
+              <a:t>. </a:t>
+            </a:r>
+          </a:p>
+          <a:p>
+            <a:endParaRPr lang="sv-SE" dirty="0"/>
+          </a:p>
+          <a:p>
+            <a:endParaRPr lang="LID4096" dirty="0"/>
+          </a:p>
+        </p:txBody>
+      </p:sp>
+      <p:sp>
+        <p:nvSpPr>
+          <p:cNvPr id="4" name="Slide Number Placeholder 3"/>
+          <p:cNvSpPr>
+            <a:spLocks noGrp="1"/>
+          </p:cNvSpPr>
+          <p:nvPr>
+            <p:ph type="sldNum" sz="quarter" idx="5"/>
+          </p:nvPr>
+        </p:nvSpPr>
+        <p:spPr/>
+        <p:txBody>
+          <a:bodyPr/>
+          <a:lstStyle/>
+          <a:p>
+            <a:fld id="{01B4E41B-EE32-43AA-BF26-21D12108C66F}" type="slidenum">
+              <a:rPr lang="LID4096" smtClean="0"/>
+              <a:t>3</a:t>
+            </a:fld>
+            <a:endParaRPr lang="LID4096"/>
+          </a:p>
+        </p:txBody>
+      </p:sp>
+    </p:spTree>
+    <p:extLst>
+      <p:ext uri="{BB962C8B-B14F-4D97-AF65-F5344CB8AC3E}">
+        <p14:creationId xmlns:p14="http://schemas.microsoft.com/office/powerpoint/2010/main" val="4131683646"/>
+      </p:ext>
+    </p:extLst>
+  </p:cSld>
+  <p:clrMapOvr>
+    <a:masterClrMapping/>
+  </p:clrMapOvr>
+</p:notes>
+</file>
+
+<file path=ppt/notesSlides/notesSlide3.xml><?xml version="1.0" encoding="utf-8"?>
+<p:notes xmlns:a="http://schemas.openxmlformats.org/drawingml/2006/main" xmlns:r="http://schemas.openxmlformats.org/officeDocument/2006/relationships" xmlns:p="http://schemas.openxmlformats.org/presentationml/2006/main">
+  <p:cSld>
+    <p:spTree>
+      <p:nvGrpSpPr>
+        <p:cNvPr id="1" name="">
+          <a:extLst>
+            <a:ext uri="{FF2B5EF4-FFF2-40B4-BE49-F238E27FC236}">
+              <a16:creationId xmlns:a16="http://schemas.microsoft.com/office/drawing/2014/main" id="{42BC0536-50E3-FF99-786A-093B3A0A1243}"/>
+            </a:ext>
+          </a:extLst>
+        </p:cNvPr>
+        <p:cNvGrpSpPr/>
+        <p:nvPr/>
+      </p:nvGrpSpPr>
+      <p:grpSpPr>
+        <a:xfrm>
+          <a:off x="0" y="0"/>
+          <a:ext cx="0" cy="0"/>
+          <a:chOff x="0" y="0"/>
+          <a:chExt cx="0" cy="0"/>
+        </a:xfrm>
+      </p:grpSpPr>
+      <p:sp>
+        <p:nvSpPr>
+          <p:cNvPr id="2" name="Slide Image Placeholder 1">
+            <a:extLst>
+              <a:ext uri="{FF2B5EF4-FFF2-40B4-BE49-F238E27FC236}">
+                <a16:creationId xmlns:a16="http://schemas.microsoft.com/office/drawing/2014/main" id="{F03AF551-D738-65B4-97AD-CC4C94BB5671}"/>
+              </a:ext>
+            </a:extLst>
+          </p:cNvPr>
+          <p:cNvSpPr>
+            <a:spLocks noGrp="1" noRot="1" noChangeAspect="1"/>
+          </p:cNvSpPr>
+          <p:nvPr>
+            <p:ph type="sldImg"/>
+          </p:nvPr>
+        </p:nvSpPr>
+        <p:spPr/>
+      </p:sp>
+      <p:sp>
+        <p:nvSpPr>
+          <p:cNvPr id="3" name="Notes Placeholder 2">
+            <a:extLst>
+              <a:ext uri="{FF2B5EF4-FFF2-40B4-BE49-F238E27FC236}">
+                <a16:creationId xmlns:a16="http://schemas.microsoft.com/office/drawing/2014/main" id="{5EA85874-2B36-6910-E8AF-3F3D3C794491}"/>
+              </a:ext>
+            </a:extLst>
+          </p:cNvPr>
+          <p:cNvSpPr>
+            <a:spLocks noGrp="1"/>
+          </p:cNvSpPr>
+          <p:nvPr>
+            <p:ph type="body" idx="1"/>
+          </p:nvPr>
+        </p:nvSpPr>
+        <p:spPr/>
+        <p:txBody>
+          <a:bodyPr/>
+          <a:lstStyle/>
+          <a:p>
+            <a:r>
+              <a:rPr lang="sv-SE" dirty="0"/>
+              <a:t>Vi </a:t>
+            </a:r>
+            <a:r>
+              <a:rPr lang="sv-SE" i="1" dirty="0"/>
+              <a:t>kan</a:t>
+            </a:r>
+            <a:r>
+              <a:rPr lang="sv-SE" i="0" dirty="0"/>
+              <a:t> spara </a:t>
+            </a:r>
+            <a:r>
+              <a:rPr lang="sv-SE" i="0" dirty="0" err="1"/>
+              <a:t>returaddressen</a:t>
+            </a:r>
+            <a:r>
+              <a:rPr lang="sv-SE" i="0" dirty="0"/>
+              <a:t> var vi vill, men </a:t>
+            </a:r>
+            <a:r>
+              <a:rPr lang="sv-SE" i="0" dirty="0" err="1"/>
+              <a:t>ABI:n</a:t>
+            </a:r>
+            <a:r>
+              <a:rPr lang="sv-SE" i="0" dirty="0"/>
+              <a:t> säger att vi skall använda register </a:t>
+            </a:r>
+            <a:r>
+              <a:rPr lang="sv-SE" b="1" i="0" dirty="0" err="1"/>
+              <a:t>ra</a:t>
+            </a:r>
+            <a:r>
+              <a:rPr lang="sv-SE" i="0" dirty="0"/>
+              <a:t>.</a:t>
+            </a:r>
+          </a:p>
+          <a:p>
+            <a:r>
+              <a:rPr lang="sv-SE" i="1" dirty="0"/>
+              <a:t>offset</a:t>
+            </a:r>
+            <a:r>
+              <a:rPr lang="sv-SE" i="0" dirty="0"/>
+              <a:t> räknar </a:t>
+            </a:r>
+            <a:r>
+              <a:rPr lang="sv-SE" i="0" dirty="0" err="1"/>
+              <a:t>assemblatorn</a:t>
+            </a:r>
+            <a:r>
+              <a:rPr lang="sv-SE" i="0" dirty="0"/>
+              <a:t> ut åt oss. </a:t>
+            </a:r>
+          </a:p>
+          <a:p>
+            <a:r>
+              <a:rPr lang="sv-SE" i="0" dirty="0"/>
+              <a:t>offset är 20 bitar (</a:t>
+            </a:r>
+            <a:r>
+              <a:rPr lang="sv-SE" i="0" dirty="0" err="1"/>
+              <a:t>signed</a:t>
+            </a:r>
+            <a:r>
+              <a:rPr lang="sv-SE" i="0" dirty="0"/>
+              <a:t>) så tillåter ett hopp +/- 1MB. </a:t>
+            </a:r>
+          </a:p>
+          <a:p>
+            <a:r>
+              <a:rPr lang="sv-SE" i="0" dirty="0"/>
+              <a:t>På vår maskin är det nästan alltid tillräckligt, men vad gör vi annars? </a:t>
+            </a:r>
+          </a:p>
+          <a:p>
+            <a:r>
+              <a:rPr lang="sv-SE" i="0" dirty="0"/>
+              <a:t>Och hur hoppar vi tillbaka efter min? </a:t>
+            </a:r>
+          </a:p>
+          <a:p>
+            <a:endParaRPr lang="LID4096" i="1" dirty="0"/>
+          </a:p>
+        </p:txBody>
+      </p:sp>
+      <p:sp>
+        <p:nvSpPr>
+          <p:cNvPr id="4" name="Slide Number Placeholder 3">
+            <a:extLst>
+              <a:ext uri="{FF2B5EF4-FFF2-40B4-BE49-F238E27FC236}">
+                <a16:creationId xmlns:a16="http://schemas.microsoft.com/office/drawing/2014/main" id="{5FB908E0-C914-9891-C434-2085E044E491}"/>
+              </a:ext>
+            </a:extLst>
+          </p:cNvPr>
+          <p:cNvSpPr>
+            <a:spLocks noGrp="1"/>
+          </p:cNvSpPr>
+          <p:nvPr>
+            <p:ph type="sldNum" sz="quarter" idx="5"/>
+          </p:nvPr>
+        </p:nvSpPr>
+        <p:spPr/>
+        <p:txBody>
+          <a:bodyPr/>
+          <a:lstStyle/>
+          <a:p>
+            <a:fld id="{01B4E41B-EE32-43AA-BF26-21D12108C66F}" type="slidenum">
+              <a:rPr lang="LID4096" smtClean="0"/>
+              <a:t>4</a:t>
+            </a:fld>
+            <a:endParaRPr lang="LID4096"/>
+          </a:p>
+        </p:txBody>
+      </p:sp>
+    </p:spTree>
+    <p:extLst>
+      <p:ext uri="{BB962C8B-B14F-4D97-AF65-F5344CB8AC3E}">
+        <p14:creationId xmlns:p14="http://schemas.microsoft.com/office/powerpoint/2010/main" val="1340088027"/>
+      </p:ext>
+    </p:extLst>
+  </p:cSld>
+  <p:clrMapOvr>
+    <a:masterClrMapping/>
+  </p:clrMapOvr>
+</p:notes>
+</file>
+
+<file path=ppt/notesSlides/notesSlide4.xml><?xml version="1.0" encoding="utf-8"?>
+<p:notes xmlns:a="http://schemas.openxmlformats.org/drawingml/2006/main" xmlns:r="http://schemas.openxmlformats.org/officeDocument/2006/relationships" xmlns:p="http://schemas.openxmlformats.org/presentationml/2006/main">
+  <p:cSld>
+    <p:spTree>
+      <p:nvGrpSpPr>
+        <p:cNvPr id="1" name="">
+          <a:extLst>
+            <a:ext uri="{FF2B5EF4-FFF2-40B4-BE49-F238E27FC236}">
+              <a16:creationId xmlns:a16="http://schemas.microsoft.com/office/drawing/2014/main" id="{A1B89935-E98B-F061-CFBE-26C13D4E39D8}"/>
+            </a:ext>
+          </a:extLst>
+        </p:cNvPr>
+        <p:cNvGrpSpPr/>
+        <p:nvPr/>
+      </p:nvGrpSpPr>
+      <p:grpSpPr>
+        <a:xfrm>
+          <a:off x="0" y="0"/>
+          <a:ext cx="0" cy="0"/>
+          <a:chOff x="0" y="0"/>
+          <a:chExt cx="0" cy="0"/>
+        </a:xfrm>
+      </p:grpSpPr>
+      <p:sp>
+        <p:nvSpPr>
+          <p:cNvPr id="2" name="Slide Image Placeholder 1">
+            <a:extLst>
+              <a:ext uri="{FF2B5EF4-FFF2-40B4-BE49-F238E27FC236}">
+                <a16:creationId xmlns:a16="http://schemas.microsoft.com/office/drawing/2014/main" id="{0E41F9F9-4A94-3F29-962D-91197DEAF461}"/>
+              </a:ext>
+            </a:extLst>
+          </p:cNvPr>
+          <p:cNvSpPr>
+            <a:spLocks noGrp="1" noRot="1" noChangeAspect="1"/>
+          </p:cNvSpPr>
+          <p:nvPr>
+            <p:ph type="sldImg"/>
+          </p:nvPr>
+        </p:nvSpPr>
+        <p:spPr/>
+      </p:sp>
+      <p:sp>
+        <p:nvSpPr>
+          <p:cNvPr id="3" name="Notes Placeholder 2">
+            <a:extLst>
+              <a:ext uri="{FF2B5EF4-FFF2-40B4-BE49-F238E27FC236}">
+                <a16:creationId xmlns:a16="http://schemas.microsoft.com/office/drawing/2014/main" id="{0FD404FC-AA44-BF8A-9586-B7798BEC1BB3}"/>
+              </a:ext>
+            </a:extLst>
+          </p:cNvPr>
+          <p:cNvSpPr>
+            <a:spLocks noGrp="1"/>
+          </p:cNvSpPr>
+          <p:nvPr>
+            <p:ph type="body" idx="1"/>
+          </p:nvPr>
+        </p:nvSpPr>
+        <p:spPr/>
+        <p:txBody>
+          <a:bodyPr/>
+          <a:lstStyle/>
+          <a:p>
+            <a:r>
+              <a:rPr lang="sv-SE" i="0" dirty="0"/>
+              <a:t>Lösningen på båda problemen: </a:t>
+            </a:r>
+            <a:r>
+              <a:rPr lang="sv-SE" i="0" dirty="0" err="1"/>
+              <a:t>jalr</a:t>
+            </a:r>
+            <a:endParaRPr lang="sv-SE" i="0" dirty="0"/>
+          </a:p>
+          <a:p>
+            <a:r>
+              <a:rPr lang="sv-SE" i="0" dirty="0"/>
+              <a:t>Den låter oss ange en direkt </a:t>
+            </a:r>
+            <a:r>
+              <a:rPr lang="sv-SE" i="0" dirty="0" err="1"/>
+              <a:t>address</a:t>
+            </a:r>
+            <a:r>
+              <a:rPr lang="sv-SE" i="0" dirty="0"/>
+              <a:t> att hoppa till (</a:t>
+            </a:r>
+            <a:r>
+              <a:rPr lang="sv-SE" i="0" dirty="0" err="1"/>
+              <a:t>ra</a:t>
+            </a:r>
+            <a:r>
+              <a:rPr lang="sv-SE" i="0" dirty="0"/>
+              <a:t>) +/- ett litet offset. </a:t>
+            </a:r>
+          </a:p>
+          <a:p>
+            <a:r>
+              <a:rPr lang="sv-SE" i="0" dirty="0"/>
+              <a:t>I det här fallet behöver vi inget </a:t>
+            </a:r>
+            <a:r>
+              <a:rPr lang="sv-SE" i="0" dirty="0" err="1"/>
+              <a:t>återhoppsaddress</a:t>
+            </a:r>
+            <a:r>
+              <a:rPr lang="sv-SE" i="0" dirty="0"/>
+              <a:t>, så vi skriver den till </a:t>
+            </a:r>
+            <a:r>
+              <a:rPr lang="sv-SE" i="0" dirty="0" err="1"/>
+              <a:t>zero</a:t>
+            </a:r>
+            <a:r>
+              <a:rPr lang="sv-SE" i="0" dirty="0"/>
+              <a:t>. </a:t>
+            </a:r>
+          </a:p>
+          <a:p>
+            <a:endParaRPr lang="sv-SE" i="0" dirty="0"/>
+          </a:p>
+          <a:p>
+            <a:r>
+              <a:rPr lang="sv-SE" i="0" dirty="0"/>
+              <a:t>Varför behövs då JAL? (en instruktion och oftast tillräcklig)</a:t>
+            </a:r>
+            <a:endParaRPr lang="LID4096" i="0" dirty="0"/>
+          </a:p>
+        </p:txBody>
+      </p:sp>
+      <p:sp>
+        <p:nvSpPr>
+          <p:cNvPr id="4" name="Slide Number Placeholder 3">
+            <a:extLst>
+              <a:ext uri="{FF2B5EF4-FFF2-40B4-BE49-F238E27FC236}">
+                <a16:creationId xmlns:a16="http://schemas.microsoft.com/office/drawing/2014/main" id="{2EB4F128-85FC-1687-2FB2-984058D99264}"/>
+              </a:ext>
+            </a:extLst>
+          </p:cNvPr>
+          <p:cNvSpPr>
+            <a:spLocks noGrp="1"/>
+          </p:cNvSpPr>
+          <p:nvPr>
+            <p:ph type="sldNum" sz="quarter" idx="5"/>
+          </p:nvPr>
+        </p:nvSpPr>
+        <p:spPr/>
+        <p:txBody>
+          <a:bodyPr/>
+          <a:lstStyle/>
+          <a:p>
+            <a:fld id="{01B4E41B-EE32-43AA-BF26-21D12108C66F}" type="slidenum">
+              <a:rPr lang="LID4096" smtClean="0"/>
+              <a:t>5</a:t>
+            </a:fld>
+            <a:endParaRPr lang="LID4096"/>
+          </a:p>
+        </p:txBody>
+      </p:sp>
+    </p:spTree>
+    <p:extLst>
+      <p:ext uri="{BB962C8B-B14F-4D97-AF65-F5344CB8AC3E}">
+        <p14:creationId xmlns:p14="http://schemas.microsoft.com/office/powerpoint/2010/main" val="472064259"/>
+      </p:ext>
+    </p:extLst>
+  </p:cSld>
+  <p:clrMapOvr>
+    <a:masterClrMapping/>
+  </p:clrMapOvr>
+</p:notes>
+</file>
+
+<file path=ppt/notesSlides/notesSlide5.xml><?xml version="1.0" encoding="utf-8"?>
+<p:notes xmlns:a="http://schemas.openxmlformats.org/drawingml/2006/main" xmlns:r="http://schemas.openxmlformats.org/officeDocument/2006/relationships" xmlns:p="http://schemas.openxmlformats.org/presentationml/2006/main">
+  <p:cSld>
+    <p:spTree>
+      <p:nvGrpSpPr>
+        <p:cNvPr id="1" name="">
+          <a:extLst>
+            <a:ext uri="{FF2B5EF4-FFF2-40B4-BE49-F238E27FC236}">
+              <a16:creationId xmlns:a16="http://schemas.microsoft.com/office/drawing/2014/main" id="{C5A61CBE-B964-01AB-4AF6-C86E741DCCB3}"/>
+            </a:ext>
+          </a:extLst>
+        </p:cNvPr>
+        <p:cNvGrpSpPr/>
+        <p:nvPr/>
+      </p:nvGrpSpPr>
+      <p:grpSpPr>
+        <a:xfrm>
+          <a:off x="0" y="0"/>
+          <a:ext cx="0" cy="0"/>
+          <a:chOff x="0" y="0"/>
+          <a:chExt cx="0" cy="0"/>
+        </a:xfrm>
+      </p:grpSpPr>
+      <p:sp>
+        <p:nvSpPr>
+          <p:cNvPr id="2" name="Slide Image Placeholder 1">
+            <a:extLst>
+              <a:ext uri="{FF2B5EF4-FFF2-40B4-BE49-F238E27FC236}">
+                <a16:creationId xmlns:a16="http://schemas.microsoft.com/office/drawing/2014/main" id="{989E654A-8B92-6B34-AB46-EE5E5F912825}"/>
+              </a:ext>
+            </a:extLst>
+          </p:cNvPr>
+          <p:cNvSpPr>
+            <a:spLocks noGrp="1" noRot="1" noChangeAspect="1"/>
+          </p:cNvSpPr>
+          <p:nvPr>
+            <p:ph type="sldImg"/>
+          </p:nvPr>
+        </p:nvSpPr>
+        <p:spPr/>
+      </p:sp>
+      <p:sp>
+        <p:nvSpPr>
+          <p:cNvPr id="3" name="Notes Placeholder 2">
+            <a:extLst>
+              <a:ext uri="{FF2B5EF4-FFF2-40B4-BE49-F238E27FC236}">
+                <a16:creationId xmlns:a16="http://schemas.microsoft.com/office/drawing/2014/main" id="{461E3B03-FC69-B866-77BF-3FDB841FFAE6}"/>
+              </a:ext>
+            </a:extLst>
+          </p:cNvPr>
+          <p:cNvSpPr>
+            <a:spLocks noGrp="1"/>
+          </p:cNvSpPr>
+          <p:nvPr>
+            <p:ph type="body" idx="1"/>
+          </p:nvPr>
+        </p:nvSpPr>
+        <p:spPr/>
+        <p:txBody>
+          <a:bodyPr/>
+          <a:lstStyle/>
+          <a:p>
+            <a:r>
+              <a:rPr lang="sv-SE" i="0" dirty="0"/>
+              <a:t>På större problem blir det väldigt jobbigt att hålla koll på om funktionen vi hoppar till ligger "nära nog". </a:t>
+            </a:r>
+          </a:p>
+          <a:p>
+            <a:r>
+              <a:rPr lang="sv-SE" i="0" dirty="0"/>
+              <a:t>Därför finns en </a:t>
+            </a:r>
+            <a:r>
+              <a:rPr lang="sv-SE" i="0" dirty="0" err="1"/>
+              <a:t>pseudoinstruktion</a:t>
+            </a:r>
+            <a:r>
+              <a:rPr lang="sv-SE" i="0" dirty="0"/>
+              <a:t> "call" där </a:t>
+            </a:r>
+            <a:r>
+              <a:rPr lang="sv-SE" i="0" dirty="0" err="1"/>
+              <a:t>assemblatorn</a:t>
+            </a:r>
+            <a:r>
+              <a:rPr lang="sv-SE" i="0" dirty="0"/>
+              <a:t> bestämmer om vi skall använda JAL eller JALR</a:t>
+            </a:r>
+          </a:p>
+          <a:p>
+            <a:r>
+              <a:rPr lang="en-US" i="0" dirty="0"/>
+              <a:t>&lt;click&gt;</a:t>
+            </a:r>
+          </a:p>
+          <a:p>
+            <a:r>
+              <a:rPr lang="en-US" i="0" dirty="0"/>
+              <a:t>Och </a:t>
+            </a:r>
+            <a:r>
+              <a:rPr lang="en-US" i="0" dirty="0" err="1"/>
+              <a:t>syntaxen</a:t>
+            </a:r>
+            <a:r>
+              <a:rPr lang="en-US" i="0" dirty="0"/>
+              <a:t> f</a:t>
+            </a:r>
+            <a:r>
+              <a:rPr lang="sv-SE" i="0" dirty="0"/>
+              <a:t>ör </a:t>
+            </a:r>
+            <a:r>
+              <a:rPr lang="sv-SE" i="0" dirty="0" err="1"/>
+              <a:t>return</a:t>
+            </a:r>
+            <a:r>
+              <a:rPr lang="sv-SE" i="0" dirty="0"/>
+              <a:t> är knölig och otydlig. Svårt att läsa om det här är en </a:t>
+            </a:r>
+            <a:r>
+              <a:rPr lang="sv-SE" i="0" dirty="0" err="1"/>
+              <a:t>return</a:t>
+            </a:r>
+            <a:r>
+              <a:rPr lang="sv-SE" i="0" dirty="0"/>
+              <a:t> eller bara ett krångligt hopp. Därför finns </a:t>
+            </a:r>
+            <a:r>
+              <a:rPr lang="sv-SE" i="0" dirty="0" err="1"/>
+              <a:t>pseudoinstruktionen</a:t>
+            </a:r>
+            <a:r>
+              <a:rPr lang="sv-SE" i="0" dirty="0"/>
+              <a:t> "</a:t>
+            </a:r>
+            <a:r>
+              <a:rPr lang="sv-SE" i="0" dirty="0" err="1"/>
+              <a:t>ret</a:t>
+            </a:r>
+            <a:r>
+              <a:rPr lang="sv-SE" i="0" dirty="0"/>
+              <a:t>"</a:t>
+            </a:r>
+          </a:p>
+          <a:p>
+            <a:r>
+              <a:rPr lang="en-US" i="0" dirty="0"/>
+              <a:t>&lt;click&gt;</a:t>
+            </a:r>
+            <a:endParaRPr lang="LID4096" i="0" dirty="0"/>
+          </a:p>
+        </p:txBody>
+      </p:sp>
+      <p:sp>
+        <p:nvSpPr>
+          <p:cNvPr id="4" name="Slide Number Placeholder 3">
+            <a:extLst>
+              <a:ext uri="{FF2B5EF4-FFF2-40B4-BE49-F238E27FC236}">
+                <a16:creationId xmlns:a16="http://schemas.microsoft.com/office/drawing/2014/main" id="{D947B048-E2BC-B623-B545-BE36FD6592DF}"/>
+              </a:ext>
+            </a:extLst>
+          </p:cNvPr>
+          <p:cNvSpPr>
+            <a:spLocks noGrp="1"/>
+          </p:cNvSpPr>
+          <p:nvPr>
+            <p:ph type="sldNum" sz="quarter" idx="5"/>
+          </p:nvPr>
+        </p:nvSpPr>
+        <p:spPr/>
+        <p:txBody>
+          <a:bodyPr/>
+          <a:lstStyle/>
+          <a:p>
+            <a:fld id="{01B4E41B-EE32-43AA-BF26-21D12108C66F}" type="slidenum">
+              <a:rPr lang="LID4096" smtClean="0"/>
+              <a:t>6</a:t>
+            </a:fld>
+            <a:endParaRPr lang="LID4096"/>
+          </a:p>
+        </p:txBody>
+      </p:sp>
+    </p:spTree>
+    <p:extLst>
+      <p:ext uri="{BB962C8B-B14F-4D97-AF65-F5344CB8AC3E}">
+        <p14:creationId xmlns:p14="http://schemas.microsoft.com/office/powerpoint/2010/main" val="2917617796"/>
+      </p:ext>
+    </p:extLst>
+  </p:cSld>
+  <p:clrMapOvr>
+    <a:masterClrMapping/>
+  </p:clrMapOvr>
+</p:notes>
+</file>
+
+<file path=ppt/notesSlides/notesSlide6.xml><?xml version="1.0" encoding="utf-8"?>
+<p:notes xmlns:a="http://schemas.openxmlformats.org/drawingml/2006/main" xmlns:r="http://schemas.openxmlformats.org/officeDocument/2006/relationships" xmlns:p="http://schemas.openxmlformats.org/presentationml/2006/main">
+  <p:cSld>
+    <p:spTree>
+      <p:nvGrpSpPr>
+        <p:cNvPr id="1" name="">
+          <a:extLst>
+            <a:ext uri="{FF2B5EF4-FFF2-40B4-BE49-F238E27FC236}">
+              <a16:creationId xmlns:a16="http://schemas.microsoft.com/office/drawing/2014/main" id="{5E398290-85B4-3522-9841-D82274523D00}"/>
+            </a:ext>
+          </a:extLst>
+        </p:cNvPr>
+        <p:cNvGrpSpPr/>
+        <p:nvPr/>
+      </p:nvGrpSpPr>
+      <p:grpSpPr>
+        <a:xfrm>
+          <a:off x="0" y="0"/>
+          <a:ext cx="0" cy="0"/>
+          <a:chOff x="0" y="0"/>
+          <a:chExt cx="0" cy="0"/>
+        </a:xfrm>
+      </p:grpSpPr>
+      <p:sp>
+        <p:nvSpPr>
+          <p:cNvPr id="2" name="Slide Image Placeholder 1">
+            <a:extLst>
+              <a:ext uri="{FF2B5EF4-FFF2-40B4-BE49-F238E27FC236}">
+                <a16:creationId xmlns:a16="http://schemas.microsoft.com/office/drawing/2014/main" id="{B50AF592-74EC-6FE7-06CB-DBB8F5AB5881}"/>
+              </a:ext>
+            </a:extLst>
+          </p:cNvPr>
+          <p:cNvSpPr>
+            <a:spLocks noGrp="1" noRot="1" noChangeAspect="1"/>
+          </p:cNvSpPr>
+          <p:nvPr>
+            <p:ph type="sldImg"/>
+          </p:nvPr>
+        </p:nvSpPr>
+        <p:spPr/>
+      </p:sp>
+      <p:sp>
+        <p:nvSpPr>
+          <p:cNvPr id="3" name="Notes Placeholder 2">
+            <a:extLst>
+              <a:ext uri="{FF2B5EF4-FFF2-40B4-BE49-F238E27FC236}">
+                <a16:creationId xmlns:a16="http://schemas.microsoft.com/office/drawing/2014/main" id="{CC4CA4C9-32B3-D44A-8162-77570D8E41A5}"/>
+              </a:ext>
+            </a:extLst>
+          </p:cNvPr>
+          <p:cNvSpPr>
+            <a:spLocks noGrp="1"/>
+          </p:cNvSpPr>
+          <p:nvPr>
+            <p:ph type="body" idx="1"/>
+          </p:nvPr>
+        </p:nvSpPr>
+        <p:spPr/>
+        <p:txBody>
+          <a:bodyPr/>
+          <a:lstStyle/>
+          <a:p>
+            <a:r>
+              <a:rPr lang="en-US" i="0" dirty="0"/>
+              <a:t>S</a:t>
+            </a:r>
+            <a:r>
+              <a:rPr lang="sv-SE" i="0" dirty="0"/>
+              <a:t>å, nu kan vi kalla en funktion, och returnera från den. </a:t>
+            </a:r>
+          </a:p>
+          <a:p>
+            <a:r>
+              <a:rPr lang="sv-SE" i="0" dirty="0"/>
+              <a:t>Men en funktion är inte mycket utan parametrar. </a:t>
+            </a:r>
+          </a:p>
+          <a:p>
+            <a:r>
+              <a:rPr lang="sv-SE" i="0" dirty="0"/>
+              <a:t>I det här fallet vet vi ju att våra parametrar ligger i t0 och t1, men det är ju slump. </a:t>
+            </a:r>
+          </a:p>
+          <a:p>
+            <a:r>
+              <a:rPr lang="sv-SE" i="0" dirty="0"/>
+              <a:t>Den som skriver min funktionen har ju ingen aning om var vi har dem. </a:t>
+            </a:r>
+          </a:p>
+          <a:p>
+            <a:r>
+              <a:rPr lang="sv-SE" i="0" dirty="0" err="1"/>
+              <a:t>ABI:n</a:t>
+            </a:r>
+            <a:r>
+              <a:rPr lang="sv-SE" i="0" dirty="0"/>
+              <a:t> säger att vi skall lägga våra parametrar, i ordning, i </a:t>
+            </a:r>
+            <a:r>
+              <a:rPr lang="sv-SE" i="0" dirty="0" err="1"/>
+              <a:t>registrena</a:t>
+            </a:r>
+            <a:r>
+              <a:rPr lang="sv-SE" i="0" dirty="0"/>
+              <a:t> a0-a6.</a:t>
+            </a:r>
+          </a:p>
+          <a:p>
+            <a:r>
+              <a:rPr lang="en-US" i="0" dirty="0"/>
+              <a:t>&lt;click&gt;</a:t>
+            </a:r>
+          </a:p>
+          <a:p>
+            <a:r>
+              <a:rPr lang="en-US" i="0" dirty="0"/>
+              <a:t>Nu </a:t>
+            </a:r>
+            <a:r>
+              <a:rPr lang="en-US" i="0" dirty="0" err="1"/>
+              <a:t>kan</a:t>
+            </a:r>
+            <a:r>
+              <a:rPr lang="en-US" i="0" dirty="0"/>
+              <a:t> vi </a:t>
+            </a:r>
+            <a:r>
+              <a:rPr lang="en-US" i="0" dirty="0" err="1"/>
+              <a:t>skriva</a:t>
+            </a:r>
+            <a:r>
+              <a:rPr lang="en-US" i="0" dirty="0"/>
+              <a:t> </a:t>
+            </a:r>
+            <a:r>
+              <a:rPr lang="en-US" i="0" dirty="0" err="1"/>
+              <a:t>vår</a:t>
+            </a:r>
+            <a:r>
+              <a:rPr lang="en-US" i="0" dirty="0"/>
+              <a:t> min function. </a:t>
+            </a:r>
+          </a:p>
+          <a:p>
+            <a:r>
+              <a:rPr lang="en-US" i="0" dirty="0" err="1"/>
+              <a:t>ABI:n</a:t>
+            </a:r>
+            <a:r>
+              <a:rPr lang="en-US" i="0" dirty="0"/>
+              <a:t> sager </a:t>
+            </a:r>
+            <a:r>
+              <a:rPr lang="en-US" i="0" dirty="0" err="1"/>
+              <a:t>att</a:t>
+            </a:r>
+            <a:r>
+              <a:rPr lang="en-US" i="0" dirty="0"/>
+              <a:t> vi </a:t>
+            </a:r>
+            <a:r>
+              <a:rPr lang="en-US" i="0" dirty="0" err="1"/>
+              <a:t>lägger</a:t>
+            </a:r>
+            <a:r>
+              <a:rPr lang="en-US" i="0" dirty="0"/>
+              <a:t> </a:t>
+            </a:r>
+            <a:r>
+              <a:rPr lang="en-US" i="0" dirty="0" err="1"/>
+              <a:t>returvärdet</a:t>
+            </a:r>
+            <a:r>
+              <a:rPr lang="en-US" i="0" dirty="0"/>
+              <a:t> </a:t>
+            </a:r>
+            <a:r>
+              <a:rPr lang="en-US" i="0" dirty="0" err="1"/>
+              <a:t>i</a:t>
+            </a:r>
+            <a:r>
+              <a:rPr lang="en-US" i="0" dirty="0"/>
+              <a:t> a0.</a:t>
+            </a:r>
+          </a:p>
+          <a:p>
+            <a:r>
+              <a:rPr lang="en-US" i="0" dirty="0"/>
+              <a:t>&lt;click&gt;</a:t>
+            </a:r>
+          </a:p>
+          <a:p>
+            <a:r>
+              <a:rPr lang="en-US" i="0" dirty="0" err="1"/>
+              <a:t>Så</a:t>
+            </a:r>
+            <a:r>
+              <a:rPr lang="en-US" i="0" dirty="0"/>
+              <a:t>! Nu </a:t>
+            </a:r>
+            <a:r>
+              <a:rPr lang="en-US" i="0" dirty="0" err="1"/>
+              <a:t>kommer</a:t>
+            </a:r>
+            <a:r>
+              <a:rPr lang="en-US" i="0" dirty="0"/>
+              <a:t> vi </a:t>
+            </a:r>
+            <a:r>
+              <a:rPr lang="en-US" i="0" dirty="0" err="1"/>
+              <a:t>tillbaka</a:t>
+            </a:r>
+            <a:r>
+              <a:rPr lang="en-US" i="0" dirty="0"/>
+              <a:t> </a:t>
+            </a:r>
+            <a:r>
+              <a:rPr lang="en-US" i="0" dirty="0" err="1"/>
+              <a:t>från</a:t>
+            </a:r>
+            <a:r>
+              <a:rPr lang="en-US" i="0" dirty="0"/>
+              <a:t> </a:t>
+            </a:r>
+            <a:r>
+              <a:rPr lang="en-US" i="0" dirty="0" err="1"/>
+              <a:t>funktionen</a:t>
+            </a:r>
+            <a:r>
+              <a:rPr lang="en-US" i="0" dirty="0"/>
+              <a:t> min och det </a:t>
+            </a:r>
+            <a:r>
+              <a:rPr lang="en-US" i="0" dirty="0" err="1"/>
+              <a:t>lägsta</a:t>
+            </a:r>
+            <a:r>
+              <a:rPr lang="en-US" i="0" dirty="0"/>
+              <a:t> </a:t>
+            </a:r>
+            <a:r>
+              <a:rPr lang="en-US" i="0" dirty="0" err="1"/>
+              <a:t>värdet</a:t>
+            </a:r>
+            <a:r>
+              <a:rPr lang="en-US" i="0" dirty="0"/>
+              <a:t> ligger </a:t>
+            </a:r>
+            <a:r>
+              <a:rPr lang="en-US" i="0" dirty="0" err="1"/>
+              <a:t>i</a:t>
+            </a:r>
+            <a:r>
+              <a:rPr lang="en-US" i="0" dirty="0"/>
+              <a:t> a0.</a:t>
+            </a:r>
+          </a:p>
+          <a:p>
+            <a:endParaRPr lang="en-US" i="0" dirty="0"/>
+          </a:p>
+          <a:p>
+            <a:r>
+              <a:rPr lang="en-US" i="0" dirty="0"/>
+              <a:t>Innan vi </a:t>
+            </a:r>
+            <a:r>
+              <a:rPr lang="en-US" i="0" dirty="0" err="1"/>
+              <a:t>fortsätter</a:t>
+            </a:r>
+            <a:r>
+              <a:rPr lang="en-US" i="0" dirty="0"/>
+              <a:t> </a:t>
+            </a:r>
+            <a:r>
+              <a:rPr lang="en-US" i="0" dirty="0" err="1"/>
+              <a:t>snyggar</a:t>
+            </a:r>
+            <a:r>
+              <a:rPr lang="en-US" i="0" dirty="0"/>
+              <a:t> vi till min </a:t>
+            </a:r>
+            <a:r>
+              <a:rPr lang="en-US" i="0" dirty="0" err="1"/>
+              <a:t>funktionen</a:t>
+            </a:r>
+            <a:r>
+              <a:rPr lang="en-US" i="0" dirty="0"/>
+              <a:t> (bara för </a:t>
+            </a:r>
+            <a:r>
+              <a:rPr lang="en-US" i="0" dirty="0" err="1"/>
+              <a:t>att</a:t>
+            </a:r>
+            <a:r>
+              <a:rPr lang="en-US" i="0" dirty="0"/>
+              <a:t> vi </a:t>
+            </a:r>
+            <a:r>
+              <a:rPr lang="en-US" i="0" dirty="0" err="1"/>
+              <a:t>vill</a:t>
+            </a:r>
+            <a:r>
+              <a:rPr lang="en-US" i="0" dirty="0"/>
+              <a:t>)</a:t>
+            </a:r>
+          </a:p>
+          <a:p>
+            <a:endParaRPr lang="sv-SE" i="0" dirty="0"/>
+          </a:p>
+          <a:p>
+            <a:endParaRPr lang="sv-SE" i="0" dirty="0"/>
+          </a:p>
+          <a:p>
+            <a:endParaRPr lang="LID4096" i="0" dirty="0"/>
+          </a:p>
+        </p:txBody>
+      </p:sp>
+      <p:sp>
+        <p:nvSpPr>
+          <p:cNvPr id="4" name="Slide Number Placeholder 3">
+            <a:extLst>
+              <a:ext uri="{FF2B5EF4-FFF2-40B4-BE49-F238E27FC236}">
+                <a16:creationId xmlns:a16="http://schemas.microsoft.com/office/drawing/2014/main" id="{FF828C1E-984E-992F-3951-944F74D176DF}"/>
+              </a:ext>
+            </a:extLst>
+          </p:cNvPr>
+          <p:cNvSpPr>
+            <a:spLocks noGrp="1"/>
+          </p:cNvSpPr>
+          <p:nvPr>
+            <p:ph type="sldNum" sz="quarter" idx="5"/>
+          </p:nvPr>
+        </p:nvSpPr>
+        <p:spPr/>
+        <p:txBody>
+          <a:bodyPr/>
+          <a:lstStyle/>
+          <a:p>
+            <a:fld id="{01B4E41B-EE32-43AA-BF26-21D12108C66F}" type="slidenum">
+              <a:rPr lang="LID4096" smtClean="0"/>
+              <a:t>7</a:t>
+            </a:fld>
+            <a:endParaRPr lang="LID4096"/>
+          </a:p>
+        </p:txBody>
+      </p:sp>
+    </p:spTree>
+    <p:extLst>
+      <p:ext uri="{BB962C8B-B14F-4D97-AF65-F5344CB8AC3E}">
+        <p14:creationId xmlns:p14="http://schemas.microsoft.com/office/powerpoint/2010/main" val="846599705"/>
+      </p:ext>
+    </p:extLst>
+  </p:cSld>
+  <p:clrMapOvr>
+    <a:masterClrMapping/>
+  </p:clrMapOvr>
+</p:notes>
+</file>
+
+<file path=ppt/notesSlides/notesSlide7.xml><?xml version="1.0" encoding="utf-8"?>
+<p:notes xmlns:a="http://schemas.openxmlformats.org/drawingml/2006/main" xmlns:r="http://schemas.openxmlformats.org/officeDocument/2006/relationships" xmlns:p="http://schemas.openxmlformats.org/presentationml/2006/main">
+  <p:cSld>
+    <p:spTree>
+      <p:nvGrpSpPr>
+        <p:cNvPr id="1" name="">
+          <a:extLst>
+            <a:ext uri="{FF2B5EF4-FFF2-40B4-BE49-F238E27FC236}">
+              <a16:creationId xmlns:a16="http://schemas.microsoft.com/office/drawing/2014/main" id="{8A426570-5CAC-CA9F-4110-67B6A05AAED3}"/>
+            </a:ext>
+          </a:extLst>
+        </p:cNvPr>
+        <p:cNvGrpSpPr/>
+        <p:nvPr/>
+      </p:nvGrpSpPr>
+      <p:grpSpPr>
+        <a:xfrm>
+          <a:off x="0" y="0"/>
+          <a:ext cx="0" cy="0"/>
+          <a:chOff x="0" y="0"/>
+          <a:chExt cx="0" cy="0"/>
+        </a:xfrm>
+      </p:grpSpPr>
+      <p:sp>
+        <p:nvSpPr>
+          <p:cNvPr id="2" name="Slide Image Placeholder 1">
+            <a:extLst>
+              <a:ext uri="{FF2B5EF4-FFF2-40B4-BE49-F238E27FC236}">
+                <a16:creationId xmlns:a16="http://schemas.microsoft.com/office/drawing/2014/main" id="{B3C7D423-8F88-0D63-0512-606908A6FB04}"/>
+              </a:ext>
+            </a:extLst>
+          </p:cNvPr>
+          <p:cNvSpPr>
+            <a:spLocks noGrp="1" noRot="1" noChangeAspect="1"/>
+          </p:cNvSpPr>
+          <p:nvPr>
+            <p:ph type="sldImg"/>
+          </p:nvPr>
+        </p:nvSpPr>
+        <p:spPr/>
+      </p:sp>
+      <p:sp>
+        <p:nvSpPr>
+          <p:cNvPr id="3" name="Notes Placeholder 2">
+            <a:extLst>
+              <a:ext uri="{FF2B5EF4-FFF2-40B4-BE49-F238E27FC236}">
+                <a16:creationId xmlns:a16="http://schemas.microsoft.com/office/drawing/2014/main" id="{523A644C-0F20-8CC2-5A77-33AD947B9DD0}"/>
+              </a:ext>
+            </a:extLst>
+          </p:cNvPr>
+          <p:cNvSpPr>
+            <a:spLocks noGrp="1"/>
+          </p:cNvSpPr>
+          <p:nvPr>
+            <p:ph type="body" idx="1"/>
+          </p:nvPr>
+        </p:nvSpPr>
+        <p:spPr/>
+        <p:txBody>
+          <a:bodyPr/>
+          <a:lstStyle/>
+          <a:p>
+            <a:endParaRPr lang="sv-SE" i="0" dirty="0"/>
+          </a:p>
+          <a:p>
+            <a:endParaRPr lang="sv-SE" i="0" dirty="0"/>
+          </a:p>
+          <a:p>
+            <a:endParaRPr lang="LID4096" i="0" dirty="0"/>
+          </a:p>
+        </p:txBody>
+      </p:sp>
+      <p:sp>
+        <p:nvSpPr>
+          <p:cNvPr id="4" name="Slide Number Placeholder 3">
+            <a:extLst>
+              <a:ext uri="{FF2B5EF4-FFF2-40B4-BE49-F238E27FC236}">
+                <a16:creationId xmlns:a16="http://schemas.microsoft.com/office/drawing/2014/main" id="{670FE299-20C2-1B52-F602-E9623C48AAA6}"/>
+              </a:ext>
+            </a:extLst>
+          </p:cNvPr>
+          <p:cNvSpPr>
+            <a:spLocks noGrp="1"/>
+          </p:cNvSpPr>
+          <p:nvPr>
+            <p:ph type="sldNum" sz="quarter" idx="5"/>
+          </p:nvPr>
+        </p:nvSpPr>
+        <p:spPr/>
+        <p:txBody>
+          <a:bodyPr/>
+          <a:lstStyle/>
+          <a:p>
+            <a:fld id="{01B4E41B-EE32-43AA-BF26-21D12108C66F}" type="slidenum">
+              <a:rPr lang="LID4096" smtClean="0"/>
+              <a:t>8</a:t>
+            </a:fld>
+            <a:endParaRPr lang="LID4096"/>
+          </a:p>
+        </p:txBody>
+      </p:sp>
+    </p:spTree>
+    <p:extLst>
+      <p:ext uri="{BB962C8B-B14F-4D97-AF65-F5344CB8AC3E}">
+        <p14:creationId xmlns:p14="http://schemas.microsoft.com/office/powerpoint/2010/main" val="1840089975"/>
+      </p:ext>
+    </p:extLst>
+  </p:cSld>
+  <p:clrMapOvr>
+    <a:masterClrMapping/>
+  </p:clrMapOvr>
+</p:notes>
+</file>
+
 <file path=ppt/slideLayouts/slideLayout1.xml><?xml version="1.0" encoding="utf-8"?>
 <p:sldLayout xmlns:a="http://schemas.openxmlformats.org/drawingml/2006/main" xmlns:r="http://schemas.openxmlformats.org/officeDocument/2006/relationships" xmlns:p="http://schemas.openxmlformats.org/presentationml/2006/main" type="title" preserve="1">
   <p:cSld name="Title Slide">
@@ -713,7 +1972,7 @@
           <a:p>
             <a:fld id="{C16EB631-5B1A-4879-85E7-A8D4C94FBFC5}" type="datetimeFigureOut">
               <a:rPr lang="LID4096" smtClean="0"/>
-              <a:t>01/25/2026</a:t>
+              <a:t>01/26/2026</a:t>
             </a:fld>
             <a:endParaRPr lang="LID4096"/>
           </a:p>
@@ -913,7 +2172,7 @@
           <a:p>
             <a:fld id="{C16EB631-5B1A-4879-85E7-A8D4C94FBFC5}" type="datetimeFigureOut">
               <a:rPr lang="LID4096" smtClean="0"/>
-              <a:t>01/25/2026</a:t>
+              <a:t>01/26/2026</a:t>
             </a:fld>
             <a:endParaRPr lang="LID4096"/>
           </a:p>
@@ -1123,7 +2382,7 @@
           <a:p>
             <a:fld id="{C16EB631-5B1A-4879-85E7-A8D4C94FBFC5}" type="datetimeFigureOut">
               <a:rPr lang="LID4096" smtClean="0"/>
-              <a:t>01/25/2026</a:t>
+              <a:t>01/26/2026</a:t>
             </a:fld>
             <a:endParaRPr lang="LID4096"/>
           </a:p>
@@ -1448,7 +2707,7 @@
           <a:p>
             <a:fld id="{C16EB631-5B1A-4879-85E7-A8D4C94FBFC5}" type="datetimeFigureOut">
               <a:rPr lang="LID4096" smtClean="0"/>
-              <a:t>01/25/2026</a:t>
+              <a:t>01/26/2026</a:t>
             </a:fld>
             <a:endParaRPr lang="LID4096"/>
           </a:p>
@@ -1724,7 +2983,7 @@
           <a:p>
             <a:fld id="{C16EB631-5B1A-4879-85E7-A8D4C94FBFC5}" type="datetimeFigureOut">
               <a:rPr lang="LID4096" smtClean="0"/>
-              <a:t>01/25/2026</a:t>
+              <a:t>01/26/2026</a:t>
             </a:fld>
             <a:endParaRPr lang="LID4096"/>
           </a:p>
@@ -2046,7 +3305,7 @@
           <a:p>
             <a:fld id="{C16EB631-5B1A-4879-85E7-A8D4C94FBFC5}" type="datetimeFigureOut">
               <a:rPr lang="LID4096" smtClean="0"/>
-              <a:t>01/25/2026</a:t>
+              <a:t>01/26/2026</a:t>
             </a:fld>
             <a:endParaRPr lang="LID4096"/>
           </a:p>
@@ -2515,7 +3774,7 @@
           <a:p>
             <a:fld id="{C16EB631-5B1A-4879-85E7-A8D4C94FBFC5}" type="datetimeFigureOut">
               <a:rPr lang="LID4096" smtClean="0"/>
-              <a:t>01/25/2026</a:t>
+              <a:t>01/26/2026</a:t>
             </a:fld>
             <a:endParaRPr lang="LID4096"/>
           </a:p>
@@ -2711,7 +3970,7 @@
           <a:p>
             <a:fld id="{C16EB631-5B1A-4879-85E7-A8D4C94FBFC5}" type="datetimeFigureOut">
               <a:rPr lang="LID4096" smtClean="0"/>
-              <a:t>01/25/2026</a:t>
+              <a:t>01/26/2026</a:t>
             </a:fld>
             <a:endParaRPr lang="LID4096"/>
           </a:p>
@@ -2824,7 +4083,7 @@
           <a:p>
             <a:fld id="{C16EB631-5B1A-4879-85E7-A8D4C94FBFC5}" type="datetimeFigureOut">
               <a:rPr lang="LID4096" smtClean="0"/>
-              <a:t>01/25/2026</a:t>
+              <a:t>01/26/2026</a:t>
             </a:fld>
             <a:endParaRPr lang="LID4096"/>
           </a:p>
@@ -3137,7 +4396,7 @@
           <a:p>
             <a:fld id="{C16EB631-5B1A-4879-85E7-A8D4C94FBFC5}" type="datetimeFigureOut">
               <a:rPr lang="LID4096" smtClean="0"/>
-              <a:t>01/25/2026</a:t>
+              <a:t>01/26/2026</a:t>
             </a:fld>
             <a:endParaRPr lang="LID4096"/>
           </a:p>
@@ -3426,7 +4685,7 @@
           <a:p>
             <a:fld id="{C16EB631-5B1A-4879-85E7-A8D4C94FBFC5}" type="datetimeFigureOut">
               <a:rPr lang="LID4096" smtClean="0"/>
-              <a:t>01/25/2026</a:t>
+              <a:t>01/26/2026</a:t>
             </a:fld>
             <a:endParaRPr lang="LID4096"/>
           </a:p>
@@ -3669,7 +4928,7 @@
           <a:p>
             <a:fld id="{C16EB631-5B1A-4879-85E7-A8D4C94FBFC5}" type="datetimeFigureOut">
               <a:rPr lang="LID4096" smtClean="0"/>
-              <a:t>01/25/2026</a:t>
+              <a:t>01/26/2026</a:t>
             </a:fld>
             <a:endParaRPr lang="LID4096"/>
           </a:p>
@@ -4180,6 +5439,598 @@
           <p:cNvPr id="2" name="Title 1">
             <a:extLst>
               <a:ext uri="{FF2B5EF4-FFF2-40B4-BE49-F238E27FC236}">
+                <a16:creationId xmlns:a16="http://schemas.microsoft.com/office/drawing/2014/main" id="{AA102AFE-405E-BC06-4384-BFD3BD60FBE9}"/>
+              </a:ext>
+            </a:extLst>
+          </p:cNvPr>
+          <p:cNvSpPr>
+            <a:spLocks noGrp="1"/>
+          </p:cNvSpPr>
+          <p:nvPr>
+            <p:ph type="title"/>
+          </p:nvPr>
+        </p:nvSpPr>
+        <p:spPr/>
+        <p:txBody>
+          <a:bodyPr/>
+          <a:lstStyle/>
+          <a:p>
+            <a:r>
+              <a:rPr lang="sv-SE"/>
+              <a:t>Stacken</a:t>
+            </a:r>
+            <a:endParaRPr lang="LID4096"/>
+          </a:p>
+        </p:txBody>
+      </p:sp>
+      <p:sp>
+        <p:nvSpPr>
+          <p:cNvPr id="3" name="Content Placeholder 2">
+            <a:extLst>
+              <a:ext uri="{FF2B5EF4-FFF2-40B4-BE49-F238E27FC236}">
+                <a16:creationId xmlns:a16="http://schemas.microsoft.com/office/drawing/2014/main" id="{5735B9B8-F988-19DA-03CB-0FB1F22F9682}"/>
+              </a:ext>
+            </a:extLst>
+          </p:cNvPr>
+          <p:cNvSpPr>
+            <a:spLocks noGrp="1"/>
+          </p:cNvSpPr>
+          <p:nvPr>
+            <p:ph idx="1"/>
+          </p:nvPr>
+        </p:nvSpPr>
+        <p:spPr/>
+        <p:txBody>
+          <a:bodyPr/>
+          <a:lstStyle/>
+          <a:p>
+            <a:r>
+              <a:rPr lang="sv-SE"/>
+              <a:t>Visa bild på stackens plats i minnet</a:t>
+            </a:r>
+          </a:p>
+          <a:p>
+            <a:r>
+              <a:rPr lang="sv-SE"/>
+              <a:t>Inga push och pop. Vi håller själva koll på stackpekaren. </a:t>
+            </a:r>
+          </a:p>
+          <a:p>
+            <a:r>
+              <a:rPr lang="sv-SE"/>
+              <a:t>Gör ett exempel (Låtsas att vi bara har litet antal register)</a:t>
+            </a:r>
+          </a:p>
+          <a:p>
+            <a:pPr lvl="1"/>
+            <a:r>
+              <a:rPr lang="sv-SE"/>
+              <a:t>Samma sak händer i verkligheten, fast i mycket mer komplicerade program</a:t>
+            </a:r>
+          </a:p>
+          <a:p>
+            <a:endParaRPr lang="LID4096"/>
+          </a:p>
+        </p:txBody>
+      </p:sp>
+    </p:spTree>
+    <p:extLst>
+      <p:ext uri="{BB962C8B-B14F-4D97-AF65-F5344CB8AC3E}">
+        <p14:creationId xmlns:p14="http://schemas.microsoft.com/office/powerpoint/2010/main" val="1932440338"/>
+      </p:ext>
+    </p:extLst>
+  </p:cSld>
+  <p:clrMapOvr>
+    <a:masterClrMapping/>
+  </p:clrMapOvr>
+</p:sld>
+</file>
+
+<file path=ppt/slides/slide11.xml><?xml version="1.0" encoding="utf-8"?>
+<p:sld xmlns:a="http://schemas.openxmlformats.org/drawingml/2006/main" xmlns:r="http://schemas.openxmlformats.org/officeDocument/2006/relationships" xmlns:p="http://schemas.openxmlformats.org/presentationml/2006/main">
+  <p:cSld>
+    <p:spTree>
+      <p:nvGrpSpPr>
+        <p:cNvPr id="1" name=""/>
+        <p:cNvGrpSpPr/>
+        <p:nvPr/>
+      </p:nvGrpSpPr>
+      <p:grpSpPr>
+        <a:xfrm>
+          <a:off x="0" y="0"/>
+          <a:ext cx="0" cy="0"/>
+          <a:chOff x="0" y="0"/>
+          <a:chExt cx="0" cy="0"/>
+        </a:xfrm>
+      </p:grpSpPr>
+      <p:sp>
+        <p:nvSpPr>
+          <p:cNvPr id="2" name="Title 1">
+            <a:extLst>
+              <a:ext uri="{FF2B5EF4-FFF2-40B4-BE49-F238E27FC236}">
+                <a16:creationId xmlns:a16="http://schemas.microsoft.com/office/drawing/2014/main" id="{EA4DBB50-CF68-B019-C880-D01EB750FFF9}"/>
+              </a:ext>
+            </a:extLst>
+          </p:cNvPr>
+          <p:cNvSpPr>
+            <a:spLocks noGrp="1"/>
+          </p:cNvSpPr>
+          <p:nvPr>
+            <p:ph type="title"/>
+          </p:nvPr>
+        </p:nvSpPr>
+        <p:spPr/>
+        <p:txBody>
+          <a:bodyPr/>
+          <a:lstStyle/>
+          <a:p>
+            <a:r>
+              <a:rPr lang="sv-SE"/>
+              <a:t>Register Saving</a:t>
+            </a:r>
+            <a:endParaRPr lang="LID4096"/>
+          </a:p>
+        </p:txBody>
+      </p:sp>
+      <p:sp>
+        <p:nvSpPr>
+          <p:cNvPr id="3" name="Content Placeholder 2">
+            <a:extLst>
+              <a:ext uri="{FF2B5EF4-FFF2-40B4-BE49-F238E27FC236}">
+                <a16:creationId xmlns:a16="http://schemas.microsoft.com/office/drawing/2014/main" id="{6F91E298-03AE-7576-04AA-8BB3BE2BF8F3}"/>
+              </a:ext>
+            </a:extLst>
+          </p:cNvPr>
+          <p:cNvSpPr>
+            <a:spLocks noGrp="1"/>
+          </p:cNvSpPr>
+          <p:nvPr>
+            <p:ph idx="1"/>
+          </p:nvPr>
+        </p:nvSpPr>
+        <p:spPr/>
+        <p:txBody>
+          <a:bodyPr/>
+          <a:lstStyle/>
+          <a:p>
+            <a:r>
+              <a:rPr lang="sv-SE"/>
+              <a:t>Gör exemplet där vi vill skriva min(x, y, z) genom att kalla min.</a:t>
+            </a:r>
+          </a:p>
+          <a:p>
+            <a:r>
+              <a:rPr lang="sv-SE"/>
+              <a:t>Kan dom se problemet? </a:t>
+            </a:r>
+          </a:p>
+          <a:p>
+            <a:endParaRPr lang="LID4096"/>
+          </a:p>
+        </p:txBody>
+      </p:sp>
+      <p:pic>
+        <p:nvPicPr>
+          <p:cNvPr id="5" name="Picture 4">
+            <a:extLst>
+              <a:ext uri="{FF2B5EF4-FFF2-40B4-BE49-F238E27FC236}">
+                <a16:creationId xmlns:a16="http://schemas.microsoft.com/office/drawing/2014/main" id="{327C5942-CF83-05B1-2698-171934D12D7D}"/>
+              </a:ext>
+            </a:extLst>
+          </p:cNvPr>
+          <p:cNvPicPr>
+            <a:picLocks noChangeAspect="1"/>
+          </p:cNvPicPr>
+          <p:nvPr/>
+        </p:nvPicPr>
+        <p:blipFill>
+          <a:blip r:embed="rId2"/>
+          <a:stretch>
+            <a:fillRect/>
+          </a:stretch>
+        </p:blipFill>
+        <p:spPr>
+          <a:xfrm>
+            <a:off x="1108934" y="3292330"/>
+            <a:ext cx="10431331" cy="2076740"/>
+          </a:xfrm>
+          <a:prstGeom prst="rect">
+            <a:avLst/>
+          </a:prstGeom>
+        </p:spPr>
+      </p:pic>
+    </p:spTree>
+    <p:extLst>
+      <p:ext uri="{BB962C8B-B14F-4D97-AF65-F5344CB8AC3E}">
+        <p14:creationId xmlns:p14="http://schemas.microsoft.com/office/powerpoint/2010/main" val="1015968766"/>
+      </p:ext>
+    </p:extLst>
+  </p:cSld>
+  <p:clrMapOvr>
+    <a:masterClrMapping/>
+  </p:clrMapOvr>
+</p:sld>
+</file>
+
+<file path=ppt/slides/slide12.xml><?xml version="1.0" encoding="utf-8"?>
+<p:sld xmlns:a="http://schemas.openxmlformats.org/drawingml/2006/main" xmlns:r="http://schemas.openxmlformats.org/officeDocument/2006/relationships" xmlns:p="http://schemas.openxmlformats.org/presentationml/2006/main">
+  <p:cSld>
+    <p:spTree>
+      <p:nvGrpSpPr>
+        <p:cNvPr id="1" name=""/>
+        <p:cNvGrpSpPr/>
+        <p:nvPr/>
+      </p:nvGrpSpPr>
+      <p:grpSpPr>
+        <a:xfrm>
+          <a:off x="0" y="0"/>
+          <a:ext cx="0" cy="0"/>
+          <a:chOff x="0" y="0"/>
+          <a:chExt cx="0" cy="0"/>
+        </a:xfrm>
+      </p:grpSpPr>
+      <p:sp>
+        <p:nvSpPr>
+          <p:cNvPr id="2" name="Title 1">
+            <a:extLst>
+              <a:ext uri="{FF2B5EF4-FFF2-40B4-BE49-F238E27FC236}">
+                <a16:creationId xmlns:a16="http://schemas.microsoft.com/office/drawing/2014/main" id="{6492B6DF-2E34-9694-7818-8ACDECBC8678}"/>
+              </a:ext>
+            </a:extLst>
+          </p:cNvPr>
+          <p:cNvSpPr>
+            <a:spLocks noGrp="1"/>
+          </p:cNvSpPr>
+          <p:nvPr>
+            <p:ph type="title"/>
+          </p:nvPr>
+        </p:nvSpPr>
+        <p:spPr/>
+        <p:txBody>
+          <a:bodyPr/>
+          <a:lstStyle/>
+          <a:p>
+            <a:r>
+              <a:rPr lang="sv-SE"/>
+              <a:t>Register Saving</a:t>
+            </a:r>
+            <a:endParaRPr lang="LID4096"/>
+          </a:p>
+        </p:txBody>
+      </p:sp>
+      <p:sp>
+        <p:nvSpPr>
+          <p:cNvPr id="3" name="Content Placeholder 2">
+            <a:extLst>
+              <a:ext uri="{FF2B5EF4-FFF2-40B4-BE49-F238E27FC236}">
+                <a16:creationId xmlns:a16="http://schemas.microsoft.com/office/drawing/2014/main" id="{9D86E6C2-0DC3-4D26-184A-F0BF515DBA03}"/>
+              </a:ext>
+            </a:extLst>
+          </p:cNvPr>
+          <p:cNvSpPr>
+            <a:spLocks noGrp="1"/>
+          </p:cNvSpPr>
+          <p:nvPr>
+            <p:ph idx="1"/>
+          </p:nvPr>
+        </p:nvSpPr>
+        <p:spPr/>
+        <p:txBody>
+          <a:bodyPr/>
+          <a:lstStyle/>
+          <a:p>
+            <a:r>
+              <a:rPr lang="sv-SE"/>
+              <a:t>Skall vi bara spara alla register vi använder innan vi kallar en funktion? </a:t>
+            </a:r>
+          </a:p>
+          <a:p>
+            <a:pPr lvl="1"/>
+            <a:r>
+              <a:rPr lang="sv-SE"/>
+              <a:t>Om funktionen bara använder ett register så blir ju det fånigt</a:t>
+            </a:r>
+          </a:p>
+          <a:p>
+            <a:r>
+              <a:rPr lang="sv-SE"/>
+              <a:t>Skall vi då låta funktionen som blir kallad spara alla register den tänker skriva över? </a:t>
+            </a:r>
+          </a:p>
+          <a:p>
+            <a:pPr lvl="1"/>
+            <a:r>
+              <a:rPr lang="sv-SE"/>
+              <a:t>Men om funktionen vi kallar behöver massor med register, och vi bara ett, blir det ju lika löjligt. </a:t>
+            </a:r>
+          </a:p>
+        </p:txBody>
+      </p:sp>
+    </p:spTree>
+    <p:extLst>
+      <p:ext uri="{BB962C8B-B14F-4D97-AF65-F5344CB8AC3E}">
+        <p14:creationId xmlns:p14="http://schemas.microsoft.com/office/powerpoint/2010/main" val="3460264548"/>
+      </p:ext>
+    </p:extLst>
+  </p:cSld>
+  <p:clrMapOvr>
+    <a:masterClrMapping/>
+  </p:clrMapOvr>
+</p:sld>
+</file>
+
+<file path=ppt/slides/slide13.xml><?xml version="1.0" encoding="utf-8"?>
+<p:sld xmlns:a="http://schemas.openxmlformats.org/drawingml/2006/main" xmlns:r="http://schemas.openxmlformats.org/officeDocument/2006/relationships" xmlns:p="http://schemas.openxmlformats.org/presentationml/2006/main">
+  <p:cSld>
+    <p:spTree>
+      <p:nvGrpSpPr>
+        <p:cNvPr id="1" name=""/>
+        <p:cNvGrpSpPr/>
+        <p:nvPr/>
+      </p:nvGrpSpPr>
+      <p:grpSpPr>
+        <a:xfrm>
+          <a:off x="0" y="0"/>
+          <a:ext cx="0" cy="0"/>
+          <a:chOff x="0" y="0"/>
+          <a:chExt cx="0" cy="0"/>
+        </a:xfrm>
+      </p:grpSpPr>
+      <p:sp>
+        <p:nvSpPr>
+          <p:cNvPr id="2" name="Title 1">
+            <a:extLst>
+              <a:ext uri="{FF2B5EF4-FFF2-40B4-BE49-F238E27FC236}">
+                <a16:creationId xmlns:a16="http://schemas.microsoft.com/office/drawing/2014/main" id="{591E27D8-3ED7-38D5-4231-2A5D1AD9F730}"/>
+              </a:ext>
+            </a:extLst>
+          </p:cNvPr>
+          <p:cNvSpPr>
+            <a:spLocks noGrp="1"/>
+          </p:cNvSpPr>
+          <p:nvPr>
+            <p:ph type="title"/>
+          </p:nvPr>
+        </p:nvSpPr>
+        <p:spPr/>
+        <p:txBody>
+          <a:bodyPr/>
+          <a:lstStyle/>
+          <a:p>
+            <a:r>
+              <a:rPr lang="sv-SE"/>
+              <a:t>Register Saving</a:t>
+            </a:r>
+            <a:endParaRPr lang="LID4096"/>
+          </a:p>
+        </p:txBody>
+      </p:sp>
+      <p:sp>
+        <p:nvSpPr>
+          <p:cNvPr id="3" name="Content Placeholder 2">
+            <a:extLst>
+              <a:ext uri="{FF2B5EF4-FFF2-40B4-BE49-F238E27FC236}">
+                <a16:creationId xmlns:a16="http://schemas.microsoft.com/office/drawing/2014/main" id="{A907C576-7072-68EC-5F4D-1936ABA023EF}"/>
+              </a:ext>
+            </a:extLst>
+          </p:cNvPr>
+          <p:cNvSpPr>
+            <a:spLocks noGrp="1"/>
+          </p:cNvSpPr>
+          <p:nvPr>
+            <p:ph idx="1"/>
+          </p:nvPr>
+        </p:nvSpPr>
+        <p:spPr/>
+        <p:txBody>
+          <a:bodyPr/>
+          <a:lstStyle/>
+          <a:p>
+            <a:r>
+              <a:rPr lang="sv-SE"/>
+              <a:t>ABI Konvention (kompromiss): </a:t>
+            </a:r>
+            <a:endParaRPr lang="LID4096"/>
+          </a:p>
+          <a:p>
+            <a:pPr lvl="1"/>
+            <a:r>
+              <a:rPr lang="sv-SE"/>
+              <a:t>Den kallande funktionen sparar t (temp) registrena, a (argument registrena), och ra (om den behöver dem).</a:t>
+            </a:r>
+          </a:p>
+          <a:p>
+            <a:pPr lvl="1"/>
+            <a:r>
+              <a:rPr lang="sv-SE"/>
+              <a:t>Den kallade funktionen sparar alla andra register om den skriver över dem.</a:t>
+            </a:r>
+          </a:p>
+          <a:p>
+            <a:pPr lvl="1"/>
+            <a:endParaRPr lang="sv-SE"/>
+          </a:p>
+          <a:p>
+            <a:pPr lvl="1"/>
+            <a:r>
+              <a:rPr lang="sv-SE"/>
+              <a:t>Vi kan ju fortfarande hamna i situationer där register blir sparade som inte egentligen behövde sparas: </a:t>
+            </a:r>
+          </a:p>
+          <a:p>
+            <a:pPr lvl="2"/>
+            <a:r>
+              <a:rPr lang="sv-SE"/>
+              <a:t>a sparar argumentregister, men dom skrivs aldrig över av b, </a:t>
+            </a:r>
+          </a:p>
+          <a:p>
+            <a:pPr lvl="2"/>
+            <a:r>
+              <a:rPr lang="sv-SE"/>
+              <a:t>eller b sparar s registrena, men dom behövs inte av a</a:t>
+            </a:r>
+          </a:p>
+          <a:p>
+            <a:pPr lvl="2"/>
+            <a:r>
+              <a:rPr lang="sv-SE"/>
+              <a:t>En optimerare kan oftast hitta sådana fall och ta bort dem</a:t>
+            </a:r>
+            <a:endParaRPr lang="LID4096"/>
+          </a:p>
+        </p:txBody>
+      </p:sp>
+    </p:spTree>
+    <p:extLst>
+      <p:ext uri="{BB962C8B-B14F-4D97-AF65-F5344CB8AC3E}">
+        <p14:creationId xmlns:p14="http://schemas.microsoft.com/office/powerpoint/2010/main" val="1709282280"/>
+      </p:ext>
+    </p:extLst>
+  </p:cSld>
+  <p:clrMapOvr>
+    <a:masterClrMapping/>
+  </p:clrMapOvr>
+</p:sld>
+</file>
+
+<file path=ppt/slides/slide14.xml><?xml version="1.0" encoding="utf-8"?>
+<p:sld xmlns:a="http://schemas.openxmlformats.org/drawingml/2006/main" xmlns:r="http://schemas.openxmlformats.org/officeDocument/2006/relationships" xmlns:p="http://schemas.openxmlformats.org/presentationml/2006/main">
+  <p:cSld>
+    <p:spTree>
+      <p:nvGrpSpPr>
+        <p:cNvPr id="1" name=""/>
+        <p:cNvGrpSpPr/>
+        <p:nvPr/>
+      </p:nvGrpSpPr>
+      <p:grpSpPr>
+        <a:xfrm>
+          <a:off x="0" y="0"/>
+          <a:ext cx="0" cy="0"/>
+          <a:chOff x="0" y="0"/>
+          <a:chExt cx="0" cy="0"/>
+        </a:xfrm>
+      </p:grpSpPr>
+      <p:sp>
+        <p:nvSpPr>
+          <p:cNvPr id="2" name="Title 1">
+            <a:extLst>
+              <a:ext uri="{FF2B5EF4-FFF2-40B4-BE49-F238E27FC236}">
+                <a16:creationId xmlns:a16="http://schemas.microsoft.com/office/drawing/2014/main" id="{F5A1DA21-300C-43E3-3FC0-40EADD2B8167}"/>
+              </a:ext>
+            </a:extLst>
+          </p:cNvPr>
+          <p:cNvSpPr>
+            <a:spLocks noGrp="1"/>
+          </p:cNvSpPr>
+          <p:nvPr>
+            <p:ph type="title"/>
+          </p:nvPr>
+        </p:nvSpPr>
+        <p:spPr/>
+        <p:txBody>
+          <a:bodyPr/>
+          <a:lstStyle/>
+          <a:p>
+            <a:r>
+              <a:rPr lang="sv-SE"/>
+              <a:t>Register saving, nästade funktionsanrop</a:t>
+            </a:r>
+            <a:endParaRPr lang="LID4096"/>
+          </a:p>
+        </p:txBody>
+      </p:sp>
+      <p:sp>
+        <p:nvSpPr>
+          <p:cNvPr id="3" name="Content Placeholder 2">
+            <a:extLst>
+              <a:ext uri="{FF2B5EF4-FFF2-40B4-BE49-F238E27FC236}">
+                <a16:creationId xmlns:a16="http://schemas.microsoft.com/office/drawing/2014/main" id="{8EA68312-15BF-1B93-E97F-041D6E40109B}"/>
+              </a:ext>
+            </a:extLst>
+          </p:cNvPr>
+          <p:cNvSpPr>
+            <a:spLocks noGrp="1"/>
+          </p:cNvSpPr>
+          <p:nvPr>
+            <p:ph idx="1"/>
+          </p:nvPr>
+        </p:nvSpPr>
+        <p:spPr/>
+        <p:txBody>
+          <a:bodyPr/>
+          <a:lstStyle/>
+          <a:p>
+            <a:r>
+              <a:rPr lang="sv-SE"/>
+              <a:t>En funktion är ofta både callee och caller (visa exempel med min(x, y, z))</a:t>
+            </a:r>
+          </a:p>
+          <a:p>
+            <a:r>
+              <a:rPr lang="sv-SE"/>
+              <a:t>Best practice: </a:t>
+            </a:r>
+          </a:p>
+          <a:p>
+            <a:pPr lvl="1"/>
+            <a:r>
+              <a:rPr lang="sv-SE"/>
+              <a:t>Gör allt du kan i t registrena (du behöver inte spara dem)</a:t>
+            </a:r>
+          </a:p>
+          <a:p>
+            <a:pPr lvl="1"/>
+            <a:r>
+              <a:rPr lang="sv-SE"/>
+              <a:t>Om du behöver spara ett värde, använd s registren</a:t>
+            </a:r>
+          </a:p>
+          <a:p>
+            <a:pPr lvl="1"/>
+            <a:r>
+              <a:rPr lang="sv-SE"/>
+              <a:t>Ha koll på alla s register du använder, och spara/restora dem i en prolog/epilog</a:t>
+            </a:r>
+            <a:endParaRPr lang="LID4096"/>
+          </a:p>
+        </p:txBody>
+      </p:sp>
+    </p:spTree>
+    <p:extLst>
+      <p:ext uri="{BB962C8B-B14F-4D97-AF65-F5344CB8AC3E}">
+        <p14:creationId xmlns:p14="http://schemas.microsoft.com/office/powerpoint/2010/main" val="251391612"/>
+      </p:ext>
+    </p:extLst>
+  </p:cSld>
+  <p:clrMapOvr>
+    <a:masterClrMapping/>
+  </p:clrMapOvr>
+</p:sld>
+</file>
+
+<file path=ppt/slides/slide15.xml><?xml version="1.0" encoding="utf-8"?>
+<p:sld xmlns:a="http://schemas.openxmlformats.org/drawingml/2006/main" xmlns:r="http://schemas.openxmlformats.org/officeDocument/2006/relationships" xmlns:p="http://schemas.openxmlformats.org/presentationml/2006/main">
+  <p:cSld>
+    <p:spTree>
+      <p:nvGrpSpPr>
+        <p:cNvPr id="1" name=""/>
+        <p:cNvGrpSpPr/>
+        <p:nvPr/>
+      </p:nvGrpSpPr>
+      <p:grpSpPr>
+        <a:xfrm>
+          <a:off x="0" y="0"/>
+          <a:ext cx="0" cy="0"/>
+          <a:chOff x="0" y="0"/>
+          <a:chExt cx="0" cy="0"/>
+        </a:xfrm>
+      </p:grpSpPr>
+      <p:sp>
+        <p:nvSpPr>
+          <p:cNvPr id="2" name="Title 1">
+            <a:extLst>
+              <a:ext uri="{FF2B5EF4-FFF2-40B4-BE49-F238E27FC236}">
                 <a16:creationId xmlns:a16="http://schemas.microsoft.com/office/drawing/2014/main" id="{40A0F3C1-E18A-20E7-894E-E0521936A621}"/>
               </a:ext>
             </a:extLst>
@@ -4246,7 +6097,7 @@
 </p:sld>
 </file>
 
-<file path=ppt/slides/slide11.xml><?xml version="1.0" encoding="utf-8"?>
+<file path=ppt/slides/slide16.xml><?xml version="1.0" encoding="utf-8"?>
 <p:sld xmlns:a="http://schemas.openxmlformats.org/drawingml/2006/main" xmlns:r="http://schemas.openxmlformats.org/officeDocument/2006/relationships" xmlns:p="http://schemas.openxmlformats.org/presentationml/2006/main">
   <p:cSld>
     <p:spTree>
@@ -4364,7 +6215,7 @@
 </p:sld>
 </file>
 
-<file path=ppt/slides/slide12.xml><?xml version="1.0" encoding="utf-8"?>
+<file path=ppt/slides/slide17.xml><?xml version="1.0" encoding="utf-8"?>
 <p:sld xmlns:a="http://schemas.openxmlformats.org/drawingml/2006/main" xmlns:r="http://schemas.openxmlformats.org/officeDocument/2006/relationships" xmlns:p="http://schemas.openxmlformats.org/presentationml/2006/main">
   <p:cSld>
     <p:spTree>
@@ -4464,7 +6315,7 @@
 </p:sld>
 </file>
 
-<file path=ppt/slides/slide13.xml><?xml version="1.0" encoding="utf-8"?>
+<file path=ppt/slides/slide18.xml><?xml version="1.0" encoding="utf-8"?>
 <p:sld xmlns:a="http://schemas.openxmlformats.org/drawingml/2006/main" xmlns:r="http://schemas.openxmlformats.org/officeDocument/2006/relationships" xmlns:p="http://schemas.openxmlformats.org/presentationml/2006/main">
   <p:cSld>
     <p:spTree>
@@ -4553,7 +6404,7 @@
 </p:sld>
 </file>
 
-<file path=ppt/slides/slide14.xml><?xml version="1.0" encoding="utf-8"?>
+<file path=ppt/slides/slide19.xml><?xml version="1.0" encoding="utf-8"?>
 <p:sld xmlns:a="http://schemas.openxmlformats.org/drawingml/2006/main" xmlns:r="http://schemas.openxmlformats.org/officeDocument/2006/relationships" xmlns:p="http://schemas.openxmlformats.org/presentationml/2006/main">
   <p:cSld>
     <p:spTree>
@@ -4642,194 +6493,6 @@
 </p:sld>
 </file>
 
-<file path=ppt/slides/slide15.xml><?xml version="1.0" encoding="utf-8"?>
-<p:sld xmlns:a="http://schemas.openxmlformats.org/drawingml/2006/main" xmlns:r="http://schemas.openxmlformats.org/officeDocument/2006/relationships" xmlns:p="http://schemas.openxmlformats.org/presentationml/2006/main">
-  <p:cSld>
-    <p:spTree>
-      <p:nvGrpSpPr>
-        <p:cNvPr id="1" name=""/>
-        <p:cNvGrpSpPr/>
-        <p:nvPr/>
-      </p:nvGrpSpPr>
-      <p:grpSpPr>
-        <a:xfrm>
-          <a:off x="0" y="0"/>
-          <a:ext cx="0" cy="0"/>
-          <a:chOff x="0" y="0"/>
-          <a:chExt cx="0" cy="0"/>
-        </a:xfrm>
-      </p:grpSpPr>
-      <p:sp>
-        <p:nvSpPr>
-          <p:cNvPr id="2" name="Title 1">
-            <a:extLst>
-              <a:ext uri="{FF2B5EF4-FFF2-40B4-BE49-F238E27FC236}">
-                <a16:creationId xmlns:a16="http://schemas.microsoft.com/office/drawing/2014/main" id="{23B500FA-96A0-F0AE-8C3E-79831B774048}"/>
-              </a:ext>
-            </a:extLst>
-          </p:cNvPr>
-          <p:cNvSpPr>
-            <a:spLocks noGrp="1"/>
-          </p:cNvSpPr>
-          <p:nvPr>
-            <p:ph type="title"/>
-          </p:nvPr>
-        </p:nvSpPr>
-        <p:spPr/>
-        <p:txBody>
-          <a:bodyPr/>
-          <a:lstStyle/>
-          <a:p>
-            <a:r>
-              <a:rPr lang="sv-SE"/>
-              <a:t>Arrays som funktionsparametrar</a:t>
-            </a:r>
-            <a:endParaRPr lang="LID4096"/>
-          </a:p>
-        </p:txBody>
-      </p:sp>
-      <p:sp>
-        <p:nvSpPr>
-          <p:cNvPr id="3" name="Content Placeholder 2">
-            <a:extLst>
-              <a:ext uri="{FF2B5EF4-FFF2-40B4-BE49-F238E27FC236}">
-                <a16:creationId xmlns:a16="http://schemas.microsoft.com/office/drawing/2014/main" id="{249BE16D-FE23-695E-443D-E2EB6B84FC92}"/>
-              </a:ext>
-            </a:extLst>
-          </p:cNvPr>
-          <p:cNvSpPr>
-            <a:spLocks noGrp="1"/>
-          </p:cNvSpPr>
-          <p:nvPr>
-            <p:ph idx="1"/>
-          </p:nvPr>
-        </p:nvSpPr>
-        <p:spPr/>
-        <p:txBody>
-          <a:bodyPr/>
-          <a:lstStyle/>
-          <a:p>
-            <a:r>
-              <a:rPr lang="sv-SE"/>
-              <a:t>Gör en min(short * numbers) funktion</a:t>
-            </a:r>
-            <a:endParaRPr lang="LID4096"/>
-          </a:p>
-        </p:txBody>
-      </p:sp>
-    </p:spTree>
-    <p:extLst>
-      <p:ext uri="{BB962C8B-B14F-4D97-AF65-F5344CB8AC3E}">
-        <p14:creationId xmlns:p14="http://schemas.microsoft.com/office/powerpoint/2010/main" val="3979438151"/>
-      </p:ext>
-    </p:extLst>
-  </p:cSld>
-  <p:clrMapOvr>
-    <a:masterClrMapping/>
-  </p:clrMapOvr>
-</p:sld>
-</file>
-
-<file path=ppt/slides/slide16.xml><?xml version="1.0" encoding="utf-8"?>
-<p:sld xmlns:a="http://schemas.openxmlformats.org/drawingml/2006/main" xmlns:r="http://schemas.openxmlformats.org/officeDocument/2006/relationships" xmlns:p="http://schemas.openxmlformats.org/presentationml/2006/main">
-  <p:cSld>
-    <p:spTree>
-      <p:nvGrpSpPr>
-        <p:cNvPr id="1" name=""/>
-        <p:cNvGrpSpPr/>
-        <p:nvPr/>
-      </p:nvGrpSpPr>
-      <p:grpSpPr>
-        <a:xfrm>
-          <a:off x="0" y="0"/>
-          <a:ext cx="0" cy="0"/>
-          <a:chOff x="0" y="0"/>
-          <a:chExt cx="0" cy="0"/>
-        </a:xfrm>
-      </p:grpSpPr>
-      <p:sp>
-        <p:nvSpPr>
-          <p:cNvPr id="2" name="Title 1">
-            <a:extLst>
-              <a:ext uri="{FF2B5EF4-FFF2-40B4-BE49-F238E27FC236}">
-                <a16:creationId xmlns:a16="http://schemas.microsoft.com/office/drawing/2014/main" id="{3F7BE40A-0791-23EB-2804-6CAC680E3F1D}"/>
-              </a:ext>
-            </a:extLst>
-          </p:cNvPr>
-          <p:cNvSpPr>
-            <a:spLocks noGrp="1"/>
-          </p:cNvSpPr>
-          <p:nvPr>
-            <p:ph type="title"/>
-          </p:nvPr>
-        </p:nvSpPr>
-        <p:spPr/>
-        <p:txBody>
-          <a:bodyPr/>
-          <a:lstStyle/>
-          <a:p>
-            <a:r>
-              <a:rPr lang="sv-SE"/>
-              <a:t>Example</a:t>
-            </a:r>
-            <a:endParaRPr lang="LID4096"/>
-          </a:p>
-        </p:txBody>
-      </p:sp>
-      <p:sp>
-        <p:nvSpPr>
-          <p:cNvPr id="3" name="Content Placeholder 2">
-            <a:extLst>
-              <a:ext uri="{FF2B5EF4-FFF2-40B4-BE49-F238E27FC236}">
-                <a16:creationId xmlns:a16="http://schemas.microsoft.com/office/drawing/2014/main" id="{415817EA-065D-43C9-FF89-E12D7584F3BB}"/>
-              </a:ext>
-            </a:extLst>
-          </p:cNvPr>
-          <p:cNvSpPr>
-            <a:spLocks noGrp="1"/>
-          </p:cNvSpPr>
-          <p:nvPr>
-            <p:ph idx="1"/>
-          </p:nvPr>
-        </p:nvSpPr>
-        <p:spPr/>
-        <p:txBody>
-          <a:bodyPr/>
-          <a:lstStyle/>
-          <a:p>
-            <a:r>
-              <a:rPr lang="sv-SE"/>
-              <a:t>sort is not part of standard C. </a:t>
-            </a:r>
-          </a:p>
-          <a:p>
-            <a:r>
-              <a:rPr lang="sv-SE"/>
-              <a:t>I could write a sorting function myself and call it from assembly.</a:t>
-            </a:r>
-          </a:p>
-          <a:p>
-            <a:r>
-              <a:rPr lang="sv-SE"/>
-              <a:t>Or go for strings. to_upper, for example. </a:t>
-            </a:r>
-            <a:endParaRPr lang="LID4096"/>
-          </a:p>
-        </p:txBody>
-      </p:sp>
-    </p:spTree>
-    <p:extLst>
-      <p:ext uri="{BB962C8B-B14F-4D97-AF65-F5344CB8AC3E}">
-        <p14:creationId xmlns:p14="http://schemas.microsoft.com/office/powerpoint/2010/main" val="2486399696"/>
-      </p:ext>
-    </p:extLst>
-  </p:cSld>
-  <p:clrMapOvr>
-    <a:masterClrMapping/>
-  </p:clrMapOvr>
-</p:sld>
-</file>
-
 <file path=ppt/slides/slide2.xml><?xml version="1.0" encoding="utf-8"?>
 <p:sld xmlns:a="http://schemas.openxmlformats.org/drawingml/2006/main" xmlns:r="http://schemas.openxmlformats.org/officeDocument/2006/relationships" xmlns:p="http://schemas.openxmlformats.org/presentationml/2006/main">
   <p:cSld>
@@ -4881,6 +6544,55 @@
       </p:pic>
       <p:sp>
         <p:nvSpPr>
+          <p:cNvPr id="11" name="Rectangle 10">
+            <a:extLst>
+              <a:ext uri="{FF2B5EF4-FFF2-40B4-BE49-F238E27FC236}">
+                <a16:creationId xmlns:a16="http://schemas.microsoft.com/office/drawing/2014/main" id="{197F8499-24AC-AFDF-B7BF-7C81D7DA659D}"/>
+              </a:ext>
+            </a:extLst>
+          </p:cNvPr>
+          <p:cNvSpPr/>
+          <p:nvPr/>
+        </p:nvSpPr>
+        <p:spPr>
+          <a:xfrm rot="18721477">
+            <a:off x="5634723" y="1518235"/>
+            <a:ext cx="922554" cy="922554"/>
+          </a:xfrm>
+          <a:prstGeom prst="rect">
+            <a:avLst/>
+          </a:prstGeom>
+          <a:solidFill>
+            <a:schemeClr val="bg1"/>
+          </a:solidFill>
+        </p:spPr>
+        <p:style>
+          <a:lnRef idx="2">
+            <a:schemeClr val="accent1">
+              <a:shade val="15000"/>
+            </a:schemeClr>
+          </a:lnRef>
+          <a:fillRef idx="1">
+            <a:schemeClr val="accent1"/>
+          </a:fillRef>
+          <a:effectRef idx="0">
+            <a:schemeClr val="accent1"/>
+          </a:effectRef>
+          <a:fontRef idx="minor">
+            <a:schemeClr val="lt1"/>
+          </a:fontRef>
+        </p:style>
+        <p:txBody>
+          <a:bodyPr rtlCol="0" anchor="ctr"/>
+          <a:lstStyle/>
+          <a:p>
+            <a:pPr algn="ctr"/>
+            <a:endParaRPr lang="LID4096"/>
+          </a:p>
+        </p:txBody>
+      </p:sp>
+      <p:sp>
+        <p:nvSpPr>
           <p:cNvPr id="2" name="Title 1">
             <a:extLst>
               <a:ext uri="{FF2B5EF4-FFF2-40B4-BE49-F238E27FC236}">
@@ -4910,10 +6622,1455 @@
       </p:sp>
       <p:sp>
         <p:nvSpPr>
+          <p:cNvPr id="7" name="TextBox 6">
+            <a:extLst>
+              <a:ext uri="{FF2B5EF4-FFF2-40B4-BE49-F238E27FC236}">
+                <a16:creationId xmlns:a16="http://schemas.microsoft.com/office/drawing/2014/main" id="{5D4CE2A3-9259-728D-E6CB-2B582D4FAFF6}"/>
+              </a:ext>
+            </a:extLst>
+          </p:cNvPr>
+          <p:cNvSpPr txBox="1"/>
+          <p:nvPr/>
+        </p:nvSpPr>
+        <p:spPr>
+          <a:xfrm>
+            <a:off x="5579766" y="1794845"/>
+            <a:ext cx="1071127" cy="369332"/>
+          </a:xfrm>
+          <a:prstGeom prst="rect">
+            <a:avLst/>
+          </a:prstGeom>
+          <a:noFill/>
+        </p:spPr>
+        <p:txBody>
+          <a:bodyPr wrap="none" rtlCol="0">
+            <a:spAutoFit/>
+          </a:bodyPr>
+          <a:lstStyle/>
+          <a:p>
+            <a:r>
+              <a:rPr lang="en-US" dirty="0">
+                <a:latin typeface="Consolas" panose="020B0609020204030204" pitchFamily="49" charset="0"/>
+              </a:rPr>
+              <a:t>t0 &lt; t1</a:t>
+            </a:r>
+            <a:endParaRPr lang="LID4096" dirty="0">
+              <a:latin typeface="Consolas" panose="020B0609020204030204" pitchFamily="49" charset="0"/>
+            </a:endParaRPr>
+          </a:p>
+        </p:txBody>
+      </p:sp>
+      <p:sp>
+        <p:nvSpPr>
+          <p:cNvPr id="12" name="TextBox 11">
+            <a:extLst>
+              <a:ext uri="{FF2B5EF4-FFF2-40B4-BE49-F238E27FC236}">
+                <a16:creationId xmlns:a16="http://schemas.microsoft.com/office/drawing/2014/main" id="{7AE185CF-8280-1EA3-118A-E0161293E824}"/>
+              </a:ext>
+            </a:extLst>
+          </p:cNvPr>
+          <p:cNvSpPr txBox="1"/>
+          <p:nvPr/>
+        </p:nvSpPr>
+        <p:spPr>
+          <a:xfrm>
+            <a:off x="6470759" y="2630975"/>
+            <a:ext cx="915187" cy="369332"/>
+          </a:xfrm>
+          <a:prstGeom prst="rect">
+            <a:avLst/>
+          </a:prstGeom>
+          <a:solidFill>
+            <a:schemeClr val="bg1"/>
+          </a:solidFill>
+          <a:ln w="25400">
+            <a:solidFill>
+              <a:schemeClr val="accent1">
+                <a:shade val="15000"/>
+              </a:schemeClr>
+            </a:solidFill>
+          </a:ln>
+        </p:spPr>
+        <p:txBody>
+          <a:bodyPr wrap="none" rtlCol="0">
+            <a:spAutoFit/>
+          </a:bodyPr>
+          <a:lstStyle/>
+          <a:p>
+            <a:r>
+              <a:rPr lang="en-US" dirty="0"/>
+              <a:t>Do that</a:t>
+            </a:r>
+            <a:endParaRPr lang="LID4096" dirty="0"/>
+          </a:p>
+        </p:txBody>
+      </p:sp>
+      <p:sp>
+        <p:nvSpPr>
+          <p:cNvPr id="13" name="TextBox 12">
+            <a:extLst>
+              <a:ext uri="{FF2B5EF4-FFF2-40B4-BE49-F238E27FC236}">
+                <a16:creationId xmlns:a16="http://schemas.microsoft.com/office/drawing/2014/main" id="{8EB47C8B-1910-2C20-D979-3BEE359E2D3F}"/>
+              </a:ext>
+            </a:extLst>
+          </p:cNvPr>
+          <p:cNvSpPr txBox="1"/>
+          <p:nvPr/>
+        </p:nvSpPr>
+        <p:spPr>
+          <a:xfrm>
+            <a:off x="4846987" y="2647445"/>
+            <a:ext cx="885179" cy="369332"/>
+          </a:xfrm>
+          <a:prstGeom prst="rect">
+            <a:avLst/>
+          </a:prstGeom>
+          <a:solidFill>
+            <a:schemeClr val="bg1"/>
+          </a:solidFill>
+          <a:ln w="25400">
+            <a:solidFill>
+              <a:schemeClr val="accent1">
+                <a:shade val="15000"/>
+              </a:schemeClr>
+            </a:solidFill>
+          </a:ln>
+        </p:spPr>
+        <p:txBody>
+          <a:bodyPr wrap="none" rtlCol="0">
+            <a:spAutoFit/>
+          </a:bodyPr>
+          <a:lstStyle/>
+          <a:p>
+            <a:r>
+              <a:rPr lang="en-US" dirty="0"/>
+              <a:t>Do this</a:t>
+            </a:r>
+            <a:endParaRPr lang="LID4096" dirty="0"/>
+          </a:p>
+        </p:txBody>
+      </p:sp>
+      <p:sp>
+        <p:nvSpPr>
+          <p:cNvPr id="14" name="Freeform: Shape 13">
+            <a:extLst>
+              <a:ext uri="{FF2B5EF4-FFF2-40B4-BE49-F238E27FC236}">
+                <a16:creationId xmlns:a16="http://schemas.microsoft.com/office/drawing/2014/main" id="{C26C67E0-53AD-A717-2BD6-04FB808ABF1F}"/>
+              </a:ext>
+            </a:extLst>
+          </p:cNvPr>
+          <p:cNvSpPr/>
+          <p:nvPr/>
+        </p:nvSpPr>
+        <p:spPr>
+          <a:xfrm>
+            <a:off x="5205834" y="2006416"/>
+            <a:ext cx="230245" cy="638106"/>
+          </a:xfrm>
+          <a:custGeom>
+            <a:avLst/>
+            <a:gdLst>
+              <a:gd name="csX0" fmla="*/ 230245 w 230245"/>
+              <a:gd name="csY0" fmla="*/ 0 h 638106"/>
+              <a:gd name="csX1" fmla="*/ 0 w 230245"/>
+              <a:gd name="csY1" fmla="*/ 0 h 638106"/>
+              <a:gd name="csX2" fmla="*/ 0 w 230245"/>
+              <a:gd name="csY2" fmla="*/ 638106 h 638106"/>
+            </a:gdLst>
+            <a:ahLst/>
+            <a:cxnLst>
+              <a:cxn ang="0">
+                <a:pos x="csX0" y="csY0"/>
+              </a:cxn>
+              <a:cxn ang="0">
+                <a:pos x="csX1" y="csY1"/>
+              </a:cxn>
+              <a:cxn ang="0">
+                <a:pos x="csX2" y="csY2"/>
+              </a:cxn>
+            </a:cxnLst>
+            <a:rect l="l" t="t" r="r" b="b"/>
+            <a:pathLst>
+              <a:path w="230245" h="638106">
+                <a:moveTo>
+                  <a:pt x="230245" y="0"/>
+                </a:moveTo>
+                <a:lnTo>
+                  <a:pt x="0" y="0"/>
+                </a:lnTo>
+                <a:lnTo>
+                  <a:pt x="0" y="638106"/>
+                </a:lnTo>
+              </a:path>
+            </a:pathLst>
+          </a:custGeom>
+          <a:noFill/>
+        </p:spPr>
+        <p:style>
+          <a:lnRef idx="2">
+            <a:schemeClr val="accent1">
+              <a:shade val="15000"/>
+            </a:schemeClr>
+          </a:lnRef>
+          <a:fillRef idx="1">
+            <a:schemeClr val="accent1"/>
+          </a:fillRef>
+          <a:effectRef idx="0">
+            <a:schemeClr val="accent1"/>
+          </a:effectRef>
+          <a:fontRef idx="minor">
+            <a:schemeClr val="lt1"/>
+          </a:fontRef>
+        </p:style>
+        <p:txBody>
+          <a:bodyPr rtlCol="0" anchor="ctr"/>
+          <a:lstStyle/>
+          <a:p>
+            <a:pPr algn="ctr"/>
+            <a:endParaRPr lang="LID4096"/>
+          </a:p>
+        </p:txBody>
+      </p:sp>
+      <p:sp>
+        <p:nvSpPr>
+          <p:cNvPr id="15" name="Freeform: Shape 14">
+            <a:extLst>
+              <a:ext uri="{FF2B5EF4-FFF2-40B4-BE49-F238E27FC236}">
+                <a16:creationId xmlns:a16="http://schemas.microsoft.com/office/drawing/2014/main" id="{53287BDF-84AA-7F5B-1BBD-FA5D6A792A73}"/>
+              </a:ext>
+            </a:extLst>
+          </p:cNvPr>
+          <p:cNvSpPr/>
+          <p:nvPr/>
+        </p:nvSpPr>
+        <p:spPr>
+          <a:xfrm>
+            <a:off x="6758340" y="1934053"/>
+            <a:ext cx="223667" cy="690734"/>
+          </a:xfrm>
+          <a:custGeom>
+            <a:avLst/>
+            <a:gdLst>
+              <a:gd name="csX0" fmla="*/ 0 w 223667"/>
+              <a:gd name="csY0" fmla="*/ 0 h 690734"/>
+              <a:gd name="csX1" fmla="*/ 223667 w 223667"/>
+              <a:gd name="csY1" fmla="*/ 0 h 690734"/>
+              <a:gd name="csX2" fmla="*/ 223667 w 223667"/>
+              <a:gd name="csY2" fmla="*/ 690734 h 690734"/>
+            </a:gdLst>
+            <a:ahLst/>
+            <a:cxnLst>
+              <a:cxn ang="0">
+                <a:pos x="csX0" y="csY0"/>
+              </a:cxn>
+              <a:cxn ang="0">
+                <a:pos x="csX1" y="csY1"/>
+              </a:cxn>
+              <a:cxn ang="0">
+                <a:pos x="csX2" y="csY2"/>
+              </a:cxn>
+            </a:cxnLst>
+            <a:rect l="l" t="t" r="r" b="b"/>
+            <a:pathLst>
+              <a:path w="223667" h="690734">
+                <a:moveTo>
+                  <a:pt x="0" y="0"/>
+                </a:moveTo>
+                <a:lnTo>
+                  <a:pt x="223667" y="0"/>
+                </a:lnTo>
+                <a:lnTo>
+                  <a:pt x="223667" y="690734"/>
+                </a:lnTo>
+              </a:path>
+            </a:pathLst>
+          </a:custGeom>
+          <a:noFill/>
+        </p:spPr>
+        <p:style>
+          <a:lnRef idx="2">
+            <a:schemeClr val="accent1">
+              <a:shade val="15000"/>
+            </a:schemeClr>
+          </a:lnRef>
+          <a:fillRef idx="1">
+            <a:schemeClr val="accent1"/>
+          </a:fillRef>
+          <a:effectRef idx="0">
+            <a:schemeClr val="accent1"/>
+          </a:effectRef>
+          <a:fontRef idx="minor">
+            <a:schemeClr val="lt1"/>
+          </a:fontRef>
+        </p:style>
+        <p:txBody>
+          <a:bodyPr rtlCol="0" anchor="ctr"/>
+          <a:lstStyle/>
+          <a:p>
+            <a:pPr algn="ctr"/>
+            <a:endParaRPr lang="LID4096"/>
+          </a:p>
+        </p:txBody>
+      </p:sp>
+      <p:sp>
+        <p:nvSpPr>
+          <p:cNvPr id="16" name="TextBox 15">
+            <a:extLst>
+              <a:ext uri="{FF2B5EF4-FFF2-40B4-BE49-F238E27FC236}">
+                <a16:creationId xmlns:a16="http://schemas.microsoft.com/office/drawing/2014/main" id="{7E01EC48-0838-521E-2A28-50A93AEE0388}"/>
+              </a:ext>
+            </a:extLst>
+          </p:cNvPr>
+          <p:cNvSpPr txBox="1"/>
+          <p:nvPr/>
+        </p:nvSpPr>
+        <p:spPr>
+          <a:xfrm>
+            <a:off x="5018162" y="1783335"/>
+            <a:ext cx="415498" cy="261610"/>
+          </a:xfrm>
+          <a:prstGeom prst="rect">
+            <a:avLst/>
+          </a:prstGeom>
+          <a:noFill/>
+        </p:spPr>
+        <p:txBody>
+          <a:bodyPr wrap="none" rtlCol="0">
+            <a:spAutoFit/>
+          </a:bodyPr>
+          <a:lstStyle/>
+          <a:p>
+            <a:r>
+              <a:rPr lang="en-US" sz="1050" b="1" dirty="0">
+                <a:latin typeface="Consolas" panose="020B0609020204030204" pitchFamily="49" charset="0"/>
+              </a:rPr>
+              <a:t>yes</a:t>
+            </a:r>
+            <a:endParaRPr lang="LID4096" sz="1050" b="1" dirty="0">
+              <a:latin typeface="Consolas" panose="020B0609020204030204" pitchFamily="49" charset="0"/>
+            </a:endParaRPr>
+          </a:p>
+        </p:txBody>
+      </p:sp>
+      <p:sp>
+        <p:nvSpPr>
+          <p:cNvPr id="17" name="TextBox 16">
+            <a:extLst>
+              <a:ext uri="{FF2B5EF4-FFF2-40B4-BE49-F238E27FC236}">
+                <a16:creationId xmlns:a16="http://schemas.microsoft.com/office/drawing/2014/main" id="{2CD4A6F0-E61D-5D07-3F56-057AC94C3429}"/>
+              </a:ext>
+            </a:extLst>
+          </p:cNvPr>
+          <p:cNvSpPr txBox="1"/>
+          <p:nvPr/>
+        </p:nvSpPr>
+        <p:spPr>
+          <a:xfrm>
+            <a:off x="6747465" y="1717901"/>
+            <a:ext cx="332142" cy="253916"/>
+          </a:xfrm>
+          <a:prstGeom prst="rect">
+            <a:avLst/>
+          </a:prstGeom>
+          <a:noFill/>
+        </p:spPr>
+        <p:txBody>
+          <a:bodyPr wrap="none" rtlCol="0">
+            <a:spAutoFit/>
+          </a:bodyPr>
+          <a:lstStyle/>
+          <a:p>
+            <a:r>
+              <a:rPr lang="en-US" sz="1050" b="1" dirty="0">
+                <a:latin typeface="Consolas" panose="020B0609020204030204" pitchFamily="49" charset="0"/>
+              </a:rPr>
+              <a:t>no</a:t>
+            </a:r>
+            <a:endParaRPr lang="LID4096" sz="1050" b="1" dirty="0">
+              <a:latin typeface="Consolas" panose="020B0609020204030204" pitchFamily="49" charset="0"/>
+            </a:endParaRPr>
+          </a:p>
+        </p:txBody>
+      </p:sp>
+      <p:sp>
+        <p:nvSpPr>
+          <p:cNvPr id="18" name="TextBox 17">
+            <a:extLst>
+              <a:ext uri="{FF2B5EF4-FFF2-40B4-BE49-F238E27FC236}">
+                <a16:creationId xmlns:a16="http://schemas.microsoft.com/office/drawing/2014/main" id="{D33C137E-2D2C-90BA-F2BD-E47401B2DB2C}"/>
+              </a:ext>
+            </a:extLst>
+          </p:cNvPr>
+          <p:cNvSpPr txBox="1"/>
+          <p:nvPr/>
+        </p:nvSpPr>
+        <p:spPr>
+          <a:xfrm>
+            <a:off x="1152751" y="3249738"/>
+            <a:ext cx="3039229" cy="2862322"/>
+          </a:xfrm>
+          <a:prstGeom prst="rect">
+            <a:avLst/>
+          </a:prstGeom>
+          <a:solidFill>
+            <a:schemeClr val="bg1"/>
+          </a:solidFill>
+          <a:ln>
+            <a:solidFill>
+              <a:schemeClr val="accent1">
+                <a:shade val="15000"/>
+              </a:schemeClr>
+            </a:solidFill>
+          </a:ln>
+        </p:spPr>
+        <p:txBody>
+          <a:bodyPr wrap="square" rtlCol="0">
+            <a:spAutoFit/>
+          </a:bodyPr>
+          <a:lstStyle/>
+          <a:p>
+            <a:r>
+              <a:rPr lang="sv-SE" b="1" dirty="0"/>
+              <a:t>FLISP</a:t>
+            </a:r>
+            <a:r>
+              <a:rPr lang="sv-SE" dirty="0"/>
+              <a:t> (and x86, ARM):</a:t>
+            </a:r>
+          </a:p>
+          <a:p>
+            <a:endParaRPr lang="sv-SE" dirty="0"/>
+          </a:p>
+          <a:p>
+            <a:r>
+              <a:rPr lang="sv-SE" dirty="0">
+                <a:latin typeface="Consolas" panose="020B0609020204030204" pitchFamily="49" charset="0"/>
+              </a:rPr>
+              <a:t>CMP X, Y</a:t>
+            </a:r>
+          </a:p>
+          <a:p>
+            <a:r>
+              <a:rPr lang="sv-SE" dirty="0">
+                <a:latin typeface="Consolas" panose="020B0609020204030204" pitchFamily="49" charset="0"/>
+              </a:rPr>
+              <a:t>BLT </a:t>
+            </a:r>
+            <a:r>
+              <a:rPr lang="sv-SE" dirty="0" err="1">
+                <a:latin typeface="Consolas" panose="020B0609020204030204" pitchFamily="49" charset="0"/>
+              </a:rPr>
+              <a:t>this</a:t>
+            </a:r>
+            <a:endParaRPr lang="sv-SE" dirty="0">
+              <a:latin typeface="Consolas" panose="020B0609020204030204" pitchFamily="49" charset="0"/>
+            </a:endParaRPr>
+          </a:p>
+          <a:p>
+            <a:r>
+              <a:rPr lang="sv-SE" dirty="0" err="1">
+                <a:latin typeface="Consolas" panose="020B0609020204030204" pitchFamily="49" charset="0"/>
+              </a:rPr>
+              <a:t>that</a:t>
+            </a:r>
+            <a:r>
+              <a:rPr lang="sv-SE" dirty="0">
+                <a:latin typeface="Consolas" panose="020B0609020204030204" pitchFamily="49" charset="0"/>
+              </a:rPr>
+              <a:t>:</a:t>
+            </a:r>
+          </a:p>
+          <a:p>
+            <a:r>
+              <a:rPr lang="sv-SE" dirty="0">
+                <a:latin typeface="Consolas" panose="020B0609020204030204" pitchFamily="49" charset="0"/>
+              </a:rPr>
+              <a:t>  ...</a:t>
+            </a:r>
+          </a:p>
+          <a:p>
+            <a:r>
+              <a:rPr lang="sv-SE" dirty="0">
+                <a:latin typeface="Consolas" panose="020B0609020204030204" pitchFamily="49" charset="0"/>
+              </a:rPr>
+              <a:t>  JMP </a:t>
+            </a:r>
+            <a:r>
+              <a:rPr lang="sv-SE" dirty="0" err="1">
+                <a:latin typeface="Consolas" panose="020B0609020204030204" pitchFamily="49" charset="0"/>
+              </a:rPr>
+              <a:t>done</a:t>
+            </a:r>
+            <a:endParaRPr lang="sv-SE" dirty="0">
+              <a:latin typeface="Consolas" panose="020B0609020204030204" pitchFamily="49" charset="0"/>
+            </a:endParaRPr>
+          </a:p>
+          <a:p>
+            <a:r>
+              <a:rPr lang="sv-SE" dirty="0" err="1">
+                <a:latin typeface="Consolas" panose="020B0609020204030204" pitchFamily="49" charset="0"/>
+              </a:rPr>
+              <a:t>this</a:t>
+            </a:r>
+            <a:r>
+              <a:rPr lang="sv-SE" dirty="0">
+                <a:latin typeface="Consolas" panose="020B0609020204030204" pitchFamily="49" charset="0"/>
+              </a:rPr>
+              <a:t>:</a:t>
+            </a:r>
+          </a:p>
+          <a:p>
+            <a:r>
+              <a:rPr lang="sv-SE" dirty="0">
+                <a:latin typeface="Consolas" panose="020B0609020204030204" pitchFamily="49" charset="0"/>
+              </a:rPr>
+              <a:t>  ...</a:t>
+            </a:r>
+          </a:p>
+          <a:p>
+            <a:r>
+              <a:rPr lang="sv-SE" dirty="0" err="1">
+                <a:latin typeface="Consolas" panose="020B0609020204030204" pitchFamily="49" charset="0"/>
+              </a:rPr>
+              <a:t>done</a:t>
+            </a:r>
+            <a:r>
+              <a:rPr lang="sv-SE" dirty="0">
+                <a:latin typeface="Consolas" panose="020B0609020204030204" pitchFamily="49" charset="0"/>
+              </a:rPr>
+              <a:t>:</a:t>
+            </a:r>
+            <a:endParaRPr lang="LID4096" dirty="0">
+              <a:latin typeface="Consolas" panose="020B0609020204030204" pitchFamily="49" charset="0"/>
+            </a:endParaRPr>
+          </a:p>
+        </p:txBody>
+      </p:sp>
+      <p:sp>
+        <p:nvSpPr>
+          <p:cNvPr id="19" name="TextBox 18">
+            <a:extLst>
+              <a:ext uri="{FF2B5EF4-FFF2-40B4-BE49-F238E27FC236}">
+                <a16:creationId xmlns:a16="http://schemas.microsoft.com/office/drawing/2014/main" id="{459916E4-F0C2-68C3-41AA-3F814DAE3893}"/>
+              </a:ext>
+            </a:extLst>
+          </p:cNvPr>
+          <p:cNvSpPr txBox="1"/>
+          <p:nvPr/>
+        </p:nvSpPr>
+        <p:spPr>
+          <a:xfrm>
+            <a:off x="8295679" y="3249738"/>
+            <a:ext cx="3143506" cy="2862322"/>
+          </a:xfrm>
+          <a:prstGeom prst="rect">
+            <a:avLst/>
+          </a:prstGeom>
+          <a:solidFill>
+            <a:schemeClr val="bg1"/>
+          </a:solidFill>
+          <a:ln>
+            <a:solidFill>
+              <a:schemeClr val="accent1">
+                <a:shade val="15000"/>
+              </a:schemeClr>
+            </a:solidFill>
+          </a:ln>
+        </p:spPr>
+        <p:txBody>
+          <a:bodyPr wrap="square" rtlCol="0">
+            <a:spAutoFit/>
+          </a:bodyPr>
+          <a:lstStyle/>
+          <a:p>
+            <a:r>
+              <a:rPr lang="sv-SE" b="1" dirty="0"/>
+              <a:t>RISC-V:</a:t>
+            </a:r>
+          </a:p>
+          <a:p>
+            <a:endParaRPr lang="sv-SE" dirty="0"/>
+          </a:p>
+          <a:p>
+            <a:r>
+              <a:rPr lang="en-US" dirty="0" err="1">
+                <a:latin typeface="Consolas" panose="020B0609020204030204" pitchFamily="49" charset="0"/>
+              </a:rPr>
+              <a:t>blt</a:t>
+            </a:r>
+            <a:r>
+              <a:rPr lang="en-US" dirty="0">
+                <a:latin typeface="Consolas" panose="020B0609020204030204" pitchFamily="49" charset="0"/>
+              </a:rPr>
+              <a:t>   t0, t1, this </a:t>
+            </a:r>
+            <a:br>
+              <a:rPr lang="en-US" dirty="0">
+                <a:latin typeface="Consolas" panose="020B0609020204030204" pitchFamily="49" charset="0"/>
+              </a:rPr>
+            </a:br>
+            <a:r>
+              <a:rPr lang="en-US" dirty="0">
+                <a:latin typeface="Consolas" panose="020B0609020204030204" pitchFamily="49" charset="0"/>
+              </a:rPr>
+              <a:t>j     that</a:t>
+            </a:r>
+          </a:p>
+          <a:p>
+            <a:r>
+              <a:rPr lang="en-US" dirty="0">
+                <a:latin typeface="Consolas" panose="020B0609020204030204" pitchFamily="49" charset="0"/>
+              </a:rPr>
+              <a:t>that:</a:t>
+            </a:r>
+          </a:p>
+          <a:p>
+            <a:r>
+              <a:rPr lang="en-US" dirty="0">
+                <a:latin typeface="Consolas" panose="020B0609020204030204" pitchFamily="49" charset="0"/>
+              </a:rPr>
+              <a:t>  ...</a:t>
+            </a:r>
+          </a:p>
+          <a:p>
+            <a:r>
+              <a:rPr lang="en-US" dirty="0">
+                <a:latin typeface="Consolas" panose="020B0609020204030204" pitchFamily="49" charset="0"/>
+              </a:rPr>
+              <a:t>  j done</a:t>
+            </a:r>
+          </a:p>
+          <a:p>
+            <a:r>
+              <a:rPr lang="en-US" dirty="0">
+                <a:latin typeface="Consolas" panose="020B0609020204030204" pitchFamily="49" charset="0"/>
+              </a:rPr>
+              <a:t>this:</a:t>
+            </a:r>
+          </a:p>
+          <a:p>
+            <a:r>
+              <a:rPr lang="en-US" dirty="0">
+                <a:latin typeface="Consolas" panose="020B0609020204030204" pitchFamily="49" charset="0"/>
+              </a:rPr>
+              <a:t>  ...</a:t>
+            </a:r>
+          </a:p>
+          <a:p>
+            <a:r>
+              <a:rPr lang="en-US" dirty="0">
+                <a:latin typeface="Consolas" panose="020B0609020204030204" pitchFamily="49" charset="0"/>
+              </a:rPr>
+              <a:t>done:</a:t>
+            </a:r>
+            <a:endParaRPr lang="LID4096" dirty="0">
+              <a:latin typeface="Consolas" panose="020B0609020204030204" pitchFamily="49" charset="0"/>
+            </a:endParaRPr>
+          </a:p>
+        </p:txBody>
+      </p:sp>
+      <p:sp>
+        <p:nvSpPr>
+          <p:cNvPr id="20" name="TextBox 19">
+            <a:extLst>
+              <a:ext uri="{FF2B5EF4-FFF2-40B4-BE49-F238E27FC236}">
+                <a16:creationId xmlns:a16="http://schemas.microsoft.com/office/drawing/2014/main" id="{DC1428DC-FE0A-397F-8A0C-D95FBFF5DEA8}"/>
+              </a:ext>
+            </a:extLst>
+          </p:cNvPr>
+          <p:cNvSpPr txBox="1"/>
+          <p:nvPr/>
+        </p:nvSpPr>
+        <p:spPr>
+          <a:xfrm>
+            <a:off x="2743200" y="3618130"/>
+            <a:ext cx="1905715" cy="523220"/>
+          </a:xfrm>
+          <a:prstGeom prst="rect">
+            <a:avLst/>
+          </a:prstGeom>
+          <a:solidFill>
+            <a:schemeClr val="bg1"/>
+          </a:solidFill>
+          <a:ln>
+            <a:solidFill>
+              <a:schemeClr val="accent1">
+                <a:shade val="15000"/>
+              </a:schemeClr>
+            </a:solidFill>
+          </a:ln>
+          <a:effectLst>
+            <a:outerShdw blurRad="50800" dist="38100" dir="2700000" algn="tl" rotWithShape="0">
+              <a:prstClr val="black">
+                <a:alpha val="40000"/>
+              </a:prstClr>
+            </a:outerShdw>
+          </a:effectLst>
+        </p:spPr>
+        <p:txBody>
+          <a:bodyPr wrap="none" rtlCol="0">
+            <a:spAutoFit/>
+          </a:bodyPr>
+          <a:lstStyle/>
+          <a:p>
+            <a:r>
+              <a:rPr lang="en-US" sz="1400" dirty="0"/>
+              <a:t>"Compare" two values</a:t>
+            </a:r>
+            <a:br>
+              <a:rPr lang="en-US" sz="1400" dirty="0"/>
+            </a:br>
+            <a:r>
+              <a:rPr lang="en-US" sz="1400" dirty="0"/>
+              <a:t>in the ALU. Set flags.</a:t>
+            </a:r>
+            <a:endParaRPr lang="LID4096" sz="1400" dirty="0"/>
+          </a:p>
+        </p:txBody>
+      </p:sp>
+      <p:sp>
+        <p:nvSpPr>
+          <p:cNvPr id="21" name="TextBox 20">
+            <a:extLst>
+              <a:ext uri="{FF2B5EF4-FFF2-40B4-BE49-F238E27FC236}">
+                <a16:creationId xmlns:a16="http://schemas.microsoft.com/office/drawing/2014/main" id="{9BC4C9C4-D87E-9489-D4F4-B9361F28BE60}"/>
+              </a:ext>
+            </a:extLst>
+          </p:cNvPr>
+          <p:cNvSpPr txBox="1"/>
+          <p:nvPr/>
+        </p:nvSpPr>
+        <p:spPr>
+          <a:xfrm>
+            <a:off x="2743200" y="4248132"/>
+            <a:ext cx="1896160" cy="307777"/>
+          </a:xfrm>
+          <a:prstGeom prst="rect">
+            <a:avLst/>
+          </a:prstGeom>
+          <a:solidFill>
+            <a:schemeClr val="bg1"/>
+          </a:solidFill>
+          <a:ln>
+            <a:solidFill>
+              <a:schemeClr val="accent1">
+                <a:shade val="15000"/>
+              </a:schemeClr>
+            </a:solidFill>
+          </a:ln>
+          <a:effectLst>
+            <a:outerShdw blurRad="50800" dist="38100" dir="2700000" algn="tl" rotWithShape="0">
+              <a:prstClr val="black">
+                <a:alpha val="40000"/>
+              </a:prstClr>
+            </a:outerShdw>
+          </a:effectLst>
+        </p:spPr>
+        <p:txBody>
+          <a:bodyPr wrap="none" rtlCol="0">
+            <a:spAutoFit/>
+          </a:bodyPr>
+          <a:lstStyle/>
+          <a:p>
+            <a:r>
+              <a:rPr lang="en-US" sz="1400" dirty="0"/>
+              <a:t>Branch based on flags</a:t>
+            </a:r>
+            <a:endParaRPr lang="LID4096" sz="1400" dirty="0"/>
+          </a:p>
+        </p:txBody>
+      </p:sp>
+      <p:sp>
+        <p:nvSpPr>
+          <p:cNvPr id="22" name="TextBox 21">
+            <a:extLst>
+              <a:ext uri="{FF2B5EF4-FFF2-40B4-BE49-F238E27FC236}">
+                <a16:creationId xmlns:a16="http://schemas.microsoft.com/office/drawing/2014/main" id="{00A86938-A227-083F-CCED-C62E94111C5C}"/>
+              </a:ext>
+            </a:extLst>
+          </p:cNvPr>
+          <p:cNvSpPr txBox="1"/>
+          <p:nvPr/>
+        </p:nvSpPr>
+        <p:spPr>
+          <a:xfrm>
+            <a:off x="6082945" y="3659465"/>
+            <a:ext cx="1775358" cy="523220"/>
+          </a:xfrm>
+          <a:prstGeom prst="rect">
+            <a:avLst/>
+          </a:prstGeom>
+          <a:solidFill>
+            <a:schemeClr val="bg1"/>
+          </a:solidFill>
+          <a:ln>
+            <a:solidFill>
+              <a:schemeClr val="accent1">
+                <a:shade val="15000"/>
+              </a:schemeClr>
+            </a:solidFill>
+          </a:ln>
+          <a:effectLst>
+            <a:outerShdw blurRad="50800" dist="38100" dir="2700000" algn="tl" rotWithShape="0">
+              <a:prstClr val="black">
+                <a:alpha val="40000"/>
+              </a:prstClr>
+            </a:outerShdw>
+          </a:effectLst>
+        </p:spPr>
+        <p:txBody>
+          <a:bodyPr wrap="none" rtlCol="0">
+            <a:spAutoFit/>
+          </a:bodyPr>
+          <a:lstStyle/>
+          <a:p>
+            <a:r>
+              <a:rPr lang="en-US" sz="1400" dirty="0"/>
+              <a:t>Always compare in a</a:t>
+            </a:r>
+            <a:br>
+              <a:rPr lang="en-US" sz="1400" dirty="0"/>
+            </a:br>
+            <a:r>
+              <a:rPr lang="en-US" sz="1400" dirty="0"/>
+              <a:t>branch instruction</a:t>
+            </a:r>
+            <a:endParaRPr lang="LID4096" sz="1400" dirty="0"/>
+          </a:p>
+        </p:txBody>
+      </p:sp>
+      <p:sp>
+        <p:nvSpPr>
+          <p:cNvPr id="23" name="TextBox 22">
+            <a:extLst>
+              <a:ext uri="{FF2B5EF4-FFF2-40B4-BE49-F238E27FC236}">
+                <a16:creationId xmlns:a16="http://schemas.microsoft.com/office/drawing/2014/main" id="{984D1CC4-A972-CA2E-F5DC-97C3843EF9A6}"/>
+              </a:ext>
+            </a:extLst>
+          </p:cNvPr>
+          <p:cNvSpPr txBox="1"/>
+          <p:nvPr/>
+        </p:nvSpPr>
+        <p:spPr>
+          <a:xfrm>
+            <a:off x="5816943" y="4211066"/>
+            <a:ext cx="2038956" cy="307777"/>
+          </a:xfrm>
+          <a:prstGeom prst="rect">
+            <a:avLst/>
+          </a:prstGeom>
+          <a:solidFill>
+            <a:schemeClr val="bg1"/>
+          </a:solidFill>
+          <a:ln>
+            <a:solidFill>
+              <a:schemeClr val="accent1">
+                <a:shade val="15000"/>
+              </a:schemeClr>
+            </a:solidFill>
+          </a:ln>
+          <a:effectLst>
+            <a:outerShdw blurRad="50800" dist="38100" dir="2700000" algn="tl" rotWithShape="0">
+              <a:prstClr val="black">
+                <a:alpha val="40000"/>
+              </a:prstClr>
+            </a:outerShdw>
+          </a:effectLst>
+        </p:spPr>
+        <p:txBody>
+          <a:bodyPr wrap="none" rtlCol="0">
+            <a:spAutoFit/>
+          </a:bodyPr>
+          <a:lstStyle/>
+          <a:p>
+            <a:r>
+              <a:rPr lang="en-US" sz="1400" dirty="0"/>
+              <a:t>There </a:t>
+            </a:r>
+            <a:r>
+              <a:rPr lang="en-US" sz="1400" b="1" dirty="0"/>
+              <a:t>is no flag register</a:t>
+            </a:r>
+            <a:endParaRPr lang="LID4096" sz="1400" b="1" dirty="0"/>
+          </a:p>
+        </p:txBody>
+      </p:sp>
+      <p:sp>
+        <p:nvSpPr>
+          <p:cNvPr id="24" name="TextBox 23">
+            <a:extLst>
+              <a:ext uri="{FF2B5EF4-FFF2-40B4-BE49-F238E27FC236}">
+                <a16:creationId xmlns:a16="http://schemas.microsoft.com/office/drawing/2014/main" id="{4BDEBBBB-0048-6975-413B-8C79F262FD6C}"/>
+              </a:ext>
+            </a:extLst>
+          </p:cNvPr>
+          <p:cNvSpPr txBox="1"/>
+          <p:nvPr/>
+        </p:nvSpPr>
+        <p:spPr>
+          <a:xfrm>
+            <a:off x="2756366" y="5914903"/>
+            <a:ext cx="2394758" cy="307777"/>
+          </a:xfrm>
+          <a:prstGeom prst="rect">
+            <a:avLst/>
+          </a:prstGeom>
+          <a:solidFill>
+            <a:schemeClr val="bg1"/>
+          </a:solidFill>
+          <a:ln>
+            <a:solidFill>
+              <a:schemeClr val="accent1">
+                <a:shade val="15000"/>
+              </a:schemeClr>
+            </a:solidFill>
+          </a:ln>
+          <a:effectLst>
+            <a:outerShdw blurRad="50800" dist="38100" dir="2700000" algn="tl" rotWithShape="0">
+              <a:prstClr val="black">
+                <a:alpha val="40000"/>
+              </a:prstClr>
+            </a:outerShdw>
+          </a:effectLst>
+        </p:spPr>
+        <p:txBody>
+          <a:bodyPr wrap="none" rtlCol="0">
+            <a:spAutoFit/>
+          </a:bodyPr>
+          <a:lstStyle/>
+          <a:p>
+            <a:r>
+              <a:rPr lang="en-US" sz="1400" dirty="0"/>
+              <a:t>+ Allows some optimizations</a:t>
+            </a:r>
+            <a:endParaRPr lang="LID4096" sz="1400" dirty="0"/>
+          </a:p>
+        </p:txBody>
+      </p:sp>
+      <p:sp>
+        <p:nvSpPr>
+          <p:cNvPr id="25" name="TextBox 24">
+            <a:extLst>
+              <a:ext uri="{FF2B5EF4-FFF2-40B4-BE49-F238E27FC236}">
+                <a16:creationId xmlns:a16="http://schemas.microsoft.com/office/drawing/2014/main" id="{D58AB1E0-19FF-BE88-1FE6-B24939D932AB}"/>
+              </a:ext>
+            </a:extLst>
+          </p:cNvPr>
+          <p:cNvSpPr txBox="1"/>
+          <p:nvPr/>
+        </p:nvSpPr>
+        <p:spPr>
+          <a:xfrm>
+            <a:off x="6534225" y="6134442"/>
+            <a:ext cx="3342775" cy="523220"/>
+          </a:xfrm>
+          <a:prstGeom prst="rect">
+            <a:avLst/>
+          </a:prstGeom>
+          <a:solidFill>
+            <a:schemeClr val="bg1"/>
+          </a:solidFill>
+          <a:ln>
+            <a:solidFill>
+              <a:schemeClr val="accent1">
+                <a:shade val="15000"/>
+              </a:schemeClr>
+            </a:solidFill>
+          </a:ln>
+          <a:effectLst>
+            <a:outerShdw blurRad="50800" dist="38100" dir="2700000" algn="tl" rotWithShape="0">
+              <a:prstClr val="black">
+                <a:alpha val="40000"/>
+              </a:prstClr>
+            </a:outerShdw>
+          </a:effectLst>
+        </p:spPr>
+        <p:txBody>
+          <a:bodyPr wrap="none" rtlCol="0">
+            <a:spAutoFit/>
+          </a:bodyPr>
+          <a:lstStyle/>
+          <a:p>
+            <a:r>
+              <a:rPr lang="en-US" sz="1400" dirty="0"/>
+              <a:t>+ Avoiding "hidden state"</a:t>
+            </a:r>
+            <a:br>
+              <a:rPr lang="en-US" sz="1400" dirty="0"/>
+            </a:br>
+            <a:r>
+              <a:rPr lang="en-US" sz="1400" dirty="0"/>
+              <a:t>+ Much easier for hardware </a:t>
+            </a:r>
+            <a:r>
+              <a:rPr lang="en-US" sz="1400" i="1" dirty="0"/>
+              <a:t>and</a:t>
+            </a:r>
+            <a:r>
+              <a:rPr lang="en-US" sz="1400" dirty="0"/>
+              <a:t> compiler</a:t>
+            </a:r>
+            <a:endParaRPr lang="LID4096" sz="1400" dirty="0"/>
+          </a:p>
+        </p:txBody>
+      </p:sp>
+    </p:spTree>
+    <p:extLst>
+      <p:ext uri="{BB962C8B-B14F-4D97-AF65-F5344CB8AC3E}">
+        <p14:creationId xmlns:p14="http://schemas.microsoft.com/office/powerpoint/2010/main" val="2514247515"/>
+      </p:ext>
+    </p:extLst>
+  </p:cSld>
+  <p:clrMapOvr>
+    <a:masterClrMapping/>
+  </p:clrMapOvr>
+  <p:timing>
+    <p:tnLst>
+      <p:par>
+        <p:cTn id="1" dur="indefinite" restart="never" nodeType="tmRoot">
+          <p:childTnLst>
+            <p:seq concurrent="1" nextAc="seek">
+              <p:cTn id="2" dur="indefinite" nodeType="mainSeq">
+                <p:childTnLst>
+                  <p:par>
+                    <p:cTn id="3" fill="hold">
+                      <p:stCondLst>
+                        <p:cond delay="indefinite"/>
+                      </p:stCondLst>
+                      <p:childTnLst>
+                        <p:par>
+                          <p:cTn id="4" fill="hold">
+                            <p:stCondLst>
+                              <p:cond delay="0"/>
+                            </p:stCondLst>
+                            <p:childTnLst>
+                              <p:par>
+                                <p:cTn id="5" presetID="10" presetClass="entr" presetSubtype="0" fill="hold" grpId="0" nodeType="clickEffect">
+                                  <p:stCondLst>
+                                    <p:cond delay="0"/>
+                                  </p:stCondLst>
+                                  <p:childTnLst>
+                                    <p:set>
+                                      <p:cBhvr>
+                                        <p:cTn id="6" dur="1" fill="hold">
+                                          <p:stCondLst>
+                                            <p:cond delay="0"/>
+                                          </p:stCondLst>
+                                        </p:cTn>
+                                        <p:tgtEl>
+                                          <p:spTgt spid="18"/>
+                                        </p:tgtEl>
+                                        <p:attrNameLst>
+                                          <p:attrName>style.visibility</p:attrName>
+                                        </p:attrNameLst>
+                                      </p:cBhvr>
+                                      <p:to>
+                                        <p:strVal val="visible"/>
+                                      </p:to>
+                                    </p:set>
+                                    <p:animEffect transition="in" filter="fade">
+                                      <p:cBhvr>
+                                        <p:cTn id="7" dur="500"/>
+                                        <p:tgtEl>
+                                          <p:spTgt spid="18"/>
+                                        </p:tgtEl>
+                                      </p:cBhvr>
+                                    </p:animEffect>
+                                  </p:childTnLst>
+                                </p:cTn>
+                              </p:par>
+                            </p:childTnLst>
+                          </p:cTn>
+                        </p:par>
+                      </p:childTnLst>
+                    </p:cTn>
+                  </p:par>
+                  <p:par>
+                    <p:cTn id="8" fill="hold">
+                      <p:stCondLst>
+                        <p:cond delay="indefinite"/>
+                      </p:stCondLst>
+                      <p:childTnLst>
+                        <p:par>
+                          <p:cTn id="9" fill="hold">
+                            <p:stCondLst>
+                              <p:cond delay="0"/>
+                            </p:stCondLst>
+                            <p:childTnLst>
+                              <p:par>
+                                <p:cTn id="10" presetID="10" presetClass="entr" presetSubtype="0" fill="hold" grpId="0" nodeType="clickEffect">
+                                  <p:stCondLst>
+                                    <p:cond delay="0"/>
+                                  </p:stCondLst>
+                                  <p:childTnLst>
+                                    <p:set>
+                                      <p:cBhvr>
+                                        <p:cTn id="11" dur="1" fill="hold">
+                                          <p:stCondLst>
+                                            <p:cond delay="0"/>
+                                          </p:stCondLst>
+                                        </p:cTn>
+                                        <p:tgtEl>
+                                          <p:spTgt spid="19"/>
+                                        </p:tgtEl>
+                                        <p:attrNameLst>
+                                          <p:attrName>style.visibility</p:attrName>
+                                        </p:attrNameLst>
+                                      </p:cBhvr>
+                                      <p:to>
+                                        <p:strVal val="visible"/>
+                                      </p:to>
+                                    </p:set>
+                                    <p:animEffect transition="in" filter="fade">
+                                      <p:cBhvr>
+                                        <p:cTn id="12" dur="500"/>
+                                        <p:tgtEl>
+                                          <p:spTgt spid="19"/>
+                                        </p:tgtEl>
+                                      </p:cBhvr>
+                                    </p:animEffect>
+                                  </p:childTnLst>
+                                </p:cTn>
+                              </p:par>
+                            </p:childTnLst>
+                          </p:cTn>
+                        </p:par>
+                      </p:childTnLst>
+                    </p:cTn>
+                  </p:par>
+                  <p:par>
+                    <p:cTn id="13" fill="hold">
+                      <p:stCondLst>
+                        <p:cond delay="indefinite"/>
+                      </p:stCondLst>
+                      <p:childTnLst>
+                        <p:par>
+                          <p:cTn id="14" fill="hold">
+                            <p:stCondLst>
+                              <p:cond delay="0"/>
+                            </p:stCondLst>
+                            <p:childTnLst>
+                              <p:par>
+                                <p:cTn id="15" presetID="10" presetClass="entr" presetSubtype="0" fill="hold" grpId="0" nodeType="clickEffect">
+                                  <p:stCondLst>
+                                    <p:cond delay="0"/>
+                                  </p:stCondLst>
+                                  <p:childTnLst>
+                                    <p:set>
+                                      <p:cBhvr>
+                                        <p:cTn id="16" dur="1" fill="hold">
+                                          <p:stCondLst>
+                                            <p:cond delay="0"/>
+                                          </p:stCondLst>
+                                        </p:cTn>
+                                        <p:tgtEl>
+                                          <p:spTgt spid="20"/>
+                                        </p:tgtEl>
+                                        <p:attrNameLst>
+                                          <p:attrName>style.visibility</p:attrName>
+                                        </p:attrNameLst>
+                                      </p:cBhvr>
+                                      <p:to>
+                                        <p:strVal val="visible"/>
+                                      </p:to>
+                                    </p:set>
+                                    <p:animEffect transition="in" filter="fade">
+                                      <p:cBhvr>
+                                        <p:cTn id="17" dur="500"/>
+                                        <p:tgtEl>
+                                          <p:spTgt spid="20"/>
+                                        </p:tgtEl>
+                                      </p:cBhvr>
+                                    </p:animEffect>
+                                  </p:childTnLst>
+                                </p:cTn>
+                              </p:par>
+                              <p:par>
+                                <p:cTn id="18" presetID="10" presetClass="entr" presetSubtype="0" fill="hold" grpId="0" nodeType="withEffect">
+                                  <p:stCondLst>
+                                    <p:cond delay="0"/>
+                                  </p:stCondLst>
+                                  <p:childTnLst>
+                                    <p:set>
+                                      <p:cBhvr>
+                                        <p:cTn id="19" dur="1" fill="hold">
+                                          <p:stCondLst>
+                                            <p:cond delay="0"/>
+                                          </p:stCondLst>
+                                        </p:cTn>
+                                        <p:tgtEl>
+                                          <p:spTgt spid="21"/>
+                                        </p:tgtEl>
+                                        <p:attrNameLst>
+                                          <p:attrName>style.visibility</p:attrName>
+                                        </p:attrNameLst>
+                                      </p:cBhvr>
+                                      <p:to>
+                                        <p:strVal val="visible"/>
+                                      </p:to>
+                                    </p:set>
+                                    <p:animEffect transition="in" filter="fade">
+                                      <p:cBhvr>
+                                        <p:cTn id="20" dur="500"/>
+                                        <p:tgtEl>
+                                          <p:spTgt spid="21"/>
+                                        </p:tgtEl>
+                                      </p:cBhvr>
+                                    </p:animEffect>
+                                  </p:childTnLst>
+                                </p:cTn>
+                              </p:par>
+                              <p:par>
+                                <p:cTn id="21" presetID="10" presetClass="entr" presetSubtype="0" fill="hold" grpId="0" nodeType="withEffect">
+                                  <p:stCondLst>
+                                    <p:cond delay="0"/>
+                                  </p:stCondLst>
+                                  <p:childTnLst>
+                                    <p:set>
+                                      <p:cBhvr>
+                                        <p:cTn id="22" dur="1" fill="hold">
+                                          <p:stCondLst>
+                                            <p:cond delay="0"/>
+                                          </p:stCondLst>
+                                        </p:cTn>
+                                        <p:tgtEl>
+                                          <p:spTgt spid="22"/>
+                                        </p:tgtEl>
+                                        <p:attrNameLst>
+                                          <p:attrName>style.visibility</p:attrName>
+                                        </p:attrNameLst>
+                                      </p:cBhvr>
+                                      <p:to>
+                                        <p:strVal val="visible"/>
+                                      </p:to>
+                                    </p:set>
+                                    <p:animEffect transition="in" filter="fade">
+                                      <p:cBhvr>
+                                        <p:cTn id="23" dur="500"/>
+                                        <p:tgtEl>
+                                          <p:spTgt spid="22"/>
+                                        </p:tgtEl>
+                                      </p:cBhvr>
+                                    </p:animEffect>
+                                  </p:childTnLst>
+                                </p:cTn>
+                              </p:par>
+                              <p:par>
+                                <p:cTn id="24" presetID="10" presetClass="entr" presetSubtype="0" fill="hold" grpId="0" nodeType="withEffect">
+                                  <p:stCondLst>
+                                    <p:cond delay="0"/>
+                                  </p:stCondLst>
+                                  <p:childTnLst>
+                                    <p:set>
+                                      <p:cBhvr>
+                                        <p:cTn id="25" dur="1" fill="hold">
+                                          <p:stCondLst>
+                                            <p:cond delay="0"/>
+                                          </p:stCondLst>
+                                        </p:cTn>
+                                        <p:tgtEl>
+                                          <p:spTgt spid="23"/>
+                                        </p:tgtEl>
+                                        <p:attrNameLst>
+                                          <p:attrName>style.visibility</p:attrName>
+                                        </p:attrNameLst>
+                                      </p:cBhvr>
+                                      <p:to>
+                                        <p:strVal val="visible"/>
+                                      </p:to>
+                                    </p:set>
+                                    <p:animEffect transition="in" filter="fade">
+                                      <p:cBhvr>
+                                        <p:cTn id="26" dur="500"/>
+                                        <p:tgtEl>
+                                          <p:spTgt spid="23"/>
+                                        </p:tgtEl>
+                                      </p:cBhvr>
+                                    </p:animEffect>
+                                  </p:childTnLst>
+                                </p:cTn>
+                              </p:par>
+                            </p:childTnLst>
+                          </p:cTn>
+                        </p:par>
+                      </p:childTnLst>
+                    </p:cTn>
+                  </p:par>
+                  <p:par>
+                    <p:cTn id="27" fill="hold">
+                      <p:stCondLst>
+                        <p:cond delay="indefinite"/>
+                      </p:stCondLst>
+                      <p:childTnLst>
+                        <p:par>
+                          <p:cTn id="28" fill="hold">
+                            <p:stCondLst>
+                              <p:cond delay="0"/>
+                            </p:stCondLst>
+                            <p:childTnLst>
+                              <p:par>
+                                <p:cTn id="29" presetID="10" presetClass="entr" presetSubtype="0" fill="hold" grpId="0" nodeType="clickEffect">
+                                  <p:stCondLst>
+                                    <p:cond delay="0"/>
+                                  </p:stCondLst>
+                                  <p:childTnLst>
+                                    <p:set>
+                                      <p:cBhvr>
+                                        <p:cTn id="30" dur="1" fill="hold">
+                                          <p:stCondLst>
+                                            <p:cond delay="0"/>
+                                          </p:stCondLst>
+                                        </p:cTn>
+                                        <p:tgtEl>
+                                          <p:spTgt spid="24"/>
+                                        </p:tgtEl>
+                                        <p:attrNameLst>
+                                          <p:attrName>style.visibility</p:attrName>
+                                        </p:attrNameLst>
+                                      </p:cBhvr>
+                                      <p:to>
+                                        <p:strVal val="visible"/>
+                                      </p:to>
+                                    </p:set>
+                                    <p:animEffect transition="in" filter="fade">
+                                      <p:cBhvr>
+                                        <p:cTn id="31" dur="500"/>
+                                        <p:tgtEl>
+                                          <p:spTgt spid="24"/>
+                                        </p:tgtEl>
+                                      </p:cBhvr>
+                                    </p:animEffect>
+                                  </p:childTnLst>
+                                </p:cTn>
+                              </p:par>
+                              <p:par>
+                                <p:cTn id="32" presetID="10" presetClass="entr" presetSubtype="0" fill="hold" grpId="0" nodeType="withEffect">
+                                  <p:stCondLst>
+                                    <p:cond delay="0"/>
+                                  </p:stCondLst>
+                                  <p:childTnLst>
+                                    <p:set>
+                                      <p:cBhvr>
+                                        <p:cTn id="33" dur="1" fill="hold">
+                                          <p:stCondLst>
+                                            <p:cond delay="0"/>
+                                          </p:stCondLst>
+                                        </p:cTn>
+                                        <p:tgtEl>
+                                          <p:spTgt spid="25"/>
+                                        </p:tgtEl>
+                                        <p:attrNameLst>
+                                          <p:attrName>style.visibility</p:attrName>
+                                        </p:attrNameLst>
+                                      </p:cBhvr>
+                                      <p:to>
+                                        <p:strVal val="visible"/>
+                                      </p:to>
+                                    </p:set>
+                                    <p:animEffect transition="in" filter="fade">
+                                      <p:cBhvr>
+                                        <p:cTn id="34" dur="500"/>
+                                        <p:tgtEl>
+                                          <p:spTgt spid="25"/>
+                                        </p:tgtEl>
+                                      </p:cBhvr>
+                                    </p:animEffect>
+                                  </p:childTnLst>
+                                </p:cTn>
+                              </p:par>
+                            </p:childTnLst>
+                          </p:cTn>
+                        </p:par>
+                      </p:childTnLst>
+                    </p:cTn>
+                  </p:par>
+                </p:childTnLst>
+              </p:cTn>
+              <p:prevCondLst>
+                <p:cond evt="onPrev" delay="0">
+                  <p:tgtEl>
+                    <p:sldTgt/>
+                  </p:tgtEl>
+                </p:cond>
+              </p:prevCondLst>
+              <p:nextCondLst>
+                <p:cond evt="onNext" delay="0">
+                  <p:tgtEl>
+                    <p:sldTgt/>
+                  </p:tgtEl>
+                </p:cond>
+              </p:nextCondLst>
+            </p:seq>
+          </p:childTnLst>
+        </p:cTn>
+      </p:par>
+    </p:tnLst>
+    <p:bldLst>
+      <p:bldP spid="18" grpId="0" animBg="1"/>
+      <p:bldP spid="19" grpId="0" animBg="1"/>
+      <p:bldP spid="20" grpId="0" animBg="1"/>
+      <p:bldP spid="21" grpId="0" animBg="1"/>
+      <p:bldP spid="22" grpId="0" animBg="1"/>
+      <p:bldP spid="23" grpId="0" animBg="1"/>
+      <p:bldP spid="24" grpId="0" animBg="1"/>
+      <p:bldP spid="25" grpId="0" animBg="1"/>
+    </p:bldLst>
+  </p:timing>
+</p:sld>
+</file>
+
+<file path=ppt/slides/slide20.xml><?xml version="1.0" encoding="utf-8"?>
+<p:sld xmlns:a="http://schemas.openxmlformats.org/drawingml/2006/main" xmlns:r="http://schemas.openxmlformats.org/officeDocument/2006/relationships" xmlns:p="http://schemas.openxmlformats.org/presentationml/2006/main">
+  <p:cSld>
+    <p:spTree>
+      <p:nvGrpSpPr>
+        <p:cNvPr id="1" name=""/>
+        <p:cNvGrpSpPr/>
+        <p:nvPr/>
+      </p:nvGrpSpPr>
+      <p:grpSpPr>
+        <a:xfrm>
+          <a:off x="0" y="0"/>
+          <a:ext cx="0" cy="0"/>
+          <a:chOff x="0" y="0"/>
+          <a:chExt cx="0" cy="0"/>
+        </a:xfrm>
+      </p:grpSpPr>
+      <p:sp>
+        <p:nvSpPr>
+          <p:cNvPr id="2" name="Title 1">
+            <a:extLst>
+              <a:ext uri="{FF2B5EF4-FFF2-40B4-BE49-F238E27FC236}">
+                <a16:creationId xmlns:a16="http://schemas.microsoft.com/office/drawing/2014/main" id="{23B500FA-96A0-F0AE-8C3E-79831B774048}"/>
+              </a:ext>
+            </a:extLst>
+          </p:cNvPr>
+          <p:cNvSpPr>
+            <a:spLocks noGrp="1"/>
+          </p:cNvSpPr>
+          <p:nvPr>
+            <p:ph type="title"/>
+          </p:nvPr>
+        </p:nvSpPr>
+        <p:spPr/>
+        <p:txBody>
+          <a:bodyPr/>
+          <a:lstStyle/>
+          <a:p>
+            <a:r>
+              <a:rPr lang="sv-SE"/>
+              <a:t>Arrays som funktionsparametrar</a:t>
+            </a:r>
+            <a:endParaRPr lang="LID4096"/>
+          </a:p>
+        </p:txBody>
+      </p:sp>
+      <p:sp>
+        <p:nvSpPr>
           <p:cNvPr id="3" name="Content Placeholder 2">
             <a:extLst>
               <a:ext uri="{FF2B5EF4-FFF2-40B4-BE49-F238E27FC236}">
-                <a16:creationId xmlns:a16="http://schemas.microsoft.com/office/drawing/2014/main" id="{804406A8-432A-ADE4-65C0-0C99A2330FDC}"/>
+                <a16:creationId xmlns:a16="http://schemas.microsoft.com/office/drawing/2014/main" id="{249BE16D-FE23-695E-443D-E2EB6B84FC92}"/>
               </a:ext>
             </a:extLst>
           </p:cNvPr>
@@ -4931,19 +8088,7 @@
           <a:p>
             <a:r>
               <a:rPr lang="sv-SE"/>
-              <a:t>Man kan inte göra mycket kul utan branches</a:t>
-            </a:r>
-          </a:p>
-          <a:p>
-            <a:r>
-              <a:rPr lang="sv-SE"/>
-              <a:t>Branches på RISCV vs FLISP (flaggor vs jämförelse i branch instruktionen)</a:t>
-            </a:r>
-          </a:p>
-          <a:p>
-            <a:r>
-              <a:rPr lang="sv-SE"/>
-              <a:t>Visa ett exempel där gör en ifsats baserat på om ett värde är mindre än ett annat (för min, senare)</a:t>
+              <a:t>Gör en min(short * numbers) funktion</a:t>
             </a:r>
             <a:endParaRPr lang="LID4096"/>
           </a:p>
@@ -4952,7 +8097,107 @@
     </p:spTree>
     <p:extLst>
       <p:ext uri="{BB962C8B-B14F-4D97-AF65-F5344CB8AC3E}">
-        <p14:creationId xmlns:p14="http://schemas.microsoft.com/office/powerpoint/2010/main" val="2514247515"/>
+        <p14:creationId xmlns:p14="http://schemas.microsoft.com/office/powerpoint/2010/main" val="3979438151"/>
+      </p:ext>
+    </p:extLst>
+  </p:cSld>
+  <p:clrMapOvr>
+    <a:masterClrMapping/>
+  </p:clrMapOvr>
+</p:sld>
+</file>
+
+<file path=ppt/slides/slide21.xml><?xml version="1.0" encoding="utf-8"?>
+<p:sld xmlns:a="http://schemas.openxmlformats.org/drawingml/2006/main" xmlns:r="http://schemas.openxmlformats.org/officeDocument/2006/relationships" xmlns:p="http://schemas.openxmlformats.org/presentationml/2006/main">
+  <p:cSld>
+    <p:spTree>
+      <p:nvGrpSpPr>
+        <p:cNvPr id="1" name=""/>
+        <p:cNvGrpSpPr/>
+        <p:nvPr/>
+      </p:nvGrpSpPr>
+      <p:grpSpPr>
+        <a:xfrm>
+          <a:off x="0" y="0"/>
+          <a:ext cx="0" cy="0"/>
+          <a:chOff x="0" y="0"/>
+          <a:chExt cx="0" cy="0"/>
+        </a:xfrm>
+      </p:grpSpPr>
+      <p:sp>
+        <p:nvSpPr>
+          <p:cNvPr id="2" name="Title 1">
+            <a:extLst>
+              <a:ext uri="{FF2B5EF4-FFF2-40B4-BE49-F238E27FC236}">
+                <a16:creationId xmlns:a16="http://schemas.microsoft.com/office/drawing/2014/main" id="{3F7BE40A-0791-23EB-2804-6CAC680E3F1D}"/>
+              </a:ext>
+            </a:extLst>
+          </p:cNvPr>
+          <p:cNvSpPr>
+            <a:spLocks noGrp="1"/>
+          </p:cNvSpPr>
+          <p:nvPr>
+            <p:ph type="title"/>
+          </p:nvPr>
+        </p:nvSpPr>
+        <p:spPr/>
+        <p:txBody>
+          <a:bodyPr/>
+          <a:lstStyle/>
+          <a:p>
+            <a:r>
+              <a:rPr lang="sv-SE"/>
+              <a:t>Example</a:t>
+            </a:r>
+            <a:endParaRPr lang="LID4096"/>
+          </a:p>
+        </p:txBody>
+      </p:sp>
+      <p:sp>
+        <p:nvSpPr>
+          <p:cNvPr id="3" name="Content Placeholder 2">
+            <a:extLst>
+              <a:ext uri="{FF2B5EF4-FFF2-40B4-BE49-F238E27FC236}">
+                <a16:creationId xmlns:a16="http://schemas.microsoft.com/office/drawing/2014/main" id="{415817EA-065D-43C9-FF89-E12D7584F3BB}"/>
+              </a:ext>
+            </a:extLst>
+          </p:cNvPr>
+          <p:cNvSpPr>
+            <a:spLocks noGrp="1"/>
+          </p:cNvSpPr>
+          <p:nvPr>
+            <p:ph idx="1"/>
+          </p:nvPr>
+        </p:nvSpPr>
+        <p:spPr/>
+        <p:txBody>
+          <a:bodyPr/>
+          <a:lstStyle/>
+          <a:p>
+            <a:r>
+              <a:rPr lang="sv-SE"/>
+              <a:t>sort is not part of standard C. </a:t>
+            </a:r>
+          </a:p>
+          <a:p>
+            <a:r>
+              <a:rPr lang="sv-SE"/>
+              <a:t>I could write a sorting function myself and call it from assembly.</a:t>
+            </a:r>
+          </a:p>
+          <a:p>
+            <a:r>
+              <a:rPr lang="sv-SE"/>
+              <a:t>Or go for strings. to_upper, for example. </a:t>
+            </a:r>
+            <a:endParaRPr lang="LID4096"/>
+          </a:p>
+        </p:txBody>
+      </p:sp>
+    </p:spTree>
+    <p:extLst>
+      <p:ext uri="{BB962C8B-B14F-4D97-AF65-F5344CB8AC3E}">
+        <p14:creationId xmlns:p14="http://schemas.microsoft.com/office/powerpoint/2010/main" val="2486399696"/>
       </p:ext>
     </p:extLst>
   </p:cSld>
@@ -5001,60 +8246,325 @@
           <a:lstStyle/>
           <a:p>
             <a:r>
-              <a:rPr lang="sv-SE"/>
-              <a:t>Funktioner</a:t>
-            </a:r>
-            <a:endParaRPr lang="LID4096"/>
-          </a:p>
-        </p:txBody>
-      </p:sp>
-      <p:sp>
-        <p:nvSpPr>
-          <p:cNvPr id="3" name="Content Placeholder 2">
-            <a:extLst>
-              <a:ext uri="{FF2B5EF4-FFF2-40B4-BE49-F238E27FC236}">
-                <a16:creationId xmlns:a16="http://schemas.microsoft.com/office/drawing/2014/main" id="{3B6559A2-613C-851F-F3BB-EC54B9F8A137}"/>
-              </a:ext>
-            </a:extLst>
-          </p:cNvPr>
-          <p:cNvSpPr>
-            <a:spLocks noGrp="1"/>
-          </p:cNvSpPr>
-          <p:nvPr>
-            <p:ph idx="1"/>
-          </p:nvPr>
-        </p:nvSpPr>
-        <p:spPr/>
-        <p:txBody>
-          <a:bodyPr/>
-          <a:lstStyle/>
-          <a:p>
-            <a:r>
-              <a:rPr lang="sv-SE"/>
-              <a:t>Visa exempelfunktion, min (ingen kropp eller parametrar ännu)</a:t>
-            </a:r>
-          </a:p>
-          <a:p>
-            <a:r>
-              <a:rPr lang="sv-SE"/>
-              <a:t>Introducera jal och jalr (förklara problemet med jal offset, och varför jalr behövs)</a:t>
-            </a:r>
-          </a:p>
-          <a:p>
-            <a:r>
-              <a:rPr lang="sv-SE"/>
-              <a:t>Visa hur vi kan hoppa tillbaka från min med jalr</a:t>
-            </a:r>
-          </a:p>
-          <a:p>
-            <a:r>
-              <a:rPr lang="sv-SE"/>
-              <a:t>Notera att ra bara är en konvention</a:t>
-            </a:r>
-            <a:endParaRPr lang="LID4096"/>
-          </a:p>
-        </p:txBody>
-      </p:sp>
+              <a:rPr lang="sv-SE" dirty="0"/>
+              <a:t>Funktioner (subrutiner)</a:t>
+            </a:r>
+            <a:endParaRPr lang="LID4096" dirty="0"/>
+          </a:p>
+        </p:txBody>
+      </p:sp>
+      <p:sp>
+        <p:nvSpPr>
+          <p:cNvPr id="4" name="TextBox 3">
+            <a:extLst>
+              <a:ext uri="{FF2B5EF4-FFF2-40B4-BE49-F238E27FC236}">
+                <a16:creationId xmlns:a16="http://schemas.microsoft.com/office/drawing/2014/main" id="{DB94F3A5-876C-10DA-599B-5FDEC685F45A}"/>
+              </a:ext>
+            </a:extLst>
+          </p:cNvPr>
+          <p:cNvSpPr txBox="1"/>
+          <p:nvPr/>
+        </p:nvSpPr>
+        <p:spPr>
+          <a:xfrm>
+            <a:off x="838200" y="2157721"/>
+            <a:ext cx="3143506" cy="4247317"/>
+          </a:xfrm>
+          <a:prstGeom prst="rect">
+            <a:avLst/>
+          </a:prstGeom>
+          <a:solidFill>
+            <a:schemeClr val="bg1"/>
+          </a:solidFill>
+          <a:ln>
+            <a:solidFill>
+              <a:schemeClr val="accent1">
+                <a:shade val="15000"/>
+              </a:schemeClr>
+            </a:solidFill>
+          </a:ln>
+          <a:effectLst>
+            <a:outerShdw blurRad="50800" dist="38100" dir="2700000" algn="tl" rotWithShape="0">
+              <a:prstClr val="black">
+                <a:alpha val="40000"/>
+              </a:prstClr>
+            </a:outerShdw>
+          </a:effectLst>
+        </p:spPr>
+        <p:txBody>
+          <a:bodyPr wrap="square" rtlCol="0">
+            <a:spAutoFit/>
+          </a:bodyPr>
+          <a:lstStyle/>
+          <a:p>
+            <a:r>
+              <a:rPr lang="en-US" dirty="0">
+                <a:latin typeface="Consolas" panose="020B0609020204030204" pitchFamily="49" charset="0"/>
+              </a:rPr>
+              <a:t>main:</a:t>
+            </a:r>
+          </a:p>
+          <a:p>
+            <a:r>
+              <a:rPr lang="en-US" dirty="0">
+                <a:latin typeface="Consolas" panose="020B0609020204030204" pitchFamily="49" charset="0"/>
+              </a:rPr>
+              <a:t>  la t0, x</a:t>
+            </a:r>
+          </a:p>
+          <a:p>
+            <a:r>
+              <a:rPr lang="en-US" dirty="0">
+                <a:latin typeface="Consolas" panose="020B0609020204030204" pitchFamily="49" charset="0"/>
+              </a:rPr>
+              <a:t>  </a:t>
+            </a:r>
+            <a:r>
+              <a:rPr lang="en-US" dirty="0" err="1">
+                <a:latin typeface="Consolas" panose="020B0609020204030204" pitchFamily="49" charset="0"/>
+              </a:rPr>
+              <a:t>lw</a:t>
+            </a:r>
+            <a:r>
+              <a:rPr lang="en-US" dirty="0">
+                <a:latin typeface="Consolas" panose="020B0609020204030204" pitchFamily="49" charset="0"/>
+              </a:rPr>
+              <a:t> t0, 0(t0)</a:t>
+            </a:r>
+          </a:p>
+          <a:p>
+            <a:r>
+              <a:rPr lang="en-US" dirty="0">
+                <a:latin typeface="Consolas" panose="020B0609020204030204" pitchFamily="49" charset="0"/>
+              </a:rPr>
+              <a:t>  la t1, y</a:t>
+            </a:r>
+          </a:p>
+          <a:p>
+            <a:r>
+              <a:rPr lang="en-US" dirty="0">
+                <a:latin typeface="Consolas" panose="020B0609020204030204" pitchFamily="49" charset="0"/>
+              </a:rPr>
+              <a:t>  </a:t>
+            </a:r>
+            <a:r>
+              <a:rPr lang="en-US" dirty="0" err="1">
+                <a:latin typeface="Consolas" panose="020B0609020204030204" pitchFamily="49" charset="0"/>
+              </a:rPr>
+              <a:t>lw</a:t>
+            </a:r>
+            <a:r>
+              <a:rPr lang="en-US" dirty="0">
+                <a:latin typeface="Consolas" panose="020B0609020204030204" pitchFamily="49" charset="0"/>
+              </a:rPr>
+              <a:t> t1, 0(t1)</a:t>
+            </a:r>
+          </a:p>
+          <a:p>
+            <a:endParaRPr lang="en-US" dirty="0">
+              <a:latin typeface="Consolas" panose="020B0609020204030204" pitchFamily="49" charset="0"/>
+            </a:endParaRPr>
+          </a:p>
+          <a:p>
+            <a:r>
+              <a:rPr lang="en-US" dirty="0">
+                <a:latin typeface="Consolas" panose="020B0609020204030204" pitchFamily="49" charset="0"/>
+              </a:rPr>
+              <a:t>  # need t0 = min(x, y)</a:t>
+            </a:r>
+          </a:p>
+          <a:p>
+            <a:r>
+              <a:rPr lang="en-US" dirty="0">
+                <a:latin typeface="Consolas" panose="020B0609020204030204" pitchFamily="49" charset="0"/>
+              </a:rPr>
+              <a:t>  ...</a:t>
+            </a:r>
+            <a:br>
+              <a:rPr lang="en-US" dirty="0">
+                <a:latin typeface="Consolas" panose="020B0609020204030204" pitchFamily="49" charset="0"/>
+              </a:rPr>
+            </a:br>
+            <a:r>
+              <a:rPr lang="en-US" dirty="0">
+                <a:latin typeface="Consolas" panose="020B0609020204030204" pitchFamily="49" charset="0"/>
+              </a:rPr>
+              <a:t>  # use smallest value</a:t>
+            </a:r>
+          </a:p>
+          <a:p>
+            <a:r>
+              <a:rPr lang="en-US" dirty="0">
+                <a:latin typeface="Consolas" panose="020B0609020204030204" pitchFamily="49" charset="0"/>
+              </a:rPr>
+              <a:t>  ... </a:t>
+            </a:r>
+          </a:p>
+          <a:p>
+            <a:r>
+              <a:rPr lang="en-US" dirty="0">
+                <a:latin typeface="Consolas" panose="020B0609020204030204" pitchFamily="49" charset="0"/>
+              </a:rPr>
+              <a:t>  </a:t>
+            </a:r>
+          </a:p>
+          <a:p>
+            <a:endParaRPr lang="en-US" dirty="0">
+              <a:latin typeface="Consolas" panose="020B0609020204030204" pitchFamily="49" charset="0"/>
+            </a:endParaRPr>
+          </a:p>
+          <a:p>
+            <a:r>
+              <a:rPr lang="en-US" dirty="0">
+                <a:latin typeface="Consolas" panose="020B0609020204030204" pitchFamily="49" charset="0"/>
+              </a:rPr>
+              <a:t>x: .word 10</a:t>
+            </a:r>
+          </a:p>
+          <a:p>
+            <a:r>
+              <a:rPr lang="en-US" dirty="0">
+                <a:latin typeface="Consolas" panose="020B0609020204030204" pitchFamily="49" charset="0"/>
+              </a:rPr>
+              <a:t>y: .word 20</a:t>
+            </a:r>
+          </a:p>
+          <a:p>
+            <a:r>
+              <a:rPr lang="en-US" dirty="0">
+                <a:latin typeface="Consolas" panose="020B0609020204030204" pitchFamily="49" charset="0"/>
+              </a:rPr>
+              <a:t>  </a:t>
+            </a:r>
+            <a:endParaRPr lang="LID4096" dirty="0">
+              <a:latin typeface="Consolas" panose="020B0609020204030204" pitchFamily="49" charset="0"/>
+            </a:endParaRPr>
+          </a:p>
+        </p:txBody>
+      </p:sp>
+      <p:sp>
+        <p:nvSpPr>
+          <p:cNvPr id="5" name="TextBox 4">
+            <a:extLst>
+              <a:ext uri="{FF2B5EF4-FFF2-40B4-BE49-F238E27FC236}">
+                <a16:creationId xmlns:a16="http://schemas.microsoft.com/office/drawing/2014/main" id="{B8DD4010-A184-3FBA-705E-B4F67C280D06}"/>
+              </a:ext>
+            </a:extLst>
+          </p:cNvPr>
+          <p:cNvSpPr txBox="1"/>
+          <p:nvPr/>
+        </p:nvSpPr>
+        <p:spPr>
+          <a:xfrm>
+            <a:off x="8674191" y="3308943"/>
+            <a:ext cx="3143506" cy="1477328"/>
+          </a:xfrm>
+          <a:prstGeom prst="rect">
+            <a:avLst/>
+          </a:prstGeom>
+          <a:solidFill>
+            <a:schemeClr val="bg1"/>
+          </a:solidFill>
+          <a:ln>
+            <a:solidFill>
+              <a:schemeClr val="accent1">
+                <a:shade val="15000"/>
+              </a:schemeClr>
+            </a:solidFill>
+          </a:ln>
+          <a:effectLst>
+            <a:outerShdw blurRad="50800" dist="38100" dir="2700000" algn="tl" rotWithShape="0">
+              <a:prstClr val="black">
+                <a:alpha val="40000"/>
+              </a:prstClr>
+            </a:outerShdw>
+          </a:effectLst>
+        </p:spPr>
+        <p:txBody>
+          <a:bodyPr wrap="square" rtlCol="0">
+            <a:spAutoFit/>
+          </a:bodyPr>
+          <a:lstStyle/>
+          <a:p>
+            <a:r>
+              <a:rPr lang="en-US" dirty="0">
+                <a:latin typeface="Consolas" panose="020B0609020204030204" pitchFamily="49" charset="0"/>
+              </a:rPr>
+              <a:t>min:</a:t>
+            </a:r>
+          </a:p>
+          <a:p>
+            <a:endParaRPr lang="en-US" dirty="0">
+              <a:latin typeface="Consolas" panose="020B0609020204030204" pitchFamily="49" charset="0"/>
+            </a:endParaRPr>
+          </a:p>
+          <a:p>
+            <a:r>
+              <a:rPr lang="en-US" dirty="0">
+                <a:latin typeface="Consolas" panose="020B0609020204030204" pitchFamily="49" charset="0"/>
+              </a:rPr>
+              <a:t>  # return smallest of</a:t>
+            </a:r>
+          </a:p>
+          <a:p>
+            <a:r>
+              <a:rPr lang="en-US" dirty="0">
+                <a:latin typeface="Consolas" panose="020B0609020204030204" pitchFamily="49" charset="0"/>
+              </a:rPr>
+              <a:t>  # two parameters</a:t>
+            </a:r>
+          </a:p>
+          <a:p>
+            <a:endParaRPr lang="en-US" dirty="0">
+              <a:latin typeface="Consolas" panose="020B0609020204030204" pitchFamily="49" charset="0"/>
+            </a:endParaRPr>
+          </a:p>
+        </p:txBody>
+      </p:sp>
+      <p:pic>
+        <p:nvPicPr>
+          <p:cNvPr id="7" name="Picture 6">
+            <a:extLst>
+              <a:ext uri="{FF2B5EF4-FFF2-40B4-BE49-F238E27FC236}">
+                <a16:creationId xmlns:a16="http://schemas.microsoft.com/office/drawing/2014/main" id="{F6D85BC1-B875-CBD8-4FB6-F118A50348A0}"/>
+              </a:ext>
+            </a:extLst>
+          </p:cNvPr>
+          <p:cNvPicPr>
+            <a:picLocks noChangeAspect="1"/>
+          </p:cNvPicPr>
+          <p:nvPr/>
+        </p:nvPicPr>
+        <p:blipFill>
+          <a:blip r:embed="rId3"/>
+          <a:stretch>
+            <a:fillRect/>
+          </a:stretch>
+        </p:blipFill>
+        <p:spPr>
+          <a:xfrm>
+            <a:off x="2153630" y="1892223"/>
+            <a:ext cx="8697539" cy="1105054"/>
+          </a:xfrm>
+          <a:prstGeom prst="rect">
+            <a:avLst/>
+          </a:prstGeom>
+          <a:ln>
+            <a:solidFill>
+              <a:schemeClr val="accent1">
+                <a:shade val="15000"/>
+              </a:schemeClr>
+            </a:solidFill>
+          </a:ln>
+          <a:effectLst>
+            <a:outerShdw blurRad="50800" dist="38100" dir="2700000" algn="tl" rotWithShape="0">
+              <a:prstClr val="black">
+                <a:alpha val="40000"/>
+              </a:prstClr>
+            </a:outerShdw>
+          </a:effectLst>
+        </p:spPr>
+      </p:pic>
     </p:spTree>
     <p:extLst>
       <p:ext uri="{BB962C8B-B14F-4D97-AF65-F5344CB8AC3E}">
@@ -5069,6 +8579,3033 @@
 </file>
 
 <file path=ppt/slides/slide4.xml><?xml version="1.0" encoding="utf-8"?>
+<p:sld xmlns:a="http://schemas.openxmlformats.org/drawingml/2006/main" xmlns:r="http://schemas.openxmlformats.org/officeDocument/2006/relationships" xmlns:p="http://schemas.openxmlformats.org/presentationml/2006/main">
+  <p:cSld>
+    <p:spTree>
+      <p:nvGrpSpPr>
+        <p:cNvPr id="1" name="">
+          <a:extLst>
+            <a:ext uri="{FF2B5EF4-FFF2-40B4-BE49-F238E27FC236}">
+              <a16:creationId xmlns:a16="http://schemas.microsoft.com/office/drawing/2014/main" id="{48C0365D-D28C-C831-5F0B-F908F8D358D3}"/>
+            </a:ext>
+          </a:extLst>
+        </p:cNvPr>
+        <p:cNvGrpSpPr/>
+        <p:nvPr/>
+      </p:nvGrpSpPr>
+      <p:grpSpPr>
+        <a:xfrm>
+          <a:off x="0" y="0"/>
+          <a:ext cx="0" cy="0"/>
+          <a:chOff x="0" y="0"/>
+          <a:chExt cx="0" cy="0"/>
+        </a:xfrm>
+      </p:grpSpPr>
+      <p:sp>
+        <p:nvSpPr>
+          <p:cNvPr id="2" name="Title 1">
+            <a:extLst>
+              <a:ext uri="{FF2B5EF4-FFF2-40B4-BE49-F238E27FC236}">
+                <a16:creationId xmlns:a16="http://schemas.microsoft.com/office/drawing/2014/main" id="{E2D75643-5A36-7F2E-C717-F1954459EA89}"/>
+              </a:ext>
+            </a:extLst>
+          </p:cNvPr>
+          <p:cNvSpPr>
+            <a:spLocks noGrp="1"/>
+          </p:cNvSpPr>
+          <p:nvPr>
+            <p:ph type="title"/>
+          </p:nvPr>
+        </p:nvSpPr>
+        <p:spPr/>
+        <p:txBody>
+          <a:bodyPr/>
+          <a:lstStyle/>
+          <a:p>
+            <a:r>
+              <a:rPr lang="sv-SE" dirty="0"/>
+              <a:t>Funktioner (subrutiner)</a:t>
+            </a:r>
+            <a:endParaRPr lang="LID4096" dirty="0"/>
+          </a:p>
+        </p:txBody>
+      </p:sp>
+      <p:sp>
+        <p:nvSpPr>
+          <p:cNvPr id="4" name="TextBox 3">
+            <a:extLst>
+              <a:ext uri="{FF2B5EF4-FFF2-40B4-BE49-F238E27FC236}">
+                <a16:creationId xmlns:a16="http://schemas.microsoft.com/office/drawing/2014/main" id="{421554DA-9C6C-4577-A6FC-83F72E88EB55}"/>
+              </a:ext>
+            </a:extLst>
+          </p:cNvPr>
+          <p:cNvSpPr txBox="1"/>
+          <p:nvPr/>
+        </p:nvSpPr>
+        <p:spPr>
+          <a:xfrm>
+            <a:off x="838200" y="2157721"/>
+            <a:ext cx="3143506" cy="4524315"/>
+          </a:xfrm>
+          <a:prstGeom prst="rect">
+            <a:avLst/>
+          </a:prstGeom>
+          <a:solidFill>
+            <a:schemeClr val="bg1"/>
+          </a:solidFill>
+          <a:ln>
+            <a:solidFill>
+              <a:schemeClr val="accent1">
+                <a:shade val="15000"/>
+              </a:schemeClr>
+            </a:solidFill>
+          </a:ln>
+          <a:effectLst>
+            <a:outerShdw blurRad="50800" dist="38100" dir="2700000" algn="tl" rotWithShape="0">
+              <a:prstClr val="black">
+                <a:alpha val="40000"/>
+              </a:prstClr>
+            </a:outerShdw>
+          </a:effectLst>
+        </p:spPr>
+        <p:txBody>
+          <a:bodyPr wrap="square" rtlCol="0">
+            <a:spAutoFit/>
+          </a:bodyPr>
+          <a:lstStyle/>
+          <a:p>
+            <a:r>
+              <a:rPr lang="en-US" dirty="0">
+                <a:latin typeface="Consolas" panose="020B0609020204030204" pitchFamily="49" charset="0"/>
+              </a:rPr>
+              <a:t>main:</a:t>
+            </a:r>
+          </a:p>
+          <a:p>
+            <a:r>
+              <a:rPr lang="en-US" dirty="0">
+                <a:latin typeface="Consolas" panose="020B0609020204030204" pitchFamily="49" charset="0"/>
+              </a:rPr>
+              <a:t>  la t0, x</a:t>
+            </a:r>
+          </a:p>
+          <a:p>
+            <a:r>
+              <a:rPr lang="en-US" dirty="0">
+                <a:latin typeface="Consolas" panose="020B0609020204030204" pitchFamily="49" charset="0"/>
+              </a:rPr>
+              <a:t>  </a:t>
+            </a:r>
+            <a:r>
+              <a:rPr lang="en-US" dirty="0" err="1">
+                <a:latin typeface="Consolas" panose="020B0609020204030204" pitchFamily="49" charset="0"/>
+              </a:rPr>
+              <a:t>lw</a:t>
+            </a:r>
+            <a:r>
+              <a:rPr lang="en-US" dirty="0">
+                <a:latin typeface="Consolas" panose="020B0609020204030204" pitchFamily="49" charset="0"/>
+              </a:rPr>
+              <a:t> t0, 0(t0)</a:t>
+            </a:r>
+          </a:p>
+          <a:p>
+            <a:r>
+              <a:rPr lang="en-US" dirty="0">
+                <a:latin typeface="Consolas" panose="020B0609020204030204" pitchFamily="49" charset="0"/>
+              </a:rPr>
+              <a:t>  la t1, y</a:t>
+            </a:r>
+          </a:p>
+          <a:p>
+            <a:r>
+              <a:rPr lang="en-US" dirty="0">
+                <a:latin typeface="Consolas" panose="020B0609020204030204" pitchFamily="49" charset="0"/>
+              </a:rPr>
+              <a:t>  </a:t>
+            </a:r>
+            <a:r>
+              <a:rPr lang="en-US" dirty="0" err="1">
+                <a:latin typeface="Consolas" panose="020B0609020204030204" pitchFamily="49" charset="0"/>
+              </a:rPr>
+              <a:t>lw</a:t>
+            </a:r>
+            <a:r>
+              <a:rPr lang="en-US" dirty="0">
+                <a:latin typeface="Consolas" panose="020B0609020204030204" pitchFamily="49" charset="0"/>
+              </a:rPr>
+              <a:t> t1, 0(t1)</a:t>
+            </a:r>
+          </a:p>
+          <a:p>
+            <a:endParaRPr lang="en-US" dirty="0">
+              <a:latin typeface="Consolas" panose="020B0609020204030204" pitchFamily="49" charset="0"/>
+            </a:endParaRPr>
+          </a:p>
+          <a:p>
+            <a:r>
+              <a:rPr lang="en-US" dirty="0">
+                <a:latin typeface="Consolas" panose="020B0609020204030204" pitchFamily="49" charset="0"/>
+              </a:rPr>
+              <a:t>  # need t0 = min(x, y)</a:t>
+            </a:r>
+          </a:p>
+          <a:p>
+            <a:r>
+              <a:rPr lang="en-US" dirty="0">
+                <a:latin typeface="Consolas" panose="020B0609020204030204" pitchFamily="49" charset="0"/>
+              </a:rPr>
+              <a:t>  </a:t>
+            </a:r>
+            <a:r>
+              <a:rPr lang="en-US" b="1" dirty="0" err="1">
+                <a:latin typeface="Consolas" panose="020B0609020204030204" pitchFamily="49" charset="0"/>
+              </a:rPr>
+              <a:t>jal</a:t>
+            </a:r>
+            <a:r>
+              <a:rPr lang="en-US" b="1" dirty="0">
+                <a:latin typeface="Consolas" panose="020B0609020204030204" pitchFamily="49" charset="0"/>
+              </a:rPr>
+              <a:t> </a:t>
+            </a:r>
+            <a:r>
+              <a:rPr lang="en-US" b="1" dirty="0" err="1">
+                <a:latin typeface="Consolas" panose="020B0609020204030204" pitchFamily="49" charset="0"/>
+              </a:rPr>
+              <a:t>ra</a:t>
+            </a:r>
+            <a:r>
+              <a:rPr lang="en-US" b="1" dirty="0">
+                <a:latin typeface="Consolas" panose="020B0609020204030204" pitchFamily="49" charset="0"/>
+              </a:rPr>
+              <a:t>, min</a:t>
+            </a:r>
+          </a:p>
+          <a:p>
+            <a:r>
+              <a:rPr lang="en-US" dirty="0">
+                <a:latin typeface="Consolas" panose="020B0609020204030204" pitchFamily="49" charset="0"/>
+              </a:rPr>
+              <a:t>  ...</a:t>
+            </a:r>
+            <a:br>
+              <a:rPr lang="en-US" dirty="0">
+                <a:latin typeface="Consolas" panose="020B0609020204030204" pitchFamily="49" charset="0"/>
+              </a:rPr>
+            </a:br>
+            <a:r>
+              <a:rPr lang="en-US" dirty="0">
+                <a:latin typeface="Consolas" panose="020B0609020204030204" pitchFamily="49" charset="0"/>
+              </a:rPr>
+              <a:t>  # use smallest value</a:t>
+            </a:r>
+          </a:p>
+          <a:p>
+            <a:r>
+              <a:rPr lang="en-US" dirty="0">
+                <a:latin typeface="Consolas" panose="020B0609020204030204" pitchFamily="49" charset="0"/>
+              </a:rPr>
+              <a:t>  ... </a:t>
+            </a:r>
+          </a:p>
+          <a:p>
+            <a:r>
+              <a:rPr lang="en-US" dirty="0">
+                <a:latin typeface="Consolas" panose="020B0609020204030204" pitchFamily="49" charset="0"/>
+              </a:rPr>
+              <a:t>  </a:t>
+            </a:r>
+          </a:p>
+          <a:p>
+            <a:endParaRPr lang="en-US" dirty="0">
+              <a:latin typeface="Consolas" panose="020B0609020204030204" pitchFamily="49" charset="0"/>
+            </a:endParaRPr>
+          </a:p>
+          <a:p>
+            <a:r>
+              <a:rPr lang="en-US" dirty="0">
+                <a:latin typeface="Consolas" panose="020B0609020204030204" pitchFamily="49" charset="0"/>
+              </a:rPr>
+              <a:t>x: .word 10</a:t>
+            </a:r>
+          </a:p>
+          <a:p>
+            <a:r>
+              <a:rPr lang="en-US" dirty="0">
+                <a:latin typeface="Consolas" panose="020B0609020204030204" pitchFamily="49" charset="0"/>
+              </a:rPr>
+              <a:t>y: .word 20</a:t>
+            </a:r>
+          </a:p>
+          <a:p>
+            <a:r>
+              <a:rPr lang="en-US" dirty="0">
+                <a:latin typeface="Consolas" panose="020B0609020204030204" pitchFamily="49" charset="0"/>
+              </a:rPr>
+              <a:t>  </a:t>
+            </a:r>
+            <a:endParaRPr lang="LID4096" dirty="0">
+              <a:latin typeface="Consolas" panose="020B0609020204030204" pitchFamily="49" charset="0"/>
+            </a:endParaRPr>
+          </a:p>
+        </p:txBody>
+      </p:sp>
+      <p:sp>
+        <p:nvSpPr>
+          <p:cNvPr id="5" name="TextBox 4">
+            <a:extLst>
+              <a:ext uri="{FF2B5EF4-FFF2-40B4-BE49-F238E27FC236}">
+                <a16:creationId xmlns:a16="http://schemas.microsoft.com/office/drawing/2014/main" id="{09C504A6-91AB-E790-0F12-C1B6A2ACEF30}"/>
+              </a:ext>
+            </a:extLst>
+          </p:cNvPr>
+          <p:cNvSpPr txBox="1"/>
+          <p:nvPr/>
+        </p:nvSpPr>
+        <p:spPr>
+          <a:xfrm>
+            <a:off x="8674191" y="3308943"/>
+            <a:ext cx="3143506" cy="1477328"/>
+          </a:xfrm>
+          <a:prstGeom prst="rect">
+            <a:avLst/>
+          </a:prstGeom>
+          <a:solidFill>
+            <a:schemeClr val="bg1"/>
+          </a:solidFill>
+          <a:ln>
+            <a:solidFill>
+              <a:schemeClr val="accent1">
+                <a:shade val="15000"/>
+              </a:schemeClr>
+            </a:solidFill>
+          </a:ln>
+          <a:effectLst>
+            <a:outerShdw blurRad="50800" dist="38100" dir="2700000" algn="tl" rotWithShape="0">
+              <a:prstClr val="black">
+                <a:alpha val="40000"/>
+              </a:prstClr>
+            </a:outerShdw>
+          </a:effectLst>
+        </p:spPr>
+        <p:txBody>
+          <a:bodyPr wrap="square" rtlCol="0">
+            <a:spAutoFit/>
+          </a:bodyPr>
+          <a:lstStyle/>
+          <a:p>
+            <a:r>
+              <a:rPr lang="en-US" dirty="0">
+                <a:latin typeface="Consolas" panose="020B0609020204030204" pitchFamily="49" charset="0"/>
+              </a:rPr>
+              <a:t>min:</a:t>
+            </a:r>
+          </a:p>
+          <a:p>
+            <a:endParaRPr lang="en-US" dirty="0">
+              <a:latin typeface="Consolas" panose="020B0609020204030204" pitchFamily="49" charset="0"/>
+            </a:endParaRPr>
+          </a:p>
+          <a:p>
+            <a:r>
+              <a:rPr lang="en-US" dirty="0">
+                <a:latin typeface="Consolas" panose="020B0609020204030204" pitchFamily="49" charset="0"/>
+              </a:rPr>
+              <a:t>  # return smallest of</a:t>
+            </a:r>
+          </a:p>
+          <a:p>
+            <a:r>
+              <a:rPr lang="en-US" dirty="0">
+                <a:latin typeface="Consolas" panose="020B0609020204030204" pitchFamily="49" charset="0"/>
+              </a:rPr>
+              <a:t>  # two parameters</a:t>
+            </a:r>
+          </a:p>
+          <a:p>
+            <a:endParaRPr lang="en-US" dirty="0">
+              <a:latin typeface="Consolas" panose="020B0609020204030204" pitchFamily="49" charset="0"/>
+            </a:endParaRPr>
+          </a:p>
+        </p:txBody>
+      </p:sp>
+      <p:pic>
+        <p:nvPicPr>
+          <p:cNvPr id="7" name="Picture 6">
+            <a:extLst>
+              <a:ext uri="{FF2B5EF4-FFF2-40B4-BE49-F238E27FC236}">
+                <a16:creationId xmlns:a16="http://schemas.microsoft.com/office/drawing/2014/main" id="{EC200E10-BA44-0DC0-1CCE-C22259B155A7}"/>
+              </a:ext>
+            </a:extLst>
+          </p:cNvPr>
+          <p:cNvPicPr>
+            <a:picLocks noChangeAspect="1"/>
+          </p:cNvPicPr>
+          <p:nvPr/>
+        </p:nvPicPr>
+        <p:blipFill>
+          <a:blip r:embed="rId3"/>
+          <a:stretch>
+            <a:fillRect/>
+          </a:stretch>
+        </p:blipFill>
+        <p:spPr>
+          <a:xfrm>
+            <a:off x="2153630" y="1892223"/>
+            <a:ext cx="8697539" cy="1105054"/>
+          </a:xfrm>
+          <a:prstGeom prst="rect">
+            <a:avLst/>
+          </a:prstGeom>
+          <a:ln>
+            <a:solidFill>
+              <a:schemeClr val="accent1">
+                <a:shade val="15000"/>
+              </a:schemeClr>
+            </a:solidFill>
+          </a:ln>
+          <a:effectLst>
+            <a:outerShdw blurRad="50800" dist="38100" dir="2700000" algn="tl" rotWithShape="0">
+              <a:prstClr val="black">
+                <a:alpha val="40000"/>
+              </a:prstClr>
+            </a:outerShdw>
+          </a:effectLst>
+        </p:spPr>
+      </p:pic>
+    </p:spTree>
+    <p:extLst>
+      <p:ext uri="{BB962C8B-B14F-4D97-AF65-F5344CB8AC3E}">
+        <p14:creationId xmlns:p14="http://schemas.microsoft.com/office/powerpoint/2010/main" val="4097493814"/>
+      </p:ext>
+    </p:extLst>
+  </p:cSld>
+  <p:clrMapOvr>
+    <a:masterClrMapping/>
+  </p:clrMapOvr>
+</p:sld>
+</file>
+
+<file path=ppt/slides/slide5.xml><?xml version="1.0" encoding="utf-8"?>
+<p:sld xmlns:a="http://schemas.openxmlformats.org/drawingml/2006/main" xmlns:r="http://schemas.openxmlformats.org/officeDocument/2006/relationships" xmlns:p="http://schemas.openxmlformats.org/presentationml/2006/main">
+  <p:cSld>
+    <p:spTree>
+      <p:nvGrpSpPr>
+        <p:cNvPr id="1" name="">
+          <a:extLst>
+            <a:ext uri="{FF2B5EF4-FFF2-40B4-BE49-F238E27FC236}">
+              <a16:creationId xmlns:a16="http://schemas.microsoft.com/office/drawing/2014/main" id="{6B9C12EE-54A5-6F67-2D76-ABAD87763C33}"/>
+            </a:ext>
+          </a:extLst>
+        </p:cNvPr>
+        <p:cNvGrpSpPr/>
+        <p:nvPr/>
+      </p:nvGrpSpPr>
+      <p:grpSpPr>
+        <a:xfrm>
+          <a:off x="0" y="0"/>
+          <a:ext cx="0" cy="0"/>
+          <a:chOff x="0" y="0"/>
+          <a:chExt cx="0" cy="0"/>
+        </a:xfrm>
+      </p:grpSpPr>
+      <p:sp>
+        <p:nvSpPr>
+          <p:cNvPr id="2" name="Title 1">
+            <a:extLst>
+              <a:ext uri="{FF2B5EF4-FFF2-40B4-BE49-F238E27FC236}">
+                <a16:creationId xmlns:a16="http://schemas.microsoft.com/office/drawing/2014/main" id="{4B6C536C-250C-8E63-6FE9-5BFD00F5AB84}"/>
+              </a:ext>
+            </a:extLst>
+          </p:cNvPr>
+          <p:cNvSpPr>
+            <a:spLocks noGrp="1"/>
+          </p:cNvSpPr>
+          <p:nvPr>
+            <p:ph type="title"/>
+          </p:nvPr>
+        </p:nvSpPr>
+        <p:spPr/>
+        <p:txBody>
+          <a:bodyPr/>
+          <a:lstStyle/>
+          <a:p>
+            <a:r>
+              <a:rPr lang="sv-SE" dirty="0"/>
+              <a:t>Funktioner (subrutiner)</a:t>
+            </a:r>
+            <a:endParaRPr lang="LID4096" dirty="0"/>
+          </a:p>
+        </p:txBody>
+      </p:sp>
+      <p:sp>
+        <p:nvSpPr>
+          <p:cNvPr id="4" name="TextBox 3">
+            <a:extLst>
+              <a:ext uri="{FF2B5EF4-FFF2-40B4-BE49-F238E27FC236}">
+                <a16:creationId xmlns:a16="http://schemas.microsoft.com/office/drawing/2014/main" id="{A97E9B9F-5446-6D45-9E93-4423D6708A54}"/>
+              </a:ext>
+            </a:extLst>
+          </p:cNvPr>
+          <p:cNvSpPr txBox="1"/>
+          <p:nvPr/>
+        </p:nvSpPr>
+        <p:spPr>
+          <a:xfrm>
+            <a:off x="838200" y="2157721"/>
+            <a:ext cx="3143506" cy="4524315"/>
+          </a:xfrm>
+          <a:prstGeom prst="rect">
+            <a:avLst/>
+          </a:prstGeom>
+          <a:solidFill>
+            <a:schemeClr val="bg1"/>
+          </a:solidFill>
+          <a:ln>
+            <a:solidFill>
+              <a:schemeClr val="accent1">
+                <a:shade val="15000"/>
+              </a:schemeClr>
+            </a:solidFill>
+          </a:ln>
+          <a:effectLst>
+            <a:outerShdw blurRad="50800" dist="38100" dir="2700000" algn="tl" rotWithShape="0">
+              <a:prstClr val="black">
+                <a:alpha val="40000"/>
+              </a:prstClr>
+            </a:outerShdw>
+          </a:effectLst>
+        </p:spPr>
+        <p:txBody>
+          <a:bodyPr wrap="square" rtlCol="0">
+            <a:spAutoFit/>
+          </a:bodyPr>
+          <a:lstStyle/>
+          <a:p>
+            <a:r>
+              <a:rPr lang="en-US" dirty="0">
+                <a:latin typeface="Consolas" panose="020B0609020204030204" pitchFamily="49" charset="0"/>
+              </a:rPr>
+              <a:t>main:</a:t>
+            </a:r>
+          </a:p>
+          <a:p>
+            <a:r>
+              <a:rPr lang="en-US" dirty="0">
+                <a:latin typeface="Consolas" panose="020B0609020204030204" pitchFamily="49" charset="0"/>
+              </a:rPr>
+              <a:t>  la t0, x</a:t>
+            </a:r>
+          </a:p>
+          <a:p>
+            <a:r>
+              <a:rPr lang="en-US" dirty="0">
+                <a:latin typeface="Consolas" panose="020B0609020204030204" pitchFamily="49" charset="0"/>
+              </a:rPr>
+              <a:t>  </a:t>
+            </a:r>
+            <a:r>
+              <a:rPr lang="en-US" dirty="0" err="1">
+                <a:latin typeface="Consolas" panose="020B0609020204030204" pitchFamily="49" charset="0"/>
+              </a:rPr>
+              <a:t>lw</a:t>
+            </a:r>
+            <a:r>
+              <a:rPr lang="en-US" dirty="0">
+                <a:latin typeface="Consolas" panose="020B0609020204030204" pitchFamily="49" charset="0"/>
+              </a:rPr>
+              <a:t> t0, 0(t0)</a:t>
+            </a:r>
+          </a:p>
+          <a:p>
+            <a:r>
+              <a:rPr lang="en-US" dirty="0">
+                <a:latin typeface="Consolas" panose="020B0609020204030204" pitchFamily="49" charset="0"/>
+              </a:rPr>
+              <a:t>  la t1, y</a:t>
+            </a:r>
+          </a:p>
+          <a:p>
+            <a:r>
+              <a:rPr lang="en-US" dirty="0">
+                <a:latin typeface="Consolas" panose="020B0609020204030204" pitchFamily="49" charset="0"/>
+              </a:rPr>
+              <a:t>  </a:t>
+            </a:r>
+            <a:r>
+              <a:rPr lang="en-US" dirty="0" err="1">
+                <a:latin typeface="Consolas" panose="020B0609020204030204" pitchFamily="49" charset="0"/>
+              </a:rPr>
+              <a:t>lw</a:t>
+            </a:r>
+            <a:r>
+              <a:rPr lang="en-US" dirty="0">
+                <a:latin typeface="Consolas" panose="020B0609020204030204" pitchFamily="49" charset="0"/>
+              </a:rPr>
+              <a:t> t1, 0(t1)</a:t>
+            </a:r>
+          </a:p>
+          <a:p>
+            <a:endParaRPr lang="en-US" dirty="0">
+              <a:latin typeface="Consolas" panose="020B0609020204030204" pitchFamily="49" charset="0"/>
+            </a:endParaRPr>
+          </a:p>
+          <a:p>
+            <a:r>
+              <a:rPr lang="en-US" dirty="0">
+                <a:latin typeface="Consolas" panose="020B0609020204030204" pitchFamily="49" charset="0"/>
+              </a:rPr>
+              <a:t>  # need t0 = min(x, y)</a:t>
+            </a:r>
+          </a:p>
+          <a:p>
+            <a:r>
+              <a:rPr lang="en-US" dirty="0">
+                <a:latin typeface="Consolas" panose="020B0609020204030204" pitchFamily="49" charset="0"/>
+              </a:rPr>
+              <a:t>  </a:t>
+            </a:r>
+            <a:r>
+              <a:rPr lang="en-US" b="1" dirty="0" err="1">
+                <a:latin typeface="Consolas" panose="020B0609020204030204" pitchFamily="49" charset="0"/>
+              </a:rPr>
+              <a:t>jal</a:t>
+            </a:r>
+            <a:r>
+              <a:rPr lang="en-US" b="1" dirty="0">
+                <a:latin typeface="Consolas" panose="020B0609020204030204" pitchFamily="49" charset="0"/>
+              </a:rPr>
+              <a:t> </a:t>
+            </a:r>
+            <a:r>
+              <a:rPr lang="en-US" b="1" dirty="0" err="1">
+                <a:latin typeface="Consolas" panose="020B0609020204030204" pitchFamily="49" charset="0"/>
+              </a:rPr>
+              <a:t>ra</a:t>
+            </a:r>
+            <a:r>
+              <a:rPr lang="en-US" b="1" dirty="0">
+                <a:latin typeface="Consolas" panose="020B0609020204030204" pitchFamily="49" charset="0"/>
+              </a:rPr>
+              <a:t>, min</a:t>
+            </a:r>
+          </a:p>
+          <a:p>
+            <a:r>
+              <a:rPr lang="en-US" dirty="0">
+                <a:latin typeface="Consolas" panose="020B0609020204030204" pitchFamily="49" charset="0"/>
+              </a:rPr>
+              <a:t>  ...</a:t>
+            </a:r>
+            <a:br>
+              <a:rPr lang="en-US" dirty="0">
+                <a:latin typeface="Consolas" panose="020B0609020204030204" pitchFamily="49" charset="0"/>
+              </a:rPr>
+            </a:br>
+            <a:r>
+              <a:rPr lang="en-US" dirty="0">
+                <a:latin typeface="Consolas" panose="020B0609020204030204" pitchFamily="49" charset="0"/>
+              </a:rPr>
+              <a:t>  # use smallest value</a:t>
+            </a:r>
+          </a:p>
+          <a:p>
+            <a:r>
+              <a:rPr lang="en-US" dirty="0">
+                <a:latin typeface="Consolas" panose="020B0609020204030204" pitchFamily="49" charset="0"/>
+              </a:rPr>
+              <a:t>  ... </a:t>
+            </a:r>
+          </a:p>
+          <a:p>
+            <a:r>
+              <a:rPr lang="en-US" dirty="0">
+                <a:latin typeface="Consolas" panose="020B0609020204030204" pitchFamily="49" charset="0"/>
+              </a:rPr>
+              <a:t>  </a:t>
+            </a:r>
+          </a:p>
+          <a:p>
+            <a:endParaRPr lang="en-US" dirty="0">
+              <a:latin typeface="Consolas" panose="020B0609020204030204" pitchFamily="49" charset="0"/>
+            </a:endParaRPr>
+          </a:p>
+          <a:p>
+            <a:r>
+              <a:rPr lang="en-US" dirty="0">
+                <a:latin typeface="Consolas" panose="020B0609020204030204" pitchFamily="49" charset="0"/>
+              </a:rPr>
+              <a:t>x: .word 10</a:t>
+            </a:r>
+          </a:p>
+          <a:p>
+            <a:r>
+              <a:rPr lang="en-US" dirty="0">
+                <a:latin typeface="Consolas" panose="020B0609020204030204" pitchFamily="49" charset="0"/>
+              </a:rPr>
+              <a:t>y: .word 20</a:t>
+            </a:r>
+          </a:p>
+          <a:p>
+            <a:r>
+              <a:rPr lang="en-US" dirty="0">
+                <a:latin typeface="Consolas" panose="020B0609020204030204" pitchFamily="49" charset="0"/>
+              </a:rPr>
+              <a:t>  </a:t>
+            </a:r>
+            <a:endParaRPr lang="LID4096" dirty="0">
+              <a:latin typeface="Consolas" panose="020B0609020204030204" pitchFamily="49" charset="0"/>
+            </a:endParaRPr>
+          </a:p>
+        </p:txBody>
+      </p:sp>
+      <p:sp>
+        <p:nvSpPr>
+          <p:cNvPr id="5" name="TextBox 4">
+            <a:extLst>
+              <a:ext uri="{FF2B5EF4-FFF2-40B4-BE49-F238E27FC236}">
+                <a16:creationId xmlns:a16="http://schemas.microsoft.com/office/drawing/2014/main" id="{CAF1E47F-E80D-104F-0ED0-7010FF3E7E05}"/>
+              </a:ext>
+            </a:extLst>
+          </p:cNvPr>
+          <p:cNvSpPr txBox="1"/>
+          <p:nvPr/>
+        </p:nvSpPr>
+        <p:spPr>
+          <a:xfrm>
+            <a:off x="8674191" y="3308943"/>
+            <a:ext cx="3143506" cy="1754326"/>
+          </a:xfrm>
+          <a:prstGeom prst="rect">
+            <a:avLst/>
+          </a:prstGeom>
+          <a:solidFill>
+            <a:schemeClr val="bg1"/>
+          </a:solidFill>
+          <a:ln>
+            <a:solidFill>
+              <a:schemeClr val="accent1">
+                <a:shade val="15000"/>
+              </a:schemeClr>
+            </a:solidFill>
+          </a:ln>
+          <a:effectLst>
+            <a:outerShdw blurRad="50800" dist="38100" dir="2700000" algn="tl" rotWithShape="0">
+              <a:prstClr val="black">
+                <a:alpha val="40000"/>
+              </a:prstClr>
+            </a:outerShdw>
+          </a:effectLst>
+        </p:spPr>
+        <p:txBody>
+          <a:bodyPr wrap="square" rtlCol="0">
+            <a:spAutoFit/>
+          </a:bodyPr>
+          <a:lstStyle/>
+          <a:p>
+            <a:r>
+              <a:rPr lang="en-US" dirty="0">
+                <a:latin typeface="Consolas" panose="020B0609020204030204" pitchFamily="49" charset="0"/>
+              </a:rPr>
+              <a:t>min:</a:t>
+            </a:r>
+          </a:p>
+          <a:p>
+            <a:endParaRPr lang="en-US" dirty="0">
+              <a:latin typeface="Consolas" panose="020B0609020204030204" pitchFamily="49" charset="0"/>
+            </a:endParaRPr>
+          </a:p>
+          <a:p>
+            <a:r>
+              <a:rPr lang="en-US" dirty="0">
+                <a:latin typeface="Consolas" panose="020B0609020204030204" pitchFamily="49" charset="0"/>
+              </a:rPr>
+              <a:t>  # return smallest of</a:t>
+            </a:r>
+          </a:p>
+          <a:p>
+            <a:r>
+              <a:rPr lang="en-US" dirty="0">
+                <a:latin typeface="Consolas" panose="020B0609020204030204" pitchFamily="49" charset="0"/>
+              </a:rPr>
+              <a:t>  # two parameters</a:t>
+            </a:r>
+          </a:p>
+          <a:p>
+            <a:r>
+              <a:rPr lang="en-US" dirty="0">
+                <a:latin typeface="Consolas" panose="020B0609020204030204" pitchFamily="49" charset="0"/>
+              </a:rPr>
+              <a:t>  </a:t>
+            </a:r>
+            <a:r>
+              <a:rPr lang="en-US" b="1" dirty="0" err="1">
+                <a:latin typeface="Consolas" panose="020B0609020204030204" pitchFamily="49" charset="0"/>
+              </a:rPr>
+              <a:t>jalr</a:t>
+            </a:r>
+            <a:r>
+              <a:rPr lang="en-US" b="1" dirty="0">
+                <a:latin typeface="Consolas" panose="020B0609020204030204" pitchFamily="49" charset="0"/>
+              </a:rPr>
+              <a:t> zero, 0(</a:t>
+            </a:r>
+            <a:r>
+              <a:rPr lang="en-US" b="1" dirty="0" err="1">
+                <a:latin typeface="Consolas" panose="020B0609020204030204" pitchFamily="49" charset="0"/>
+              </a:rPr>
+              <a:t>ra</a:t>
+            </a:r>
+            <a:r>
+              <a:rPr lang="en-US" b="1" dirty="0">
+                <a:latin typeface="Consolas" panose="020B0609020204030204" pitchFamily="49" charset="0"/>
+              </a:rPr>
+              <a:t>)</a:t>
+            </a:r>
+          </a:p>
+          <a:p>
+            <a:r>
+              <a:rPr lang="en-US" dirty="0">
+                <a:latin typeface="Consolas" panose="020B0609020204030204" pitchFamily="49" charset="0"/>
+              </a:rPr>
+              <a:t>  </a:t>
+            </a:r>
+          </a:p>
+        </p:txBody>
+      </p:sp>
+      <p:pic>
+        <p:nvPicPr>
+          <p:cNvPr id="6" name="Picture 5">
+            <a:extLst>
+              <a:ext uri="{FF2B5EF4-FFF2-40B4-BE49-F238E27FC236}">
+                <a16:creationId xmlns:a16="http://schemas.microsoft.com/office/drawing/2014/main" id="{63173DEA-C3F6-F5A5-EC73-0C5187467347}"/>
+              </a:ext>
+            </a:extLst>
+          </p:cNvPr>
+          <p:cNvPicPr>
+            <a:picLocks noChangeAspect="1"/>
+          </p:cNvPicPr>
+          <p:nvPr/>
+        </p:nvPicPr>
+        <p:blipFill>
+          <a:blip r:embed="rId3"/>
+          <a:stretch>
+            <a:fillRect/>
+          </a:stretch>
+        </p:blipFill>
+        <p:spPr>
+          <a:xfrm>
+            <a:off x="2160305" y="1875841"/>
+            <a:ext cx="8621328" cy="1247949"/>
+          </a:xfrm>
+          <a:prstGeom prst="rect">
+            <a:avLst/>
+          </a:prstGeom>
+          <a:ln>
+            <a:solidFill>
+              <a:schemeClr val="accent1">
+                <a:shade val="15000"/>
+              </a:schemeClr>
+            </a:solidFill>
+          </a:ln>
+          <a:effectLst>
+            <a:outerShdw blurRad="50800" dist="38100" dir="2700000" algn="tl" rotWithShape="0">
+              <a:prstClr val="black">
+                <a:alpha val="40000"/>
+              </a:prstClr>
+            </a:outerShdw>
+          </a:effectLst>
+        </p:spPr>
+      </p:pic>
+    </p:spTree>
+    <p:extLst>
+      <p:ext uri="{BB962C8B-B14F-4D97-AF65-F5344CB8AC3E}">
+        <p14:creationId xmlns:p14="http://schemas.microsoft.com/office/powerpoint/2010/main" val="1044436016"/>
+      </p:ext>
+    </p:extLst>
+  </p:cSld>
+  <p:clrMapOvr>
+    <a:masterClrMapping/>
+  </p:clrMapOvr>
+</p:sld>
+</file>
+
+<file path=ppt/slides/slide6.xml><?xml version="1.0" encoding="utf-8"?>
+<p:sld xmlns:a="http://schemas.openxmlformats.org/drawingml/2006/main" xmlns:r="http://schemas.openxmlformats.org/officeDocument/2006/relationships" xmlns:p="http://schemas.openxmlformats.org/presentationml/2006/main">
+  <p:cSld>
+    <p:spTree>
+      <p:nvGrpSpPr>
+        <p:cNvPr id="1" name="">
+          <a:extLst>
+            <a:ext uri="{FF2B5EF4-FFF2-40B4-BE49-F238E27FC236}">
+              <a16:creationId xmlns:a16="http://schemas.microsoft.com/office/drawing/2014/main" id="{720317EB-57DE-DFB0-5B8C-7C7C088E0F7F}"/>
+            </a:ext>
+          </a:extLst>
+        </p:cNvPr>
+        <p:cNvGrpSpPr/>
+        <p:nvPr/>
+      </p:nvGrpSpPr>
+      <p:grpSpPr>
+        <a:xfrm>
+          <a:off x="0" y="0"/>
+          <a:ext cx="0" cy="0"/>
+          <a:chOff x="0" y="0"/>
+          <a:chExt cx="0" cy="0"/>
+        </a:xfrm>
+      </p:grpSpPr>
+      <p:sp>
+        <p:nvSpPr>
+          <p:cNvPr id="2" name="Title 1">
+            <a:extLst>
+              <a:ext uri="{FF2B5EF4-FFF2-40B4-BE49-F238E27FC236}">
+                <a16:creationId xmlns:a16="http://schemas.microsoft.com/office/drawing/2014/main" id="{C95F0124-1665-1A40-3A49-8D8EDE3CCAB5}"/>
+              </a:ext>
+            </a:extLst>
+          </p:cNvPr>
+          <p:cNvSpPr>
+            <a:spLocks noGrp="1"/>
+          </p:cNvSpPr>
+          <p:nvPr>
+            <p:ph type="title"/>
+          </p:nvPr>
+        </p:nvSpPr>
+        <p:spPr/>
+        <p:txBody>
+          <a:bodyPr/>
+          <a:lstStyle/>
+          <a:p>
+            <a:r>
+              <a:rPr lang="sv-SE" dirty="0"/>
+              <a:t>Funktioner (call och </a:t>
+            </a:r>
+            <a:r>
+              <a:rPr lang="sv-SE" dirty="0" err="1"/>
+              <a:t>return</a:t>
+            </a:r>
+            <a:r>
+              <a:rPr lang="sv-SE" dirty="0"/>
+              <a:t>)</a:t>
+            </a:r>
+            <a:endParaRPr lang="LID4096" dirty="0"/>
+          </a:p>
+        </p:txBody>
+      </p:sp>
+      <p:sp>
+        <p:nvSpPr>
+          <p:cNvPr id="4" name="TextBox 3">
+            <a:extLst>
+              <a:ext uri="{FF2B5EF4-FFF2-40B4-BE49-F238E27FC236}">
+                <a16:creationId xmlns:a16="http://schemas.microsoft.com/office/drawing/2014/main" id="{CACF08E5-3A0E-9F91-7552-8511BD25D567}"/>
+              </a:ext>
+            </a:extLst>
+          </p:cNvPr>
+          <p:cNvSpPr txBox="1"/>
+          <p:nvPr/>
+        </p:nvSpPr>
+        <p:spPr>
+          <a:xfrm>
+            <a:off x="838200" y="1844022"/>
+            <a:ext cx="3873964" cy="4801314"/>
+          </a:xfrm>
+          <a:prstGeom prst="rect">
+            <a:avLst/>
+          </a:prstGeom>
+          <a:solidFill>
+            <a:schemeClr val="bg1"/>
+          </a:solidFill>
+          <a:ln>
+            <a:solidFill>
+              <a:schemeClr val="accent1">
+                <a:shade val="15000"/>
+              </a:schemeClr>
+            </a:solidFill>
+          </a:ln>
+          <a:effectLst>
+            <a:outerShdw blurRad="50800" dist="38100" dir="2700000" algn="tl" rotWithShape="0">
+              <a:prstClr val="black">
+                <a:alpha val="40000"/>
+              </a:prstClr>
+            </a:outerShdw>
+          </a:effectLst>
+        </p:spPr>
+        <p:txBody>
+          <a:bodyPr wrap="square" rtlCol="0">
+            <a:spAutoFit/>
+          </a:bodyPr>
+          <a:lstStyle/>
+          <a:p>
+            <a:r>
+              <a:rPr lang="en-US" dirty="0">
+                <a:latin typeface="Consolas" panose="020B0609020204030204" pitchFamily="49" charset="0"/>
+              </a:rPr>
+              <a:t>main:</a:t>
+            </a:r>
+          </a:p>
+          <a:p>
+            <a:r>
+              <a:rPr lang="en-US" dirty="0">
+                <a:latin typeface="Consolas" panose="020B0609020204030204" pitchFamily="49" charset="0"/>
+              </a:rPr>
+              <a:t>  la t0, x</a:t>
+            </a:r>
+          </a:p>
+          <a:p>
+            <a:r>
+              <a:rPr lang="en-US" dirty="0">
+                <a:latin typeface="Consolas" panose="020B0609020204030204" pitchFamily="49" charset="0"/>
+              </a:rPr>
+              <a:t>  </a:t>
+            </a:r>
+            <a:r>
+              <a:rPr lang="en-US" dirty="0" err="1">
+                <a:latin typeface="Consolas" panose="020B0609020204030204" pitchFamily="49" charset="0"/>
+              </a:rPr>
+              <a:t>lw</a:t>
+            </a:r>
+            <a:r>
+              <a:rPr lang="en-US" dirty="0">
+                <a:latin typeface="Consolas" panose="020B0609020204030204" pitchFamily="49" charset="0"/>
+              </a:rPr>
+              <a:t> t0, 0(t0)</a:t>
+            </a:r>
+          </a:p>
+          <a:p>
+            <a:r>
+              <a:rPr lang="en-US" dirty="0">
+                <a:latin typeface="Consolas" panose="020B0609020204030204" pitchFamily="49" charset="0"/>
+              </a:rPr>
+              <a:t>  la t1, y</a:t>
+            </a:r>
+          </a:p>
+          <a:p>
+            <a:r>
+              <a:rPr lang="en-US" dirty="0">
+                <a:latin typeface="Consolas" panose="020B0609020204030204" pitchFamily="49" charset="0"/>
+              </a:rPr>
+              <a:t>  </a:t>
+            </a:r>
+            <a:r>
+              <a:rPr lang="en-US" dirty="0" err="1">
+                <a:latin typeface="Consolas" panose="020B0609020204030204" pitchFamily="49" charset="0"/>
+              </a:rPr>
+              <a:t>lw</a:t>
+            </a:r>
+            <a:r>
+              <a:rPr lang="en-US" dirty="0">
+                <a:latin typeface="Consolas" panose="020B0609020204030204" pitchFamily="49" charset="0"/>
+              </a:rPr>
+              <a:t> t1, 0(t1)</a:t>
+            </a:r>
+          </a:p>
+          <a:p>
+            <a:endParaRPr lang="en-US" dirty="0">
+              <a:latin typeface="Consolas" panose="020B0609020204030204" pitchFamily="49" charset="0"/>
+            </a:endParaRPr>
+          </a:p>
+          <a:p>
+            <a:r>
+              <a:rPr lang="en-US" dirty="0">
+                <a:latin typeface="Consolas" panose="020B0609020204030204" pitchFamily="49" charset="0"/>
+              </a:rPr>
+              <a:t>  # need t0 = min(x, y)</a:t>
+            </a:r>
+          </a:p>
+          <a:p>
+            <a:r>
+              <a:rPr lang="en-US" dirty="0">
+                <a:latin typeface="Consolas" panose="020B0609020204030204" pitchFamily="49" charset="0"/>
+              </a:rPr>
+              <a:t>  </a:t>
+            </a:r>
+            <a:r>
+              <a:rPr lang="en-US" b="1" dirty="0" err="1">
+                <a:latin typeface="Consolas" panose="020B0609020204030204" pitchFamily="49" charset="0"/>
+              </a:rPr>
+              <a:t>jal</a:t>
+            </a:r>
+            <a:r>
+              <a:rPr lang="en-US" b="1" dirty="0">
+                <a:latin typeface="Consolas" panose="020B0609020204030204" pitchFamily="49" charset="0"/>
+              </a:rPr>
+              <a:t> </a:t>
+            </a:r>
+            <a:r>
+              <a:rPr lang="en-US" b="1" dirty="0" err="1">
+                <a:latin typeface="Consolas" panose="020B0609020204030204" pitchFamily="49" charset="0"/>
+              </a:rPr>
+              <a:t>ra</a:t>
+            </a:r>
+            <a:r>
+              <a:rPr lang="en-US" b="1" dirty="0">
+                <a:latin typeface="Consolas" panose="020B0609020204030204" pitchFamily="49" charset="0"/>
+              </a:rPr>
+              <a:t>, min</a:t>
+            </a:r>
+          </a:p>
+          <a:p>
+            <a:r>
+              <a:rPr lang="en-US" b="1" dirty="0">
+                <a:latin typeface="Consolas" panose="020B0609020204030204" pitchFamily="49" charset="0"/>
+              </a:rPr>
+              <a:t>  call min # </a:t>
+            </a:r>
+            <a:r>
+              <a:rPr lang="en-US" b="1" dirty="0" err="1">
+                <a:latin typeface="Consolas" panose="020B0609020204030204" pitchFamily="49" charset="0"/>
+              </a:rPr>
+              <a:t>Ekvivalent</a:t>
+            </a:r>
+            <a:r>
+              <a:rPr lang="en-US" b="1" dirty="0">
+                <a:latin typeface="Consolas" panose="020B0609020204030204" pitchFamily="49" charset="0"/>
+              </a:rPr>
+              <a:t> </a:t>
+            </a:r>
+          </a:p>
+          <a:p>
+            <a:r>
+              <a:rPr lang="en-US" b="1" dirty="0">
+                <a:latin typeface="Consolas" panose="020B0609020204030204" pitchFamily="49" charset="0"/>
+              </a:rPr>
+              <a:t>  </a:t>
+            </a:r>
+            <a:r>
+              <a:rPr lang="en-US" dirty="0">
+                <a:latin typeface="Consolas" panose="020B0609020204030204" pitchFamily="49" charset="0"/>
+              </a:rPr>
+              <a:t>...</a:t>
+            </a:r>
+            <a:br>
+              <a:rPr lang="en-US" dirty="0">
+                <a:latin typeface="Consolas" panose="020B0609020204030204" pitchFamily="49" charset="0"/>
+              </a:rPr>
+            </a:br>
+            <a:r>
+              <a:rPr lang="en-US" dirty="0">
+                <a:latin typeface="Consolas" panose="020B0609020204030204" pitchFamily="49" charset="0"/>
+              </a:rPr>
+              <a:t>  # use smallest value</a:t>
+            </a:r>
+          </a:p>
+          <a:p>
+            <a:r>
+              <a:rPr lang="en-US" dirty="0">
+                <a:latin typeface="Consolas" panose="020B0609020204030204" pitchFamily="49" charset="0"/>
+              </a:rPr>
+              <a:t>  ... </a:t>
+            </a:r>
+          </a:p>
+          <a:p>
+            <a:r>
+              <a:rPr lang="en-US" dirty="0">
+                <a:latin typeface="Consolas" panose="020B0609020204030204" pitchFamily="49" charset="0"/>
+              </a:rPr>
+              <a:t>  </a:t>
+            </a:r>
+          </a:p>
+          <a:p>
+            <a:endParaRPr lang="en-US" dirty="0">
+              <a:latin typeface="Consolas" panose="020B0609020204030204" pitchFamily="49" charset="0"/>
+            </a:endParaRPr>
+          </a:p>
+          <a:p>
+            <a:r>
+              <a:rPr lang="en-US" dirty="0">
+                <a:latin typeface="Consolas" panose="020B0609020204030204" pitchFamily="49" charset="0"/>
+              </a:rPr>
+              <a:t>x: .word 10</a:t>
+            </a:r>
+          </a:p>
+          <a:p>
+            <a:r>
+              <a:rPr lang="en-US" dirty="0">
+                <a:latin typeface="Consolas" panose="020B0609020204030204" pitchFamily="49" charset="0"/>
+              </a:rPr>
+              <a:t>y: .word 20</a:t>
+            </a:r>
+          </a:p>
+          <a:p>
+            <a:r>
+              <a:rPr lang="en-US" dirty="0">
+                <a:latin typeface="Consolas" panose="020B0609020204030204" pitchFamily="49" charset="0"/>
+              </a:rPr>
+              <a:t>  </a:t>
+            </a:r>
+            <a:endParaRPr lang="LID4096" dirty="0">
+              <a:latin typeface="Consolas" panose="020B0609020204030204" pitchFamily="49" charset="0"/>
+            </a:endParaRPr>
+          </a:p>
+        </p:txBody>
+      </p:sp>
+      <p:sp>
+        <p:nvSpPr>
+          <p:cNvPr id="5" name="TextBox 4">
+            <a:extLst>
+              <a:ext uri="{FF2B5EF4-FFF2-40B4-BE49-F238E27FC236}">
+                <a16:creationId xmlns:a16="http://schemas.microsoft.com/office/drawing/2014/main" id="{05AE8DD7-4C43-EFDA-14CA-2F313ADDF422}"/>
+              </a:ext>
+            </a:extLst>
+          </p:cNvPr>
+          <p:cNvSpPr txBox="1"/>
+          <p:nvPr/>
+        </p:nvSpPr>
+        <p:spPr>
+          <a:xfrm>
+            <a:off x="8674191" y="3308943"/>
+            <a:ext cx="3143506" cy="2031325"/>
+          </a:xfrm>
+          <a:prstGeom prst="rect">
+            <a:avLst/>
+          </a:prstGeom>
+          <a:solidFill>
+            <a:schemeClr val="bg1"/>
+          </a:solidFill>
+          <a:ln>
+            <a:solidFill>
+              <a:schemeClr val="accent1">
+                <a:shade val="15000"/>
+              </a:schemeClr>
+            </a:solidFill>
+          </a:ln>
+          <a:effectLst>
+            <a:outerShdw blurRad="50800" dist="38100" dir="2700000" algn="tl" rotWithShape="0">
+              <a:prstClr val="black">
+                <a:alpha val="40000"/>
+              </a:prstClr>
+            </a:outerShdw>
+          </a:effectLst>
+        </p:spPr>
+        <p:txBody>
+          <a:bodyPr wrap="square" rtlCol="0">
+            <a:spAutoFit/>
+          </a:bodyPr>
+          <a:lstStyle/>
+          <a:p>
+            <a:r>
+              <a:rPr lang="en-US" dirty="0">
+                <a:latin typeface="Consolas" panose="020B0609020204030204" pitchFamily="49" charset="0"/>
+              </a:rPr>
+              <a:t>min:</a:t>
+            </a:r>
+          </a:p>
+          <a:p>
+            <a:endParaRPr lang="en-US" dirty="0">
+              <a:latin typeface="Consolas" panose="020B0609020204030204" pitchFamily="49" charset="0"/>
+            </a:endParaRPr>
+          </a:p>
+          <a:p>
+            <a:r>
+              <a:rPr lang="en-US" dirty="0">
+                <a:latin typeface="Consolas" panose="020B0609020204030204" pitchFamily="49" charset="0"/>
+              </a:rPr>
+              <a:t>  # return smallest of</a:t>
+            </a:r>
+          </a:p>
+          <a:p>
+            <a:r>
+              <a:rPr lang="en-US" dirty="0">
+                <a:latin typeface="Consolas" panose="020B0609020204030204" pitchFamily="49" charset="0"/>
+              </a:rPr>
+              <a:t>  # two parameters</a:t>
+            </a:r>
+          </a:p>
+          <a:p>
+            <a:r>
+              <a:rPr lang="en-US" dirty="0">
+                <a:latin typeface="Consolas" panose="020B0609020204030204" pitchFamily="49" charset="0"/>
+              </a:rPr>
+              <a:t>  </a:t>
+            </a:r>
+            <a:r>
+              <a:rPr lang="en-US" b="1" dirty="0" err="1">
+                <a:latin typeface="Consolas" panose="020B0609020204030204" pitchFamily="49" charset="0"/>
+              </a:rPr>
+              <a:t>jalr</a:t>
+            </a:r>
+            <a:r>
+              <a:rPr lang="en-US" b="1" dirty="0">
+                <a:latin typeface="Consolas" panose="020B0609020204030204" pitchFamily="49" charset="0"/>
+              </a:rPr>
+              <a:t> zero, 0(</a:t>
+            </a:r>
+            <a:r>
+              <a:rPr lang="en-US" b="1" dirty="0" err="1">
+                <a:latin typeface="Consolas" panose="020B0609020204030204" pitchFamily="49" charset="0"/>
+              </a:rPr>
+              <a:t>ra</a:t>
+            </a:r>
+            <a:r>
+              <a:rPr lang="en-US" b="1" dirty="0">
+                <a:latin typeface="Consolas" panose="020B0609020204030204" pitchFamily="49" charset="0"/>
+              </a:rPr>
+              <a:t>)</a:t>
+            </a:r>
+          </a:p>
+          <a:p>
+            <a:r>
+              <a:rPr lang="en-US" b="1" dirty="0">
+                <a:latin typeface="Consolas" panose="020B0609020204030204" pitchFamily="49" charset="0"/>
+              </a:rPr>
+              <a:t>  ret  # </a:t>
+            </a:r>
+            <a:r>
+              <a:rPr lang="en-US" b="1" dirty="0" err="1">
+                <a:latin typeface="Consolas" panose="020B0609020204030204" pitchFamily="49" charset="0"/>
+              </a:rPr>
+              <a:t>Ekvivalent</a:t>
+            </a:r>
+            <a:endParaRPr lang="en-US" b="1" dirty="0">
+              <a:latin typeface="Consolas" panose="020B0609020204030204" pitchFamily="49" charset="0"/>
+            </a:endParaRPr>
+          </a:p>
+          <a:p>
+            <a:r>
+              <a:rPr lang="en-US" dirty="0">
+                <a:latin typeface="Consolas" panose="020B0609020204030204" pitchFamily="49" charset="0"/>
+              </a:rPr>
+              <a:t>  </a:t>
+            </a:r>
+          </a:p>
+        </p:txBody>
+      </p:sp>
+    </p:spTree>
+    <p:extLst>
+      <p:ext uri="{BB962C8B-B14F-4D97-AF65-F5344CB8AC3E}">
+        <p14:creationId xmlns:p14="http://schemas.microsoft.com/office/powerpoint/2010/main" val="1458960748"/>
+      </p:ext>
+    </p:extLst>
+  </p:cSld>
+  <p:clrMapOvr>
+    <a:masterClrMapping/>
+  </p:clrMapOvr>
+  <p:timing>
+    <p:tnLst>
+      <p:par>
+        <p:cTn id="1" dur="indefinite" restart="never" nodeType="tmRoot">
+          <p:childTnLst>
+            <p:seq concurrent="1" nextAc="seek">
+              <p:cTn id="2" dur="indefinite" nodeType="mainSeq">
+                <p:childTnLst>
+                  <p:par>
+                    <p:cTn id="3" fill="hold">
+                      <p:stCondLst>
+                        <p:cond delay="indefinite"/>
+                      </p:stCondLst>
+                      <p:childTnLst>
+                        <p:par>
+                          <p:cTn id="4" fill="hold">
+                            <p:stCondLst>
+                              <p:cond delay="0"/>
+                            </p:stCondLst>
+                            <p:childTnLst>
+                              <p:par>
+                                <p:cTn id="5" presetID="10" presetClass="exit" presetSubtype="0" fill="hold" nodeType="clickEffect">
+                                  <p:stCondLst>
+                                    <p:cond delay="0"/>
+                                  </p:stCondLst>
+                                  <p:childTnLst>
+                                    <p:animEffect transition="out" filter="fade">
+                                      <p:cBhvr>
+                                        <p:cTn id="6" dur="500"/>
+                                        <p:tgtEl>
+                                          <p:spTgt spid="4">
+                                            <p:txEl>
+                                              <p:pRg st="7" end="7"/>
+                                            </p:txEl>
+                                          </p:spTgt>
+                                        </p:tgtEl>
+                                      </p:cBhvr>
+                                    </p:animEffect>
+                                    <p:set>
+                                      <p:cBhvr>
+                                        <p:cTn id="7" dur="1" fill="hold">
+                                          <p:stCondLst>
+                                            <p:cond delay="499"/>
+                                          </p:stCondLst>
+                                        </p:cTn>
+                                        <p:tgtEl>
+                                          <p:spTgt spid="4">
+                                            <p:txEl>
+                                              <p:pRg st="7" end="7"/>
+                                            </p:txEl>
+                                          </p:spTgt>
+                                        </p:tgtEl>
+                                        <p:attrNameLst>
+                                          <p:attrName>style.visibility</p:attrName>
+                                        </p:attrNameLst>
+                                      </p:cBhvr>
+                                      <p:to>
+                                        <p:strVal val="hidden"/>
+                                      </p:to>
+                                    </p:set>
+                                  </p:childTnLst>
+                                </p:cTn>
+                              </p:par>
+                              <p:par>
+                                <p:cTn id="8" presetID="10" presetClass="entr" presetSubtype="0" fill="hold" nodeType="withEffect">
+                                  <p:stCondLst>
+                                    <p:cond delay="0"/>
+                                  </p:stCondLst>
+                                  <p:childTnLst>
+                                    <p:set>
+                                      <p:cBhvr>
+                                        <p:cTn id="9" dur="1" fill="hold">
+                                          <p:stCondLst>
+                                            <p:cond delay="0"/>
+                                          </p:stCondLst>
+                                        </p:cTn>
+                                        <p:tgtEl>
+                                          <p:spTgt spid="4">
+                                            <p:txEl>
+                                              <p:pRg st="8" end="8"/>
+                                            </p:txEl>
+                                          </p:spTgt>
+                                        </p:tgtEl>
+                                        <p:attrNameLst>
+                                          <p:attrName>style.visibility</p:attrName>
+                                        </p:attrNameLst>
+                                      </p:cBhvr>
+                                      <p:to>
+                                        <p:strVal val="visible"/>
+                                      </p:to>
+                                    </p:set>
+                                    <p:animEffect transition="in" filter="fade">
+                                      <p:cBhvr>
+                                        <p:cTn id="10" dur="500"/>
+                                        <p:tgtEl>
+                                          <p:spTgt spid="4">
+                                            <p:txEl>
+                                              <p:pRg st="8" end="8"/>
+                                            </p:txEl>
+                                          </p:spTgt>
+                                        </p:tgtEl>
+                                      </p:cBhvr>
+                                    </p:animEffect>
+                                  </p:childTnLst>
+                                </p:cTn>
+                              </p:par>
+                            </p:childTnLst>
+                          </p:cTn>
+                        </p:par>
+                      </p:childTnLst>
+                    </p:cTn>
+                  </p:par>
+                  <p:par>
+                    <p:cTn id="11" fill="hold">
+                      <p:stCondLst>
+                        <p:cond delay="indefinite"/>
+                      </p:stCondLst>
+                      <p:childTnLst>
+                        <p:par>
+                          <p:cTn id="12" fill="hold">
+                            <p:stCondLst>
+                              <p:cond delay="0"/>
+                            </p:stCondLst>
+                            <p:childTnLst>
+                              <p:par>
+                                <p:cTn id="13" presetID="10" presetClass="exit" presetSubtype="0" fill="hold" nodeType="clickEffect">
+                                  <p:stCondLst>
+                                    <p:cond delay="0"/>
+                                  </p:stCondLst>
+                                  <p:childTnLst>
+                                    <p:animEffect transition="out" filter="fade">
+                                      <p:cBhvr>
+                                        <p:cTn id="14" dur="500"/>
+                                        <p:tgtEl>
+                                          <p:spTgt spid="5">
+                                            <p:txEl>
+                                              <p:pRg st="4" end="4"/>
+                                            </p:txEl>
+                                          </p:spTgt>
+                                        </p:tgtEl>
+                                      </p:cBhvr>
+                                    </p:animEffect>
+                                    <p:set>
+                                      <p:cBhvr>
+                                        <p:cTn id="15" dur="1" fill="hold">
+                                          <p:stCondLst>
+                                            <p:cond delay="499"/>
+                                          </p:stCondLst>
+                                        </p:cTn>
+                                        <p:tgtEl>
+                                          <p:spTgt spid="5">
+                                            <p:txEl>
+                                              <p:pRg st="4" end="4"/>
+                                            </p:txEl>
+                                          </p:spTgt>
+                                        </p:tgtEl>
+                                        <p:attrNameLst>
+                                          <p:attrName>style.visibility</p:attrName>
+                                        </p:attrNameLst>
+                                      </p:cBhvr>
+                                      <p:to>
+                                        <p:strVal val="hidden"/>
+                                      </p:to>
+                                    </p:set>
+                                  </p:childTnLst>
+                                </p:cTn>
+                              </p:par>
+                              <p:par>
+                                <p:cTn id="16" presetID="10" presetClass="entr" presetSubtype="0" fill="hold" nodeType="withEffect">
+                                  <p:stCondLst>
+                                    <p:cond delay="0"/>
+                                  </p:stCondLst>
+                                  <p:childTnLst>
+                                    <p:set>
+                                      <p:cBhvr>
+                                        <p:cTn id="17" dur="1" fill="hold">
+                                          <p:stCondLst>
+                                            <p:cond delay="0"/>
+                                          </p:stCondLst>
+                                        </p:cTn>
+                                        <p:tgtEl>
+                                          <p:spTgt spid="5">
+                                            <p:txEl>
+                                              <p:pRg st="5" end="5"/>
+                                            </p:txEl>
+                                          </p:spTgt>
+                                        </p:tgtEl>
+                                        <p:attrNameLst>
+                                          <p:attrName>style.visibility</p:attrName>
+                                        </p:attrNameLst>
+                                      </p:cBhvr>
+                                      <p:to>
+                                        <p:strVal val="visible"/>
+                                      </p:to>
+                                    </p:set>
+                                    <p:animEffect transition="in" filter="fade">
+                                      <p:cBhvr>
+                                        <p:cTn id="18" dur="500"/>
+                                        <p:tgtEl>
+                                          <p:spTgt spid="5">
+                                            <p:txEl>
+                                              <p:pRg st="5" end="5"/>
+                                            </p:txEl>
+                                          </p:spTgt>
+                                        </p:tgtEl>
+                                      </p:cBhvr>
+                                    </p:animEffect>
+                                  </p:childTnLst>
+                                </p:cTn>
+                              </p:par>
+                            </p:childTnLst>
+                          </p:cTn>
+                        </p:par>
+                      </p:childTnLst>
+                    </p:cTn>
+                  </p:par>
+                </p:childTnLst>
+              </p:cTn>
+              <p:prevCondLst>
+                <p:cond evt="onPrev" delay="0">
+                  <p:tgtEl>
+                    <p:sldTgt/>
+                  </p:tgtEl>
+                </p:cond>
+              </p:prevCondLst>
+              <p:nextCondLst>
+                <p:cond evt="onNext" delay="0">
+                  <p:tgtEl>
+                    <p:sldTgt/>
+                  </p:tgtEl>
+                </p:cond>
+              </p:nextCondLst>
+            </p:seq>
+          </p:childTnLst>
+        </p:cTn>
+      </p:par>
+    </p:tnLst>
+  </p:timing>
+</p:sld>
+</file>
+
+<file path=ppt/slides/slide7.xml><?xml version="1.0" encoding="utf-8"?>
+<p:sld xmlns:a="http://schemas.openxmlformats.org/drawingml/2006/main" xmlns:r="http://schemas.openxmlformats.org/officeDocument/2006/relationships" xmlns:p="http://schemas.openxmlformats.org/presentationml/2006/main">
+  <p:cSld>
+    <p:spTree>
+      <p:nvGrpSpPr>
+        <p:cNvPr id="1" name="">
+          <a:extLst>
+            <a:ext uri="{FF2B5EF4-FFF2-40B4-BE49-F238E27FC236}">
+              <a16:creationId xmlns:a16="http://schemas.microsoft.com/office/drawing/2014/main" id="{68733108-666A-FAAD-935E-93E6E3350848}"/>
+            </a:ext>
+          </a:extLst>
+        </p:cNvPr>
+        <p:cNvGrpSpPr/>
+        <p:nvPr/>
+      </p:nvGrpSpPr>
+      <p:grpSpPr>
+        <a:xfrm>
+          <a:off x="0" y="0"/>
+          <a:ext cx="0" cy="0"/>
+          <a:chOff x="0" y="0"/>
+          <a:chExt cx="0" cy="0"/>
+        </a:xfrm>
+      </p:grpSpPr>
+      <p:sp>
+        <p:nvSpPr>
+          <p:cNvPr id="2" name="Title 1">
+            <a:extLst>
+              <a:ext uri="{FF2B5EF4-FFF2-40B4-BE49-F238E27FC236}">
+                <a16:creationId xmlns:a16="http://schemas.microsoft.com/office/drawing/2014/main" id="{09F4944E-13BE-25A3-8420-9F215D6ED2D5}"/>
+              </a:ext>
+            </a:extLst>
+          </p:cNvPr>
+          <p:cNvSpPr>
+            <a:spLocks noGrp="1"/>
+          </p:cNvSpPr>
+          <p:nvPr>
+            <p:ph type="title"/>
+          </p:nvPr>
+        </p:nvSpPr>
+        <p:spPr/>
+        <p:txBody>
+          <a:bodyPr/>
+          <a:lstStyle/>
+          <a:p>
+            <a:r>
+              <a:rPr lang="sv-SE" dirty="0"/>
+              <a:t>Funktioner (parametrar)</a:t>
+            </a:r>
+            <a:endParaRPr lang="LID4096" dirty="0"/>
+          </a:p>
+        </p:txBody>
+      </p:sp>
+      <p:sp>
+        <p:nvSpPr>
+          <p:cNvPr id="4" name="TextBox 3">
+            <a:extLst>
+              <a:ext uri="{FF2B5EF4-FFF2-40B4-BE49-F238E27FC236}">
+                <a16:creationId xmlns:a16="http://schemas.microsoft.com/office/drawing/2014/main" id="{89FAD3DF-872C-A327-5924-F29ED1C42883}"/>
+              </a:ext>
+            </a:extLst>
+          </p:cNvPr>
+          <p:cNvSpPr txBox="1"/>
+          <p:nvPr/>
+        </p:nvSpPr>
+        <p:spPr>
+          <a:xfrm>
+            <a:off x="838199" y="1844022"/>
+            <a:ext cx="5043791" cy="4247317"/>
+          </a:xfrm>
+          <a:prstGeom prst="rect">
+            <a:avLst/>
+          </a:prstGeom>
+          <a:solidFill>
+            <a:schemeClr val="bg1"/>
+          </a:solidFill>
+          <a:ln>
+            <a:solidFill>
+              <a:schemeClr val="accent1">
+                <a:shade val="15000"/>
+              </a:schemeClr>
+            </a:solidFill>
+          </a:ln>
+          <a:effectLst>
+            <a:outerShdw blurRad="50800" dist="38100" dir="2700000" algn="tl" rotWithShape="0">
+              <a:prstClr val="black">
+                <a:alpha val="40000"/>
+              </a:prstClr>
+            </a:outerShdw>
+          </a:effectLst>
+        </p:spPr>
+        <p:txBody>
+          <a:bodyPr wrap="square" rtlCol="0">
+            <a:spAutoFit/>
+          </a:bodyPr>
+          <a:lstStyle/>
+          <a:p>
+            <a:r>
+              <a:rPr lang="en-US" dirty="0">
+                <a:latin typeface="Consolas" panose="020B0609020204030204" pitchFamily="49" charset="0"/>
+              </a:rPr>
+              <a:t>main:</a:t>
+            </a:r>
+          </a:p>
+          <a:p>
+            <a:r>
+              <a:rPr lang="en-US" dirty="0">
+                <a:latin typeface="Consolas" panose="020B0609020204030204" pitchFamily="49" charset="0"/>
+              </a:rPr>
+              <a:t>  la t0, x</a:t>
+            </a:r>
+          </a:p>
+          <a:p>
+            <a:r>
+              <a:rPr lang="en-US" dirty="0">
+                <a:latin typeface="Consolas" panose="020B0609020204030204" pitchFamily="49" charset="0"/>
+              </a:rPr>
+              <a:t>  </a:t>
+            </a:r>
+            <a:r>
+              <a:rPr lang="en-US" dirty="0" err="1">
+                <a:latin typeface="Consolas" panose="020B0609020204030204" pitchFamily="49" charset="0"/>
+              </a:rPr>
+              <a:t>lw</a:t>
+            </a:r>
+            <a:r>
+              <a:rPr lang="en-US" dirty="0">
+                <a:latin typeface="Consolas" panose="020B0609020204030204" pitchFamily="49" charset="0"/>
+              </a:rPr>
+              <a:t> t0, 0(t0)</a:t>
+            </a:r>
+          </a:p>
+          <a:p>
+            <a:r>
+              <a:rPr lang="en-US" dirty="0">
+                <a:latin typeface="Consolas" panose="020B0609020204030204" pitchFamily="49" charset="0"/>
+              </a:rPr>
+              <a:t>  la t1, y</a:t>
+            </a:r>
+          </a:p>
+          <a:p>
+            <a:r>
+              <a:rPr lang="en-US" dirty="0">
+                <a:latin typeface="Consolas" panose="020B0609020204030204" pitchFamily="49" charset="0"/>
+              </a:rPr>
+              <a:t>  </a:t>
+            </a:r>
+            <a:r>
+              <a:rPr lang="en-US" dirty="0" err="1">
+                <a:latin typeface="Consolas" panose="020B0609020204030204" pitchFamily="49" charset="0"/>
+              </a:rPr>
+              <a:t>lw</a:t>
+            </a:r>
+            <a:r>
+              <a:rPr lang="en-US" dirty="0">
+                <a:latin typeface="Consolas" panose="020B0609020204030204" pitchFamily="49" charset="0"/>
+              </a:rPr>
+              <a:t> t1, 0(t1)</a:t>
+            </a:r>
+          </a:p>
+          <a:p>
+            <a:endParaRPr lang="en-US" dirty="0">
+              <a:latin typeface="Consolas" panose="020B0609020204030204" pitchFamily="49" charset="0"/>
+            </a:endParaRPr>
+          </a:p>
+          <a:p>
+            <a:r>
+              <a:rPr lang="en-US" dirty="0">
+                <a:latin typeface="Consolas" panose="020B0609020204030204" pitchFamily="49" charset="0"/>
+              </a:rPr>
+              <a:t>  # need t0 = min(x, y)</a:t>
+            </a:r>
+          </a:p>
+          <a:p>
+            <a:r>
+              <a:rPr lang="en-US" b="1" dirty="0">
+                <a:latin typeface="Consolas" panose="020B0609020204030204" pitchFamily="49" charset="0"/>
+              </a:rPr>
+              <a:t>  mv a0, t0  # </a:t>
+            </a:r>
+            <a:r>
+              <a:rPr lang="en-US" b="1" dirty="0" err="1">
+                <a:latin typeface="Consolas" panose="020B0609020204030204" pitchFamily="49" charset="0"/>
+              </a:rPr>
+              <a:t>Första</a:t>
+            </a:r>
+            <a:r>
+              <a:rPr lang="en-US" b="1" dirty="0">
+                <a:latin typeface="Consolas" panose="020B0609020204030204" pitchFamily="49" charset="0"/>
+              </a:rPr>
+              <a:t> parameter </a:t>
+            </a:r>
+            <a:r>
+              <a:rPr lang="en-US" b="1" dirty="0" err="1">
+                <a:latin typeface="Consolas" panose="020B0609020204030204" pitchFamily="49" charset="0"/>
+              </a:rPr>
+              <a:t>i</a:t>
+            </a:r>
+            <a:r>
+              <a:rPr lang="en-US" b="1" dirty="0">
+                <a:latin typeface="Consolas" panose="020B0609020204030204" pitchFamily="49" charset="0"/>
+              </a:rPr>
+              <a:t> a0</a:t>
+            </a:r>
+          </a:p>
+          <a:p>
+            <a:r>
+              <a:rPr lang="en-US" b="1" dirty="0">
+                <a:latin typeface="Consolas" panose="020B0609020204030204" pitchFamily="49" charset="0"/>
+              </a:rPr>
+              <a:t>  mv a1, t1  # Andra parameter </a:t>
+            </a:r>
+            <a:r>
+              <a:rPr lang="en-US" b="1" dirty="0" err="1">
+                <a:latin typeface="Consolas" panose="020B0609020204030204" pitchFamily="49" charset="0"/>
+              </a:rPr>
+              <a:t>i</a:t>
+            </a:r>
+            <a:r>
+              <a:rPr lang="en-US" b="1" dirty="0">
+                <a:latin typeface="Consolas" panose="020B0609020204030204" pitchFamily="49" charset="0"/>
+              </a:rPr>
+              <a:t> a1</a:t>
+            </a:r>
+          </a:p>
+          <a:p>
+            <a:r>
+              <a:rPr lang="en-US" dirty="0">
+                <a:latin typeface="Consolas" panose="020B0609020204030204" pitchFamily="49" charset="0"/>
+              </a:rPr>
+              <a:t>  call min </a:t>
+            </a:r>
+          </a:p>
+          <a:p>
+            <a:r>
+              <a:rPr lang="en-US" dirty="0">
+                <a:latin typeface="Consolas" panose="020B0609020204030204" pitchFamily="49" charset="0"/>
+              </a:rPr>
+              <a:t>  </a:t>
+            </a:r>
+            <a:r>
+              <a:rPr lang="en-US" b="1" dirty="0">
+                <a:latin typeface="Consolas" panose="020B0609020204030204" pitchFamily="49" charset="0"/>
+              </a:rPr>
+              <a:t># Smallest of x and y is now in a0</a:t>
+            </a:r>
+          </a:p>
+          <a:p>
+            <a:r>
+              <a:rPr lang="en-US" dirty="0">
+                <a:latin typeface="Consolas" panose="020B0609020204030204" pitchFamily="49" charset="0"/>
+              </a:rPr>
+              <a:t>  ... </a:t>
+            </a:r>
+          </a:p>
+          <a:p>
+            <a:r>
+              <a:rPr lang="en-US" dirty="0">
+                <a:latin typeface="Consolas" panose="020B0609020204030204" pitchFamily="49" charset="0"/>
+              </a:rPr>
+              <a:t>x: .word 10</a:t>
+            </a:r>
+          </a:p>
+          <a:p>
+            <a:r>
+              <a:rPr lang="en-US" dirty="0">
+                <a:latin typeface="Consolas" panose="020B0609020204030204" pitchFamily="49" charset="0"/>
+              </a:rPr>
+              <a:t>y: .word 20</a:t>
+            </a:r>
+          </a:p>
+          <a:p>
+            <a:r>
+              <a:rPr lang="en-US" dirty="0">
+                <a:latin typeface="Consolas" panose="020B0609020204030204" pitchFamily="49" charset="0"/>
+              </a:rPr>
+              <a:t>  </a:t>
+            </a:r>
+            <a:endParaRPr lang="LID4096" dirty="0">
+              <a:latin typeface="Consolas" panose="020B0609020204030204" pitchFamily="49" charset="0"/>
+            </a:endParaRPr>
+          </a:p>
+        </p:txBody>
+      </p:sp>
+      <p:sp>
+        <p:nvSpPr>
+          <p:cNvPr id="5" name="TextBox 4">
+            <a:extLst>
+              <a:ext uri="{FF2B5EF4-FFF2-40B4-BE49-F238E27FC236}">
+                <a16:creationId xmlns:a16="http://schemas.microsoft.com/office/drawing/2014/main" id="{E4D6720B-6C11-B3FD-7513-52D6E044FFF9}"/>
+              </a:ext>
+            </a:extLst>
+          </p:cNvPr>
+          <p:cNvSpPr txBox="1"/>
+          <p:nvPr/>
+        </p:nvSpPr>
+        <p:spPr>
+          <a:xfrm>
+            <a:off x="7328170" y="2522557"/>
+            <a:ext cx="4450616" cy="2585323"/>
+          </a:xfrm>
+          <a:prstGeom prst="rect">
+            <a:avLst/>
+          </a:prstGeom>
+          <a:solidFill>
+            <a:schemeClr val="bg1"/>
+          </a:solidFill>
+          <a:ln>
+            <a:solidFill>
+              <a:schemeClr val="accent1">
+                <a:shade val="15000"/>
+              </a:schemeClr>
+            </a:solidFill>
+          </a:ln>
+          <a:effectLst>
+            <a:outerShdw blurRad="50800" dist="38100" dir="2700000" algn="tl" rotWithShape="0">
+              <a:prstClr val="black">
+                <a:alpha val="40000"/>
+              </a:prstClr>
+            </a:outerShdw>
+          </a:effectLst>
+        </p:spPr>
+        <p:txBody>
+          <a:bodyPr wrap="square" rtlCol="0">
+            <a:spAutoFit/>
+          </a:bodyPr>
+          <a:lstStyle/>
+          <a:p>
+            <a:r>
+              <a:rPr lang="en-US" dirty="0">
+                <a:latin typeface="Consolas" panose="020B0609020204030204" pitchFamily="49" charset="0"/>
+              </a:rPr>
+              <a:t>min:</a:t>
+            </a:r>
+          </a:p>
+          <a:p>
+            <a:r>
+              <a:rPr lang="en-US" dirty="0">
+                <a:latin typeface="Consolas" panose="020B0609020204030204" pitchFamily="49" charset="0"/>
+              </a:rPr>
+              <a:t>  </a:t>
+            </a:r>
+            <a:r>
+              <a:rPr lang="en-US" dirty="0" err="1">
+                <a:latin typeface="Consolas" panose="020B0609020204030204" pitchFamily="49" charset="0"/>
+              </a:rPr>
+              <a:t>blt</a:t>
+            </a:r>
+            <a:r>
+              <a:rPr lang="en-US" dirty="0">
+                <a:latin typeface="Consolas" panose="020B0609020204030204" pitchFamily="49" charset="0"/>
+              </a:rPr>
+              <a:t>   a0, a1, </a:t>
+            </a:r>
+            <a:r>
+              <a:rPr lang="en-US" dirty="0" err="1">
+                <a:latin typeface="Consolas" panose="020B0609020204030204" pitchFamily="49" charset="0"/>
+              </a:rPr>
+              <a:t>first_is_smallest</a:t>
+            </a:r>
+            <a:r>
+              <a:rPr lang="en-US" dirty="0">
+                <a:latin typeface="Consolas" panose="020B0609020204030204" pitchFamily="49" charset="0"/>
+              </a:rPr>
+              <a:t> </a:t>
+            </a:r>
+            <a:br>
+              <a:rPr lang="en-US" dirty="0">
+                <a:latin typeface="Consolas" panose="020B0609020204030204" pitchFamily="49" charset="0"/>
+              </a:rPr>
+            </a:br>
+            <a:r>
+              <a:rPr lang="en-US" dirty="0">
+                <a:latin typeface="Consolas" panose="020B0609020204030204" pitchFamily="49" charset="0"/>
+              </a:rPr>
+              <a:t>  j     </a:t>
+            </a:r>
+            <a:r>
+              <a:rPr lang="en-US" dirty="0" err="1">
+                <a:latin typeface="Consolas" panose="020B0609020204030204" pitchFamily="49" charset="0"/>
+              </a:rPr>
+              <a:t>second_is_smallest</a:t>
+            </a:r>
+            <a:endParaRPr lang="en-US" dirty="0">
+              <a:latin typeface="Consolas" panose="020B0609020204030204" pitchFamily="49" charset="0"/>
+            </a:endParaRPr>
+          </a:p>
+          <a:p>
+            <a:r>
+              <a:rPr lang="en-US" dirty="0" err="1">
+                <a:latin typeface="Consolas" panose="020B0609020204030204" pitchFamily="49" charset="0"/>
+              </a:rPr>
+              <a:t>first_is_smallest</a:t>
+            </a:r>
+            <a:r>
+              <a:rPr lang="en-US" dirty="0">
+                <a:latin typeface="Consolas" panose="020B0609020204030204" pitchFamily="49" charset="0"/>
+              </a:rPr>
+              <a:t>:</a:t>
+            </a:r>
+          </a:p>
+          <a:p>
+            <a:r>
+              <a:rPr lang="en-US" b="1" dirty="0">
+                <a:latin typeface="Consolas" panose="020B0609020204030204" pitchFamily="49" charset="0"/>
+              </a:rPr>
+              <a:t>  </a:t>
+            </a:r>
+            <a:r>
+              <a:rPr lang="sv-SE" b="1" dirty="0">
+                <a:latin typeface="Consolas" panose="020B0609020204030204" pitchFamily="49" charset="0"/>
+              </a:rPr>
+              <a:t>mv a0, a0   # Lite fånigt</a:t>
+            </a:r>
+            <a:endParaRPr lang="en-US" b="1" dirty="0">
+              <a:latin typeface="Consolas" panose="020B0609020204030204" pitchFamily="49" charset="0"/>
+            </a:endParaRPr>
+          </a:p>
+          <a:p>
+            <a:r>
+              <a:rPr lang="en-US" dirty="0">
+                <a:latin typeface="Consolas" panose="020B0609020204030204" pitchFamily="49" charset="0"/>
+              </a:rPr>
+              <a:t>  ret</a:t>
+            </a:r>
+          </a:p>
+          <a:p>
+            <a:r>
+              <a:rPr lang="en-US" dirty="0" err="1">
+                <a:latin typeface="Consolas" panose="020B0609020204030204" pitchFamily="49" charset="0"/>
+              </a:rPr>
+              <a:t>second_is_smallest</a:t>
+            </a:r>
+            <a:r>
+              <a:rPr lang="en-US" dirty="0">
+                <a:latin typeface="Consolas" panose="020B0609020204030204" pitchFamily="49" charset="0"/>
+              </a:rPr>
+              <a:t>:</a:t>
+            </a:r>
+          </a:p>
+          <a:p>
+            <a:r>
+              <a:rPr lang="en-US" b="1" dirty="0">
+                <a:latin typeface="Consolas" panose="020B0609020204030204" pitchFamily="49" charset="0"/>
+              </a:rPr>
+              <a:t>  mv a0, a1</a:t>
+            </a:r>
+          </a:p>
+          <a:p>
+            <a:r>
+              <a:rPr lang="en-US" dirty="0">
+                <a:latin typeface="Consolas" panose="020B0609020204030204" pitchFamily="49" charset="0"/>
+              </a:rPr>
+              <a:t>  ret</a:t>
+            </a:r>
+            <a:endParaRPr lang="LID4096" dirty="0">
+              <a:latin typeface="Consolas" panose="020B0609020204030204" pitchFamily="49" charset="0"/>
+            </a:endParaRPr>
+          </a:p>
+        </p:txBody>
+      </p:sp>
+    </p:spTree>
+    <p:extLst>
+      <p:ext uri="{BB962C8B-B14F-4D97-AF65-F5344CB8AC3E}">
+        <p14:creationId xmlns:p14="http://schemas.microsoft.com/office/powerpoint/2010/main" val="902741494"/>
+      </p:ext>
+    </p:extLst>
+  </p:cSld>
+  <p:clrMapOvr>
+    <a:masterClrMapping/>
+  </p:clrMapOvr>
+  <p:timing>
+    <p:tnLst>
+      <p:par>
+        <p:cTn id="1" dur="indefinite" restart="never" nodeType="tmRoot">
+          <p:childTnLst>
+            <p:seq concurrent="1" nextAc="seek">
+              <p:cTn id="2" dur="indefinite" nodeType="mainSeq">
+                <p:childTnLst>
+                  <p:par>
+                    <p:cTn id="3" fill="hold">
+                      <p:stCondLst>
+                        <p:cond delay="indefinite"/>
+                      </p:stCondLst>
+                      <p:childTnLst>
+                        <p:par>
+                          <p:cTn id="4" fill="hold">
+                            <p:stCondLst>
+                              <p:cond delay="0"/>
+                            </p:stCondLst>
+                            <p:childTnLst>
+                              <p:par>
+                                <p:cTn id="5" presetID="10" presetClass="entr" presetSubtype="0" fill="hold" nodeType="clickEffect">
+                                  <p:stCondLst>
+                                    <p:cond delay="0"/>
+                                  </p:stCondLst>
+                                  <p:childTnLst>
+                                    <p:set>
+                                      <p:cBhvr>
+                                        <p:cTn id="6" dur="1" fill="hold">
+                                          <p:stCondLst>
+                                            <p:cond delay="0"/>
+                                          </p:stCondLst>
+                                        </p:cTn>
+                                        <p:tgtEl>
+                                          <p:spTgt spid="4">
+                                            <p:txEl>
+                                              <p:pRg st="7" end="7"/>
+                                            </p:txEl>
+                                          </p:spTgt>
+                                        </p:tgtEl>
+                                        <p:attrNameLst>
+                                          <p:attrName>style.visibility</p:attrName>
+                                        </p:attrNameLst>
+                                      </p:cBhvr>
+                                      <p:to>
+                                        <p:strVal val="visible"/>
+                                      </p:to>
+                                    </p:set>
+                                    <p:animEffect transition="in" filter="fade">
+                                      <p:cBhvr>
+                                        <p:cTn id="7" dur="500"/>
+                                        <p:tgtEl>
+                                          <p:spTgt spid="4">
+                                            <p:txEl>
+                                              <p:pRg st="7" end="7"/>
+                                            </p:txEl>
+                                          </p:spTgt>
+                                        </p:tgtEl>
+                                      </p:cBhvr>
+                                    </p:animEffect>
+                                  </p:childTnLst>
+                                </p:cTn>
+                              </p:par>
+                              <p:par>
+                                <p:cTn id="8" presetID="10" presetClass="entr" presetSubtype="0" fill="hold" nodeType="withEffect">
+                                  <p:stCondLst>
+                                    <p:cond delay="0"/>
+                                  </p:stCondLst>
+                                  <p:childTnLst>
+                                    <p:set>
+                                      <p:cBhvr>
+                                        <p:cTn id="9" dur="1" fill="hold">
+                                          <p:stCondLst>
+                                            <p:cond delay="0"/>
+                                          </p:stCondLst>
+                                        </p:cTn>
+                                        <p:tgtEl>
+                                          <p:spTgt spid="4">
+                                            <p:txEl>
+                                              <p:pRg st="8" end="8"/>
+                                            </p:txEl>
+                                          </p:spTgt>
+                                        </p:tgtEl>
+                                        <p:attrNameLst>
+                                          <p:attrName>style.visibility</p:attrName>
+                                        </p:attrNameLst>
+                                      </p:cBhvr>
+                                      <p:to>
+                                        <p:strVal val="visible"/>
+                                      </p:to>
+                                    </p:set>
+                                    <p:animEffect transition="in" filter="fade">
+                                      <p:cBhvr>
+                                        <p:cTn id="10" dur="500"/>
+                                        <p:tgtEl>
+                                          <p:spTgt spid="4">
+                                            <p:txEl>
+                                              <p:pRg st="8" end="8"/>
+                                            </p:txEl>
+                                          </p:spTgt>
+                                        </p:tgtEl>
+                                      </p:cBhvr>
+                                    </p:animEffect>
+                                  </p:childTnLst>
+                                </p:cTn>
+                              </p:par>
+                            </p:childTnLst>
+                          </p:cTn>
+                        </p:par>
+                      </p:childTnLst>
+                    </p:cTn>
+                  </p:par>
+                  <p:par>
+                    <p:cTn id="11" fill="hold">
+                      <p:stCondLst>
+                        <p:cond delay="indefinite"/>
+                      </p:stCondLst>
+                      <p:childTnLst>
+                        <p:par>
+                          <p:cTn id="12" fill="hold">
+                            <p:stCondLst>
+                              <p:cond delay="0"/>
+                            </p:stCondLst>
+                            <p:childTnLst>
+                              <p:par>
+                                <p:cTn id="13" presetID="10" presetClass="entr" presetSubtype="0" fill="hold" grpId="0" nodeType="clickEffect">
+                                  <p:stCondLst>
+                                    <p:cond delay="0"/>
+                                  </p:stCondLst>
+                                  <p:childTnLst>
+                                    <p:set>
+                                      <p:cBhvr>
+                                        <p:cTn id="14" dur="1" fill="hold">
+                                          <p:stCondLst>
+                                            <p:cond delay="0"/>
+                                          </p:stCondLst>
+                                        </p:cTn>
+                                        <p:tgtEl>
+                                          <p:spTgt spid="5"/>
+                                        </p:tgtEl>
+                                        <p:attrNameLst>
+                                          <p:attrName>style.visibility</p:attrName>
+                                        </p:attrNameLst>
+                                      </p:cBhvr>
+                                      <p:to>
+                                        <p:strVal val="visible"/>
+                                      </p:to>
+                                    </p:set>
+                                    <p:animEffect transition="in" filter="fade">
+                                      <p:cBhvr>
+                                        <p:cTn id="15" dur="500"/>
+                                        <p:tgtEl>
+                                          <p:spTgt spid="5"/>
+                                        </p:tgtEl>
+                                      </p:cBhvr>
+                                    </p:animEffect>
+                                  </p:childTnLst>
+                                </p:cTn>
+                              </p:par>
+                            </p:childTnLst>
+                          </p:cTn>
+                        </p:par>
+                      </p:childTnLst>
+                    </p:cTn>
+                  </p:par>
+                  <p:par>
+                    <p:cTn id="16" fill="hold">
+                      <p:stCondLst>
+                        <p:cond delay="indefinite"/>
+                      </p:stCondLst>
+                      <p:childTnLst>
+                        <p:par>
+                          <p:cTn id="17" fill="hold">
+                            <p:stCondLst>
+                              <p:cond delay="0"/>
+                            </p:stCondLst>
+                            <p:childTnLst>
+                              <p:par>
+                                <p:cTn id="18" presetID="10" presetClass="entr" presetSubtype="0" fill="hold" nodeType="clickEffect">
+                                  <p:stCondLst>
+                                    <p:cond delay="0"/>
+                                  </p:stCondLst>
+                                  <p:childTnLst>
+                                    <p:set>
+                                      <p:cBhvr>
+                                        <p:cTn id="19" dur="1" fill="hold">
+                                          <p:stCondLst>
+                                            <p:cond delay="0"/>
+                                          </p:stCondLst>
+                                        </p:cTn>
+                                        <p:tgtEl>
+                                          <p:spTgt spid="5">
+                                            <p:txEl>
+                                              <p:pRg st="3" end="3"/>
+                                            </p:txEl>
+                                          </p:spTgt>
+                                        </p:tgtEl>
+                                        <p:attrNameLst>
+                                          <p:attrName>style.visibility</p:attrName>
+                                        </p:attrNameLst>
+                                      </p:cBhvr>
+                                      <p:to>
+                                        <p:strVal val="visible"/>
+                                      </p:to>
+                                    </p:set>
+                                    <p:animEffect transition="in" filter="fade">
+                                      <p:cBhvr>
+                                        <p:cTn id="20" dur="500"/>
+                                        <p:tgtEl>
+                                          <p:spTgt spid="5">
+                                            <p:txEl>
+                                              <p:pRg st="3" end="3"/>
+                                            </p:txEl>
+                                          </p:spTgt>
+                                        </p:tgtEl>
+                                      </p:cBhvr>
+                                    </p:animEffect>
+                                  </p:childTnLst>
+                                </p:cTn>
+                              </p:par>
+                              <p:par>
+                                <p:cTn id="21" presetID="10" presetClass="entr" presetSubtype="0" fill="hold" nodeType="withEffect">
+                                  <p:stCondLst>
+                                    <p:cond delay="0"/>
+                                  </p:stCondLst>
+                                  <p:childTnLst>
+                                    <p:set>
+                                      <p:cBhvr>
+                                        <p:cTn id="22" dur="1" fill="hold">
+                                          <p:stCondLst>
+                                            <p:cond delay="0"/>
+                                          </p:stCondLst>
+                                        </p:cTn>
+                                        <p:tgtEl>
+                                          <p:spTgt spid="5">
+                                            <p:txEl>
+                                              <p:pRg st="6" end="6"/>
+                                            </p:txEl>
+                                          </p:spTgt>
+                                        </p:tgtEl>
+                                        <p:attrNameLst>
+                                          <p:attrName>style.visibility</p:attrName>
+                                        </p:attrNameLst>
+                                      </p:cBhvr>
+                                      <p:to>
+                                        <p:strVal val="visible"/>
+                                      </p:to>
+                                    </p:set>
+                                    <p:animEffect transition="in" filter="fade">
+                                      <p:cBhvr>
+                                        <p:cTn id="23" dur="500"/>
+                                        <p:tgtEl>
+                                          <p:spTgt spid="5">
+                                            <p:txEl>
+                                              <p:pRg st="6" end="6"/>
+                                            </p:txEl>
+                                          </p:spTgt>
+                                        </p:tgtEl>
+                                      </p:cBhvr>
+                                    </p:animEffect>
+                                  </p:childTnLst>
+                                </p:cTn>
+                              </p:par>
+                            </p:childTnLst>
+                          </p:cTn>
+                        </p:par>
+                      </p:childTnLst>
+                    </p:cTn>
+                  </p:par>
+                  <p:par>
+                    <p:cTn id="24" fill="hold">
+                      <p:stCondLst>
+                        <p:cond delay="indefinite"/>
+                      </p:stCondLst>
+                      <p:childTnLst>
+                        <p:par>
+                          <p:cTn id="25" fill="hold">
+                            <p:stCondLst>
+                              <p:cond delay="0"/>
+                            </p:stCondLst>
+                            <p:childTnLst>
+                              <p:par>
+                                <p:cTn id="26" presetID="10" presetClass="entr" presetSubtype="0" fill="hold" nodeType="clickEffect">
+                                  <p:stCondLst>
+                                    <p:cond delay="0"/>
+                                  </p:stCondLst>
+                                  <p:childTnLst>
+                                    <p:set>
+                                      <p:cBhvr>
+                                        <p:cTn id="27" dur="1" fill="hold">
+                                          <p:stCondLst>
+                                            <p:cond delay="0"/>
+                                          </p:stCondLst>
+                                        </p:cTn>
+                                        <p:tgtEl>
+                                          <p:spTgt spid="4">
+                                            <p:txEl>
+                                              <p:pRg st="10" end="10"/>
+                                            </p:txEl>
+                                          </p:spTgt>
+                                        </p:tgtEl>
+                                        <p:attrNameLst>
+                                          <p:attrName>style.visibility</p:attrName>
+                                        </p:attrNameLst>
+                                      </p:cBhvr>
+                                      <p:to>
+                                        <p:strVal val="visible"/>
+                                      </p:to>
+                                    </p:set>
+                                    <p:animEffect transition="in" filter="fade">
+                                      <p:cBhvr>
+                                        <p:cTn id="28" dur="500"/>
+                                        <p:tgtEl>
+                                          <p:spTgt spid="4">
+                                            <p:txEl>
+                                              <p:pRg st="10" end="10"/>
+                                            </p:txEl>
+                                          </p:spTgt>
+                                        </p:tgtEl>
+                                      </p:cBhvr>
+                                    </p:animEffect>
+                                  </p:childTnLst>
+                                </p:cTn>
+                              </p:par>
+                            </p:childTnLst>
+                          </p:cTn>
+                        </p:par>
+                      </p:childTnLst>
+                    </p:cTn>
+                  </p:par>
+                </p:childTnLst>
+              </p:cTn>
+              <p:prevCondLst>
+                <p:cond evt="onPrev" delay="0">
+                  <p:tgtEl>
+                    <p:sldTgt/>
+                  </p:tgtEl>
+                </p:cond>
+              </p:prevCondLst>
+              <p:nextCondLst>
+                <p:cond evt="onNext" delay="0">
+                  <p:tgtEl>
+                    <p:sldTgt/>
+                  </p:tgtEl>
+                </p:cond>
+              </p:nextCondLst>
+            </p:seq>
+          </p:childTnLst>
+        </p:cTn>
+      </p:par>
+    </p:tnLst>
+    <p:bldLst>
+      <p:bldP spid="5" grpId="0" animBg="1"/>
+    </p:bldLst>
+  </p:timing>
+</p:sld>
+</file>
+
+<file path=ppt/slides/slide8.xml><?xml version="1.0" encoding="utf-8"?>
+<p:sld xmlns:a="http://schemas.openxmlformats.org/drawingml/2006/main" xmlns:r="http://schemas.openxmlformats.org/officeDocument/2006/relationships" xmlns:p="http://schemas.openxmlformats.org/presentationml/2006/main">
+  <p:cSld>
+    <p:spTree>
+      <p:nvGrpSpPr>
+        <p:cNvPr id="1" name="">
+          <a:extLst>
+            <a:ext uri="{FF2B5EF4-FFF2-40B4-BE49-F238E27FC236}">
+              <a16:creationId xmlns:a16="http://schemas.microsoft.com/office/drawing/2014/main" id="{7DF381AA-6C7F-3FA9-9FE6-60A711145267}"/>
+            </a:ext>
+          </a:extLst>
+        </p:cNvPr>
+        <p:cNvGrpSpPr/>
+        <p:nvPr/>
+      </p:nvGrpSpPr>
+      <p:grpSpPr>
+        <a:xfrm>
+          <a:off x="0" y="0"/>
+          <a:ext cx="0" cy="0"/>
+          <a:chOff x="0" y="0"/>
+          <a:chExt cx="0" cy="0"/>
+        </a:xfrm>
+      </p:grpSpPr>
+      <p:sp>
+        <p:nvSpPr>
+          <p:cNvPr id="2" name="Title 1">
+            <a:extLst>
+              <a:ext uri="{FF2B5EF4-FFF2-40B4-BE49-F238E27FC236}">
+                <a16:creationId xmlns:a16="http://schemas.microsoft.com/office/drawing/2014/main" id="{4F6024E8-49A7-D5C6-C16B-CACBDF8D7233}"/>
+              </a:ext>
+            </a:extLst>
+          </p:cNvPr>
+          <p:cNvSpPr>
+            <a:spLocks noGrp="1"/>
+          </p:cNvSpPr>
+          <p:nvPr>
+            <p:ph type="title"/>
+          </p:nvPr>
+        </p:nvSpPr>
+        <p:spPr/>
+        <p:txBody>
+          <a:bodyPr/>
+          <a:lstStyle/>
+          <a:p>
+            <a:r>
+              <a:rPr lang="sv-SE" dirty="0"/>
+              <a:t>Funktioner (parametrar)</a:t>
+            </a:r>
+            <a:endParaRPr lang="LID4096" dirty="0"/>
+          </a:p>
+        </p:txBody>
+      </p:sp>
+      <p:sp>
+        <p:nvSpPr>
+          <p:cNvPr id="4" name="TextBox 3">
+            <a:extLst>
+              <a:ext uri="{FF2B5EF4-FFF2-40B4-BE49-F238E27FC236}">
+                <a16:creationId xmlns:a16="http://schemas.microsoft.com/office/drawing/2014/main" id="{60CED252-8794-00A1-86C6-9E1016FD7916}"/>
+              </a:ext>
+            </a:extLst>
+          </p:cNvPr>
+          <p:cNvSpPr txBox="1"/>
+          <p:nvPr/>
+        </p:nvSpPr>
+        <p:spPr>
+          <a:xfrm>
+            <a:off x="838199" y="1844022"/>
+            <a:ext cx="5043791" cy="4247317"/>
+          </a:xfrm>
+          <a:prstGeom prst="rect">
+            <a:avLst/>
+          </a:prstGeom>
+          <a:solidFill>
+            <a:schemeClr val="bg1"/>
+          </a:solidFill>
+          <a:ln>
+            <a:solidFill>
+              <a:schemeClr val="accent1">
+                <a:shade val="15000"/>
+              </a:schemeClr>
+            </a:solidFill>
+          </a:ln>
+          <a:effectLst>
+            <a:outerShdw blurRad="50800" dist="38100" dir="2700000" algn="tl" rotWithShape="0">
+              <a:prstClr val="black">
+                <a:alpha val="40000"/>
+              </a:prstClr>
+            </a:outerShdw>
+          </a:effectLst>
+        </p:spPr>
+        <p:txBody>
+          <a:bodyPr wrap="square" rtlCol="0">
+            <a:spAutoFit/>
+          </a:bodyPr>
+          <a:lstStyle/>
+          <a:p>
+            <a:r>
+              <a:rPr lang="en-US" dirty="0">
+                <a:latin typeface="Consolas" panose="020B0609020204030204" pitchFamily="49" charset="0"/>
+              </a:rPr>
+              <a:t>main:</a:t>
+            </a:r>
+          </a:p>
+          <a:p>
+            <a:r>
+              <a:rPr lang="en-US" dirty="0">
+                <a:latin typeface="Consolas" panose="020B0609020204030204" pitchFamily="49" charset="0"/>
+              </a:rPr>
+              <a:t>  la t0, x</a:t>
+            </a:r>
+          </a:p>
+          <a:p>
+            <a:r>
+              <a:rPr lang="en-US" dirty="0">
+                <a:latin typeface="Consolas" panose="020B0609020204030204" pitchFamily="49" charset="0"/>
+              </a:rPr>
+              <a:t>  </a:t>
+            </a:r>
+            <a:r>
+              <a:rPr lang="en-US" dirty="0" err="1">
+                <a:latin typeface="Consolas" panose="020B0609020204030204" pitchFamily="49" charset="0"/>
+              </a:rPr>
+              <a:t>lw</a:t>
+            </a:r>
+            <a:r>
+              <a:rPr lang="en-US" dirty="0">
+                <a:latin typeface="Consolas" panose="020B0609020204030204" pitchFamily="49" charset="0"/>
+              </a:rPr>
+              <a:t> t0, 0(t0)</a:t>
+            </a:r>
+          </a:p>
+          <a:p>
+            <a:r>
+              <a:rPr lang="en-US" dirty="0">
+                <a:latin typeface="Consolas" panose="020B0609020204030204" pitchFamily="49" charset="0"/>
+              </a:rPr>
+              <a:t>  la t1, y</a:t>
+            </a:r>
+          </a:p>
+          <a:p>
+            <a:r>
+              <a:rPr lang="en-US" dirty="0">
+                <a:latin typeface="Consolas" panose="020B0609020204030204" pitchFamily="49" charset="0"/>
+              </a:rPr>
+              <a:t>  </a:t>
+            </a:r>
+            <a:r>
+              <a:rPr lang="en-US" dirty="0" err="1">
+                <a:latin typeface="Consolas" panose="020B0609020204030204" pitchFamily="49" charset="0"/>
+              </a:rPr>
+              <a:t>lw</a:t>
+            </a:r>
+            <a:r>
+              <a:rPr lang="en-US" dirty="0">
+                <a:latin typeface="Consolas" panose="020B0609020204030204" pitchFamily="49" charset="0"/>
+              </a:rPr>
+              <a:t> t1, 0(t1)</a:t>
+            </a:r>
+          </a:p>
+          <a:p>
+            <a:endParaRPr lang="en-US" dirty="0">
+              <a:latin typeface="Consolas" panose="020B0609020204030204" pitchFamily="49" charset="0"/>
+            </a:endParaRPr>
+          </a:p>
+          <a:p>
+            <a:r>
+              <a:rPr lang="en-US" dirty="0">
+                <a:latin typeface="Consolas" panose="020B0609020204030204" pitchFamily="49" charset="0"/>
+              </a:rPr>
+              <a:t>  # need t0 = min(x, y)</a:t>
+            </a:r>
+          </a:p>
+          <a:p>
+            <a:r>
+              <a:rPr lang="en-US" b="1" dirty="0">
+                <a:latin typeface="Consolas" panose="020B0609020204030204" pitchFamily="49" charset="0"/>
+              </a:rPr>
+              <a:t>  mv a0, t0  # </a:t>
+            </a:r>
+            <a:r>
+              <a:rPr lang="en-US" b="1" dirty="0" err="1">
+                <a:latin typeface="Consolas" panose="020B0609020204030204" pitchFamily="49" charset="0"/>
+              </a:rPr>
+              <a:t>Första</a:t>
+            </a:r>
+            <a:r>
+              <a:rPr lang="en-US" b="1" dirty="0">
+                <a:latin typeface="Consolas" panose="020B0609020204030204" pitchFamily="49" charset="0"/>
+              </a:rPr>
+              <a:t> parameter </a:t>
+            </a:r>
+            <a:r>
+              <a:rPr lang="en-US" b="1" dirty="0" err="1">
+                <a:latin typeface="Consolas" panose="020B0609020204030204" pitchFamily="49" charset="0"/>
+              </a:rPr>
+              <a:t>i</a:t>
+            </a:r>
+            <a:r>
+              <a:rPr lang="en-US" b="1" dirty="0">
+                <a:latin typeface="Consolas" panose="020B0609020204030204" pitchFamily="49" charset="0"/>
+              </a:rPr>
+              <a:t> a0</a:t>
+            </a:r>
+          </a:p>
+          <a:p>
+            <a:r>
+              <a:rPr lang="en-US" b="1" dirty="0">
+                <a:latin typeface="Consolas" panose="020B0609020204030204" pitchFamily="49" charset="0"/>
+              </a:rPr>
+              <a:t>  mv a1, t1  # Andra parameter </a:t>
+            </a:r>
+            <a:r>
+              <a:rPr lang="en-US" b="1" dirty="0" err="1">
+                <a:latin typeface="Consolas" panose="020B0609020204030204" pitchFamily="49" charset="0"/>
+              </a:rPr>
+              <a:t>i</a:t>
+            </a:r>
+            <a:r>
+              <a:rPr lang="en-US" b="1" dirty="0">
+                <a:latin typeface="Consolas" panose="020B0609020204030204" pitchFamily="49" charset="0"/>
+              </a:rPr>
+              <a:t> a1</a:t>
+            </a:r>
+          </a:p>
+          <a:p>
+            <a:r>
+              <a:rPr lang="en-US" dirty="0">
+                <a:latin typeface="Consolas" panose="020B0609020204030204" pitchFamily="49" charset="0"/>
+              </a:rPr>
+              <a:t>  call min </a:t>
+            </a:r>
+          </a:p>
+          <a:p>
+            <a:r>
+              <a:rPr lang="en-US" dirty="0">
+                <a:latin typeface="Consolas" panose="020B0609020204030204" pitchFamily="49" charset="0"/>
+              </a:rPr>
+              <a:t>  </a:t>
+            </a:r>
+            <a:r>
+              <a:rPr lang="en-US" b="1" dirty="0">
+                <a:latin typeface="Consolas" panose="020B0609020204030204" pitchFamily="49" charset="0"/>
+              </a:rPr>
+              <a:t># Smallest of x and y is now in a0</a:t>
+            </a:r>
+          </a:p>
+          <a:p>
+            <a:r>
+              <a:rPr lang="en-US" dirty="0">
+                <a:latin typeface="Consolas" panose="020B0609020204030204" pitchFamily="49" charset="0"/>
+              </a:rPr>
+              <a:t>  ... </a:t>
+            </a:r>
+          </a:p>
+          <a:p>
+            <a:r>
+              <a:rPr lang="en-US" dirty="0">
+                <a:latin typeface="Consolas" panose="020B0609020204030204" pitchFamily="49" charset="0"/>
+              </a:rPr>
+              <a:t>x: .word 10</a:t>
+            </a:r>
+          </a:p>
+          <a:p>
+            <a:r>
+              <a:rPr lang="en-US" dirty="0">
+                <a:latin typeface="Consolas" panose="020B0609020204030204" pitchFamily="49" charset="0"/>
+              </a:rPr>
+              <a:t>y: .word 20</a:t>
+            </a:r>
+          </a:p>
+          <a:p>
+            <a:r>
+              <a:rPr lang="en-US" dirty="0">
+                <a:latin typeface="Consolas" panose="020B0609020204030204" pitchFamily="49" charset="0"/>
+              </a:rPr>
+              <a:t>  </a:t>
+            </a:r>
+            <a:endParaRPr lang="LID4096" dirty="0">
+              <a:latin typeface="Consolas" panose="020B0609020204030204" pitchFamily="49" charset="0"/>
+            </a:endParaRPr>
+          </a:p>
+        </p:txBody>
+      </p:sp>
+      <p:sp>
+        <p:nvSpPr>
+          <p:cNvPr id="5" name="TextBox 4">
+            <a:extLst>
+              <a:ext uri="{FF2B5EF4-FFF2-40B4-BE49-F238E27FC236}">
+                <a16:creationId xmlns:a16="http://schemas.microsoft.com/office/drawing/2014/main" id="{7F0CD4CE-5FF1-C24D-DE74-B5D19DD1C869}"/>
+              </a:ext>
+            </a:extLst>
+          </p:cNvPr>
+          <p:cNvSpPr txBox="1"/>
+          <p:nvPr/>
+        </p:nvSpPr>
+        <p:spPr>
+          <a:xfrm>
+            <a:off x="7204953" y="843677"/>
+            <a:ext cx="4450616" cy="2585323"/>
+          </a:xfrm>
+          <a:prstGeom prst="rect">
+            <a:avLst/>
+          </a:prstGeom>
+          <a:solidFill>
+            <a:schemeClr val="bg1"/>
+          </a:solidFill>
+          <a:ln>
+            <a:solidFill>
+              <a:schemeClr val="accent1">
+                <a:shade val="15000"/>
+              </a:schemeClr>
+            </a:solidFill>
+          </a:ln>
+          <a:effectLst>
+            <a:outerShdw blurRad="50800" dist="38100" dir="2700000" algn="tl" rotWithShape="0">
+              <a:prstClr val="black">
+                <a:alpha val="40000"/>
+              </a:prstClr>
+            </a:outerShdw>
+          </a:effectLst>
+        </p:spPr>
+        <p:txBody>
+          <a:bodyPr wrap="square" rtlCol="0">
+            <a:spAutoFit/>
+          </a:bodyPr>
+          <a:lstStyle/>
+          <a:p>
+            <a:r>
+              <a:rPr lang="en-US" dirty="0">
+                <a:latin typeface="Consolas" panose="020B0609020204030204" pitchFamily="49" charset="0"/>
+              </a:rPr>
+              <a:t>min:</a:t>
+            </a:r>
+          </a:p>
+          <a:p>
+            <a:r>
+              <a:rPr lang="en-US" dirty="0">
+                <a:latin typeface="Consolas" panose="020B0609020204030204" pitchFamily="49" charset="0"/>
+              </a:rPr>
+              <a:t>  </a:t>
+            </a:r>
+            <a:r>
+              <a:rPr lang="en-US" dirty="0" err="1">
+                <a:latin typeface="Consolas" panose="020B0609020204030204" pitchFamily="49" charset="0"/>
+              </a:rPr>
+              <a:t>blt</a:t>
+            </a:r>
+            <a:r>
+              <a:rPr lang="en-US" dirty="0">
+                <a:latin typeface="Consolas" panose="020B0609020204030204" pitchFamily="49" charset="0"/>
+              </a:rPr>
+              <a:t>   a0, a1, </a:t>
+            </a:r>
+            <a:r>
+              <a:rPr lang="en-US" dirty="0" err="1">
+                <a:latin typeface="Consolas" panose="020B0609020204030204" pitchFamily="49" charset="0"/>
+              </a:rPr>
+              <a:t>first_is_smallest</a:t>
+            </a:r>
+            <a:r>
+              <a:rPr lang="en-US" dirty="0">
+                <a:latin typeface="Consolas" panose="020B0609020204030204" pitchFamily="49" charset="0"/>
+              </a:rPr>
+              <a:t> </a:t>
+            </a:r>
+            <a:br>
+              <a:rPr lang="en-US" dirty="0">
+                <a:latin typeface="Consolas" panose="020B0609020204030204" pitchFamily="49" charset="0"/>
+              </a:rPr>
+            </a:br>
+            <a:r>
+              <a:rPr lang="en-US" dirty="0">
+                <a:latin typeface="Consolas" panose="020B0609020204030204" pitchFamily="49" charset="0"/>
+              </a:rPr>
+              <a:t>  j     </a:t>
+            </a:r>
+            <a:r>
+              <a:rPr lang="en-US" dirty="0" err="1">
+                <a:latin typeface="Consolas" panose="020B0609020204030204" pitchFamily="49" charset="0"/>
+              </a:rPr>
+              <a:t>second_is_smallest</a:t>
+            </a:r>
+            <a:endParaRPr lang="en-US" dirty="0">
+              <a:latin typeface="Consolas" panose="020B0609020204030204" pitchFamily="49" charset="0"/>
+            </a:endParaRPr>
+          </a:p>
+          <a:p>
+            <a:r>
+              <a:rPr lang="en-US" dirty="0" err="1">
+                <a:latin typeface="Consolas" panose="020B0609020204030204" pitchFamily="49" charset="0"/>
+              </a:rPr>
+              <a:t>first_is_smallest</a:t>
+            </a:r>
+            <a:r>
+              <a:rPr lang="en-US" dirty="0">
+                <a:latin typeface="Consolas" panose="020B0609020204030204" pitchFamily="49" charset="0"/>
+              </a:rPr>
+              <a:t>:</a:t>
+            </a:r>
+          </a:p>
+          <a:p>
+            <a:r>
+              <a:rPr lang="en-US" b="1" dirty="0">
+                <a:latin typeface="Consolas" panose="020B0609020204030204" pitchFamily="49" charset="0"/>
+              </a:rPr>
+              <a:t>  </a:t>
+            </a:r>
+            <a:r>
+              <a:rPr lang="sv-SE" b="1" dirty="0">
+                <a:latin typeface="Consolas" panose="020B0609020204030204" pitchFamily="49" charset="0"/>
+              </a:rPr>
+              <a:t>mv a0, a0   # Lite fånigt</a:t>
+            </a:r>
+            <a:endParaRPr lang="en-US" b="1" dirty="0">
+              <a:latin typeface="Consolas" panose="020B0609020204030204" pitchFamily="49" charset="0"/>
+            </a:endParaRPr>
+          </a:p>
+          <a:p>
+            <a:r>
+              <a:rPr lang="en-US" dirty="0">
+                <a:latin typeface="Consolas" panose="020B0609020204030204" pitchFamily="49" charset="0"/>
+              </a:rPr>
+              <a:t>  ret</a:t>
+            </a:r>
+          </a:p>
+          <a:p>
+            <a:r>
+              <a:rPr lang="en-US" dirty="0" err="1">
+                <a:latin typeface="Consolas" panose="020B0609020204030204" pitchFamily="49" charset="0"/>
+              </a:rPr>
+              <a:t>second_is_smallest</a:t>
+            </a:r>
+            <a:r>
+              <a:rPr lang="en-US" dirty="0">
+                <a:latin typeface="Consolas" panose="020B0609020204030204" pitchFamily="49" charset="0"/>
+              </a:rPr>
+              <a:t>:</a:t>
+            </a:r>
+          </a:p>
+          <a:p>
+            <a:r>
+              <a:rPr lang="en-US" b="1" dirty="0">
+                <a:latin typeface="Consolas" panose="020B0609020204030204" pitchFamily="49" charset="0"/>
+              </a:rPr>
+              <a:t>  mv a0, a1</a:t>
+            </a:r>
+          </a:p>
+          <a:p>
+            <a:r>
+              <a:rPr lang="en-US" dirty="0">
+                <a:latin typeface="Consolas" panose="020B0609020204030204" pitchFamily="49" charset="0"/>
+              </a:rPr>
+              <a:t>  ret</a:t>
+            </a:r>
+            <a:endParaRPr lang="LID4096" dirty="0">
+              <a:latin typeface="Consolas" panose="020B0609020204030204" pitchFamily="49" charset="0"/>
+            </a:endParaRPr>
+          </a:p>
+        </p:txBody>
+      </p:sp>
+      <p:sp>
+        <p:nvSpPr>
+          <p:cNvPr id="3" name="TextBox 2">
+            <a:extLst>
+              <a:ext uri="{FF2B5EF4-FFF2-40B4-BE49-F238E27FC236}">
+                <a16:creationId xmlns:a16="http://schemas.microsoft.com/office/drawing/2014/main" id="{06202704-2F0C-F3CD-9D93-8AA1121CDAB9}"/>
+              </a:ext>
+            </a:extLst>
+          </p:cNvPr>
+          <p:cNvSpPr txBox="1"/>
+          <p:nvPr/>
+        </p:nvSpPr>
+        <p:spPr>
+          <a:xfrm>
+            <a:off x="7204953" y="3635515"/>
+            <a:ext cx="4450616" cy="1754326"/>
+          </a:xfrm>
+          <a:prstGeom prst="rect">
+            <a:avLst/>
+          </a:prstGeom>
+          <a:solidFill>
+            <a:schemeClr val="bg1"/>
+          </a:solidFill>
+          <a:ln>
+            <a:solidFill>
+              <a:schemeClr val="accent1">
+                <a:shade val="15000"/>
+              </a:schemeClr>
+            </a:solidFill>
+          </a:ln>
+          <a:effectLst>
+            <a:outerShdw blurRad="50800" dist="38100" dir="2700000" algn="tl" rotWithShape="0">
+              <a:prstClr val="black">
+                <a:alpha val="40000"/>
+              </a:prstClr>
+            </a:outerShdw>
+          </a:effectLst>
+        </p:spPr>
+        <p:txBody>
+          <a:bodyPr wrap="square" rtlCol="0">
+            <a:spAutoFit/>
+          </a:bodyPr>
+          <a:lstStyle/>
+          <a:p>
+            <a:r>
+              <a:rPr lang="en-US" dirty="0">
+                <a:latin typeface="Consolas" panose="020B0609020204030204" pitchFamily="49" charset="0"/>
+              </a:rPr>
+              <a:t>min:</a:t>
+            </a:r>
+          </a:p>
+          <a:p>
+            <a:r>
+              <a:rPr lang="en-US" dirty="0">
+                <a:latin typeface="Consolas" panose="020B0609020204030204" pitchFamily="49" charset="0"/>
+              </a:rPr>
+              <a:t>  </a:t>
+            </a:r>
+            <a:r>
+              <a:rPr lang="en-US" dirty="0" err="1">
+                <a:latin typeface="Consolas" panose="020B0609020204030204" pitchFamily="49" charset="0"/>
+              </a:rPr>
+              <a:t>bge</a:t>
+            </a:r>
+            <a:r>
+              <a:rPr lang="en-US" dirty="0">
+                <a:latin typeface="Consolas" panose="020B0609020204030204" pitchFamily="49" charset="0"/>
+              </a:rPr>
+              <a:t>   a0, a1, </a:t>
+            </a:r>
+            <a:r>
+              <a:rPr lang="en-US" dirty="0" err="1">
+                <a:latin typeface="Consolas" panose="020B0609020204030204" pitchFamily="49" charset="0"/>
+              </a:rPr>
+              <a:t>second_is_smallest</a:t>
+            </a:r>
+            <a:r>
+              <a:rPr lang="en-US" dirty="0">
+                <a:latin typeface="Consolas" panose="020B0609020204030204" pitchFamily="49" charset="0"/>
+              </a:rPr>
+              <a:t> </a:t>
+            </a:r>
+            <a:br>
+              <a:rPr lang="en-US" dirty="0">
+                <a:latin typeface="Consolas" panose="020B0609020204030204" pitchFamily="49" charset="0"/>
+              </a:rPr>
+            </a:br>
+            <a:r>
+              <a:rPr lang="en-US" dirty="0">
+                <a:latin typeface="Consolas" panose="020B0609020204030204" pitchFamily="49" charset="0"/>
+              </a:rPr>
+              <a:t>  ret</a:t>
+            </a:r>
+          </a:p>
+          <a:p>
+            <a:r>
+              <a:rPr lang="en-US" dirty="0" err="1">
+                <a:latin typeface="Consolas" panose="020B0609020204030204" pitchFamily="49" charset="0"/>
+              </a:rPr>
+              <a:t>second_is_smallest</a:t>
+            </a:r>
+            <a:r>
+              <a:rPr lang="en-US" dirty="0">
+                <a:latin typeface="Consolas" panose="020B0609020204030204" pitchFamily="49" charset="0"/>
+              </a:rPr>
+              <a:t>:</a:t>
+            </a:r>
+          </a:p>
+          <a:p>
+            <a:r>
+              <a:rPr lang="en-US" b="1" dirty="0">
+                <a:latin typeface="Consolas" panose="020B0609020204030204" pitchFamily="49" charset="0"/>
+              </a:rPr>
+              <a:t>  mv a0, a1</a:t>
+            </a:r>
+          </a:p>
+          <a:p>
+            <a:r>
+              <a:rPr lang="en-US" dirty="0">
+                <a:latin typeface="Consolas" panose="020B0609020204030204" pitchFamily="49" charset="0"/>
+              </a:rPr>
+              <a:t>  ret</a:t>
+            </a:r>
+            <a:endParaRPr lang="LID4096" dirty="0">
+              <a:latin typeface="Consolas" panose="020B0609020204030204" pitchFamily="49" charset="0"/>
+            </a:endParaRPr>
+          </a:p>
+        </p:txBody>
+      </p:sp>
+      <p:sp>
+        <p:nvSpPr>
+          <p:cNvPr id="6" name="Rectangle 5">
+            <a:extLst>
+              <a:ext uri="{FF2B5EF4-FFF2-40B4-BE49-F238E27FC236}">
+                <a16:creationId xmlns:a16="http://schemas.microsoft.com/office/drawing/2014/main" id="{0828CB26-BEC1-D7F6-7FFD-4E5C92839C26}"/>
+              </a:ext>
+            </a:extLst>
+          </p:cNvPr>
+          <p:cNvSpPr/>
+          <p:nvPr/>
+        </p:nvSpPr>
+        <p:spPr>
+          <a:xfrm>
+            <a:off x="7204953" y="830094"/>
+            <a:ext cx="4450616" cy="2598906"/>
+          </a:xfrm>
+          <a:prstGeom prst="rect">
+            <a:avLst/>
+          </a:prstGeom>
+          <a:solidFill>
+            <a:schemeClr val="tx1">
+              <a:alpha val="24000"/>
+            </a:schemeClr>
+          </a:solidFill>
+          <a:ln>
+            <a:noFill/>
+          </a:ln>
+          <a:effectLst/>
+        </p:spPr>
+        <p:style>
+          <a:lnRef idx="2">
+            <a:schemeClr val="accent1">
+              <a:shade val="15000"/>
+            </a:schemeClr>
+          </a:lnRef>
+          <a:fillRef idx="1">
+            <a:schemeClr val="accent1"/>
+          </a:fillRef>
+          <a:effectRef idx="0">
+            <a:schemeClr val="accent1"/>
+          </a:effectRef>
+          <a:fontRef idx="minor">
+            <a:schemeClr val="lt1"/>
+          </a:fontRef>
+        </p:style>
+        <p:txBody>
+          <a:bodyPr rtlCol="0" anchor="ctr"/>
+          <a:lstStyle/>
+          <a:p>
+            <a:pPr algn="ctr"/>
+            <a:endParaRPr lang="LID4096"/>
+          </a:p>
+        </p:txBody>
+      </p:sp>
+    </p:spTree>
+    <p:extLst>
+      <p:ext uri="{BB962C8B-B14F-4D97-AF65-F5344CB8AC3E}">
+        <p14:creationId xmlns:p14="http://schemas.microsoft.com/office/powerpoint/2010/main" val="273758227"/>
+      </p:ext>
+    </p:extLst>
+  </p:cSld>
+  <p:clrMapOvr>
+    <a:masterClrMapping/>
+  </p:clrMapOvr>
+</p:sld>
+</file>
+
+<file path=ppt/slides/slide9.xml><?xml version="1.0" encoding="utf-8"?>
 <p:sld xmlns:a="http://schemas.openxmlformats.org/drawingml/2006/main" xmlns:r="http://schemas.openxmlformats.org/officeDocument/2006/relationships" xmlns:p="http://schemas.openxmlformats.org/presentationml/2006/main">
   <p:cSld>
     <p:spTree>
@@ -5091,678 +11628,10 @@
           <a:chExt cx="0" cy="0"/>
         </a:xfrm>
       </p:grpSpPr>
-      <p:sp>
-        <p:nvSpPr>
-          <p:cNvPr id="2" name="Title 1">
-            <a:extLst>
-              <a:ext uri="{FF2B5EF4-FFF2-40B4-BE49-F238E27FC236}">
-                <a16:creationId xmlns:a16="http://schemas.microsoft.com/office/drawing/2014/main" id="{2FA2EA0E-73B8-961E-FB36-BBBAF8FA0A9A}"/>
-              </a:ext>
-            </a:extLst>
-          </p:cNvPr>
-          <p:cNvSpPr>
-            <a:spLocks noGrp="1"/>
-          </p:cNvSpPr>
-          <p:nvPr>
-            <p:ph type="title"/>
-          </p:nvPr>
-        </p:nvSpPr>
-        <p:spPr/>
-        <p:txBody>
-          <a:bodyPr/>
-          <a:lstStyle/>
-          <a:p>
-            <a:r>
-              <a:rPr lang="sv-SE"/>
-              <a:t>Funktioner</a:t>
-            </a:r>
-            <a:endParaRPr lang="LID4096"/>
-          </a:p>
-        </p:txBody>
-      </p:sp>
-      <p:sp>
-        <p:nvSpPr>
-          <p:cNvPr id="3" name="Content Placeholder 2">
-            <a:extLst>
-              <a:ext uri="{FF2B5EF4-FFF2-40B4-BE49-F238E27FC236}">
-                <a16:creationId xmlns:a16="http://schemas.microsoft.com/office/drawing/2014/main" id="{C17FDC9E-4CB9-4072-6BF3-4F7E2F7195A5}"/>
-              </a:ext>
-            </a:extLst>
-          </p:cNvPr>
-          <p:cNvSpPr>
-            <a:spLocks noGrp="1"/>
-          </p:cNvSpPr>
-          <p:nvPr>
-            <p:ph idx="1"/>
-          </p:nvPr>
-        </p:nvSpPr>
-        <p:spPr/>
-        <p:txBody>
-          <a:bodyPr/>
-          <a:lstStyle/>
-          <a:p>
-            <a:r>
-              <a:rPr lang="sv-SE"/>
-              <a:t>Visa hur call och ret gör det lättlästare</a:t>
-            </a:r>
-          </a:p>
-          <a:p>
-            <a:r>
-              <a:rPr lang="sv-SE"/>
-              <a:t>Visa hur vi skickar parametrar och returvärden i a registrena</a:t>
-            </a:r>
-          </a:p>
-          <a:p>
-            <a:r>
-              <a:rPr lang="sv-SE"/>
-              <a:t>Notera att även små parametrar får ett 32 bitars register var</a:t>
-            </a:r>
-          </a:p>
-          <a:p>
-            <a:r>
-              <a:rPr lang="sv-SE"/>
-              <a:t>Notera att man kan ha större argument eller fler än vad som finns plats för, och att det finns regler för det med, men out of scope. </a:t>
-            </a:r>
-            <a:endParaRPr lang="LID4096"/>
-          </a:p>
-        </p:txBody>
-      </p:sp>
     </p:spTree>
     <p:extLst>
       <p:ext uri="{BB962C8B-B14F-4D97-AF65-F5344CB8AC3E}">
         <p14:creationId xmlns:p14="http://schemas.microsoft.com/office/powerpoint/2010/main" val="2683925252"/>
-      </p:ext>
-    </p:extLst>
-  </p:cSld>
-  <p:clrMapOvr>
-    <a:masterClrMapping/>
-  </p:clrMapOvr>
-</p:sld>
-</file>
-
-<file path=ppt/slides/slide5.xml><?xml version="1.0" encoding="utf-8"?>
-<p:sld xmlns:a="http://schemas.openxmlformats.org/drawingml/2006/main" xmlns:r="http://schemas.openxmlformats.org/officeDocument/2006/relationships" xmlns:p="http://schemas.openxmlformats.org/presentationml/2006/main">
-  <p:cSld>
-    <p:spTree>
-      <p:nvGrpSpPr>
-        <p:cNvPr id="1" name=""/>
-        <p:cNvGrpSpPr/>
-        <p:nvPr/>
-      </p:nvGrpSpPr>
-      <p:grpSpPr>
-        <a:xfrm>
-          <a:off x="0" y="0"/>
-          <a:ext cx="0" cy="0"/>
-          <a:chOff x="0" y="0"/>
-          <a:chExt cx="0" cy="0"/>
-        </a:xfrm>
-      </p:grpSpPr>
-      <p:sp>
-        <p:nvSpPr>
-          <p:cNvPr id="2" name="Title 1">
-            <a:extLst>
-              <a:ext uri="{FF2B5EF4-FFF2-40B4-BE49-F238E27FC236}">
-                <a16:creationId xmlns:a16="http://schemas.microsoft.com/office/drawing/2014/main" id="{AA102AFE-405E-BC06-4384-BFD3BD60FBE9}"/>
-              </a:ext>
-            </a:extLst>
-          </p:cNvPr>
-          <p:cNvSpPr>
-            <a:spLocks noGrp="1"/>
-          </p:cNvSpPr>
-          <p:nvPr>
-            <p:ph type="title"/>
-          </p:nvPr>
-        </p:nvSpPr>
-        <p:spPr/>
-        <p:txBody>
-          <a:bodyPr/>
-          <a:lstStyle/>
-          <a:p>
-            <a:r>
-              <a:rPr lang="sv-SE"/>
-              <a:t>Stacken</a:t>
-            </a:r>
-            <a:endParaRPr lang="LID4096"/>
-          </a:p>
-        </p:txBody>
-      </p:sp>
-      <p:sp>
-        <p:nvSpPr>
-          <p:cNvPr id="3" name="Content Placeholder 2">
-            <a:extLst>
-              <a:ext uri="{FF2B5EF4-FFF2-40B4-BE49-F238E27FC236}">
-                <a16:creationId xmlns:a16="http://schemas.microsoft.com/office/drawing/2014/main" id="{5735B9B8-F988-19DA-03CB-0FB1F22F9682}"/>
-              </a:ext>
-            </a:extLst>
-          </p:cNvPr>
-          <p:cNvSpPr>
-            <a:spLocks noGrp="1"/>
-          </p:cNvSpPr>
-          <p:nvPr>
-            <p:ph idx="1"/>
-          </p:nvPr>
-        </p:nvSpPr>
-        <p:spPr/>
-        <p:txBody>
-          <a:bodyPr/>
-          <a:lstStyle/>
-          <a:p>
-            <a:r>
-              <a:rPr lang="sv-SE"/>
-              <a:t>Visa bild på stackens plats i minnet</a:t>
-            </a:r>
-          </a:p>
-          <a:p>
-            <a:r>
-              <a:rPr lang="sv-SE"/>
-              <a:t>Inga push och pop. Vi håller själva koll på stackpekaren. </a:t>
-            </a:r>
-          </a:p>
-          <a:p>
-            <a:r>
-              <a:rPr lang="sv-SE"/>
-              <a:t>Gör ett exempel (Låtsas att vi bara har litet antal register)</a:t>
-            </a:r>
-          </a:p>
-          <a:p>
-            <a:pPr lvl="1"/>
-            <a:r>
-              <a:rPr lang="sv-SE"/>
-              <a:t>Samma sak händer i verkligheten, fast i mycket mer komplicerade program</a:t>
-            </a:r>
-          </a:p>
-          <a:p>
-            <a:endParaRPr lang="LID4096"/>
-          </a:p>
-        </p:txBody>
-      </p:sp>
-    </p:spTree>
-    <p:extLst>
-      <p:ext uri="{BB962C8B-B14F-4D97-AF65-F5344CB8AC3E}">
-        <p14:creationId xmlns:p14="http://schemas.microsoft.com/office/powerpoint/2010/main" val="1932440338"/>
-      </p:ext>
-    </p:extLst>
-  </p:cSld>
-  <p:clrMapOvr>
-    <a:masterClrMapping/>
-  </p:clrMapOvr>
-</p:sld>
-</file>
-
-<file path=ppt/slides/slide6.xml><?xml version="1.0" encoding="utf-8"?>
-<p:sld xmlns:a="http://schemas.openxmlformats.org/drawingml/2006/main" xmlns:r="http://schemas.openxmlformats.org/officeDocument/2006/relationships" xmlns:p="http://schemas.openxmlformats.org/presentationml/2006/main">
-  <p:cSld>
-    <p:spTree>
-      <p:nvGrpSpPr>
-        <p:cNvPr id="1" name=""/>
-        <p:cNvGrpSpPr/>
-        <p:nvPr/>
-      </p:nvGrpSpPr>
-      <p:grpSpPr>
-        <a:xfrm>
-          <a:off x="0" y="0"/>
-          <a:ext cx="0" cy="0"/>
-          <a:chOff x="0" y="0"/>
-          <a:chExt cx="0" cy="0"/>
-        </a:xfrm>
-      </p:grpSpPr>
-      <p:sp>
-        <p:nvSpPr>
-          <p:cNvPr id="2" name="Title 1">
-            <a:extLst>
-              <a:ext uri="{FF2B5EF4-FFF2-40B4-BE49-F238E27FC236}">
-                <a16:creationId xmlns:a16="http://schemas.microsoft.com/office/drawing/2014/main" id="{EA4DBB50-CF68-B019-C880-D01EB750FFF9}"/>
-              </a:ext>
-            </a:extLst>
-          </p:cNvPr>
-          <p:cNvSpPr>
-            <a:spLocks noGrp="1"/>
-          </p:cNvSpPr>
-          <p:nvPr>
-            <p:ph type="title"/>
-          </p:nvPr>
-        </p:nvSpPr>
-        <p:spPr/>
-        <p:txBody>
-          <a:bodyPr/>
-          <a:lstStyle/>
-          <a:p>
-            <a:r>
-              <a:rPr lang="sv-SE"/>
-              <a:t>Register Saving</a:t>
-            </a:r>
-            <a:endParaRPr lang="LID4096"/>
-          </a:p>
-        </p:txBody>
-      </p:sp>
-      <p:sp>
-        <p:nvSpPr>
-          <p:cNvPr id="3" name="Content Placeholder 2">
-            <a:extLst>
-              <a:ext uri="{FF2B5EF4-FFF2-40B4-BE49-F238E27FC236}">
-                <a16:creationId xmlns:a16="http://schemas.microsoft.com/office/drawing/2014/main" id="{6F91E298-03AE-7576-04AA-8BB3BE2BF8F3}"/>
-              </a:ext>
-            </a:extLst>
-          </p:cNvPr>
-          <p:cNvSpPr>
-            <a:spLocks noGrp="1"/>
-          </p:cNvSpPr>
-          <p:nvPr>
-            <p:ph idx="1"/>
-          </p:nvPr>
-        </p:nvSpPr>
-        <p:spPr/>
-        <p:txBody>
-          <a:bodyPr/>
-          <a:lstStyle/>
-          <a:p>
-            <a:r>
-              <a:rPr lang="sv-SE"/>
-              <a:t>Gör exemplet där vi vill skriva min(x, y, z) genom att kalla min.</a:t>
-            </a:r>
-          </a:p>
-          <a:p>
-            <a:r>
-              <a:rPr lang="sv-SE"/>
-              <a:t>Kan dom se problemet? </a:t>
-            </a:r>
-          </a:p>
-          <a:p>
-            <a:endParaRPr lang="LID4096"/>
-          </a:p>
-        </p:txBody>
-      </p:sp>
-      <p:pic>
-        <p:nvPicPr>
-          <p:cNvPr id="5" name="Picture 4">
-            <a:extLst>
-              <a:ext uri="{FF2B5EF4-FFF2-40B4-BE49-F238E27FC236}">
-                <a16:creationId xmlns:a16="http://schemas.microsoft.com/office/drawing/2014/main" id="{327C5942-CF83-05B1-2698-171934D12D7D}"/>
-              </a:ext>
-            </a:extLst>
-          </p:cNvPr>
-          <p:cNvPicPr>
-            <a:picLocks noChangeAspect="1"/>
-          </p:cNvPicPr>
-          <p:nvPr/>
-        </p:nvPicPr>
-        <p:blipFill>
-          <a:blip r:embed="rId2"/>
-          <a:stretch>
-            <a:fillRect/>
-          </a:stretch>
-        </p:blipFill>
-        <p:spPr>
-          <a:xfrm>
-            <a:off x="1108934" y="3292330"/>
-            <a:ext cx="10431331" cy="2076740"/>
-          </a:xfrm>
-          <a:prstGeom prst="rect">
-            <a:avLst/>
-          </a:prstGeom>
-        </p:spPr>
-      </p:pic>
-    </p:spTree>
-    <p:extLst>
-      <p:ext uri="{BB962C8B-B14F-4D97-AF65-F5344CB8AC3E}">
-        <p14:creationId xmlns:p14="http://schemas.microsoft.com/office/powerpoint/2010/main" val="1015968766"/>
-      </p:ext>
-    </p:extLst>
-  </p:cSld>
-  <p:clrMapOvr>
-    <a:masterClrMapping/>
-  </p:clrMapOvr>
-</p:sld>
-</file>
-
-<file path=ppt/slides/slide7.xml><?xml version="1.0" encoding="utf-8"?>
-<p:sld xmlns:a="http://schemas.openxmlformats.org/drawingml/2006/main" xmlns:r="http://schemas.openxmlformats.org/officeDocument/2006/relationships" xmlns:p="http://schemas.openxmlformats.org/presentationml/2006/main">
-  <p:cSld>
-    <p:spTree>
-      <p:nvGrpSpPr>
-        <p:cNvPr id="1" name=""/>
-        <p:cNvGrpSpPr/>
-        <p:nvPr/>
-      </p:nvGrpSpPr>
-      <p:grpSpPr>
-        <a:xfrm>
-          <a:off x="0" y="0"/>
-          <a:ext cx="0" cy="0"/>
-          <a:chOff x="0" y="0"/>
-          <a:chExt cx="0" cy="0"/>
-        </a:xfrm>
-      </p:grpSpPr>
-      <p:sp>
-        <p:nvSpPr>
-          <p:cNvPr id="2" name="Title 1">
-            <a:extLst>
-              <a:ext uri="{FF2B5EF4-FFF2-40B4-BE49-F238E27FC236}">
-                <a16:creationId xmlns:a16="http://schemas.microsoft.com/office/drawing/2014/main" id="{6492B6DF-2E34-9694-7818-8ACDECBC8678}"/>
-              </a:ext>
-            </a:extLst>
-          </p:cNvPr>
-          <p:cNvSpPr>
-            <a:spLocks noGrp="1"/>
-          </p:cNvSpPr>
-          <p:nvPr>
-            <p:ph type="title"/>
-          </p:nvPr>
-        </p:nvSpPr>
-        <p:spPr/>
-        <p:txBody>
-          <a:bodyPr/>
-          <a:lstStyle/>
-          <a:p>
-            <a:r>
-              <a:rPr lang="sv-SE"/>
-              <a:t>Register Saving</a:t>
-            </a:r>
-            <a:endParaRPr lang="LID4096"/>
-          </a:p>
-        </p:txBody>
-      </p:sp>
-      <p:sp>
-        <p:nvSpPr>
-          <p:cNvPr id="3" name="Content Placeholder 2">
-            <a:extLst>
-              <a:ext uri="{FF2B5EF4-FFF2-40B4-BE49-F238E27FC236}">
-                <a16:creationId xmlns:a16="http://schemas.microsoft.com/office/drawing/2014/main" id="{9D86E6C2-0DC3-4D26-184A-F0BF515DBA03}"/>
-              </a:ext>
-            </a:extLst>
-          </p:cNvPr>
-          <p:cNvSpPr>
-            <a:spLocks noGrp="1"/>
-          </p:cNvSpPr>
-          <p:nvPr>
-            <p:ph idx="1"/>
-          </p:nvPr>
-        </p:nvSpPr>
-        <p:spPr/>
-        <p:txBody>
-          <a:bodyPr/>
-          <a:lstStyle/>
-          <a:p>
-            <a:r>
-              <a:rPr lang="sv-SE"/>
-              <a:t>Skall vi bara spara alla register vi använder innan vi kallar en funktion? </a:t>
-            </a:r>
-          </a:p>
-          <a:p>
-            <a:pPr lvl="1"/>
-            <a:r>
-              <a:rPr lang="sv-SE"/>
-              <a:t>Om funktionen bara använder ett register så blir ju det fånigt</a:t>
-            </a:r>
-          </a:p>
-          <a:p>
-            <a:r>
-              <a:rPr lang="sv-SE"/>
-              <a:t>Skall vi då låta funktionen som blir kallad spara alla register den tänker skriva över? </a:t>
-            </a:r>
-          </a:p>
-          <a:p>
-            <a:pPr lvl="1"/>
-            <a:r>
-              <a:rPr lang="sv-SE"/>
-              <a:t>Men om funktionen vi kallar behöver massor med register, och vi bara ett, blir det ju lika löjligt. </a:t>
-            </a:r>
-          </a:p>
-        </p:txBody>
-      </p:sp>
-    </p:spTree>
-    <p:extLst>
-      <p:ext uri="{BB962C8B-B14F-4D97-AF65-F5344CB8AC3E}">
-        <p14:creationId xmlns:p14="http://schemas.microsoft.com/office/powerpoint/2010/main" val="3460264548"/>
-      </p:ext>
-    </p:extLst>
-  </p:cSld>
-  <p:clrMapOvr>
-    <a:masterClrMapping/>
-  </p:clrMapOvr>
-</p:sld>
-</file>
-
-<file path=ppt/slides/slide8.xml><?xml version="1.0" encoding="utf-8"?>
-<p:sld xmlns:a="http://schemas.openxmlformats.org/drawingml/2006/main" xmlns:r="http://schemas.openxmlformats.org/officeDocument/2006/relationships" xmlns:p="http://schemas.openxmlformats.org/presentationml/2006/main">
-  <p:cSld>
-    <p:spTree>
-      <p:nvGrpSpPr>
-        <p:cNvPr id="1" name=""/>
-        <p:cNvGrpSpPr/>
-        <p:nvPr/>
-      </p:nvGrpSpPr>
-      <p:grpSpPr>
-        <a:xfrm>
-          <a:off x="0" y="0"/>
-          <a:ext cx="0" cy="0"/>
-          <a:chOff x="0" y="0"/>
-          <a:chExt cx="0" cy="0"/>
-        </a:xfrm>
-      </p:grpSpPr>
-      <p:sp>
-        <p:nvSpPr>
-          <p:cNvPr id="2" name="Title 1">
-            <a:extLst>
-              <a:ext uri="{FF2B5EF4-FFF2-40B4-BE49-F238E27FC236}">
-                <a16:creationId xmlns:a16="http://schemas.microsoft.com/office/drawing/2014/main" id="{591E27D8-3ED7-38D5-4231-2A5D1AD9F730}"/>
-              </a:ext>
-            </a:extLst>
-          </p:cNvPr>
-          <p:cNvSpPr>
-            <a:spLocks noGrp="1"/>
-          </p:cNvSpPr>
-          <p:nvPr>
-            <p:ph type="title"/>
-          </p:nvPr>
-        </p:nvSpPr>
-        <p:spPr/>
-        <p:txBody>
-          <a:bodyPr/>
-          <a:lstStyle/>
-          <a:p>
-            <a:r>
-              <a:rPr lang="sv-SE"/>
-              <a:t>Register Saving</a:t>
-            </a:r>
-            <a:endParaRPr lang="LID4096"/>
-          </a:p>
-        </p:txBody>
-      </p:sp>
-      <p:sp>
-        <p:nvSpPr>
-          <p:cNvPr id="3" name="Content Placeholder 2">
-            <a:extLst>
-              <a:ext uri="{FF2B5EF4-FFF2-40B4-BE49-F238E27FC236}">
-                <a16:creationId xmlns:a16="http://schemas.microsoft.com/office/drawing/2014/main" id="{A907C576-7072-68EC-5F4D-1936ABA023EF}"/>
-              </a:ext>
-            </a:extLst>
-          </p:cNvPr>
-          <p:cNvSpPr>
-            <a:spLocks noGrp="1"/>
-          </p:cNvSpPr>
-          <p:nvPr>
-            <p:ph idx="1"/>
-          </p:nvPr>
-        </p:nvSpPr>
-        <p:spPr/>
-        <p:txBody>
-          <a:bodyPr/>
-          <a:lstStyle/>
-          <a:p>
-            <a:r>
-              <a:rPr lang="sv-SE"/>
-              <a:t>ABI Konvention (kompromiss): </a:t>
-            </a:r>
-            <a:endParaRPr lang="LID4096"/>
-          </a:p>
-          <a:p>
-            <a:pPr lvl="1"/>
-            <a:r>
-              <a:rPr lang="sv-SE"/>
-              <a:t>Den kallande funktionen sparar t (temp) registrena, a (argument registrena), och ra (om den behöver dem).</a:t>
-            </a:r>
-          </a:p>
-          <a:p>
-            <a:pPr lvl="1"/>
-            <a:r>
-              <a:rPr lang="sv-SE"/>
-              <a:t>Den kallade funktionen sparar alla andra register om den skriver över dem.</a:t>
-            </a:r>
-          </a:p>
-          <a:p>
-            <a:pPr lvl="1"/>
-            <a:endParaRPr lang="sv-SE"/>
-          </a:p>
-          <a:p>
-            <a:pPr lvl="1"/>
-            <a:r>
-              <a:rPr lang="sv-SE"/>
-              <a:t>Vi kan ju fortfarande hamna i situationer där register blir sparade som inte egentligen behövde sparas: </a:t>
-            </a:r>
-          </a:p>
-          <a:p>
-            <a:pPr lvl="2"/>
-            <a:r>
-              <a:rPr lang="sv-SE"/>
-              <a:t>a sparar argumentregister, men dom skrivs aldrig över av b, </a:t>
-            </a:r>
-          </a:p>
-          <a:p>
-            <a:pPr lvl="2"/>
-            <a:r>
-              <a:rPr lang="sv-SE"/>
-              <a:t>eller b sparar s registrena, men dom behövs inte av a</a:t>
-            </a:r>
-          </a:p>
-          <a:p>
-            <a:pPr lvl="2"/>
-            <a:r>
-              <a:rPr lang="sv-SE"/>
-              <a:t>En optimerare kan oftast hitta sådana fall och ta bort dem</a:t>
-            </a:r>
-            <a:endParaRPr lang="LID4096"/>
-          </a:p>
-        </p:txBody>
-      </p:sp>
-    </p:spTree>
-    <p:extLst>
-      <p:ext uri="{BB962C8B-B14F-4D97-AF65-F5344CB8AC3E}">
-        <p14:creationId xmlns:p14="http://schemas.microsoft.com/office/powerpoint/2010/main" val="1709282280"/>
-      </p:ext>
-    </p:extLst>
-  </p:cSld>
-  <p:clrMapOvr>
-    <a:masterClrMapping/>
-  </p:clrMapOvr>
-</p:sld>
-</file>
-
-<file path=ppt/slides/slide9.xml><?xml version="1.0" encoding="utf-8"?>
-<p:sld xmlns:a="http://schemas.openxmlformats.org/drawingml/2006/main" xmlns:r="http://schemas.openxmlformats.org/officeDocument/2006/relationships" xmlns:p="http://schemas.openxmlformats.org/presentationml/2006/main">
-  <p:cSld>
-    <p:spTree>
-      <p:nvGrpSpPr>
-        <p:cNvPr id="1" name=""/>
-        <p:cNvGrpSpPr/>
-        <p:nvPr/>
-      </p:nvGrpSpPr>
-      <p:grpSpPr>
-        <a:xfrm>
-          <a:off x="0" y="0"/>
-          <a:ext cx="0" cy="0"/>
-          <a:chOff x="0" y="0"/>
-          <a:chExt cx="0" cy="0"/>
-        </a:xfrm>
-      </p:grpSpPr>
-      <p:sp>
-        <p:nvSpPr>
-          <p:cNvPr id="2" name="Title 1">
-            <a:extLst>
-              <a:ext uri="{FF2B5EF4-FFF2-40B4-BE49-F238E27FC236}">
-                <a16:creationId xmlns:a16="http://schemas.microsoft.com/office/drawing/2014/main" id="{F5A1DA21-300C-43E3-3FC0-40EADD2B8167}"/>
-              </a:ext>
-            </a:extLst>
-          </p:cNvPr>
-          <p:cNvSpPr>
-            <a:spLocks noGrp="1"/>
-          </p:cNvSpPr>
-          <p:nvPr>
-            <p:ph type="title"/>
-          </p:nvPr>
-        </p:nvSpPr>
-        <p:spPr/>
-        <p:txBody>
-          <a:bodyPr/>
-          <a:lstStyle/>
-          <a:p>
-            <a:r>
-              <a:rPr lang="sv-SE"/>
-              <a:t>Register saving, nästade funktionsanrop</a:t>
-            </a:r>
-            <a:endParaRPr lang="LID4096"/>
-          </a:p>
-        </p:txBody>
-      </p:sp>
-      <p:sp>
-        <p:nvSpPr>
-          <p:cNvPr id="3" name="Content Placeholder 2">
-            <a:extLst>
-              <a:ext uri="{FF2B5EF4-FFF2-40B4-BE49-F238E27FC236}">
-                <a16:creationId xmlns:a16="http://schemas.microsoft.com/office/drawing/2014/main" id="{8EA68312-15BF-1B93-E97F-041D6E40109B}"/>
-              </a:ext>
-            </a:extLst>
-          </p:cNvPr>
-          <p:cNvSpPr>
-            <a:spLocks noGrp="1"/>
-          </p:cNvSpPr>
-          <p:nvPr>
-            <p:ph idx="1"/>
-          </p:nvPr>
-        </p:nvSpPr>
-        <p:spPr/>
-        <p:txBody>
-          <a:bodyPr/>
-          <a:lstStyle/>
-          <a:p>
-            <a:r>
-              <a:rPr lang="sv-SE"/>
-              <a:t>En funktion är ofta både callee och caller (visa exempel med min(x, y, z))</a:t>
-            </a:r>
-          </a:p>
-          <a:p>
-            <a:r>
-              <a:rPr lang="sv-SE"/>
-              <a:t>Best practice: </a:t>
-            </a:r>
-          </a:p>
-          <a:p>
-            <a:pPr lvl="1"/>
-            <a:r>
-              <a:rPr lang="sv-SE"/>
-              <a:t>Gör allt du kan i t registrena (du behöver inte spara dem)</a:t>
-            </a:r>
-          </a:p>
-          <a:p>
-            <a:pPr lvl="1"/>
-            <a:r>
-              <a:rPr lang="sv-SE"/>
-              <a:t>Om du behöver spara ett värde, använd s registren</a:t>
-            </a:r>
-          </a:p>
-          <a:p>
-            <a:pPr lvl="1"/>
-            <a:r>
-              <a:rPr lang="sv-SE"/>
-              <a:t>Ha koll på alla s register du använder, och spara/restora dem i en prolog/epilog</a:t>
-            </a:r>
-            <a:endParaRPr lang="LID4096"/>
-          </a:p>
-        </p:txBody>
-      </p:sp>
-    </p:spTree>
-    <p:extLst>
-      <p:ext uri="{BB962C8B-B14F-4D97-AF65-F5344CB8AC3E}">
-        <p14:creationId xmlns:p14="http://schemas.microsoft.com/office/powerpoint/2010/main" val="251391612"/>
       </p:ext>
     </p:extLst>
   </p:cSld>
@@ -6058,6 +11927,35 @@
     </a:fmtScheme>
   </a:themeElements>
   <a:objectDefaults>
+    <a:spDef>
+      <a:spPr>
+        <a:solidFill>
+          <a:schemeClr val="bg1"/>
+        </a:solidFill>
+      </a:spPr>
+      <a:bodyPr rtlCol="0" anchor="ctr"/>
+      <a:lstStyle>
+        <a:defPPr algn="ctr">
+          <a:defRPr/>
+        </a:defPPr>
+      </a:lstStyle>
+      <a:style>
+        <a:lnRef idx="2">
+          <a:schemeClr val="accent1">
+            <a:shade val="15000"/>
+          </a:schemeClr>
+        </a:lnRef>
+        <a:fillRef idx="1">
+          <a:schemeClr val="accent1"/>
+        </a:fillRef>
+        <a:effectRef idx="0">
+          <a:schemeClr val="accent1"/>
+        </a:effectRef>
+        <a:fontRef idx="minor">
+          <a:schemeClr val="lt1"/>
+        </a:fontRef>
+      </a:style>
+    </a:spDef>
     <a:lnDef>
       <a:spPr/>
       <a:bodyPr/>

--- a/slides/lecture03-assembly2.pptx
+++ b/slides/lecture03-assembly2.pptx
@@ -5,7 +5,7 @@
     <p:sldMasterId id="2147483648" r:id="rId1"/>
   </p:sldMasterIdLst>
   <p:notesMasterIdLst>
-    <p:notesMasterId r:id="rId23"/>
+    <p:notesMasterId r:id="rId26"/>
   </p:notesMasterIdLst>
   <p:sldIdLst>
     <p:sldId id="256" r:id="rId2"/>
@@ -17,18 +17,21 @@
     <p:sldId id="276" r:id="rId8"/>
     <p:sldId id="277" r:id="rId9"/>
     <p:sldId id="260" r:id="rId10"/>
-    <p:sldId id="258" r:id="rId11"/>
-    <p:sldId id="261" r:id="rId12"/>
+    <p:sldId id="278" r:id="rId11"/>
+    <p:sldId id="279" r:id="rId12"/>
     <p:sldId id="262" r:id="rId13"/>
     <p:sldId id="263" r:id="rId14"/>
     <p:sldId id="264" r:id="rId15"/>
-    <p:sldId id="270" r:id="rId16"/>
-    <p:sldId id="265" r:id="rId17"/>
-    <p:sldId id="266" r:id="rId18"/>
-    <p:sldId id="267" r:id="rId19"/>
-    <p:sldId id="268" r:id="rId20"/>
-    <p:sldId id="269" r:id="rId21"/>
-    <p:sldId id="271" r:id="rId22"/>
+    <p:sldId id="280" r:id="rId16"/>
+    <p:sldId id="270" r:id="rId17"/>
+    <p:sldId id="265" r:id="rId18"/>
+    <p:sldId id="266" r:id="rId19"/>
+    <p:sldId id="282" r:id="rId20"/>
+    <p:sldId id="283" r:id="rId21"/>
+    <p:sldId id="267" r:id="rId22"/>
+    <p:sldId id="268" r:id="rId23"/>
+    <p:sldId id="269" r:id="rId24"/>
+    <p:sldId id="271" r:id="rId25"/>
   </p:sldIdLst>
   <p:sldSz cx="12192000" cy="6858000"/>
   <p:notesSz cx="6858000" cy="9144000"/>
@@ -1814,6 +1817,206 @@
     <p:extLst>
       <p:ext uri="{BB962C8B-B14F-4D97-AF65-F5344CB8AC3E}">
         <p14:creationId xmlns:p14="http://schemas.microsoft.com/office/powerpoint/2010/main" val="1840089975"/>
+      </p:ext>
+    </p:extLst>
+  </p:cSld>
+  <p:clrMapOvr>
+    <a:masterClrMapping/>
+  </p:clrMapOvr>
+</p:notes>
+</file>
+
+<file path=ppt/notesSlides/notesSlide8.xml><?xml version="1.0" encoding="utf-8"?>
+<p:notes xmlns:a="http://schemas.openxmlformats.org/drawingml/2006/main" xmlns:r="http://schemas.openxmlformats.org/officeDocument/2006/relationships" xmlns:p="http://schemas.openxmlformats.org/presentationml/2006/main">
+  <p:cSld>
+    <p:spTree>
+      <p:nvGrpSpPr>
+        <p:cNvPr id="1" name=""/>
+        <p:cNvGrpSpPr/>
+        <p:nvPr/>
+      </p:nvGrpSpPr>
+      <p:grpSpPr>
+        <a:xfrm>
+          <a:off x="0" y="0"/>
+          <a:ext cx="0" cy="0"/>
+          <a:chOff x="0" y="0"/>
+          <a:chExt cx="0" cy="0"/>
+        </a:xfrm>
+      </p:grpSpPr>
+      <p:sp>
+        <p:nvSpPr>
+          <p:cNvPr id="2" name="Slide Image Placeholder 1"/>
+          <p:cNvSpPr>
+            <a:spLocks noGrp="1" noRot="1" noChangeAspect="1"/>
+          </p:cNvSpPr>
+          <p:nvPr>
+            <p:ph type="sldImg"/>
+          </p:nvPr>
+        </p:nvSpPr>
+        <p:spPr/>
+      </p:sp>
+      <p:sp>
+        <p:nvSpPr>
+          <p:cNvPr id="3" name="Notes Placeholder 2"/>
+          <p:cNvSpPr>
+            <a:spLocks noGrp="1"/>
+          </p:cNvSpPr>
+          <p:nvPr>
+            <p:ph type="body" idx="1"/>
+          </p:nvPr>
+        </p:nvSpPr>
+        <p:spPr/>
+        <p:txBody>
+          <a:bodyPr/>
+          <a:lstStyle/>
+          <a:p>
+            <a:r>
+              <a:rPr lang="sv-SE"/>
+              <a:t>Gå igenom koden rad för rad. </a:t>
+            </a:r>
+          </a:p>
+          <a:p>
+            <a:r>
+              <a:rPr lang="en-GB"/>
+              <a:t>&lt;click&gt;</a:t>
+            </a:r>
+          </a:p>
+          <a:p>
+            <a:r>
+              <a:rPr lang="en-GB"/>
+              <a:t>Vad kan g[ fel h</a:t>
+            </a:r>
+            <a:r>
+              <a:rPr lang="sv-SE"/>
+              <a:t>är? </a:t>
+            </a:r>
+            <a:endParaRPr lang="LID4096"/>
+          </a:p>
+        </p:txBody>
+      </p:sp>
+      <p:sp>
+        <p:nvSpPr>
+          <p:cNvPr id="4" name="Slide Number Placeholder 3"/>
+          <p:cNvSpPr>
+            <a:spLocks noGrp="1"/>
+          </p:cNvSpPr>
+          <p:nvPr>
+            <p:ph type="sldNum" sz="quarter" idx="5"/>
+          </p:nvPr>
+        </p:nvSpPr>
+        <p:spPr/>
+        <p:txBody>
+          <a:bodyPr/>
+          <a:lstStyle/>
+          <a:p>
+            <a:fld id="{01B4E41B-EE32-43AA-BF26-21D12108C66F}" type="slidenum">
+              <a:rPr lang="LID4096" smtClean="0"/>
+              <a:t>11</a:t>
+            </a:fld>
+            <a:endParaRPr lang="LID4096"/>
+          </a:p>
+        </p:txBody>
+      </p:sp>
+    </p:spTree>
+    <p:extLst>
+      <p:ext uri="{BB962C8B-B14F-4D97-AF65-F5344CB8AC3E}">
+        <p14:creationId xmlns:p14="http://schemas.microsoft.com/office/powerpoint/2010/main" val="2946493518"/>
+      </p:ext>
+    </p:extLst>
+  </p:cSld>
+  <p:clrMapOvr>
+    <a:masterClrMapping/>
+  </p:clrMapOvr>
+</p:notes>
+</file>
+
+<file path=ppt/notesSlides/notesSlide9.xml><?xml version="1.0" encoding="utf-8"?>
+<p:notes xmlns:a="http://schemas.openxmlformats.org/drawingml/2006/main" xmlns:r="http://schemas.openxmlformats.org/officeDocument/2006/relationships" xmlns:p="http://schemas.openxmlformats.org/presentationml/2006/main">
+  <p:cSld>
+    <p:spTree>
+      <p:nvGrpSpPr>
+        <p:cNvPr id="1" name=""/>
+        <p:cNvGrpSpPr/>
+        <p:nvPr/>
+      </p:nvGrpSpPr>
+      <p:grpSpPr>
+        <a:xfrm>
+          <a:off x="0" y="0"/>
+          <a:ext cx="0" cy="0"/>
+          <a:chOff x="0" y="0"/>
+          <a:chExt cx="0" cy="0"/>
+        </a:xfrm>
+      </p:grpSpPr>
+      <p:sp>
+        <p:nvSpPr>
+          <p:cNvPr id="2" name="Slide Image Placeholder 1"/>
+          <p:cNvSpPr>
+            <a:spLocks noGrp="1" noRot="1" noChangeAspect="1"/>
+          </p:cNvSpPr>
+          <p:nvPr>
+            <p:ph type="sldImg"/>
+          </p:nvPr>
+        </p:nvSpPr>
+        <p:spPr/>
+      </p:sp>
+      <p:sp>
+        <p:nvSpPr>
+          <p:cNvPr id="3" name="Notes Placeholder 2"/>
+          <p:cNvSpPr>
+            <a:spLocks noGrp="1"/>
+          </p:cNvSpPr>
+          <p:nvPr>
+            <p:ph type="body" idx="1"/>
+          </p:nvPr>
+        </p:nvSpPr>
+        <p:spPr/>
+        <p:txBody>
+          <a:bodyPr/>
+          <a:lstStyle/>
+          <a:p>
+            <a:r>
+              <a:rPr lang="sv-SE"/>
+              <a:t>Nu skall vi byta spår en stund och prata om arrays istället. </a:t>
+            </a:r>
+          </a:p>
+          <a:p>
+            <a:r>
+              <a:rPr lang="sv-SE"/>
+              <a:t>Ni har stött på arrays förut (i Java) och skrivit sådana här saker. </a:t>
+            </a:r>
+          </a:p>
+          <a:p>
+            <a:endParaRPr lang="LID4096"/>
+          </a:p>
+        </p:txBody>
+      </p:sp>
+      <p:sp>
+        <p:nvSpPr>
+          <p:cNvPr id="4" name="Slide Number Placeholder 3"/>
+          <p:cNvSpPr>
+            <a:spLocks noGrp="1"/>
+          </p:cNvSpPr>
+          <p:nvPr>
+            <p:ph type="sldNum" sz="quarter" idx="5"/>
+          </p:nvPr>
+        </p:nvSpPr>
+        <p:spPr/>
+        <p:txBody>
+          <a:bodyPr/>
+          <a:lstStyle/>
+          <a:p>
+            <a:fld id="{01B4E41B-EE32-43AA-BF26-21D12108C66F}" type="slidenum">
+              <a:rPr lang="LID4096" smtClean="0"/>
+              <a:t>17</a:t>
+            </a:fld>
+            <a:endParaRPr lang="LID4096"/>
+          </a:p>
+        </p:txBody>
+      </p:sp>
+    </p:spTree>
+    <p:extLst>
+      <p:ext uri="{BB962C8B-B14F-4D97-AF65-F5344CB8AC3E}">
+        <p14:creationId xmlns:p14="http://schemas.microsoft.com/office/powerpoint/2010/main" val="1123326930"/>
       </p:ext>
     </p:extLst>
   </p:cSld>
@@ -5439,7 +5642,7 @@
           <p:cNvPr id="2" name="Title 1">
             <a:extLst>
               <a:ext uri="{FF2B5EF4-FFF2-40B4-BE49-F238E27FC236}">
-                <a16:creationId xmlns:a16="http://schemas.microsoft.com/office/drawing/2014/main" id="{AA102AFE-405E-BC06-4384-BFD3BD60FBE9}"/>
+                <a16:creationId xmlns:a16="http://schemas.microsoft.com/office/drawing/2014/main" id="{1235AA07-B2D8-1B70-3C80-CEBB583658C3}"/>
               </a:ext>
             </a:extLst>
           </p:cNvPr>
@@ -5456,7 +5659,7 @@
           <a:lstStyle/>
           <a:p>
             <a:r>
-              <a:rPr lang="sv-SE"/>
+              <a:rPr lang="en-GB"/>
               <a:t>Stacken</a:t>
             </a:r>
             <a:endParaRPr lang="LID4096"/>
@@ -5465,64 +5668,1111 @@
       </p:sp>
       <p:sp>
         <p:nvSpPr>
-          <p:cNvPr id="3" name="Content Placeholder 2">
+          <p:cNvPr id="4" name="Rectangle 3">
             <a:extLst>
               <a:ext uri="{FF2B5EF4-FFF2-40B4-BE49-F238E27FC236}">
-                <a16:creationId xmlns:a16="http://schemas.microsoft.com/office/drawing/2014/main" id="{5735B9B8-F988-19DA-03CB-0FB1F22F9682}"/>
+                <a16:creationId xmlns:a16="http://schemas.microsoft.com/office/drawing/2014/main" id="{2589525E-896C-E730-5F60-2610F49D93D9}"/>
               </a:ext>
             </a:extLst>
           </p:cNvPr>
-          <p:cNvSpPr>
-            <a:spLocks noGrp="1"/>
-          </p:cNvSpPr>
-          <p:nvPr>
-            <p:ph idx="1"/>
-          </p:nvPr>
+          <p:cNvSpPr/>
+          <p:nvPr/>
         </p:nvSpPr>
-        <p:spPr/>
+        <p:spPr>
+          <a:xfrm>
+            <a:off x="9714963" y="2193701"/>
+            <a:ext cx="1360868" cy="4299174"/>
+          </a:xfrm>
+          <a:prstGeom prst="rect">
+            <a:avLst/>
+          </a:prstGeom>
+          <a:solidFill>
+            <a:schemeClr val="bg1">
+              <a:lumMod val="65000"/>
+            </a:schemeClr>
+          </a:solidFill>
+        </p:spPr>
+        <p:style>
+          <a:lnRef idx="2">
+            <a:schemeClr val="accent1">
+              <a:shade val="15000"/>
+            </a:schemeClr>
+          </a:lnRef>
+          <a:fillRef idx="1">
+            <a:schemeClr val="accent1"/>
+          </a:fillRef>
+          <a:effectRef idx="0">
+            <a:schemeClr val="accent1"/>
+          </a:effectRef>
+          <a:fontRef idx="minor">
+            <a:schemeClr val="lt1"/>
+          </a:fontRef>
+        </p:style>
         <p:txBody>
-          <a:bodyPr/>
+          <a:bodyPr rtlCol="0" anchor="ctr"/>
           <a:lstStyle/>
           <a:p>
+            <a:pPr algn="ctr"/>
+            <a:endParaRPr lang="LID4096"/>
+          </a:p>
+        </p:txBody>
+      </p:sp>
+      <p:sp>
+        <p:nvSpPr>
+          <p:cNvPr id="6" name="TextBox 5">
+            <a:extLst>
+              <a:ext uri="{FF2B5EF4-FFF2-40B4-BE49-F238E27FC236}">
+                <a16:creationId xmlns:a16="http://schemas.microsoft.com/office/drawing/2014/main" id="{A479C0A9-756D-D42F-B9AD-6DE58D108F83}"/>
+              </a:ext>
+            </a:extLst>
+          </p:cNvPr>
+          <p:cNvSpPr txBox="1"/>
+          <p:nvPr/>
+        </p:nvSpPr>
+        <p:spPr>
+          <a:xfrm>
+            <a:off x="9714962" y="5969655"/>
+            <a:ext cx="1360867" cy="523220"/>
+          </a:xfrm>
+          <a:prstGeom prst="rect">
+            <a:avLst/>
+          </a:prstGeom>
+          <a:solidFill>
+            <a:schemeClr val="bg1"/>
+          </a:solidFill>
+          <a:ln>
+            <a:solidFill>
+              <a:schemeClr val="tx1"/>
+            </a:solidFill>
+          </a:ln>
+        </p:spPr>
+        <p:txBody>
+          <a:bodyPr wrap="none" rtlCol="0">
+            <a:noAutofit/>
+          </a:bodyPr>
+          <a:lstStyle/>
+          <a:p>
+            <a:pPr algn="ctr"/>
+            <a:r>
+              <a:rPr lang="en-GB" sz="1400"/>
+              <a:t>FLASH</a:t>
+            </a:r>
+            <a:br>
+              <a:rPr lang="en-GB"/>
+            </a:br>
+            <a:r>
+              <a:rPr lang="en-GB" sz="700"/>
+              <a:t>0x00000000-</a:t>
+            </a:r>
+            <a:br>
+              <a:rPr lang="en-GB" sz="700"/>
+            </a:br>
+            <a:r>
+              <a:rPr lang="en-GB" sz="700"/>
+              <a:t>0x00047FFF</a:t>
+            </a:r>
+            <a:endParaRPr lang="LID4096" sz="700"/>
+          </a:p>
+        </p:txBody>
+      </p:sp>
+      <p:sp>
+        <p:nvSpPr>
+          <p:cNvPr id="7" name="TextBox 6">
+            <a:extLst>
+              <a:ext uri="{FF2B5EF4-FFF2-40B4-BE49-F238E27FC236}">
+                <a16:creationId xmlns:a16="http://schemas.microsoft.com/office/drawing/2014/main" id="{369187D8-7DA6-1828-E1C2-74DA6C46C186}"/>
+              </a:ext>
+            </a:extLst>
+          </p:cNvPr>
+          <p:cNvSpPr txBox="1"/>
+          <p:nvPr/>
+        </p:nvSpPr>
+        <p:spPr>
+          <a:xfrm>
+            <a:off x="9714961" y="3661893"/>
+            <a:ext cx="1360867" cy="2056256"/>
+          </a:xfrm>
+          <a:prstGeom prst="rect">
+            <a:avLst/>
+          </a:prstGeom>
+          <a:solidFill>
+            <a:schemeClr val="bg1"/>
+          </a:solidFill>
+          <a:ln>
+            <a:solidFill>
+              <a:schemeClr val="tx1"/>
+            </a:solidFill>
+          </a:ln>
+        </p:spPr>
+        <p:txBody>
+          <a:bodyPr wrap="none" rtlCol="0" anchor="ctr">
+            <a:noAutofit/>
+          </a:bodyPr>
+          <a:lstStyle/>
+          <a:p>
+            <a:pPr algn="ctr"/>
+            <a:r>
+              <a:rPr lang="en-GB" sz="1400"/>
+              <a:t>SRAM</a:t>
+            </a:r>
+            <a:br>
+              <a:rPr lang="en-GB" sz="1400"/>
+            </a:br>
+            <a:r>
+              <a:rPr lang="en-GB" sz="700"/>
+              <a:t>0x20000000-</a:t>
+            </a:r>
+            <a:br>
+              <a:rPr lang="en-GB" sz="700"/>
+            </a:br>
+            <a:r>
+              <a:rPr lang="en-GB" sz="700"/>
+              <a:t>0x2001FFFF</a:t>
+            </a:r>
+            <a:endParaRPr lang="LID4096" sz="700"/>
+          </a:p>
+        </p:txBody>
+      </p:sp>
+      <p:sp>
+        <p:nvSpPr>
+          <p:cNvPr id="8" name="TextBox 7">
+            <a:extLst>
+              <a:ext uri="{FF2B5EF4-FFF2-40B4-BE49-F238E27FC236}">
+                <a16:creationId xmlns:a16="http://schemas.microsoft.com/office/drawing/2014/main" id="{39A989CA-E2CA-C771-F95C-7C29D17111D8}"/>
+              </a:ext>
+            </a:extLst>
+          </p:cNvPr>
+          <p:cNvSpPr txBox="1"/>
+          <p:nvPr/>
+        </p:nvSpPr>
+        <p:spPr>
+          <a:xfrm>
+            <a:off x="9714960" y="2580067"/>
+            <a:ext cx="1360867" cy="830319"/>
+          </a:xfrm>
+          <a:prstGeom prst="rect">
+            <a:avLst/>
+          </a:prstGeom>
+          <a:solidFill>
+            <a:schemeClr val="bg1"/>
+          </a:solidFill>
+          <a:ln>
+            <a:solidFill>
+              <a:schemeClr val="tx1"/>
+            </a:solidFill>
+          </a:ln>
+        </p:spPr>
+        <p:txBody>
+          <a:bodyPr wrap="none" rtlCol="0" anchor="ctr">
+            <a:noAutofit/>
+          </a:bodyPr>
+          <a:lstStyle/>
+          <a:p>
+            <a:pPr algn="ctr"/>
+            <a:r>
+              <a:rPr lang="en-GB" sz="1400"/>
+              <a:t>Peripherals</a:t>
+            </a:r>
+            <a:br>
+              <a:rPr lang="en-GB" sz="1400"/>
+            </a:br>
+            <a:r>
+              <a:rPr lang="en-GB" sz="700"/>
+              <a:t>0x40000000-</a:t>
+            </a:r>
+            <a:br>
+              <a:rPr lang="en-GB" sz="700"/>
+            </a:br>
+            <a:r>
+              <a:rPr lang="en-GB" sz="700"/>
+              <a:t>0x40007FFF</a:t>
+            </a:r>
+            <a:endParaRPr lang="LID4096" sz="700"/>
+          </a:p>
+        </p:txBody>
+      </p:sp>
+      <p:sp>
+        <p:nvSpPr>
+          <p:cNvPr id="10" name="TextBox 9">
+            <a:extLst>
+              <a:ext uri="{FF2B5EF4-FFF2-40B4-BE49-F238E27FC236}">
+                <a16:creationId xmlns:a16="http://schemas.microsoft.com/office/drawing/2014/main" id="{B8652EB4-3CF1-DD7A-B927-44B2223EDB5D}"/>
+              </a:ext>
+            </a:extLst>
+          </p:cNvPr>
+          <p:cNvSpPr txBox="1"/>
+          <p:nvPr/>
+        </p:nvSpPr>
+        <p:spPr>
+          <a:xfrm>
+            <a:off x="9755746" y="5014175"/>
+            <a:ext cx="1294328" cy="665184"/>
+          </a:xfrm>
+          <a:prstGeom prst="rect">
+            <a:avLst/>
+          </a:prstGeom>
+          <a:solidFill>
+            <a:schemeClr val="bg1">
+              <a:lumMod val="95000"/>
+            </a:schemeClr>
+          </a:solidFill>
+          <a:ln>
+            <a:solidFill>
+              <a:schemeClr val="tx1"/>
+            </a:solidFill>
+          </a:ln>
+        </p:spPr>
+        <p:txBody>
+          <a:bodyPr wrap="none" rtlCol="0">
+            <a:noAutofit/>
+          </a:bodyPr>
+          <a:lstStyle/>
+          <a:p>
+            <a:pPr algn="ctr"/>
+            <a:r>
+              <a:rPr lang="en-GB" sz="1400"/>
+              <a:t>your code</a:t>
+            </a:r>
+            <a:br>
+              <a:rPr lang="en-GB" sz="1400"/>
+            </a:br>
+            <a:r>
+              <a:rPr lang="en-GB" sz="1400"/>
+              <a:t>goes here</a:t>
+            </a:r>
+            <a:br>
+              <a:rPr lang="en-GB" sz="1400"/>
+            </a:br>
+            <a:r>
+              <a:rPr lang="en-GB" sz="700"/>
+              <a:t>0x20000000-0x???</a:t>
+            </a:r>
+            <a:br>
+              <a:rPr lang="en-GB" sz="700"/>
+            </a:br>
+            <a:endParaRPr lang="LID4096" sz="700"/>
+          </a:p>
+        </p:txBody>
+      </p:sp>
+      <p:sp>
+        <p:nvSpPr>
+          <p:cNvPr id="11" name="TextBox 10">
+            <a:extLst>
+              <a:ext uri="{FF2B5EF4-FFF2-40B4-BE49-F238E27FC236}">
+                <a16:creationId xmlns:a16="http://schemas.microsoft.com/office/drawing/2014/main" id="{66C333DF-27D1-1A9F-7986-942B534D84BD}"/>
+              </a:ext>
+            </a:extLst>
+          </p:cNvPr>
+          <p:cNvSpPr txBox="1"/>
+          <p:nvPr/>
+        </p:nvSpPr>
+        <p:spPr>
+          <a:xfrm>
+            <a:off x="9755746" y="3692244"/>
+            <a:ext cx="1294328" cy="665184"/>
+          </a:xfrm>
+          <a:prstGeom prst="rect">
+            <a:avLst/>
+          </a:prstGeom>
+          <a:solidFill>
+            <a:schemeClr val="bg1">
+              <a:lumMod val="95000"/>
+            </a:schemeClr>
+          </a:solidFill>
+          <a:ln>
+            <a:solidFill>
+              <a:schemeClr val="tx1"/>
+            </a:solidFill>
+          </a:ln>
+        </p:spPr>
+        <p:txBody>
+          <a:bodyPr wrap="none" rtlCol="0">
+            <a:noAutofit/>
+          </a:bodyPr>
+          <a:lstStyle/>
+          <a:p>
+            <a:pPr algn="ctr"/>
+            <a:r>
+              <a:rPr lang="en-GB" sz="1400"/>
+              <a:t>stack goes here</a:t>
+            </a:r>
+            <a:br>
+              <a:rPr lang="en-GB" sz="1400"/>
+            </a:br>
+            <a:r>
+              <a:rPr lang="en-GB" sz="700"/>
+              <a:t>0x???-</a:t>
+            </a:r>
+            <a:br>
+              <a:rPr lang="en-GB" sz="700"/>
+            </a:br>
+            <a:r>
+              <a:rPr lang="en-GB" sz="700"/>
+              <a:t>0x2001FFFF</a:t>
+            </a:r>
+            <a:br>
+              <a:rPr lang="en-GB" sz="700"/>
+            </a:br>
+            <a:endParaRPr lang="LID4096" sz="700"/>
+          </a:p>
+        </p:txBody>
+      </p:sp>
+      <p:sp>
+        <p:nvSpPr>
+          <p:cNvPr id="12" name="TextBox 11">
+            <a:extLst>
+              <a:ext uri="{FF2B5EF4-FFF2-40B4-BE49-F238E27FC236}">
+                <a16:creationId xmlns:a16="http://schemas.microsoft.com/office/drawing/2014/main" id="{5AD5499F-144B-7272-14FF-2015A30869DF}"/>
+              </a:ext>
+            </a:extLst>
+          </p:cNvPr>
+          <p:cNvSpPr txBox="1"/>
+          <p:nvPr/>
+        </p:nvSpPr>
+        <p:spPr>
+          <a:xfrm>
+            <a:off x="598959" y="2653017"/>
+            <a:ext cx="4033142" cy="2585323"/>
+          </a:xfrm>
+          <a:prstGeom prst="rect">
+            <a:avLst/>
+          </a:prstGeom>
+          <a:solidFill>
+            <a:schemeClr val="bg1"/>
+          </a:solidFill>
+          <a:ln>
+            <a:solidFill>
+              <a:schemeClr val="accent1">
+                <a:shade val="15000"/>
+              </a:schemeClr>
+            </a:solidFill>
+          </a:ln>
+        </p:spPr>
+        <p:txBody>
+          <a:bodyPr wrap="square" rtlCol="0">
+            <a:spAutoFit/>
+          </a:bodyPr>
+          <a:lstStyle/>
+          <a:p>
+            <a:r>
+              <a:rPr lang="sv-SE" b="1"/>
+              <a:t>FLISP</a:t>
+            </a:r>
             <a:r>
               <a:rPr lang="sv-SE"/>
-              <a:t>Visa bild på stackens plats i minnet</a:t>
-            </a:r>
-          </a:p>
-          <a:p>
+              <a:t> (och </a:t>
+            </a:r>
+            <a:r>
+              <a:rPr lang="sv-SE" dirty="0"/>
+              <a:t>x86</a:t>
+            </a:r>
             <a:r>
               <a:rPr lang="sv-SE"/>
-              <a:t>Inga push och pop. Vi håller själva koll på stackpekaren. </a:t>
-            </a:r>
-          </a:p>
-          <a:p>
-            <a:r>
-              <a:rPr lang="sv-SE"/>
-              <a:t>Gör ett exempel (Låtsas att vi bara har litet antal register)</a:t>
-            </a:r>
-          </a:p>
-          <a:p>
-            <a:pPr lvl="1"/>
-            <a:r>
-              <a:rPr lang="sv-SE"/>
-              <a:t>Samma sak händer i verkligheten, fast i mycket mer komplicerade program</a:t>
-            </a:r>
-          </a:p>
-          <a:p>
-            <a:endParaRPr lang="LID4096"/>
+              <a:t>, och (äldre) ARM</a:t>
+            </a:r>
+            <a:r>
+              <a:rPr lang="sv-SE" dirty="0"/>
+              <a:t>):</a:t>
+            </a:r>
+          </a:p>
+          <a:p>
+            <a:endParaRPr lang="sv-SE"/>
+          </a:p>
+          <a:p>
+            <a:r>
+              <a:rPr lang="sv-SE" sz="1400">
+                <a:latin typeface="Consolas" panose="020B0609020204030204" pitchFamily="49" charset="0"/>
+              </a:rPr>
+              <a:t># Vi behöver spara undan ett</a:t>
+            </a:r>
+            <a:br>
+              <a:rPr lang="sv-SE" sz="1400">
+                <a:latin typeface="Consolas" panose="020B0609020204030204" pitchFamily="49" charset="0"/>
+              </a:rPr>
+            </a:br>
+            <a:r>
+              <a:rPr lang="sv-SE" sz="1400">
+                <a:latin typeface="Consolas" panose="020B0609020204030204" pitchFamily="49" charset="0"/>
+              </a:rPr>
+              <a:t># register för det behövs till </a:t>
+            </a:r>
+            <a:br>
+              <a:rPr lang="sv-SE" sz="1400">
+                <a:latin typeface="Consolas" panose="020B0609020204030204" pitchFamily="49" charset="0"/>
+              </a:rPr>
+            </a:br>
+            <a:r>
+              <a:rPr lang="sv-SE" sz="1400">
+                <a:latin typeface="Consolas" panose="020B0609020204030204" pitchFamily="49" charset="0"/>
+              </a:rPr>
+              <a:t># annat</a:t>
+            </a:r>
+          </a:p>
+          <a:p>
+            <a:r>
+              <a:rPr lang="sv-SE" sz="1400">
+                <a:latin typeface="Consolas" panose="020B0609020204030204" pitchFamily="49" charset="0"/>
+              </a:rPr>
+              <a:t>PUSH r0</a:t>
+            </a:r>
+          </a:p>
+          <a:p>
+            <a:br>
+              <a:rPr lang="sv-SE" sz="1400">
+                <a:latin typeface="Consolas" panose="020B0609020204030204" pitchFamily="49" charset="0"/>
+              </a:rPr>
+            </a:br>
+            <a:r>
+              <a:rPr lang="sv-SE" sz="1400">
+                <a:latin typeface="Consolas" panose="020B0609020204030204" pitchFamily="49" charset="0"/>
+              </a:rPr>
+              <a:t># Nu kan vi använda registret</a:t>
+            </a:r>
+            <a:br>
+              <a:rPr lang="sv-SE" sz="1400">
+                <a:latin typeface="Consolas" panose="020B0609020204030204" pitchFamily="49" charset="0"/>
+              </a:rPr>
+            </a:br>
+            <a:endParaRPr lang="sv-SE" sz="1400">
+              <a:latin typeface="Consolas" panose="020B0609020204030204" pitchFamily="49" charset="0"/>
+            </a:endParaRPr>
+          </a:p>
+          <a:p>
+            <a:r>
+              <a:rPr lang="sv-SE" sz="1400">
+                <a:latin typeface="Consolas" panose="020B0609020204030204" pitchFamily="49" charset="0"/>
+              </a:rPr>
+              <a:t># Återställ registrets värde</a:t>
+            </a:r>
+          </a:p>
+          <a:p>
+            <a:r>
+              <a:rPr lang="sv-SE" sz="1400">
+                <a:latin typeface="Consolas" panose="020B0609020204030204" pitchFamily="49" charset="0"/>
+              </a:rPr>
+              <a:t>POP r0</a:t>
+            </a:r>
+            <a:endParaRPr lang="sv-SE" sz="1400" dirty="0">
+              <a:latin typeface="Consolas" panose="020B0609020204030204" pitchFamily="49" charset="0"/>
+            </a:endParaRPr>
+          </a:p>
+        </p:txBody>
+      </p:sp>
+      <p:sp>
+        <p:nvSpPr>
+          <p:cNvPr id="13" name="TextBox 12">
+            <a:extLst>
+              <a:ext uri="{FF2B5EF4-FFF2-40B4-BE49-F238E27FC236}">
+                <a16:creationId xmlns:a16="http://schemas.microsoft.com/office/drawing/2014/main" id="{987E1581-D1D8-9977-089B-29DAC5717E44}"/>
+              </a:ext>
+            </a:extLst>
+          </p:cNvPr>
+          <p:cNvSpPr txBox="1"/>
+          <p:nvPr/>
+        </p:nvSpPr>
+        <p:spPr>
+          <a:xfrm>
+            <a:off x="5170405" y="2653017"/>
+            <a:ext cx="4317032" cy="2800767"/>
+          </a:xfrm>
+          <a:prstGeom prst="rect">
+            <a:avLst/>
+          </a:prstGeom>
+          <a:solidFill>
+            <a:schemeClr val="bg1"/>
+          </a:solidFill>
+          <a:ln>
+            <a:solidFill>
+              <a:schemeClr val="accent1">
+                <a:shade val="15000"/>
+              </a:schemeClr>
+            </a:solidFill>
+          </a:ln>
+        </p:spPr>
+        <p:txBody>
+          <a:bodyPr wrap="square" rtlCol="0">
+            <a:spAutoFit/>
+          </a:bodyPr>
+          <a:lstStyle/>
+          <a:p>
+            <a:r>
+              <a:rPr lang="sv-SE" b="1"/>
+              <a:t>RISC-V:</a:t>
+            </a:r>
+          </a:p>
+          <a:p>
+            <a:endParaRPr lang="sv-SE" b="1"/>
+          </a:p>
+          <a:p>
+            <a:r>
+              <a:rPr lang="sv-SE" sz="1400">
+                <a:latin typeface="Consolas" panose="020B0609020204030204" pitchFamily="49" charset="0"/>
+              </a:rPr>
+              <a:t># Vi behöver spara undan ett</a:t>
+            </a:r>
+            <a:br>
+              <a:rPr lang="sv-SE" sz="1400">
+                <a:latin typeface="Consolas" panose="020B0609020204030204" pitchFamily="49" charset="0"/>
+              </a:rPr>
+            </a:br>
+            <a:r>
+              <a:rPr lang="sv-SE" sz="1400">
+                <a:latin typeface="Consolas" panose="020B0609020204030204" pitchFamily="49" charset="0"/>
+              </a:rPr>
+              <a:t># register för det behövs till </a:t>
+            </a:r>
+            <a:br>
+              <a:rPr lang="sv-SE" sz="1400">
+                <a:latin typeface="Consolas" panose="020B0609020204030204" pitchFamily="49" charset="0"/>
+              </a:rPr>
+            </a:br>
+            <a:r>
+              <a:rPr lang="sv-SE" sz="1400">
+                <a:latin typeface="Consolas" panose="020B0609020204030204" pitchFamily="49" charset="0"/>
+              </a:rPr>
+              <a:t># annat</a:t>
+            </a:r>
+          </a:p>
+          <a:p>
+            <a:r>
+              <a:rPr lang="sv-SE" sz="1400">
+                <a:latin typeface="Consolas" panose="020B0609020204030204" pitchFamily="49" charset="0"/>
+              </a:rPr>
+              <a:t>sw t0, 0(sp)    # Spara t0 till M(sp)</a:t>
+            </a:r>
+          </a:p>
+          <a:p>
+            <a:r>
+              <a:rPr lang="sv-SE" sz="1400">
+                <a:latin typeface="Consolas" panose="020B0609020204030204" pitchFamily="49" charset="0"/>
+              </a:rPr>
+              <a:t>addi sp, sp, -4 # Flytta ned stackpekaren</a:t>
+            </a:r>
+            <a:br>
+              <a:rPr lang="sv-SE" sz="1400">
+                <a:latin typeface="Consolas" panose="020B0609020204030204" pitchFamily="49" charset="0"/>
+              </a:rPr>
+            </a:br>
+            <a:endParaRPr lang="sv-SE" sz="1400">
+              <a:latin typeface="Consolas" panose="020B0609020204030204" pitchFamily="49" charset="0"/>
+            </a:endParaRPr>
+          </a:p>
+          <a:p>
+            <a:r>
+              <a:rPr lang="sv-SE" sz="1400">
+                <a:latin typeface="Consolas" panose="020B0609020204030204" pitchFamily="49" charset="0"/>
+              </a:rPr>
+              <a:t># Nu kan vi använda registret</a:t>
+            </a:r>
+          </a:p>
+          <a:p>
+            <a:endParaRPr lang="sv-SE" sz="1400">
+              <a:latin typeface="Consolas" panose="020B0609020204030204" pitchFamily="49" charset="0"/>
+            </a:endParaRPr>
+          </a:p>
+          <a:p>
+            <a:r>
+              <a:rPr lang="sv-SE" sz="1400">
+                <a:latin typeface="Consolas" panose="020B0609020204030204" pitchFamily="49" charset="0"/>
+              </a:rPr>
+              <a:t>addi sp, sp, 4 # Flytta upp stackpekaren</a:t>
+            </a:r>
+          </a:p>
+          <a:p>
+            <a:r>
+              <a:rPr lang="sv-SE" sz="1400">
+                <a:latin typeface="Consolas" panose="020B0609020204030204" pitchFamily="49" charset="0"/>
+              </a:rPr>
+              <a:t>lw t0, 0(sp)</a:t>
+            </a:r>
+            <a:endParaRPr lang="sv-SE" b="1" dirty="0"/>
+          </a:p>
+        </p:txBody>
+      </p:sp>
+      <p:sp>
+        <p:nvSpPr>
+          <p:cNvPr id="14" name="TextBox 13">
+            <a:extLst>
+              <a:ext uri="{FF2B5EF4-FFF2-40B4-BE49-F238E27FC236}">
+                <a16:creationId xmlns:a16="http://schemas.microsoft.com/office/drawing/2014/main" id="{FB555DD4-2E97-B7E2-43C6-70DF2343D774}"/>
+              </a:ext>
+            </a:extLst>
+          </p:cNvPr>
+          <p:cNvSpPr txBox="1"/>
+          <p:nvPr/>
+        </p:nvSpPr>
+        <p:spPr>
+          <a:xfrm>
+            <a:off x="1518402" y="3684068"/>
+            <a:ext cx="3382851" cy="523220"/>
+          </a:xfrm>
+          <a:prstGeom prst="rect">
+            <a:avLst/>
+          </a:prstGeom>
+          <a:solidFill>
+            <a:schemeClr val="bg1"/>
+          </a:solidFill>
+          <a:ln>
+            <a:solidFill>
+              <a:schemeClr val="accent1">
+                <a:shade val="15000"/>
+              </a:schemeClr>
+            </a:solidFill>
+          </a:ln>
+          <a:effectLst>
+            <a:outerShdw blurRad="50800" dist="38100" dir="2700000" algn="tl" rotWithShape="0">
+              <a:prstClr val="black">
+                <a:alpha val="40000"/>
+              </a:prstClr>
+            </a:outerShdw>
+          </a:effectLst>
+        </p:spPr>
+        <p:txBody>
+          <a:bodyPr wrap="square" rtlCol="0">
+            <a:spAutoFit/>
+          </a:bodyPr>
+          <a:lstStyle/>
+          <a:p>
+            <a:r>
+              <a:rPr lang="sv-SE" sz="1400"/>
+              <a:t>Spara r0 till M(sp)</a:t>
+            </a:r>
+            <a:br>
+              <a:rPr lang="sv-SE" sz="1400"/>
+            </a:br>
+            <a:r>
+              <a:rPr lang="sv-SE" sz="1400"/>
+              <a:t>Flytta ned stackpekaren, </a:t>
+            </a:r>
+            <a:endParaRPr lang="LID4096" sz="1400" dirty="0"/>
+          </a:p>
+        </p:txBody>
+      </p:sp>
+      <p:sp>
+        <p:nvSpPr>
+          <p:cNvPr id="15" name="TextBox 14">
+            <a:extLst>
+              <a:ext uri="{FF2B5EF4-FFF2-40B4-BE49-F238E27FC236}">
+                <a16:creationId xmlns:a16="http://schemas.microsoft.com/office/drawing/2014/main" id="{4982AC7F-008F-D140-17D2-EE7BE7C3AE7D}"/>
+              </a:ext>
+            </a:extLst>
+          </p:cNvPr>
+          <p:cNvSpPr txBox="1"/>
+          <p:nvPr/>
+        </p:nvSpPr>
+        <p:spPr>
+          <a:xfrm>
+            <a:off x="1416674" y="5014175"/>
+            <a:ext cx="3382851" cy="523220"/>
+          </a:xfrm>
+          <a:prstGeom prst="rect">
+            <a:avLst/>
+          </a:prstGeom>
+          <a:solidFill>
+            <a:schemeClr val="bg1"/>
+          </a:solidFill>
+          <a:ln>
+            <a:solidFill>
+              <a:schemeClr val="accent1">
+                <a:shade val="15000"/>
+              </a:schemeClr>
+            </a:solidFill>
+          </a:ln>
+          <a:effectLst>
+            <a:outerShdw blurRad="50800" dist="38100" dir="2700000" algn="tl" rotWithShape="0">
+              <a:prstClr val="black">
+                <a:alpha val="40000"/>
+              </a:prstClr>
+            </a:outerShdw>
+          </a:effectLst>
+        </p:spPr>
+        <p:txBody>
+          <a:bodyPr wrap="square" rtlCol="0">
+            <a:spAutoFit/>
+          </a:bodyPr>
+          <a:lstStyle/>
+          <a:p>
+            <a:r>
+              <a:rPr lang="sv-SE" sz="1400"/>
+              <a:t>Flytta upp stackpekaren</a:t>
+            </a:r>
+            <a:br>
+              <a:rPr lang="sv-SE" sz="1400"/>
+            </a:br>
+            <a:r>
+              <a:rPr lang="sv-SE" sz="1400"/>
+              <a:t>Läs tillbaka r0 från M(sp)</a:t>
+            </a:r>
+            <a:endParaRPr lang="LID4096" sz="1400" dirty="0"/>
           </a:p>
         </p:txBody>
       </p:sp>
     </p:spTree>
     <p:extLst>
       <p:ext uri="{BB962C8B-B14F-4D97-AF65-F5344CB8AC3E}">
-        <p14:creationId xmlns:p14="http://schemas.microsoft.com/office/powerpoint/2010/main" val="1932440338"/>
+        <p14:creationId xmlns:p14="http://schemas.microsoft.com/office/powerpoint/2010/main" val="3526660466"/>
       </p:ext>
     </p:extLst>
   </p:cSld>
   <p:clrMapOvr>
     <a:masterClrMapping/>
   </p:clrMapOvr>
+  <p:timing>
+    <p:tnLst>
+      <p:par>
+        <p:cTn id="1" dur="indefinite" restart="never" nodeType="tmRoot">
+          <p:childTnLst>
+            <p:seq concurrent="1" nextAc="seek">
+              <p:cTn id="2" dur="indefinite" nodeType="mainSeq">
+                <p:childTnLst>
+                  <p:par>
+                    <p:cTn id="3" fill="hold">
+                      <p:stCondLst>
+                        <p:cond delay="indefinite"/>
+                      </p:stCondLst>
+                      <p:childTnLst>
+                        <p:par>
+                          <p:cTn id="4" fill="hold">
+                            <p:stCondLst>
+                              <p:cond delay="0"/>
+                            </p:stCondLst>
+                            <p:childTnLst>
+                              <p:par>
+                                <p:cTn id="5" presetID="10" presetClass="entr" presetSubtype="0" fill="hold" grpId="0" nodeType="clickEffect">
+                                  <p:stCondLst>
+                                    <p:cond delay="0"/>
+                                  </p:stCondLst>
+                                  <p:childTnLst>
+                                    <p:set>
+                                      <p:cBhvr>
+                                        <p:cTn id="6" dur="1" fill="hold">
+                                          <p:stCondLst>
+                                            <p:cond delay="0"/>
+                                          </p:stCondLst>
+                                        </p:cTn>
+                                        <p:tgtEl>
+                                          <p:spTgt spid="10"/>
+                                        </p:tgtEl>
+                                        <p:attrNameLst>
+                                          <p:attrName>style.visibility</p:attrName>
+                                        </p:attrNameLst>
+                                      </p:cBhvr>
+                                      <p:to>
+                                        <p:strVal val="visible"/>
+                                      </p:to>
+                                    </p:set>
+                                    <p:animEffect transition="in" filter="fade">
+                                      <p:cBhvr>
+                                        <p:cTn id="7" dur="500"/>
+                                        <p:tgtEl>
+                                          <p:spTgt spid="10"/>
+                                        </p:tgtEl>
+                                      </p:cBhvr>
+                                    </p:animEffect>
+                                  </p:childTnLst>
+                                </p:cTn>
+                              </p:par>
+                            </p:childTnLst>
+                          </p:cTn>
+                        </p:par>
+                      </p:childTnLst>
+                    </p:cTn>
+                  </p:par>
+                  <p:par>
+                    <p:cTn id="8" fill="hold">
+                      <p:stCondLst>
+                        <p:cond delay="indefinite"/>
+                      </p:stCondLst>
+                      <p:childTnLst>
+                        <p:par>
+                          <p:cTn id="9" fill="hold">
+                            <p:stCondLst>
+                              <p:cond delay="0"/>
+                            </p:stCondLst>
+                            <p:childTnLst>
+                              <p:par>
+                                <p:cTn id="10" presetID="10" presetClass="entr" presetSubtype="0" fill="hold" grpId="0" nodeType="clickEffect">
+                                  <p:stCondLst>
+                                    <p:cond delay="0"/>
+                                  </p:stCondLst>
+                                  <p:childTnLst>
+                                    <p:set>
+                                      <p:cBhvr>
+                                        <p:cTn id="11" dur="1" fill="hold">
+                                          <p:stCondLst>
+                                            <p:cond delay="0"/>
+                                          </p:stCondLst>
+                                        </p:cTn>
+                                        <p:tgtEl>
+                                          <p:spTgt spid="11"/>
+                                        </p:tgtEl>
+                                        <p:attrNameLst>
+                                          <p:attrName>style.visibility</p:attrName>
+                                        </p:attrNameLst>
+                                      </p:cBhvr>
+                                      <p:to>
+                                        <p:strVal val="visible"/>
+                                      </p:to>
+                                    </p:set>
+                                    <p:animEffect transition="in" filter="fade">
+                                      <p:cBhvr>
+                                        <p:cTn id="12" dur="500"/>
+                                        <p:tgtEl>
+                                          <p:spTgt spid="11"/>
+                                        </p:tgtEl>
+                                      </p:cBhvr>
+                                    </p:animEffect>
+                                  </p:childTnLst>
+                                </p:cTn>
+                              </p:par>
+                            </p:childTnLst>
+                          </p:cTn>
+                        </p:par>
+                      </p:childTnLst>
+                    </p:cTn>
+                  </p:par>
+                  <p:par>
+                    <p:cTn id="13" fill="hold">
+                      <p:stCondLst>
+                        <p:cond delay="indefinite"/>
+                      </p:stCondLst>
+                      <p:childTnLst>
+                        <p:par>
+                          <p:cTn id="14" fill="hold">
+                            <p:stCondLst>
+                              <p:cond delay="0"/>
+                            </p:stCondLst>
+                            <p:childTnLst>
+                              <p:par>
+                                <p:cTn id="15" presetID="10" presetClass="entr" presetSubtype="0" fill="hold" grpId="0" nodeType="clickEffect">
+                                  <p:stCondLst>
+                                    <p:cond delay="0"/>
+                                  </p:stCondLst>
+                                  <p:childTnLst>
+                                    <p:set>
+                                      <p:cBhvr>
+                                        <p:cTn id="16" dur="1" fill="hold">
+                                          <p:stCondLst>
+                                            <p:cond delay="0"/>
+                                          </p:stCondLst>
+                                        </p:cTn>
+                                        <p:tgtEl>
+                                          <p:spTgt spid="12"/>
+                                        </p:tgtEl>
+                                        <p:attrNameLst>
+                                          <p:attrName>style.visibility</p:attrName>
+                                        </p:attrNameLst>
+                                      </p:cBhvr>
+                                      <p:to>
+                                        <p:strVal val="visible"/>
+                                      </p:to>
+                                    </p:set>
+                                    <p:animEffect transition="in" filter="fade">
+                                      <p:cBhvr>
+                                        <p:cTn id="17" dur="500"/>
+                                        <p:tgtEl>
+                                          <p:spTgt spid="12"/>
+                                        </p:tgtEl>
+                                      </p:cBhvr>
+                                    </p:animEffect>
+                                  </p:childTnLst>
+                                </p:cTn>
+                              </p:par>
+                            </p:childTnLst>
+                          </p:cTn>
+                        </p:par>
+                      </p:childTnLst>
+                    </p:cTn>
+                  </p:par>
+                  <p:par>
+                    <p:cTn id="18" fill="hold">
+                      <p:stCondLst>
+                        <p:cond delay="indefinite"/>
+                      </p:stCondLst>
+                      <p:childTnLst>
+                        <p:par>
+                          <p:cTn id="19" fill="hold">
+                            <p:stCondLst>
+                              <p:cond delay="0"/>
+                            </p:stCondLst>
+                            <p:childTnLst>
+                              <p:par>
+                                <p:cTn id="20" presetID="10" presetClass="entr" presetSubtype="0" fill="hold" grpId="0" nodeType="clickEffect">
+                                  <p:stCondLst>
+                                    <p:cond delay="0"/>
+                                  </p:stCondLst>
+                                  <p:childTnLst>
+                                    <p:set>
+                                      <p:cBhvr>
+                                        <p:cTn id="21" dur="1" fill="hold">
+                                          <p:stCondLst>
+                                            <p:cond delay="0"/>
+                                          </p:stCondLst>
+                                        </p:cTn>
+                                        <p:tgtEl>
+                                          <p:spTgt spid="14"/>
+                                        </p:tgtEl>
+                                        <p:attrNameLst>
+                                          <p:attrName>style.visibility</p:attrName>
+                                        </p:attrNameLst>
+                                      </p:cBhvr>
+                                      <p:to>
+                                        <p:strVal val="visible"/>
+                                      </p:to>
+                                    </p:set>
+                                    <p:animEffect transition="in" filter="fade">
+                                      <p:cBhvr>
+                                        <p:cTn id="22" dur="500"/>
+                                        <p:tgtEl>
+                                          <p:spTgt spid="14"/>
+                                        </p:tgtEl>
+                                      </p:cBhvr>
+                                    </p:animEffect>
+                                  </p:childTnLst>
+                                </p:cTn>
+                              </p:par>
+                            </p:childTnLst>
+                          </p:cTn>
+                        </p:par>
+                      </p:childTnLst>
+                    </p:cTn>
+                  </p:par>
+                  <p:par>
+                    <p:cTn id="23" fill="hold">
+                      <p:stCondLst>
+                        <p:cond delay="indefinite"/>
+                      </p:stCondLst>
+                      <p:childTnLst>
+                        <p:par>
+                          <p:cTn id="24" fill="hold">
+                            <p:stCondLst>
+                              <p:cond delay="0"/>
+                            </p:stCondLst>
+                            <p:childTnLst>
+                              <p:par>
+                                <p:cTn id="25" presetID="10" presetClass="entr" presetSubtype="0" fill="hold" grpId="0" nodeType="clickEffect">
+                                  <p:stCondLst>
+                                    <p:cond delay="0"/>
+                                  </p:stCondLst>
+                                  <p:childTnLst>
+                                    <p:set>
+                                      <p:cBhvr>
+                                        <p:cTn id="26" dur="1" fill="hold">
+                                          <p:stCondLst>
+                                            <p:cond delay="0"/>
+                                          </p:stCondLst>
+                                        </p:cTn>
+                                        <p:tgtEl>
+                                          <p:spTgt spid="15"/>
+                                        </p:tgtEl>
+                                        <p:attrNameLst>
+                                          <p:attrName>style.visibility</p:attrName>
+                                        </p:attrNameLst>
+                                      </p:cBhvr>
+                                      <p:to>
+                                        <p:strVal val="visible"/>
+                                      </p:to>
+                                    </p:set>
+                                    <p:animEffect transition="in" filter="fade">
+                                      <p:cBhvr>
+                                        <p:cTn id="27" dur="500"/>
+                                        <p:tgtEl>
+                                          <p:spTgt spid="15"/>
+                                        </p:tgtEl>
+                                      </p:cBhvr>
+                                    </p:animEffect>
+                                  </p:childTnLst>
+                                </p:cTn>
+                              </p:par>
+                            </p:childTnLst>
+                          </p:cTn>
+                        </p:par>
+                      </p:childTnLst>
+                    </p:cTn>
+                  </p:par>
+                  <p:par>
+                    <p:cTn id="28" fill="hold">
+                      <p:stCondLst>
+                        <p:cond delay="indefinite"/>
+                      </p:stCondLst>
+                      <p:childTnLst>
+                        <p:par>
+                          <p:cTn id="29" fill="hold">
+                            <p:stCondLst>
+                              <p:cond delay="0"/>
+                            </p:stCondLst>
+                            <p:childTnLst>
+                              <p:par>
+                                <p:cTn id="30" presetID="10" presetClass="entr" presetSubtype="0" fill="hold" grpId="0" nodeType="clickEffect">
+                                  <p:stCondLst>
+                                    <p:cond delay="0"/>
+                                  </p:stCondLst>
+                                  <p:childTnLst>
+                                    <p:set>
+                                      <p:cBhvr>
+                                        <p:cTn id="31" dur="1" fill="hold">
+                                          <p:stCondLst>
+                                            <p:cond delay="0"/>
+                                          </p:stCondLst>
+                                        </p:cTn>
+                                        <p:tgtEl>
+                                          <p:spTgt spid="13"/>
+                                        </p:tgtEl>
+                                        <p:attrNameLst>
+                                          <p:attrName>style.visibility</p:attrName>
+                                        </p:attrNameLst>
+                                      </p:cBhvr>
+                                      <p:to>
+                                        <p:strVal val="visible"/>
+                                      </p:to>
+                                    </p:set>
+                                    <p:animEffect transition="in" filter="fade">
+                                      <p:cBhvr>
+                                        <p:cTn id="32" dur="500"/>
+                                        <p:tgtEl>
+                                          <p:spTgt spid="13"/>
+                                        </p:tgtEl>
+                                      </p:cBhvr>
+                                    </p:animEffect>
+                                  </p:childTnLst>
+                                </p:cTn>
+                              </p:par>
+                            </p:childTnLst>
+                          </p:cTn>
+                        </p:par>
+                      </p:childTnLst>
+                    </p:cTn>
+                  </p:par>
+                </p:childTnLst>
+              </p:cTn>
+              <p:prevCondLst>
+                <p:cond evt="onPrev" delay="0">
+                  <p:tgtEl>
+                    <p:sldTgt/>
+                  </p:tgtEl>
+                </p:cond>
+              </p:prevCondLst>
+              <p:nextCondLst>
+                <p:cond evt="onNext" delay="0">
+                  <p:tgtEl>
+                    <p:sldTgt/>
+                  </p:tgtEl>
+                </p:cond>
+              </p:nextCondLst>
+            </p:seq>
+          </p:childTnLst>
+        </p:cTn>
+      </p:par>
+    </p:tnLst>
+    <p:bldLst>
+      <p:bldP spid="10" grpId="0" animBg="1"/>
+      <p:bldP spid="11" grpId="0" animBg="1"/>
+      <p:bldP spid="12" grpId="0" animBg="1"/>
+      <p:bldP spid="13" grpId="0" animBg="1"/>
+      <p:bldP spid="14" grpId="0" animBg="1"/>
+      <p:bldP spid="15" grpId="0" animBg="1"/>
+    </p:bldLst>
+  </p:timing>
 </p:sld>
 </file>
 
@@ -5548,7 +6798,7 @@
           <p:cNvPr id="2" name="Title 1">
             <a:extLst>
               <a:ext uri="{FF2B5EF4-FFF2-40B4-BE49-F238E27FC236}">
-                <a16:creationId xmlns:a16="http://schemas.microsoft.com/office/drawing/2014/main" id="{EA4DBB50-CF68-B019-C880-D01EB750FFF9}"/>
+                <a16:creationId xmlns:a16="http://schemas.microsoft.com/office/drawing/2014/main" id="{A71F771A-7F3C-4D37-856D-01BE2476CA8C}"/>
               </a:ext>
             </a:extLst>
           </p:cNvPr>
@@ -5566,7 +6816,7 @@
           <a:p>
             <a:r>
               <a:rPr lang="sv-SE"/>
-              <a:t>Register Saving</a:t>
+              <a:t>Register Saving vid Funktionsanrop</a:t>
             </a:r>
             <a:endParaRPr lang="LID4096"/>
           </a:p>
@@ -5577,7 +6827,7 @@
           <p:cNvPr id="3" name="Content Placeholder 2">
             <a:extLst>
               <a:ext uri="{FF2B5EF4-FFF2-40B4-BE49-F238E27FC236}">
-                <a16:creationId xmlns:a16="http://schemas.microsoft.com/office/drawing/2014/main" id="{6F91E298-03AE-7576-04AA-8BB3BE2BF8F3}"/>
+                <a16:creationId xmlns:a16="http://schemas.microsoft.com/office/drawing/2014/main" id="{11B69114-7D7F-1BDF-B52C-C4CF9685F75B}"/>
               </a:ext>
             </a:extLst>
           </p:cNvPr>
@@ -5588,67 +6838,324 @@
             <p:ph idx="1"/>
           </p:nvPr>
         </p:nvSpPr>
-        <p:spPr/>
+        <p:spPr>
+          <a:xfrm>
+            <a:off x="838200" y="1842797"/>
+            <a:ext cx="10515600" cy="4351338"/>
+          </a:xfrm>
+        </p:spPr>
         <p:txBody>
           <a:bodyPr/>
           <a:lstStyle/>
           <a:p>
+            <a:pPr marL="0" indent="0">
+              <a:buNone/>
+            </a:pPr>
             <a:r>
               <a:rPr lang="sv-SE"/>
-              <a:t>Gör exemplet där vi vill skriva min(x, y, z) genom att kalla min.</a:t>
-            </a:r>
-          </a:p>
-          <a:p>
-            <a:r>
-              <a:rPr lang="sv-SE"/>
-              <a:t>Kan dom se problemet? </a:t>
-            </a:r>
-          </a:p>
-          <a:p>
+              <a:t>Vi vill hitta max(x, y, z) = max(max(x,y),z)</a:t>
+            </a:r>
             <a:endParaRPr lang="LID4096"/>
           </a:p>
         </p:txBody>
       </p:sp>
-      <p:pic>
-        <p:nvPicPr>
-          <p:cNvPr id="5" name="Picture 4">
+      <p:sp>
+        <p:nvSpPr>
+          <p:cNvPr id="4" name="TextBox 3">
             <a:extLst>
               <a:ext uri="{FF2B5EF4-FFF2-40B4-BE49-F238E27FC236}">
-                <a16:creationId xmlns:a16="http://schemas.microsoft.com/office/drawing/2014/main" id="{327C5942-CF83-05B1-2698-171934D12D7D}"/>
+                <a16:creationId xmlns:a16="http://schemas.microsoft.com/office/drawing/2014/main" id="{4A27A6BE-8C79-895D-B118-168D8985D8BE}"/>
               </a:ext>
             </a:extLst>
           </p:cNvPr>
-          <p:cNvPicPr>
-            <a:picLocks noChangeAspect="1"/>
-          </p:cNvPicPr>
+          <p:cNvSpPr txBox="1"/>
           <p:nvPr/>
-        </p:nvPicPr>
-        <p:blipFill>
-          <a:blip r:embed="rId2"/>
-          <a:stretch>
-            <a:fillRect/>
-          </a:stretch>
-        </p:blipFill>
+        </p:nvSpPr>
         <p:spPr>
           <a:xfrm>
-            <a:off x="1108934" y="3292330"/>
-            <a:ext cx="10431331" cy="2076740"/>
+            <a:off x="1155341" y="2556654"/>
+            <a:ext cx="9881317" cy="3139321"/>
           </a:xfrm>
           <a:prstGeom prst="rect">
             <a:avLst/>
           </a:prstGeom>
+          <a:solidFill>
+            <a:schemeClr val="bg1"/>
+          </a:solidFill>
+          <a:ln>
+            <a:solidFill>
+              <a:schemeClr val="accent1">
+                <a:shade val="15000"/>
+              </a:schemeClr>
+            </a:solidFill>
+          </a:ln>
+          <a:effectLst>
+            <a:outerShdw blurRad="50800" dist="38100" dir="2700000" algn="tl" rotWithShape="0">
+              <a:prstClr val="black">
+                <a:alpha val="40000"/>
+              </a:prstClr>
+            </a:outerShdw>
+          </a:effectLst>
         </p:spPr>
-      </p:pic>
+        <p:txBody>
+          <a:bodyPr wrap="square" rtlCol="0">
+            <a:spAutoFit/>
+          </a:bodyPr>
+          <a:lstStyle/>
+          <a:p>
+            <a:r>
+              <a:rPr lang="en-US">
+                <a:latin typeface="Consolas" panose="020B0609020204030204" pitchFamily="49" charset="0"/>
+              </a:rPr>
+              <a:t># t0 = x, t1 = y, t2 = z</a:t>
+            </a:r>
+          </a:p>
+          <a:p>
+            <a:r>
+              <a:rPr lang="en-US">
+                <a:latin typeface="Consolas" panose="020B0609020204030204" pitchFamily="49" charset="0"/>
+              </a:rPr>
+              <a:t>main:</a:t>
+            </a:r>
+          </a:p>
+          <a:p>
+            <a:r>
+              <a:rPr lang="en-US">
+                <a:latin typeface="Consolas" panose="020B0609020204030204" pitchFamily="49" charset="0"/>
+              </a:rPr>
+              <a:t>mv a0, t0        # </a:t>
+            </a:r>
+            <a:r>
+              <a:rPr lang="en-US">
+                <a:latin typeface="+mj-lt"/>
+              </a:rPr>
+              <a:t>Use t0 as the first parameter</a:t>
+            </a:r>
+          </a:p>
+          <a:p>
+            <a:r>
+              <a:rPr lang="en-US">
+                <a:latin typeface="Consolas" panose="020B0609020204030204" pitchFamily="49" charset="0"/>
+              </a:rPr>
+              <a:t>mv a1, t1        # </a:t>
+            </a:r>
+            <a:r>
+              <a:rPr lang="en-US">
+                <a:latin typeface="+mj-lt"/>
+              </a:rPr>
+              <a:t>and t1 as the second parameter</a:t>
+            </a:r>
+          </a:p>
+          <a:p>
+            <a:r>
+              <a:rPr lang="en-US">
+                <a:latin typeface="Consolas" panose="020B0609020204030204" pitchFamily="49" charset="0"/>
+              </a:rPr>
+              <a:t>call max         # </a:t>
+            </a:r>
+            <a:r>
+              <a:rPr lang="en-US">
+                <a:latin typeface="+mj-lt"/>
+              </a:rPr>
+              <a:t>After this line, the maximum of t0 and t1 is in a0.</a:t>
+            </a:r>
+            <a:br>
+              <a:rPr lang="en-US">
+                <a:latin typeface="Consolas" panose="020B0609020204030204" pitchFamily="49" charset="0"/>
+              </a:rPr>
+            </a:br>
+            <a:r>
+              <a:rPr lang="en-US">
+                <a:latin typeface="Consolas" panose="020B0609020204030204" pitchFamily="49" charset="0"/>
+              </a:rPr>
+              <a:t>                 # </a:t>
+            </a:r>
+            <a:r>
+              <a:rPr lang="en-US">
+                <a:latin typeface="+mj-lt"/>
+              </a:rPr>
+              <a:t>Since a0 is already max(t0, t1) we do not have to             </a:t>
+            </a:r>
+          </a:p>
+          <a:p>
+            <a:r>
+              <a:rPr lang="en-US">
+                <a:latin typeface="Consolas" panose="020B0609020204030204" pitchFamily="49" charset="0"/>
+              </a:rPr>
+              <a:t>                 # </a:t>
+            </a:r>
+            <a:r>
+              <a:rPr lang="en-US">
+                <a:latin typeface="+mj-lt"/>
+              </a:rPr>
+              <a:t>do anything for the first parameter</a:t>
+            </a:r>
+          </a:p>
+          <a:p>
+            <a:r>
+              <a:rPr lang="en-US">
+                <a:latin typeface="Consolas" panose="020B0609020204030204" pitchFamily="49" charset="0"/>
+              </a:rPr>
+              <a:t>mv a1, t2        # </a:t>
+            </a:r>
+            <a:r>
+              <a:rPr lang="en-US">
+                <a:latin typeface="+mj-lt"/>
+              </a:rPr>
+              <a:t>Use t2 as the second parameter</a:t>
+            </a:r>
+          </a:p>
+          <a:p>
+            <a:r>
+              <a:rPr lang="en-US">
+                <a:latin typeface="Consolas" panose="020B0609020204030204" pitchFamily="49" charset="0"/>
+              </a:rPr>
+              <a:t>call max         # </a:t>
+            </a:r>
+            <a:r>
+              <a:rPr lang="en-US">
+                <a:latin typeface="+mj-lt"/>
+              </a:rPr>
+              <a:t>After this line a0 should contain max(max(t0, t1), t2)...</a:t>
+            </a:r>
+          </a:p>
+          <a:p>
+            <a:r>
+              <a:rPr lang="en-US">
+                <a:latin typeface="Consolas" panose="020B0609020204030204" pitchFamily="49" charset="0"/>
+              </a:rPr>
+              <a:t>                 # </a:t>
+            </a:r>
+            <a:r>
+              <a:rPr lang="en-US" b="1">
+                <a:solidFill>
+                  <a:srgbClr val="C00000"/>
+                </a:solidFill>
+                <a:latin typeface="Harrington" panose="04040505050A02020702" pitchFamily="82" charset="0"/>
+              </a:rPr>
+              <a:t>Or should it...</a:t>
+            </a:r>
+            <a:endParaRPr lang="en-US" b="1" dirty="0">
+              <a:solidFill>
+                <a:srgbClr val="C00000"/>
+              </a:solidFill>
+              <a:latin typeface="Harrington" panose="04040505050A02020702" pitchFamily="82" charset="0"/>
+            </a:endParaRPr>
+          </a:p>
+          <a:p>
+            <a:r>
+              <a:rPr lang="en-US">
+                <a:latin typeface="Consolas" panose="020B0609020204030204" pitchFamily="49" charset="0"/>
+              </a:rPr>
+              <a:t>  </a:t>
+            </a:r>
+            <a:endParaRPr lang="LID4096" dirty="0">
+              <a:latin typeface="Consolas" panose="020B0609020204030204" pitchFamily="49" charset="0"/>
+            </a:endParaRPr>
+          </a:p>
+        </p:txBody>
+      </p:sp>
     </p:spTree>
     <p:extLst>
       <p:ext uri="{BB962C8B-B14F-4D97-AF65-F5344CB8AC3E}">
-        <p14:creationId xmlns:p14="http://schemas.microsoft.com/office/powerpoint/2010/main" val="1015968766"/>
+        <p14:creationId xmlns:p14="http://schemas.microsoft.com/office/powerpoint/2010/main" val="3839348139"/>
       </p:ext>
     </p:extLst>
   </p:cSld>
   <p:clrMapOvr>
     <a:masterClrMapping/>
   </p:clrMapOvr>
+  <p:timing>
+    <p:tnLst>
+      <p:par>
+        <p:cTn id="1" dur="indefinite" restart="never" nodeType="tmRoot">
+          <p:childTnLst>
+            <p:seq concurrent="1" nextAc="seek">
+              <p:cTn id="2" dur="indefinite" nodeType="mainSeq">
+                <p:childTnLst>
+                  <p:par>
+                    <p:cTn id="3" fill="hold">
+                      <p:stCondLst>
+                        <p:cond delay="indefinite"/>
+                      </p:stCondLst>
+                      <p:childTnLst>
+                        <p:par>
+                          <p:cTn id="4" fill="hold">
+                            <p:stCondLst>
+                              <p:cond delay="0"/>
+                            </p:stCondLst>
+                            <p:childTnLst>
+                              <p:par>
+                                <p:cTn id="5" presetID="10" presetClass="entr" presetSubtype="0" fill="hold" nodeType="clickEffect">
+                                  <p:stCondLst>
+                                    <p:cond delay="0"/>
+                                  </p:stCondLst>
+                                  <p:childTnLst>
+                                    <p:set>
+                                      <p:cBhvr>
+                                        <p:cTn id="6" dur="1" fill="hold">
+                                          <p:stCondLst>
+                                            <p:cond delay="0"/>
+                                          </p:stCondLst>
+                                        </p:cTn>
+                                        <p:tgtEl>
+                                          <p:spTgt spid="4">
+                                            <p:txEl>
+                                              <p:pRg st="8" end="8"/>
+                                            </p:txEl>
+                                          </p:spTgt>
+                                        </p:tgtEl>
+                                        <p:attrNameLst>
+                                          <p:attrName>style.visibility</p:attrName>
+                                        </p:attrNameLst>
+                                      </p:cBhvr>
+                                      <p:to>
+                                        <p:strVal val="visible"/>
+                                      </p:to>
+                                    </p:set>
+                                    <p:animEffect transition="in" filter="fade">
+                                      <p:cBhvr>
+                                        <p:cTn id="7" dur="500"/>
+                                        <p:tgtEl>
+                                          <p:spTgt spid="4">
+                                            <p:txEl>
+                                              <p:pRg st="8" end="8"/>
+                                            </p:txEl>
+                                          </p:spTgt>
+                                        </p:tgtEl>
+                                      </p:cBhvr>
+                                    </p:animEffect>
+                                  </p:childTnLst>
+                                </p:cTn>
+                              </p:par>
+                            </p:childTnLst>
+                          </p:cTn>
+                        </p:par>
+                      </p:childTnLst>
+                    </p:cTn>
+                  </p:par>
+                </p:childTnLst>
+              </p:cTn>
+              <p:prevCondLst>
+                <p:cond evt="onPrev" delay="0">
+                  <p:tgtEl>
+                    <p:sldTgt/>
+                  </p:tgtEl>
+                </p:cond>
+              </p:prevCondLst>
+              <p:nextCondLst>
+                <p:cond evt="onNext" delay="0">
+                  <p:tgtEl>
+                    <p:sldTgt/>
+                  </p:tgtEl>
+                </p:cond>
+              </p:nextCondLst>
+            </p:seq>
+          </p:childTnLst>
+        </p:cTn>
+      </p:par>
+    </p:tnLst>
+  </p:timing>
 </p:sld>
 </file>
 
@@ -5692,7 +7199,7 @@
           <a:p>
             <a:r>
               <a:rPr lang="sv-SE"/>
-              <a:t>Register Saving</a:t>
+              <a:t>Register Saving vid Funktionsanrop</a:t>
             </a:r>
             <a:endParaRPr lang="LID4096"/>
           </a:p>
@@ -5719,29 +7226,96 @@
           <a:bodyPr/>
           <a:lstStyle/>
           <a:p>
+            <a:pPr marL="0" indent="0">
+              <a:buNone/>
+            </a:pPr>
             <a:r>
               <a:rPr lang="sv-SE"/>
-              <a:t>Skall vi bara spara alla register vi använder innan vi kallar en funktion? </a:t>
+              <a:t>Vi måste komma överens om vem som sparar registrena när </a:t>
+            </a:r>
+            <a:r>
+              <a:rPr lang="sv-SE" b="1"/>
+              <a:t>caller</a:t>
+            </a:r>
+            <a:r>
+              <a:rPr lang="sv-SE"/>
+              <a:t>() kallar </a:t>
+            </a:r>
+            <a:r>
+              <a:rPr lang="sv-SE" b="1"/>
+              <a:t>callee</a:t>
+            </a:r>
+            <a:r>
+              <a:rPr lang="sv-SE"/>
+              <a:t>()</a:t>
+            </a:r>
+          </a:p>
+          <a:p>
+            <a:r>
+              <a:rPr lang="sv-SE" b="1"/>
+              <a:t>Förslag #1</a:t>
+            </a:r>
+            <a:r>
+              <a:rPr lang="sv-SE"/>
+              <a:t>: </a:t>
+            </a:r>
+            <a:br>
+              <a:rPr lang="sv-SE"/>
+            </a:br>
+            <a:r>
+              <a:rPr lang="sv-SE" b="1"/>
+              <a:t>caller </a:t>
+            </a:r>
+            <a:r>
+              <a:rPr lang="sv-SE"/>
+              <a:t>sparar alla register den behöver ha kvar värdet på? </a:t>
             </a:r>
           </a:p>
           <a:p>
             <a:pPr lvl="1"/>
             <a:r>
               <a:rPr lang="sv-SE"/>
-              <a:t>Om funktionen bara använder ett register så blir ju det fånigt</a:t>
-            </a:r>
-          </a:p>
-          <a:p>
+              <a:t>Om </a:t>
+            </a:r>
+            <a:r>
+              <a:rPr lang="sv-SE" b="1"/>
+              <a:t>callee</a:t>
+            </a:r>
             <a:r>
               <a:rPr lang="sv-SE"/>
-              <a:t>Skall vi då låta funktionen som blir kallad spara alla register den tänker skriva över? </a:t>
+              <a:t> bara använder 1 register är det ju väldigt onödigt.</a:t>
+            </a:r>
+          </a:p>
+          <a:p>
+            <a:r>
+              <a:rPr lang="sv-SE" b="1"/>
+              <a:t>Förslag #2: </a:t>
+            </a:r>
+            <a:br>
+              <a:rPr lang="sv-SE" b="1"/>
+            </a:br>
+            <a:r>
+              <a:rPr lang="sv-SE" b="1"/>
+              <a:t>callee</a:t>
+            </a:r>
+            <a:r>
+              <a:rPr lang="sv-SE"/>
+              <a:t> sparar alla register den tänker skriva över?</a:t>
             </a:r>
           </a:p>
           <a:p>
             <a:pPr lvl="1"/>
             <a:r>
               <a:rPr lang="sv-SE"/>
-              <a:t>Men om funktionen vi kallar behöver massor med register, och vi bara ett, blir det ju lika löjligt. </a:t>
+              <a:t>Om </a:t>
+            </a:r>
+            <a:r>
+              <a:rPr lang="sv-SE" b="1"/>
+              <a:t>caller</a:t>
+            </a:r>
+            <a:r>
+              <a:rPr lang="sv-SE"/>
+              <a:t> inte behöver något av de registrena blir det ju väldigt onödigt. </a:t>
             </a:r>
           </a:p>
         </p:txBody>
@@ -5756,6 +7330,280 @@
   <p:clrMapOvr>
     <a:masterClrMapping/>
   </p:clrMapOvr>
+  <p:timing>
+    <p:tnLst>
+      <p:par>
+        <p:cTn id="1" dur="indefinite" restart="never" nodeType="tmRoot">
+          <p:childTnLst>
+            <p:seq concurrent="1" nextAc="seek">
+              <p:cTn id="2" dur="indefinite" nodeType="mainSeq">
+                <p:childTnLst>
+                  <p:par>
+                    <p:cTn id="3" fill="hold">
+                      <p:stCondLst>
+                        <p:cond delay="indefinite"/>
+                      </p:stCondLst>
+                      <p:childTnLst>
+                        <p:par>
+                          <p:cTn id="4" fill="hold">
+                            <p:stCondLst>
+                              <p:cond delay="0"/>
+                            </p:stCondLst>
+                            <p:childTnLst>
+                              <p:par>
+                                <p:cTn id="5" presetID="10" presetClass="entr" presetSubtype="0" fill="hold" nodeType="clickEffect">
+                                  <p:stCondLst>
+                                    <p:cond delay="0"/>
+                                  </p:stCondLst>
+                                  <p:childTnLst>
+                                    <p:set>
+                                      <p:cBhvr>
+                                        <p:cTn id="6" dur="1" fill="hold">
+                                          <p:stCondLst>
+                                            <p:cond delay="0"/>
+                                          </p:stCondLst>
+                                        </p:cTn>
+                                        <p:tgtEl>
+                                          <p:spTgt spid="3">
+                                            <p:txEl>
+                                              <p:pRg st="1" end="1"/>
+                                            </p:txEl>
+                                          </p:spTgt>
+                                        </p:tgtEl>
+                                        <p:attrNameLst>
+                                          <p:attrName>style.visibility</p:attrName>
+                                        </p:attrNameLst>
+                                      </p:cBhvr>
+                                      <p:to>
+                                        <p:strVal val="visible"/>
+                                      </p:to>
+                                    </p:set>
+                                    <p:animEffect transition="in" filter="fade">
+                                      <p:cBhvr>
+                                        <p:cTn id="7" dur="500"/>
+                                        <p:tgtEl>
+                                          <p:spTgt spid="3">
+                                            <p:txEl>
+                                              <p:pRg st="1" end="1"/>
+                                            </p:txEl>
+                                          </p:spTgt>
+                                        </p:tgtEl>
+                                      </p:cBhvr>
+                                    </p:animEffect>
+                                  </p:childTnLst>
+                                </p:cTn>
+                              </p:par>
+                            </p:childTnLst>
+                          </p:cTn>
+                        </p:par>
+                      </p:childTnLst>
+                    </p:cTn>
+                  </p:par>
+                  <p:par>
+                    <p:cTn id="8" fill="hold">
+                      <p:stCondLst>
+                        <p:cond delay="indefinite"/>
+                      </p:stCondLst>
+                      <p:childTnLst>
+                        <p:par>
+                          <p:cTn id="9" fill="hold">
+                            <p:stCondLst>
+                              <p:cond delay="0"/>
+                            </p:stCondLst>
+                            <p:childTnLst>
+                              <p:par>
+                                <p:cTn id="10" presetID="10" presetClass="entr" presetSubtype="0" fill="hold" nodeType="clickEffect">
+                                  <p:stCondLst>
+                                    <p:cond delay="0"/>
+                                  </p:stCondLst>
+                                  <p:childTnLst>
+                                    <p:set>
+                                      <p:cBhvr>
+                                        <p:cTn id="11" dur="1" fill="hold">
+                                          <p:stCondLst>
+                                            <p:cond delay="0"/>
+                                          </p:stCondLst>
+                                        </p:cTn>
+                                        <p:tgtEl>
+                                          <p:spTgt spid="3">
+                                            <p:txEl>
+                                              <p:pRg st="2" end="2"/>
+                                            </p:txEl>
+                                          </p:spTgt>
+                                        </p:tgtEl>
+                                        <p:attrNameLst>
+                                          <p:attrName>style.visibility</p:attrName>
+                                        </p:attrNameLst>
+                                      </p:cBhvr>
+                                      <p:to>
+                                        <p:strVal val="visible"/>
+                                      </p:to>
+                                    </p:set>
+                                    <p:animEffect transition="in" filter="fade">
+                                      <p:cBhvr>
+                                        <p:cTn id="12" dur="500"/>
+                                        <p:tgtEl>
+                                          <p:spTgt spid="3">
+                                            <p:txEl>
+                                              <p:pRg st="2" end="2"/>
+                                            </p:txEl>
+                                          </p:spTgt>
+                                        </p:tgtEl>
+                                      </p:cBhvr>
+                                    </p:animEffect>
+                                  </p:childTnLst>
+                                </p:cTn>
+                              </p:par>
+                            </p:childTnLst>
+                          </p:cTn>
+                        </p:par>
+                      </p:childTnLst>
+                    </p:cTn>
+                  </p:par>
+                  <p:par>
+                    <p:cTn id="13" fill="hold">
+                      <p:stCondLst>
+                        <p:cond delay="indefinite"/>
+                      </p:stCondLst>
+                      <p:childTnLst>
+                        <p:par>
+                          <p:cTn id="14" fill="hold">
+                            <p:stCondLst>
+                              <p:cond delay="0"/>
+                            </p:stCondLst>
+                            <p:childTnLst>
+                              <p:par>
+                                <p:cTn id="15" presetID="10" presetClass="entr" presetSubtype="0" fill="hold" nodeType="clickEffect">
+                                  <p:stCondLst>
+                                    <p:cond delay="0"/>
+                                  </p:stCondLst>
+                                  <p:childTnLst>
+                                    <p:set>
+                                      <p:cBhvr>
+                                        <p:cTn id="16" dur="1" fill="hold">
+                                          <p:stCondLst>
+                                            <p:cond delay="0"/>
+                                          </p:stCondLst>
+                                        </p:cTn>
+                                        <p:tgtEl>
+                                          <p:spTgt spid="3">
+                                            <p:txEl>
+                                              <p:pRg st="3" end="3"/>
+                                            </p:txEl>
+                                          </p:spTgt>
+                                        </p:tgtEl>
+                                        <p:attrNameLst>
+                                          <p:attrName>style.visibility</p:attrName>
+                                        </p:attrNameLst>
+                                      </p:cBhvr>
+                                      <p:to>
+                                        <p:strVal val="visible"/>
+                                      </p:to>
+                                    </p:set>
+                                    <p:animEffect transition="in" filter="fade">
+                                      <p:cBhvr>
+                                        <p:cTn id="17" dur="500"/>
+                                        <p:tgtEl>
+                                          <p:spTgt spid="3">
+                                            <p:txEl>
+                                              <p:pRg st="3" end="3"/>
+                                            </p:txEl>
+                                          </p:spTgt>
+                                        </p:tgtEl>
+                                      </p:cBhvr>
+                                    </p:animEffect>
+                                  </p:childTnLst>
+                                </p:cTn>
+                              </p:par>
+                            </p:childTnLst>
+                          </p:cTn>
+                        </p:par>
+                      </p:childTnLst>
+                    </p:cTn>
+                  </p:par>
+                  <p:par>
+                    <p:cTn id="18" fill="hold">
+                      <p:stCondLst>
+                        <p:cond delay="indefinite"/>
+                      </p:stCondLst>
+                      <p:childTnLst>
+                        <p:par>
+                          <p:cTn id="19" fill="hold">
+                            <p:stCondLst>
+                              <p:cond delay="0"/>
+                            </p:stCondLst>
+                            <p:childTnLst>
+                              <p:par>
+                                <p:cTn id="20" presetID="10" presetClass="entr" presetSubtype="0" fill="hold" nodeType="clickEffect">
+                                  <p:stCondLst>
+                                    <p:cond delay="0"/>
+                                  </p:stCondLst>
+                                  <p:childTnLst>
+                                    <p:set>
+                                      <p:cBhvr>
+                                        <p:cTn id="21" dur="1" fill="hold">
+                                          <p:stCondLst>
+                                            <p:cond delay="0"/>
+                                          </p:stCondLst>
+                                        </p:cTn>
+                                        <p:tgtEl>
+                                          <p:spTgt spid="3">
+                                            <p:txEl>
+                                              <p:pRg st="4" end="4"/>
+                                            </p:txEl>
+                                          </p:spTgt>
+                                        </p:tgtEl>
+                                        <p:attrNameLst>
+                                          <p:attrName>style.visibility</p:attrName>
+                                        </p:attrNameLst>
+                                      </p:cBhvr>
+                                      <p:to>
+                                        <p:strVal val="visible"/>
+                                      </p:to>
+                                    </p:set>
+                                    <p:animEffect transition="in" filter="fade">
+                                      <p:cBhvr>
+                                        <p:cTn id="22" dur="500"/>
+                                        <p:tgtEl>
+                                          <p:spTgt spid="3">
+                                            <p:txEl>
+                                              <p:pRg st="4" end="4"/>
+                                            </p:txEl>
+                                          </p:spTgt>
+                                        </p:tgtEl>
+                                      </p:cBhvr>
+                                    </p:animEffect>
+                                  </p:childTnLst>
+                                </p:cTn>
+                              </p:par>
+                            </p:childTnLst>
+                          </p:cTn>
+                        </p:par>
+                      </p:childTnLst>
+                    </p:cTn>
+                  </p:par>
+                </p:childTnLst>
+              </p:cTn>
+              <p:prevCondLst>
+                <p:cond evt="onPrev" delay="0">
+                  <p:tgtEl>
+                    <p:sldTgt/>
+                  </p:tgtEl>
+                </p:cond>
+              </p:prevCondLst>
+              <p:nextCondLst>
+                <p:cond evt="onNext" delay="0">
+                  <p:tgtEl>
+                    <p:sldTgt/>
+                  </p:tgtEl>
+                </p:cond>
+              </p:nextCondLst>
+            </p:seq>
+          </p:childTnLst>
+        </p:cTn>
+      </p:par>
+    </p:tnLst>
+  </p:timing>
 </p:sld>
 </file>
 
@@ -5799,7 +7647,7 @@
           <a:p>
             <a:r>
               <a:rPr lang="sv-SE"/>
-              <a:t>Register Saving</a:t>
+              <a:t>Register Saving vid Funktionsanrop</a:t>
             </a:r>
             <a:endParaRPr lang="LID4096"/>
           </a:p>
@@ -5826,6 +7674,9 @@
           <a:bodyPr/>
           <a:lstStyle/>
           <a:p>
+            <a:pPr marL="0" indent="0">
+              <a:buNone/>
+            </a:pPr>
             <a:r>
               <a:rPr lang="sv-SE"/>
               <a:t>ABI Konvention (kompromiss): </a:t>
@@ -5835,49 +7686,135 @@
           <a:p>
             <a:pPr lvl="1"/>
             <a:r>
+              <a:rPr lang="sv-SE" b="1"/>
+              <a:t>caller</a:t>
+            </a:r>
+            <a:r>
               <a:rPr lang="sv-SE"/>
-              <a:t>Den kallande funktionen sparar t (temp) registrena, a (argument registrena), och ra (om den behöver dem).</a:t>
+              <a:t> sparar </a:t>
+            </a:r>
+            <a:r>
+              <a:rPr lang="sv-SE" b="1"/>
+              <a:t>t</a:t>
+            </a:r>
+            <a:r>
+              <a:rPr lang="sv-SE"/>
+              <a:t> (temp) registrena, </a:t>
+            </a:r>
+            <a:r>
+              <a:rPr lang="sv-SE" b="1"/>
+              <a:t>a</a:t>
+            </a:r>
+            <a:r>
+              <a:rPr lang="sv-SE"/>
+              <a:t> (argument registrena), och </a:t>
+            </a:r>
+            <a:r>
+              <a:rPr lang="sv-SE" b="1"/>
+              <a:t>ra</a:t>
+            </a:r>
+            <a:r>
+              <a:rPr lang="sv-SE"/>
+              <a:t> </a:t>
+            </a:r>
+            <a:br>
+              <a:rPr lang="sv-SE"/>
+            </a:br>
+            <a:r>
+              <a:rPr lang="sv-SE" sz="1600"/>
+              <a:t>(om den behöver dem).</a:t>
             </a:r>
           </a:p>
           <a:p>
             <a:pPr lvl="1"/>
             <a:r>
+              <a:rPr lang="sv-SE" b="1"/>
+              <a:t>callee</a:t>
+            </a:r>
+            <a:r>
               <a:rPr lang="sv-SE"/>
-              <a:t>Den kallade funktionen sparar alla andra register om den skriver över dem.</a:t>
-            </a:r>
+              <a:t> sparar alla andra register </a:t>
+            </a:r>
+            <a:br>
+              <a:rPr lang="sv-SE"/>
+            </a:br>
+            <a:r>
+              <a:rPr lang="sv-SE" sz="1600"/>
+              <a:t>(om den behöver skriva över dem)</a:t>
+            </a:r>
+          </a:p>
+          <a:p>
+            <a:pPr marL="0" indent="0">
+              <a:buNone/>
+            </a:pPr>
+            <a:r>
+              <a:rPr lang="sv-SE" b="1"/>
+              <a:t>Best Practice: </a:t>
+            </a:r>
+          </a:p>
+          <a:p>
+            <a:r>
+              <a:rPr lang="sv-SE" sz="2400"/>
+              <a:t>Använd </a:t>
+            </a:r>
+            <a:r>
+              <a:rPr lang="sv-SE" sz="2000" b="1">
+                <a:latin typeface="Consolas" panose="020B0609020204030204" pitchFamily="49" charset="0"/>
+              </a:rPr>
+              <a:t>t0-t6</a:t>
+            </a:r>
+            <a:r>
+              <a:rPr lang="sv-SE" sz="2400"/>
+              <a:t> för det mesta. </a:t>
+            </a:r>
+            <a:r>
+              <a:rPr lang="sv-SE" sz="1800"/>
+              <a:t>(du behöver inte oroa dig för att spara undan dem)</a:t>
+            </a:r>
+          </a:p>
+          <a:p>
+            <a:r>
+              <a:rPr lang="sv-SE" sz="2400"/>
+              <a:t>Om du behöver spara ett värde över ett funktionsanrop, använd </a:t>
+            </a:r>
+            <a:r>
+              <a:rPr lang="sv-SE" sz="2000" b="1">
+                <a:latin typeface="Consolas" panose="020B0609020204030204" pitchFamily="49" charset="0"/>
+              </a:rPr>
+              <a:t>s0-s11</a:t>
+            </a:r>
+            <a:r>
+              <a:rPr lang="sv-SE" sz="2400"/>
+              <a:t> istället. </a:t>
+            </a:r>
+            <a:r>
+              <a:rPr lang="sv-SE" sz="1800"/>
+              <a:t>(funktionen du kallar får inte skriva över dem utan att återställa)</a:t>
+            </a:r>
+          </a:p>
+          <a:p>
+            <a:r>
+              <a:rPr lang="sv-SE" sz="2400"/>
+              <a:t>Håll koll på vilka </a:t>
+            </a:r>
+            <a:r>
+              <a:rPr lang="sv-SE" sz="2000" b="1">
+                <a:latin typeface="Consolas" panose="020B0609020204030204" pitchFamily="49" charset="0"/>
+              </a:rPr>
+              <a:t>s</a:t>
+            </a:r>
+            <a:r>
+              <a:rPr lang="sv-SE" sz="2400"/>
+              <a:t> (eller andra callee-saved) register du använder och se till att spara undan dem i början av funktionen, och återställa i slutet.</a:t>
+            </a:r>
+            <a:br>
+              <a:rPr lang="sv-SE" sz="2400"/>
+            </a:br>
+            <a:endParaRPr lang="sv-SE"/>
           </a:p>
           <a:p>
             <a:pPr lvl="1"/>
             <a:endParaRPr lang="sv-SE"/>
-          </a:p>
-          <a:p>
-            <a:pPr lvl="1"/>
-            <a:r>
-              <a:rPr lang="sv-SE"/>
-              <a:t>Vi kan ju fortfarande hamna i situationer där register blir sparade som inte egentligen behövde sparas: </a:t>
-            </a:r>
-          </a:p>
-          <a:p>
-            <a:pPr lvl="2"/>
-            <a:r>
-              <a:rPr lang="sv-SE"/>
-              <a:t>a sparar argumentregister, men dom skrivs aldrig över av b, </a:t>
-            </a:r>
-          </a:p>
-          <a:p>
-            <a:pPr lvl="2"/>
-            <a:r>
-              <a:rPr lang="sv-SE"/>
-              <a:t>eller b sparar s registrena, men dom behövs inte av a</a:t>
-            </a:r>
-          </a:p>
-          <a:p>
-            <a:pPr lvl="2"/>
-            <a:r>
-              <a:rPr lang="sv-SE"/>
-              <a:t>En optimerare kan oftast hitta sådana fall och ta bort dem</a:t>
-            </a:r>
-            <a:endParaRPr lang="LID4096"/>
           </a:p>
         </p:txBody>
       </p:sp>
@@ -5934,68 +7871,49 @@
           <a:p>
             <a:r>
               <a:rPr lang="sv-SE"/>
-              <a:t>Register saving, nästade funktionsanrop</a:t>
+              <a:t>Register saving, exempel</a:t>
             </a:r>
             <a:endParaRPr lang="LID4096"/>
           </a:p>
         </p:txBody>
       </p:sp>
-      <p:sp>
-        <p:nvSpPr>
-          <p:cNvPr id="3" name="Content Placeholder 2">
+      <p:pic>
+        <p:nvPicPr>
+          <p:cNvPr id="5" name="Picture 4">
             <a:extLst>
               <a:ext uri="{FF2B5EF4-FFF2-40B4-BE49-F238E27FC236}">
-                <a16:creationId xmlns:a16="http://schemas.microsoft.com/office/drawing/2014/main" id="{8EA68312-15BF-1B93-E97F-041D6E40109B}"/>
+                <a16:creationId xmlns:a16="http://schemas.microsoft.com/office/drawing/2014/main" id="{A974403D-4B00-5AA2-1246-34DE9585E229}"/>
               </a:ext>
             </a:extLst>
           </p:cNvPr>
-          <p:cNvSpPr>
-            <a:spLocks noGrp="1"/>
-          </p:cNvSpPr>
-          <p:nvPr>
-            <p:ph idx="1"/>
-          </p:nvPr>
-        </p:nvSpPr>
-        <p:spPr/>
-        <p:txBody>
-          <a:bodyPr/>
-          <a:lstStyle/>
-          <a:p>
-            <a:r>
-              <a:rPr lang="sv-SE"/>
-              <a:t>En funktion är ofta både callee och caller (visa exempel med min(x, y, z))</a:t>
-            </a:r>
-          </a:p>
-          <a:p>
-            <a:r>
-              <a:rPr lang="sv-SE"/>
-              <a:t>Best practice: </a:t>
-            </a:r>
-          </a:p>
-          <a:p>
-            <a:pPr lvl="1"/>
-            <a:r>
-              <a:rPr lang="sv-SE"/>
-              <a:t>Gör allt du kan i t registrena (du behöver inte spara dem)</a:t>
-            </a:r>
-          </a:p>
-          <a:p>
-            <a:pPr lvl="1"/>
-            <a:r>
-              <a:rPr lang="sv-SE"/>
-              <a:t>Om du behöver spara ett värde, använd s registren</a:t>
-            </a:r>
-          </a:p>
-          <a:p>
-            <a:pPr lvl="1"/>
-            <a:r>
-              <a:rPr lang="sv-SE"/>
-              <a:t>Ha koll på alla s register du använder, och spara/restora dem i en prolog/epilog</a:t>
-            </a:r>
-            <a:endParaRPr lang="LID4096"/>
-          </a:p>
-        </p:txBody>
-      </p:sp>
+          <p:cNvPicPr>
+            <a:picLocks noChangeAspect="1"/>
+          </p:cNvPicPr>
+          <p:nvPr/>
+        </p:nvPicPr>
+        <p:blipFill>
+          <a:blip r:embed="rId2"/>
+          <a:stretch>
+            <a:fillRect/>
+          </a:stretch>
+        </p:blipFill>
+        <p:spPr>
+          <a:xfrm>
+            <a:off x="2979313" y="1690688"/>
+            <a:ext cx="5800308" cy="5167312"/>
+          </a:xfrm>
+          <a:prstGeom prst="rect">
+            <a:avLst/>
+          </a:prstGeom>
+          <a:ln>
+            <a:solidFill>
+              <a:schemeClr val="accent1">
+                <a:shade val="15000"/>
+              </a:schemeClr>
+            </a:solidFill>
+          </a:ln>
+        </p:spPr>
+      </p:pic>
     </p:spTree>
     <p:extLst>
       <p:ext uri="{BB962C8B-B14F-4D97-AF65-F5344CB8AC3E}">
@@ -6010,6 +7928,42 @@
 </file>
 
 <file path=ppt/slides/slide15.xml><?xml version="1.0" encoding="utf-8"?>
+<p:sld xmlns:a="http://schemas.openxmlformats.org/drawingml/2006/main" xmlns:r="http://schemas.openxmlformats.org/officeDocument/2006/relationships" xmlns:p="http://schemas.openxmlformats.org/presentationml/2006/main">
+  <p:cSld>
+    <p:spTree>
+      <p:nvGrpSpPr>
+        <p:cNvPr id="1" name="">
+          <a:extLst>
+            <a:ext uri="{FF2B5EF4-FFF2-40B4-BE49-F238E27FC236}">
+              <a16:creationId xmlns:a16="http://schemas.microsoft.com/office/drawing/2014/main" id="{CAD98C54-4B75-31FB-FCA5-819B7E557C6E}"/>
+            </a:ext>
+          </a:extLst>
+        </p:cNvPr>
+        <p:cNvGrpSpPr/>
+        <p:nvPr/>
+      </p:nvGrpSpPr>
+      <p:grpSpPr>
+        <a:xfrm>
+          <a:off x="0" y="0"/>
+          <a:ext cx="0" cy="0"/>
+          <a:chOff x="0" y="0"/>
+          <a:chExt cx="0" cy="0"/>
+        </a:xfrm>
+      </p:grpSpPr>
+    </p:spTree>
+    <p:extLst>
+      <p:ext uri="{BB962C8B-B14F-4D97-AF65-F5344CB8AC3E}">
+        <p14:creationId xmlns:p14="http://schemas.microsoft.com/office/powerpoint/2010/main" val="3033886345"/>
+      </p:ext>
+    </p:extLst>
+  </p:cSld>
+  <p:clrMapOvr>
+    <a:masterClrMapping/>
+  </p:clrMapOvr>
+</p:sld>
+</file>
+
+<file path=ppt/slides/slide16.xml><?xml version="1.0" encoding="utf-8"?>
 <p:sld xmlns:a="http://schemas.openxmlformats.org/drawingml/2006/main" xmlns:r="http://schemas.openxmlformats.org/officeDocument/2006/relationships" xmlns:p="http://schemas.openxmlformats.org/presentationml/2006/main">
   <p:cSld>
     <p:spTree>
@@ -6097,7 +8051,7 @@
 </p:sld>
 </file>
 
-<file path=ppt/slides/slide16.xml><?xml version="1.0" encoding="utf-8"?>
+<file path=ppt/slides/slide17.xml><?xml version="1.0" encoding="utf-8"?>
 <p:sld xmlns:a="http://schemas.openxmlformats.org/drawingml/2006/main" xmlns:r="http://schemas.openxmlformats.org/officeDocument/2006/relationships" xmlns:p="http://schemas.openxmlformats.org/presentationml/2006/main">
   <p:cSld>
     <p:spTree>
@@ -6145,63 +8099,527 @@
       </p:sp>
       <p:sp>
         <p:nvSpPr>
-          <p:cNvPr id="3" name="Content Placeholder 2">
+          <p:cNvPr id="7" name="TextBox 6">
             <a:extLst>
               <a:ext uri="{FF2B5EF4-FFF2-40B4-BE49-F238E27FC236}">
-                <a16:creationId xmlns:a16="http://schemas.microsoft.com/office/drawing/2014/main" id="{50ED0AC0-66F8-0CC2-5CD0-5464990038D0}"/>
+                <a16:creationId xmlns:a16="http://schemas.microsoft.com/office/drawing/2014/main" id="{04D4DF9B-E989-60E2-2A08-E9D95DD6655F}"/>
               </a:ext>
             </a:extLst>
           </p:cNvPr>
-          <p:cNvSpPr>
-            <a:spLocks noGrp="1"/>
-          </p:cNvSpPr>
-          <p:nvPr>
-            <p:ph idx="1"/>
-          </p:nvPr>
+          <p:cNvSpPr txBox="1"/>
+          <p:nvPr/>
         </p:nvSpPr>
-        <p:spPr/>
-        <p:txBody>
-          <a:bodyPr/>
-          <a:lstStyle/>
-          <a:p>
-            <a:r>
-              <a:rPr lang="sv-SE"/>
-              <a:t>Vad är arrays</a:t>
-            </a:r>
-            <a:endParaRPr lang="LID4096"/>
-          </a:p>
-        </p:txBody>
-      </p:sp>
-      <p:pic>
-        <p:nvPicPr>
-          <p:cNvPr id="5" name="Picture 4">
-            <a:extLst>
-              <a:ext uri="{FF2B5EF4-FFF2-40B4-BE49-F238E27FC236}">
-                <a16:creationId xmlns:a16="http://schemas.microsoft.com/office/drawing/2014/main" id="{CBC25463-2779-B641-4479-2F8554E34702}"/>
-              </a:ext>
-            </a:extLst>
-          </p:cNvPr>
-          <p:cNvPicPr>
-            <a:picLocks noChangeAspect="1"/>
-          </p:cNvPicPr>
-          <p:nvPr/>
-        </p:nvPicPr>
-        <p:blipFill>
-          <a:blip r:embed="rId2"/>
-          <a:stretch>
-            <a:fillRect/>
-          </a:stretch>
-        </p:blipFill>
         <p:spPr>
           <a:xfrm>
-            <a:off x="1461440" y="2509709"/>
-            <a:ext cx="9269119" cy="1838582"/>
+            <a:off x="579547" y="3052551"/>
+            <a:ext cx="11131641" cy="1948354"/>
           </a:xfrm>
           <a:prstGeom prst="rect">
             <a:avLst/>
           </a:prstGeom>
+          <a:solidFill>
+            <a:schemeClr val="tx1">
+              <a:lumMod val="75000"/>
+              <a:lumOff val="25000"/>
+            </a:schemeClr>
+          </a:solidFill>
         </p:spPr>
-      </p:pic>
+        <p:txBody>
+          <a:bodyPr wrap="square" rtlCol="0">
+            <a:spAutoFit/>
+          </a:bodyPr>
+          <a:lstStyle/>
+          <a:p>
+            <a:pPr>
+              <a:buNone/>
+            </a:pPr>
+            <a:r>
+              <a:rPr lang="en-US">
+                <a:solidFill>
+                  <a:srgbClr val="569CD6"/>
+                </a:solidFill>
+                <a:latin typeface="Consolas" panose="020B0609020204030204" pitchFamily="49" charset="0"/>
+              </a:rPr>
+              <a:t>char</a:t>
+            </a:r>
+            <a:r>
+              <a:rPr lang="en-US">
+                <a:solidFill>
+                  <a:srgbClr val="CCCCCC"/>
+                </a:solidFill>
+                <a:latin typeface="Consolas" panose="020B0609020204030204" pitchFamily="49" charset="0"/>
+              </a:rPr>
+              <a:t> </a:t>
+            </a:r>
+            <a:r>
+              <a:rPr lang="en-US">
+                <a:solidFill>
+                  <a:srgbClr val="9CDCFE"/>
+                </a:solidFill>
+                <a:latin typeface="Consolas" panose="020B0609020204030204" pitchFamily="49" charset="0"/>
+              </a:rPr>
+              <a:t>numbers</a:t>
+            </a:r>
+            <a:r>
+              <a:rPr lang="en-US">
+                <a:solidFill>
+                  <a:srgbClr val="CCCCCC"/>
+                </a:solidFill>
+                <a:latin typeface="Consolas" panose="020B0609020204030204" pitchFamily="49" charset="0"/>
+              </a:rPr>
+              <a:t>[</a:t>
+            </a:r>
+            <a:r>
+              <a:rPr lang="en-US">
+                <a:solidFill>
+                  <a:srgbClr val="B5CEA8"/>
+                </a:solidFill>
+                <a:latin typeface="Consolas" panose="020B0609020204030204" pitchFamily="49" charset="0"/>
+              </a:rPr>
+              <a:t>10</a:t>
+            </a:r>
+            <a:r>
+              <a:rPr lang="en-US">
+                <a:solidFill>
+                  <a:srgbClr val="CCCCCC"/>
+                </a:solidFill>
+                <a:latin typeface="Consolas" panose="020B0609020204030204" pitchFamily="49" charset="0"/>
+              </a:rPr>
+              <a:t>];</a:t>
+            </a:r>
+            <a:r>
+              <a:rPr lang="en-US">
+                <a:solidFill>
+                  <a:srgbClr val="6A9955"/>
+                </a:solidFill>
+                <a:latin typeface="Consolas" panose="020B0609020204030204" pitchFamily="49" charset="0"/>
+              </a:rPr>
+              <a:t>          // Allocate memory space for 10 chars (bytes)</a:t>
+            </a:r>
+            <a:endParaRPr lang="en-US">
+              <a:solidFill>
+                <a:srgbClr val="CCCCCC"/>
+              </a:solidFill>
+              <a:latin typeface="Consolas" panose="020B0609020204030204" pitchFamily="49" charset="0"/>
+            </a:endParaRPr>
+          </a:p>
+          <a:p>
+            <a:pPr>
+              <a:buNone/>
+            </a:pPr>
+            <a:r>
+              <a:rPr lang="en-US">
+                <a:solidFill>
+                  <a:srgbClr val="9CDCFE"/>
+                </a:solidFill>
+                <a:latin typeface="Consolas" panose="020B0609020204030204" pitchFamily="49" charset="0"/>
+              </a:rPr>
+              <a:t>numbers</a:t>
+            </a:r>
+            <a:r>
+              <a:rPr lang="en-US">
+                <a:solidFill>
+                  <a:srgbClr val="CCCCCC"/>
+                </a:solidFill>
+                <a:latin typeface="Consolas" panose="020B0609020204030204" pitchFamily="49" charset="0"/>
+              </a:rPr>
+              <a:t>[</a:t>
+            </a:r>
+            <a:r>
+              <a:rPr lang="en-US">
+                <a:solidFill>
+                  <a:srgbClr val="B5CEA8"/>
+                </a:solidFill>
+                <a:latin typeface="Consolas" panose="020B0609020204030204" pitchFamily="49" charset="0"/>
+              </a:rPr>
+              <a:t>0</a:t>
+            </a:r>
+            <a:r>
+              <a:rPr lang="en-US">
+                <a:solidFill>
+                  <a:srgbClr val="CCCCCC"/>
+                </a:solidFill>
+                <a:latin typeface="Consolas" panose="020B0609020204030204" pitchFamily="49" charset="0"/>
+              </a:rPr>
+              <a:t>] </a:t>
+            </a:r>
+            <a:r>
+              <a:rPr lang="en-US">
+                <a:solidFill>
+                  <a:srgbClr val="D4D4D4"/>
+                </a:solidFill>
+                <a:latin typeface="Consolas" panose="020B0609020204030204" pitchFamily="49" charset="0"/>
+              </a:rPr>
+              <a:t>=</a:t>
+            </a:r>
+            <a:r>
+              <a:rPr lang="en-US">
+                <a:solidFill>
+                  <a:srgbClr val="CCCCCC"/>
+                </a:solidFill>
+                <a:latin typeface="Consolas" panose="020B0609020204030204" pitchFamily="49" charset="0"/>
+              </a:rPr>
+              <a:t> </a:t>
+            </a:r>
+            <a:r>
+              <a:rPr lang="en-US">
+                <a:solidFill>
+                  <a:srgbClr val="B5CEA8"/>
+                </a:solidFill>
+                <a:latin typeface="Consolas" panose="020B0609020204030204" pitchFamily="49" charset="0"/>
+              </a:rPr>
+              <a:t>10</a:t>
+            </a:r>
+            <a:r>
+              <a:rPr lang="en-US">
+                <a:solidFill>
+                  <a:srgbClr val="CCCCCC"/>
+                </a:solidFill>
+                <a:latin typeface="Consolas" panose="020B0609020204030204" pitchFamily="49" charset="0"/>
+              </a:rPr>
+              <a:t>;</a:t>
+            </a:r>
+            <a:r>
+              <a:rPr lang="en-US">
+                <a:solidFill>
+                  <a:srgbClr val="6A9955"/>
+                </a:solidFill>
+                <a:latin typeface="Consolas" panose="020B0609020204030204" pitchFamily="49" charset="0"/>
+              </a:rPr>
+              <a:t>           // Write a value into the first element of the array</a:t>
+            </a:r>
+            <a:endParaRPr lang="en-US">
+              <a:solidFill>
+                <a:srgbClr val="CCCCCC"/>
+              </a:solidFill>
+              <a:latin typeface="Consolas" panose="020B0609020204030204" pitchFamily="49" charset="0"/>
+            </a:endParaRPr>
+          </a:p>
+          <a:p>
+            <a:pPr>
+              <a:buNone/>
+            </a:pPr>
+            <a:r>
+              <a:rPr lang="en-US">
+                <a:solidFill>
+                  <a:srgbClr val="9CDCFE"/>
+                </a:solidFill>
+                <a:latin typeface="Consolas" panose="020B0609020204030204" pitchFamily="49" charset="0"/>
+              </a:rPr>
+              <a:t>numbers</a:t>
+            </a:r>
+            <a:r>
+              <a:rPr lang="en-US">
+                <a:solidFill>
+                  <a:srgbClr val="CCCCCC"/>
+                </a:solidFill>
+                <a:latin typeface="Consolas" panose="020B0609020204030204" pitchFamily="49" charset="0"/>
+              </a:rPr>
+              <a:t>[</a:t>
+            </a:r>
+            <a:r>
+              <a:rPr lang="en-US">
+                <a:solidFill>
+                  <a:srgbClr val="B5CEA8"/>
+                </a:solidFill>
+                <a:latin typeface="Consolas" panose="020B0609020204030204" pitchFamily="49" charset="0"/>
+              </a:rPr>
+              <a:t>1</a:t>
+            </a:r>
+            <a:r>
+              <a:rPr lang="en-US">
+                <a:solidFill>
+                  <a:srgbClr val="CCCCCC"/>
+                </a:solidFill>
+                <a:latin typeface="Consolas" panose="020B0609020204030204" pitchFamily="49" charset="0"/>
+              </a:rPr>
+              <a:t>] </a:t>
+            </a:r>
+            <a:r>
+              <a:rPr lang="en-US">
+                <a:solidFill>
+                  <a:srgbClr val="D4D4D4"/>
+                </a:solidFill>
+                <a:latin typeface="Consolas" panose="020B0609020204030204" pitchFamily="49" charset="0"/>
+              </a:rPr>
+              <a:t>=</a:t>
+            </a:r>
+            <a:r>
+              <a:rPr lang="en-US">
+                <a:solidFill>
+                  <a:srgbClr val="CCCCCC"/>
+                </a:solidFill>
+                <a:latin typeface="Consolas" panose="020B0609020204030204" pitchFamily="49" charset="0"/>
+              </a:rPr>
+              <a:t> </a:t>
+            </a:r>
+            <a:r>
+              <a:rPr lang="en-US">
+                <a:solidFill>
+                  <a:srgbClr val="B5CEA8"/>
+                </a:solidFill>
+                <a:latin typeface="Consolas" panose="020B0609020204030204" pitchFamily="49" charset="0"/>
+              </a:rPr>
+              <a:t>20</a:t>
+            </a:r>
+            <a:r>
+              <a:rPr lang="en-US">
+                <a:solidFill>
+                  <a:srgbClr val="CCCCCC"/>
+                </a:solidFill>
+                <a:latin typeface="Consolas" panose="020B0609020204030204" pitchFamily="49" charset="0"/>
+              </a:rPr>
+              <a:t>;</a:t>
+            </a:r>
+            <a:r>
+              <a:rPr lang="en-US">
+                <a:solidFill>
+                  <a:srgbClr val="6A9955"/>
+                </a:solidFill>
+                <a:latin typeface="Consolas" panose="020B0609020204030204" pitchFamily="49" charset="0"/>
+              </a:rPr>
+              <a:t>           //          ...           second         ....</a:t>
+            </a:r>
+            <a:endParaRPr lang="en-US">
+              <a:solidFill>
+                <a:srgbClr val="CCCCCC"/>
+              </a:solidFill>
+              <a:latin typeface="Consolas" panose="020B0609020204030204" pitchFamily="49" charset="0"/>
+            </a:endParaRPr>
+          </a:p>
+          <a:p>
+            <a:pPr>
+              <a:buNone/>
+            </a:pPr>
+            <a:r>
+              <a:rPr lang="en-US">
+                <a:solidFill>
+                  <a:srgbClr val="CCCCCC"/>
+                </a:solidFill>
+                <a:latin typeface="Consolas" panose="020B0609020204030204" pitchFamily="49" charset="0"/>
+              </a:rPr>
+              <a:t>...</a:t>
+            </a:r>
+          </a:p>
+          <a:p>
+            <a:pPr>
+              <a:buNone/>
+            </a:pPr>
+            <a:r>
+              <a:rPr lang="en-US">
+                <a:solidFill>
+                  <a:srgbClr val="9CDCFE"/>
+                </a:solidFill>
+                <a:latin typeface="Consolas" panose="020B0609020204030204" pitchFamily="49" charset="0"/>
+              </a:rPr>
+              <a:t>numbers</a:t>
+            </a:r>
+            <a:r>
+              <a:rPr lang="en-US">
+                <a:solidFill>
+                  <a:srgbClr val="CCCCCC"/>
+                </a:solidFill>
+                <a:latin typeface="Consolas" panose="020B0609020204030204" pitchFamily="49" charset="0"/>
+              </a:rPr>
+              <a:t>[</a:t>
+            </a:r>
+            <a:r>
+              <a:rPr lang="en-US">
+                <a:solidFill>
+                  <a:srgbClr val="B5CEA8"/>
+                </a:solidFill>
+                <a:latin typeface="Consolas" panose="020B0609020204030204" pitchFamily="49" charset="0"/>
+              </a:rPr>
+              <a:t>9</a:t>
+            </a:r>
+            <a:r>
+              <a:rPr lang="en-US">
+                <a:solidFill>
+                  <a:srgbClr val="CCCCCC"/>
+                </a:solidFill>
+                <a:latin typeface="Consolas" panose="020B0609020204030204" pitchFamily="49" charset="0"/>
+              </a:rPr>
+              <a:t>] </a:t>
+            </a:r>
+            <a:r>
+              <a:rPr lang="en-US">
+                <a:solidFill>
+                  <a:srgbClr val="D4D4D4"/>
+                </a:solidFill>
+                <a:latin typeface="Consolas" panose="020B0609020204030204" pitchFamily="49" charset="0"/>
+              </a:rPr>
+              <a:t>=</a:t>
+            </a:r>
+            <a:r>
+              <a:rPr lang="en-US">
+                <a:solidFill>
+                  <a:srgbClr val="CCCCCC"/>
+                </a:solidFill>
+                <a:latin typeface="Consolas" panose="020B0609020204030204" pitchFamily="49" charset="0"/>
+              </a:rPr>
+              <a:t> </a:t>
+            </a:r>
+            <a:r>
+              <a:rPr lang="en-US">
+                <a:solidFill>
+                  <a:srgbClr val="B5CEA8"/>
+                </a:solidFill>
+                <a:latin typeface="Consolas" panose="020B0609020204030204" pitchFamily="49" charset="0"/>
+              </a:rPr>
+              <a:t>100</a:t>
+            </a:r>
+            <a:r>
+              <a:rPr lang="en-US">
+                <a:solidFill>
+                  <a:srgbClr val="CCCCCC"/>
+                </a:solidFill>
+                <a:latin typeface="Consolas" panose="020B0609020204030204" pitchFamily="49" charset="0"/>
+              </a:rPr>
+              <a:t>;</a:t>
+            </a:r>
+            <a:r>
+              <a:rPr lang="en-US">
+                <a:solidFill>
+                  <a:srgbClr val="6A9955"/>
+                </a:solidFill>
+                <a:latin typeface="Consolas" panose="020B0609020204030204" pitchFamily="49" charset="0"/>
+              </a:rPr>
+              <a:t>          //          ...           last           ...</a:t>
+            </a:r>
+            <a:endParaRPr lang="en-US">
+              <a:solidFill>
+                <a:srgbClr val="CCCCCC"/>
+              </a:solidFill>
+              <a:latin typeface="Consolas" panose="020B0609020204030204" pitchFamily="49" charset="0"/>
+            </a:endParaRPr>
+          </a:p>
+          <a:p>
+            <a:pPr>
+              <a:buNone/>
+            </a:pPr>
+            <a:r>
+              <a:rPr lang="en-US">
+                <a:solidFill>
+                  <a:srgbClr val="569CD6"/>
+                </a:solidFill>
+                <a:latin typeface="Consolas" panose="020B0609020204030204" pitchFamily="49" charset="0"/>
+              </a:rPr>
+              <a:t>char</a:t>
+            </a:r>
+            <a:r>
+              <a:rPr lang="en-US">
+                <a:solidFill>
+                  <a:srgbClr val="CCCCCC"/>
+                </a:solidFill>
+                <a:latin typeface="Consolas" panose="020B0609020204030204" pitchFamily="49" charset="0"/>
+              </a:rPr>
+              <a:t> </a:t>
+            </a:r>
+            <a:r>
+              <a:rPr lang="en-US">
+                <a:solidFill>
+                  <a:srgbClr val="9CDCFE"/>
+                </a:solidFill>
+                <a:latin typeface="Consolas" panose="020B0609020204030204" pitchFamily="49" charset="0"/>
+              </a:rPr>
+              <a:t>v</a:t>
+            </a:r>
+            <a:r>
+              <a:rPr lang="en-US">
+                <a:solidFill>
+                  <a:srgbClr val="CCCCCC"/>
+                </a:solidFill>
+                <a:latin typeface="Consolas" panose="020B0609020204030204" pitchFamily="49" charset="0"/>
+              </a:rPr>
+              <a:t> </a:t>
+            </a:r>
+            <a:r>
+              <a:rPr lang="en-US">
+                <a:solidFill>
+                  <a:srgbClr val="D4D4D4"/>
+                </a:solidFill>
+                <a:latin typeface="Consolas" panose="020B0609020204030204" pitchFamily="49" charset="0"/>
+              </a:rPr>
+              <a:t>=</a:t>
+            </a:r>
+            <a:r>
+              <a:rPr lang="en-US">
+                <a:solidFill>
+                  <a:srgbClr val="CCCCCC"/>
+                </a:solidFill>
+                <a:latin typeface="Consolas" panose="020B0609020204030204" pitchFamily="49" charset="0"/>
+              </a:rPr>
+              <a:t> </a:t>
+            </a:r>
+            <a:r>
+              <a:rPr lang="en-US">
+                <a:solidFill>
+                  <a:srgbClr val="9CDCFE"/>
+                </a:solidFill>
+                <a:latin typeface="Consolas" panose="020B0609020204030204" pitchFamily="49" charset="0"/>
+              </a:rPr>
+              <a:t>numbers</a:t>
+            </a:r>
+            <a:r>
+              <a:rPr lang="en-US">
+                <a:solidFill>
+                  <a:srgbClr val="CCCCCC"/>
+                </a:solidFill>
+                <a:latin typeface="Consolas" panose="020B0609020204030204" pitchFamily="49" charset="0"/>
+              </a:rPr>
+              <a:t>[</a:t>
+            </a:r>
+            <a:r>
+              <a:rPr lang="en-US">
+                <a:solidFill>
+                  <a:srgbClr val="B5CEA8"/>
+                </a:solidFill>
+                <a:latin typeface="Consolas" panose="020B0609020204030204" pitchFamily="49" charset="0"/>
+              </a:rPr>
+              <a:t>9</a:t>
+            </a:r>
+            <a:r>
+              <a:rPr lang="en-US">
+                <a:solidFill>
+                  <a:srgbClr val="CCCCCC"/>
+                </a:solidFill>
+                <a:latin typeface="Consolas" panose="020B0609020204030204" pitchFamily="49" charset="0"/>
+              </a:rPr>
+              <a:t>];</a:t>
+            </a:r>
+            <a:r>
+              <a:rPr lang="en-US">
+                <a:solidFill>
+                  <a:srgbClr val="6A9955"/>
+                </a:solidFill>
+                <a:latin typeface="Consolas" panose="020B0609020204030204" pitchFamily="49" charset="0"/>
+              </a:rPr>
+              <a:t>       // Read the last element of the array into another variable</a:t>
+            </a:r>
+            <a:endParaRPr lang="en-US">
+              <a:solidFill>
+                <a:srgbClr val="CCCCCC"/>
+              </a:solidFill>
+              <a:latin typeface="Consolas" panose="020B0609020204030204" pitchFamily="49" charset="0"/>
+            </a:endParaRPr>
+          </a:p>
+          <a:p>
+            <a:pPr>
+              <a:lnSpc>
+                <a:spcPts val="1425"/>
+              </a:lnSpc>
+              <a:buNone/>
+            </a:pPr>
+            <a:endParaRPr lang="en-GB" b="0">
+              <a:solidFill>
+                <a:srgbClr val="CCCCCC"/>
+              </a:solidFill>
+              <a:effectLst/>
+              <a:latin typeface="Consolas" panose="020B0609020204030204" pitchFamily="49" charset="0"/>
+            </a:endParaRPr>
+          </a:p>
+        </p:txBody>
+      </p:sp>
     </p:spTree>
     <p:extLst>
       <p:ext uri="{BB962C8B-B14F-4D97-AF65-F5344CB8AC3E}">
@@ -6215,7 +8633,7 @@
 </p:sld>
 </file>
 
-<file path=ppt/slides/slide17.xml><?xml version="1.0" encoding="utf-8"?>
+<file path=ppt/slides/slide18.xml><?xml version="1.0" encoding="utf-8"?>
 <p:sld xmlns:a="http://schemas.openxmlformats.org/drawingml/2006/main" xmlns:r="http://schemas.openxmlformats.org/officeDocument/2006/relationships" xmlns:p="http://schemas.openxmlformats.org/presentationml/2006/main">
   <p:cSld>
     <p:spTree>
@@ -6277,28 +8695,463 @@
             <p:ph idx="1"/>
           </p:nvPr>
         </p:nvSpPr>
-        <p:spPr/>
+        <p:spPr>
+          <a:xfrm>
+            <a:off x="846786" y="1825625"/>
+            <a:ext cx="10515600" cy="1076414"/>
+          </a:xfrm>
+        </p:spPr>
         <p:txBody>
           <a:bodyPr/>
           <a:lstStyle/>
           <a:p>
             <a:r>
               <a:rPr lang="sv-SE"/>
-              <a:t>Visa en array i assembler och hur vi kan accessa den</a:t>
+              <a:t>I assembler finns inga speciella instruktioner för arrays. </a:t>
             </a:r>
           </a:p>
           <a:p>
             <a:r>
               <a:rPr lang="sv-SE"/>
-              <a:t>Visa .space direktivet</a:t>
-            </a:r>
-          </a:p>
-          <a:p>
-            <a:r>
-              <a:rPr lang="sv-SE"/>
-              <a:t>Visa med halfword (align och .space igen)</a:t>
-            </a:r>
-            <a:endParaRPr lang="LID4096"/>
+              <a:t>En array är bara en rad variabler av samma typ.</a:t>
+            </a:r>
+          </a:p>
+        </p:txBody>
+      </p:sp>
+      <p:sp>
+        <p:nvSpPr>
+          <p:cNvPr id="4" name="TextBox 3">
+            <a:extLst>
+              <a:ext uri="{FF2B5EF4-FFF2-40B4-BE49-F238E27FC236}">
+                <a16:creationId xmlns:a16="http://schemas.microsoft.com/office/drawing/2014/main" id="{2F8A3C55-A241-3545-5BD0-218CAD8EA41B}"/>
+              </a:ext>
+            </a:extLst>
+          </p:cNvPr>
+          <p:cNvSpPr txBox="1"/>
+          <p:nvPr/>
+        </p:nvSpPr>
+        <p:spPr>
+          <a:xfrm>
+            <a:off x="888641" y="3318714"/>
+            <a:ext cx="9255618" cy="2502352"/>
+          </a:xfrm>
+          <a:prstGeom prst="rect">
+            <a:avLst/>
+          </a:prstGeom>
+          <a:solidFill>
+            <a:schemeClr val="tx1">
+              <a:lumMod val="75000"/>
+              <a:lumOff val="25000"/>
+            </a:schemeClr>
+          </a:solidFill>
+        </p:spPr>
+        <p:txBody>
+          <a:bodyPr wrap="square" rtlCol="0">
+            <a:spAutoFit/>
+          </a:bodyPr>
+          <a:lstStyle/>
+          <a:p>
+            <a:pPr>
+              <a:buNone/>
+            </a:pPr>
+            <a:r>
+              <a:rPr lang="fr-FR">
+                <a:solidFill>
+                  <a:srgbClr val="DCDCAA"/>
+                </a:solidFill>
+                <a:latin typeface="Consolas" panose="020B0609020204030204" pitchFamily="49" charset="0"/>
+              </a:rPr>
+              <a:t>main</a:t>
+            </a:r>
+            <a:r>
+              <a:rPr lang="fr-FR">
+                <a:solidFill>
+                  <a:srgbClr val="CCCCCC"/>
+                </a:solidFill>
+                <a:latin typeface="Consolas" panose="020B0609020204030204" pitchFamily="49" charset="0"/>
+              </a:rPr>
+              <a:t>: </a:t>
+            </a:r>
+          </a:p>
+          <a:p>
+            <a:pPr>
+              <a:buNone/>
+            </a:pPr>
+            <a:r>
+              <a:rPr lang="fr-FR">
+                <a:solidFill>
+                  <a:srgbClr val="CCCCCC"/>
+                </a:solidFill>
+                <a:latin typeface="Consolas" panose="020B0609020204030204" pitchFamily="49" charset="0"/>
+              </a:rPr>
+              <a:t>  </a:t>
+            </a:r>
+            <a:r>
+              <a:rPr lang="fr-FR">
+                <a:solidFill>
+                  <a:srgbClr val="DCDCAA"/>
+                </a:solidFill>
+                <a:latin typeface="Consolas" panose="020B0609020204030204" pitchFamily="49" charset="0"/>
+              </a:rPr>
+              <a:t>la</a:t>
+            </a:r>
+            <a:r>
+              <a:rPr lang="fr-FR">
+                <a:solidFill>
+                  <a:srgbClr val="CCCCCC"/>
+                </a:solidFill>
+                <a:latin typeface="Consolas" panose="020B0609020204030204" pitchFamily="49" charset="0"/>
+              </a:rPr>
+              <a:t> </a:t>
+            </a:r>
+            <a:r>
+              <a:rPr lang="fr-FR">
+                <a:solidFill>
+                  <a:srgbClr val="9CDCFE"/>
+                </a:solidFill>
+                <a:latin typeface="Consolas" panose="020B0609020204030204" pitchFamily="49" charset="0"/>
+              </a:rPr>
+              <a:t>t0</a:t>
+            </a:r>
+            <a:r>
+              <a:rPr lang="fr-FR">
+                <a:solidFill>
+                  <a:srgbClr val="CCCCCC"/>
+                </a:solidFill>
+                <a:latin typeface="Consolas" panose="020B0609020204030204" pitchFamily="49" charset="0"/>
+              </a:rPr>
+              <a:t>, numbers        </a:t>
+            </a:r>
+            <a:r>
+              <a:rPr lang="fr-FR">
+                <a:solidFill>
+                  <a:srgbClr val="6A9955"/>
+                </a:solidFill>
+                <a:latin typeface="Consolas" panose="020B0609020204030204" pitchFamily="49" charset="0"/>
+              </a:rPr>
+              <a:t># Ladda addressen till arrayen i t0</a:t>
+            </a:r>
+            <a:endParaRPr lang="fr-FR">
+              <a:solidFill>
+                <a:srgbClr val="CCCCCC"/>
+              </a:solidFill>
+              <a:latin typeface="Consolas" panose="020B0609020204030204" pitchFamily="49" charset="0"/>
+            </a:endParaRPr>
+          </a:p>
+          <a:p>
+            <a:pPr>
+              <a:buNone/>
+            </a:pPr>
+            <a:r>
+              <a:rPr lang="fr-FR">
+                <a:solidFill>
+                  <a:srgbClr val="CCCCCC"/>
+                </a:solidFill>
+                <a:latin typeface="Consolas" panose="020B0609020204030204" pitchFamily="49" charset="0"/>
+              </a:rPr>
+              <a:t>  </a:t>
+            </a:r>
+            <a:r>
+              <a:rPr lang="fr-FR">
+                <a:solidFill>
+                  <a:srgbClr val="DCDCAA"/>
+                </a:solidFill>
+                <a:latin typeface="Consolas" panose="020B0609020204030204" pitchFamily="49" charset="0"/>
+              </a:rPr>
+              <a:t>lw</a:t>
+            </a:r>
+            <a:r>
+              <a:rPr lang="fr-FR">
+                <a:solidFill>
+                  <a:srgbClr val="CCCCCC"/>
+                </a:solidFill>
+                <a:latin typeface="Consolas" panose="020B0609020204030204" pitchFamily="49" charset="0"/>
+              </a:rPr>
+              <a:t> </a:t>
+            </a:r>
+            <a:r>
+              <a:rPr lang="fr-FR">
+                <a:solidFill>
+                  <a:srgbClr val="9CDCFE"/>
+                </a:solidFill>
+                <a:latin typeface="Consolas" panose="020B0609020204030204" pitchFamily="49" charset="0"/>
+              </a:rPr>
+              <a:t>t1</a:t>
+            </a:r>
+            <a:r>
+              <a:rPr lang="fr-FR">
+                <a:solidFill>
+                  <a:srgbClr val="CCCCCC"/>
+                </a:solidFill>
+                <a:latin typeface="Consolas" panose="020B0609020204030204" pitchFamily="49" charset="0"/>
+              </a:rPr>
+              <a:t>, </a:t>
+            </a:r>
+            <a:r>
+              <a:rPr lang="fr-FR">
+                <a:solidFill>
+                  <a:srgbClr val="B5CEA8"/>
+                </a:solidFill>
+                <a:latin typeface="Consolas" panose="020B0609020204030204" pitchFamily="49" charset="0"/>
+              </a:rPr>
+              <a:t>0</a:t>
+            </a:r>
+            <a:r>
+              <a:rPr lang="fr-FR">
+                <a:solidFill>
+                  <a:srgbClr val="CCCCCC"/>
+                </a:solidFill>
+                <a:latin typeface="Consolas" panose="020B0609020204030204" pitchFamily="49" charset="0"/>
+              </a:rPr>
+              <a:t>(</a:t>
+            </a:r>
+            <a:r>
+              <a:rPr lang="fr-FR">
+                <a:solidFill>
+                  <a:srgbClr val="9CDCFE"/>
+                </a:solidFill>
+                <a:latin typeface="Consolas" panose="020B0609020204030204" pitchFamily="49" charset="0"/>
+              </a:rPr>
+              <a:t>t0</a:t>
+            </a:r>
+            <a:r>
+              <a:rPr lang="fr-FR">
+                <a:solidFill>
+                  <a:srgbClr val="CCCCCC"/>
+                </a:solidFill>
+                <a:latin typeface="Consolas" panose="020B0609020204030204" pitchFamily="49" charset="0"/>
+              </a:rPr>
+              <a:t>)          </a:t>
+            </a:r>
+            <a:r>
+              <a:rPr lang="fr-FR">
+                <a:solidFill>
+                  <a:srgbClr val="6A9955"/>
+                </a:solidFill>
+                <a:latin typeface="Consolas" panose="020B0609020204030204" pitchFamily="49" charset="0"/>
+              </a:rPr>
+              <a:t># t1 &lt;- numbers[0]</a:t>
+            </a:r>
+            <a:endParaRPr lang="fr-FR">
+              <a:solidFill>
+                <a:srgbClr val="CCCCCC"/>
+              </a:solidFill>
+              <a:latin typeface="Consolas" panose="020B0609020204030204" pitchFamily="49" charset="0"/>
+            </a:endParaRPr>
+          </a:p>
+          <a:p>
+            <a:pPr>
+              <a:buNone/>
+            </a:pPr>
+            <a:r>
+              <a:rPr lang="fr-FR">
+                <a:solidFill>
+                  <a:srgbClr val="CCCCCC"/>
+                </a:solidFill>
+                <a:latin typeface="Consolas" panose="020B0609020204030204" pitchFamily="49" charset="0"/>
+              </a:rPr>
+              <a:t>  </a:t>
+            </a:r>
+            <a:r>
+              <a:rPr lang="fr-FR">
+                <a:solidFill>
+                  <a:srgbClr val="DCDCAA"/>
+                </a:solidFill>
+                <a:latin typeface="Consolas" panose="020B0609020204030204" pitchFamily="49" charset="0"/>
+              </a:rPr>
+              <a:t>lw</a:t>
+            </a:r>
+            <a:r>
+              <a:rPr lang="fr-FR">
+                <a:solidFill>
+                  <a:srgbClr val="CCCCCC"/>
+                </a:solidFill>
+                <a:latin typeface="Consolas" panose="020B0609020204030204" pitchFamily="49" charset="0"/>
+              </a:rPr>
+              <a:t> </a:t>
+            </a:r>
+            <a:r>
+              <a:rPr lang="fr-FR">
+                <a:solidFill>
+                  <a:srgbClr val="9CDCFE"/>
+                </a:solidFill>
+                <a:latin typeface="Consolas" panose="020B0609020204030204" pitchFamily="49" charset="0"/>
+              </a:rPr>
+              <a:t>t2</a:t>
+            </a:r>
+            <a:r>
+              <a:rPr lang="fr-FR">
+                <a:solidFill>
+                  <a:srgbClr val="CCCCCC"/>
+                </a:solidFill>
+                <a:latin typeface="Consolas" panose="020B0609020204030204" pitchFamily="49" charset="0"/>
+              </a:rPr>
+              <a:t>, </a:t>
+            </a:r>
+            <a:r>
+              <a:rPr lang="fr-FR">
+                <a:solidFill>
+                  <a:srgbClr val="B5CEA8"/>
+                </a:solidFill>
+                <a:latin typeface="Consolas" panose="020B0609020204030204" pitchFamily="49" charset="0"/>
+              </a:rPr>
+              <a:t>1</a:t>
+            </a:r>
+            <a:r>
+              <a:rPr lang="fr-FR">
+                <a:solidFill>
+                  <a:srgbClr val="CCCCCC"/>
+                </a:solidFill>
+                <a:latin typeface="Consolas" panose="020B0609020204030204" pitchFamily="49" charset="0"/>
+              </a:rPr>
+              <a:t>(</a:t>
+            </a:r>
+            <a:r>
+              <a:rPr lang="fr-FR">
+                <a:solidFill>
+                  <a:srgbClr val="9CDCFE"/>
+                </a:solidFill>
+                <a:latin typeface="Consolas" panose="020B0609020204030204" pitchFamily="49" charset="0"/>
+              </a:rPr>
+              <a:t>t0</a:t>
+            </a:r>
+            <a:r>
+              <a:rPr lang="fr-FR">
+                <a:solidFill>
+                  <a:srgbClr val="CCCCCC"/>
+                </a:solidFill>
+                <a:latin typeface="Consolas" panose="020B0609020204030204" pitchFamily="49" charset="0"/>
+              </a:rPr>
+              <a:t>)          </a:t>
+            </a:r>
+            <a:r>
+              <a:rPr lang="fr-FR">
+                <a:solidFill>
+                  <a:srgbClr val="6A9955"/>
+                </a:solidFill>
+                <a:latin typeface="Consolas" panose="020B0609020204030204" pitchFamily="49" charset="0"/>
+              </a:rPr>
+              <a:t># t2 &lt;- numbers[1]</a:t>
+            </a:r>
+            <a:endParaRPr lang="fr-FR">
+              <a:solidFill>
+                <a:srgbClr val="CCCCCC"/>
+              </a:solidFill>
+              <a:latin typeface="Consolas" panose="020B0609020204030204" pitchFamily="49" charset="0"/>
+            </a:endParaRPr>
+          </a:p>
+          <a:p>
+            <a:pPr>
+              <a:buNone/>
+            </a:pPr>
+            <a:br>
+              <a:rPr lang="fr-FR">
+                <a:solidFill>
+                  <a:srgbClr val="CCCCCC"/>
+                </a:solidFill>
+                <a:latin typeface="Consolas" panose="020B0609020204030204" pitchFamily="49" charset="0"/>
+              </a:rPr>
+            </a:br>
+            <a:endParaRPr lang="fr-FR">
+              <a:solidFill>
+                <a:srgbClr val="CCCCCC"/>
+              </a:solidFill>
+              <a:latin typeface="Consolas" panose="020B0609020204030204" pitchFamily="49" charset="0"/>
+            </a:endParaRPr>
+          </a:p>
+          <a:p>
+            <a:pPr>
+              <a:buNone/>
+            </a:pPr>
+            <a:r>
+              <a:rPr lang="fr-FR">
+                <a:solidFill>
+                  <a:srgbClr val="DCDCAA"/>
+                </a:solidFill>
+                <a:latin typeface="Consolas" panose="020B0609020204030204" pitchFamily="49" charset="0"/>
+              </a:rPr>
+              <a:t>numbers</a:t>
+            </a:r>
+            <a:r>
+              <a:rPr lang="fr-FR">
+                <a:solidFill>
+                  <a:srgbClr val="CCCCCC"/>
+                </a:solidFill>
+                <a:latin typeface="Consolas" panose="020B0609020204030204" pitchFamily="49" charset="0"/>
+              </a:rPr>
+              <a:t>:                </a:t>
+            </a:r>
+            <a:r>
+              <a:rPr lang="fr-FR">
+                <a:solidFill>
+                  <a:srgbClr val="6A9955"/>
+                </a:solidFill>
+                <a:latin typeface="Consolas" panose="020B0609020204030204" pitchFamily="49" charset="0"/>
+              </a:rPr>
+              <a:t># Deklarera numbers[5]</a:t>
+            </a:r>
+            <a:endParaRPr lang="fr-FR">
+              <a:solidFill>
+                <a:srgbClr val="CCCCCC"/>
+              </a:solidFill>
+              <a:latin typeface="Consolas" panose="020B0609020204030204" pitchFamily="49" charset="0"/>
+            </a:endParaRPr>
+          </a:p>
+          <a:p>
+            <a:pPr>
+              <a:buNone/>
+            </a:pPr>
+            <a:r>
+              <a:rPr lang="fr-FR">
+                <a:solidFill>
+                  <a:srgbClr val="569CD6"/>
+                </a:solidFill>
+                <a:latin typeface="Consolas" panose="020B0609020204030204" pitchFamily="49" charset="0"/>
+              </a:rPr>
+              <a:t>.space</a:t>
+            </a:r>
+            <a:r>
+              <a:rPr lang="fr-FR">
+                <a:solidFill>
+                  <a:srgbClr val="CCCCCC"/>
+                </a:solidFill>
+                <a:latin typeface="Consolas" panose="020B0609020204030204" pitchFamily="49" charset="0"/>
+              </a:rPr>
+              <a:t> </a:t>
+            </a:r>
+            <a:r>
+              <a:rPr lang="fr-FR">
+                <a:solidFill>
+                  <a:srgbClr val="B5CEA8"/>
+                </a:solidFill>
+                <a:latin typeface="Consolas" panose="020B0609020204030204" pitchFamily="49" charset="0"/>
+              </a:rPr>
+              <a:t>5</a:t>
+            </a:r>
+            <a:r>
+              <a:rPr lang="fr-FR">
+                <a:solidFill>
+                  <a:srgbClr val="CCCCCC"/>
+                </a:solidFill>
+                <a:latin typeface="Consolas" panose="020B0609020204030204" pitchFamily="49" charset="0"/>
+              </a:rPr>
+              <a:t> </a:t>
+            </a:r>
+          </a:p>
+          <a:p>
+            <a:pPr>
+              <a:lnSpc>
+                <a:spcPts val="1425"/>
+              </a:lnSpc>
+              <a:buNone/>
+            </a:pPr>
+            <a:endParaRPr lang="en-GB" b="0">
+              <a:solidFill>
+                <a:srgbClr val="CCCCCC"/>
+              </a:solidFill>
+              <a:effectLst/>
+              <a:latin typeface="Consolas" panose="020B0609020204030204" pitchFamily="49" charset="0"/>
+            </a:endParaRPr>
           </a:p>
         </p:txBody>
       </p:sp>
@@ -6312,15 +9165,320 @@
   <p:clrMapOvr>
     <a:masterClrMapping/>
   </p:clrMapOvr>
+  <p:timing>
+    <p:tnLst>
+      <p:par>
+        <p:cTn id="1" dur="indefinite" restart="never" nodeType="tmRoot">
+          <p:childTnLst>
+            <p:seq concurrent="1" nextAc="seek">
+              <p:cTn id="2" dur="indefinite" nodeType="mainSeq">
+                <p:childTnLst>
+                  <p:par>
+                    <p:cTn id="3" fill="hold">
+                      <p:stCondLst>
+                        <p:cond delay="indefinite"/>
+                      </p:stCondLst>
+                      <p:childTnLst>
+                        <p:par>
+                          <p:cTn id="4" fill="hold">
+                            <p:stCondLst>
+                              <p:cond delay="0"/>
+                            </p:stCondLst>
+                            <p:childTnLst>
+                              <p:par>
+                                <p:cTn id="5" presetID="10" presetClass="entr" presetSubtype="0" fill="hold" nodeType="clickEffect">
+                                  <p:stCondLst>
+                                    <p:cond delay="0"/>
+                                  </p:stCondLst>
+                                  <p:childTnLst>
+                                    <p:set>
+                                      <p:cBhvr>
+                                        <p:cTn id="6" dur="1" fill="hold">
+                                          <p:stCondLst>
+                                            <p:cond delay="0"/>
+                                          </p:stCondLst>
+                                        </p:cTn>
+                                        <p:tgtEl>
+                                          <p:spTgt spid="4">
+                                            <p:txEl>
+                                              <p:pRg st="5" end="5"/>
+                                            </p:txEl>
+                                          </p:spTgt>
+                                        </p:tgtEl>
+                                        <p:attrNameLst>
+                                          <p:attrName>style.visibility</p:attrName>
+                                        </p:attrNameLst>
+                                      </p:cBhvr>
+                                      <p:to>
+                                        <p:strVal val="visible"/>
+                                      </p:to>
+                                    </p:set>
+                                    <p:animEffect transition="in" filter="fade">
+                                      <p:cBhvr>
+                                        <p:cTn id="7" dur="500"/>
+                                        <p:tgtEl>
+                                          <p:spTgt spid="4">
+                                            <p:txEl>
+                                              <p:pRg st="5" end="5"/>
+                                            </p:txEl>
+                                          </p:spTgt>
+                                        </p:tgtEl>
+                                      </p:cBhvr>
+                                    </p:animEffect>
+                                  </p:childTnLst>
+                                </p:cTn>
+                              </p:par>
+                              <p:par>
+                                <p:cTn id="8" presetID="10" presetClass="entr" presetSubtype="0" fill="hold" nodeType="withEffect">
+                                  <p:stCondLst>
+                                    <p:cond delay="0"/>
+                                  </p:stCondLst>
+                                  <p:childTnLst>
+                                    <p:set>
+                                      <p:cBhvr>
+                                        <p:cTn id="9" dur="1" fill="hold">
+                                          <p:stCondLst>
+                                            <p:cond delay="0"/>
+                                          </p:stCondLst>
+                                        </p:cTn>
+                                        <p:tgtEl>
+                                          <p:spTgt spid="4">
+                                            <p:txEl>
+                                              <p:pRg st="6" end="6"/>
+                                            </p:txEl>
+                                          </p:spTgt>
+                                        </p:tgtEl>
+                                        <p:attrNameLst>
+                                          <p:attrName>style.visibility</p:attrName>
+                                        </p:attrNameLst>
+                                      </p:cBhvr>
+                                      <p:to>
+                                        <p:strVal val="visible"/>
+                                      </p:to>
+                                    </p:set>
+                                    <p:animEffect transition="in" filter="fade">
+                                      <p:cBhvr>
+                                        <p:cTn id="10" dur="500"/>
+                                        <p:tgtEl>
+                                          <p:spTgt spid="4">
+                                            <p:txEl>
+                                              <p:pRg st="6" end="6"/>
+                                            </p:txEl>
+                                          </p:spTgt>
+                                        </p:tgtEl>
+                                      </p:cBhvr>
+                                    </p:animEffect>
+                                  </p:childTnLst>
+                                </p:cTn>
+                              </p:par>
+                            </p:childTnLst>
+                          </p:cTn>
+                        </p:par>
+                      </p:childTnLst>
+                    </p:cTn>
+                  </p:par>
+                  <p:par>
+                    <p:cTn id="11" fill="hold">
+                      <p:stCondLst>
+                        <p:cond delay="indefinite"/>
+                      </p:stCondLst>
+                      <p:childTnLst>
+                        <p:par>
+                          <p:cTn id="12" fill="hold">
+                            <p:stCondLst>
+                              <p:cond delay="0"/>
+                            </p:stCondLst>
+                            <p:childTnLst>
+                              <p:par>
+                                <p:cTn id="13" presetID="10" presetClass="entr" presetSubtype="0" fill="hold" nodeType="clickEffect">
+                                  <p:stCondLst>
+                                    <p:cond delay="0"/>
+                                  </p:stCondLst>
+                                  <p:childTnLst>
+                                    <p:set>
+                                      <p:cBhvr>
+                                        <p:cTn id="14" dur="1" fill="hold">
+                                          <p:stCondLst>
+                                            <p:cond delay="0"/>
+                                          </p:stCondLst>
+                                        </p:cTn>
+                                        <p:tgtEl>
+                                          <p:spTgt spid="4">
+                                            <p:txEl>
+                                              <p:pRg st="1" end="1"/>
+                                            </p:txEl>
+                                          </p:spTgt>
+                                        </p:tgtEl>
+                                        <p:attrNameLst>
+                                          <p:attrName>style.visibility</p:attrName>
+                                        </p:attrNameLst>
+                                      </p:cBhvr>
+                                      <p:to>
+                                        <p:strVal val="visible"/>
+                                      </p:to>
+                                    </p:set>
+                                    <p:animEffect transition="in" filter="fade">
+                                      <p:cBhvr>
+                                        <p:cTn id="15" dur="500"/>
+                                        <p:tgtEl>
+                                          <p:spTgt spid="4">
+                                            <p:txEl>
+                                              <p:pRg st="1" end="1"/>
+                                            </p:txEl>
+                                          </p:spTgt>
+                                        </p:tgtEl>
+                                      </p:cBhvr>
+                                    </p:animEffect>
+                                  </p:childTnLst>
+                                </p:cTn>
+                              </p:par>
+                            </p:childTnLst>
+                          </p:cTn>
+                        </p:par>
+                      </p:childTnLst>
+                    </p:cTn>
+                  </p:par>
+                  <p:par>
+                    <p:cTn id="16" fill="hold">
+                      <p:stCondLst>
+                        <p:cond delay="indefinite"/>
+                      </p:stCondLst>
+                      <p:childTnLst>
+                        <p:par>
+                          <p:cTn id="17" fill="hold">
+                            <p:stCondLst>
+                              <p:cond delay="0"/>
+                            </p:stCondLst>
+                            <p:childTnLst>
+                              <p:par>
+                                <p:cTn id="18" presetID="10" presetClass="entr" presetSubtype="0" fill="hold" nodeType="clickEffect">
+                                  <p:stCondLst>
+                                    <p:cond delay="0"/>
+                                  </p:stCondLst>
+                                  <p:childTnLst>
+                                    <p:set>
+                                      <p:cBhvr>
+                                        <p:cTn id="19" dur="1" fill="hold">
+                                          <p:stCondLst>
+                                            <p:cond delay="0"/>
+                                          </p:stCondLst>
+                                        </p:cTn>
+                                        <p:tgtEl>
+                                          <p:spTgt spid="4">
+                                            <p:txEl>
+                                              <p:pRg st="2" end="2"/>
+                                            </p:txEl>
+                                          </p:spTgt>
+                                        </p:tgtEl>
+                                        <p:attrNameLst>
+                                          <p:attrName>style.visibility</p:attrName>
+                                        </p:attrNameLst>
+                                      </p:cBhvr>
+                                      <p:to>
+                                        <p:strVal val="visible"/>
+                                      </p:to>
+                                    </p:set>
+                                    <p:animEffect transition="in" filter="fade">
+                                      <p:cBhvr>
+                                        <p:cTn id="20" dur="500"/>
+                                        <p:tgtEl>
+                                          <p:spTgt spid="4">
+                                            <p:txEl>
+                                              <p:pRg st="2" end="2"/>
+                                            </p:txEl>
+                                          </p:spTgt>
+                                        </p:tgtEl>
+                                      </p:cBhvr>
+                                    </p:animEffect>
+                                  </p:childTnLst>
+                                </p:cTn>
+                              </p:par>
+                              <p:par>
+                                <p:cTn id="21" presetID="10" presetClass="entr" presetSubtype="0" fill="hold" nodeType="withEffect">
+                                  <p:stCondLst>
+                                    <p:cond delay="0"/>
+                                  </p:stCondLst>
+                                  <p:childTnLst>
+                                    <p:set>
+                                      <p:cBhvr>
+                                        <p:cTn id="22" dur="1" fill="hold">
+                                          <p:stCondLst>
+                                            <p:cond delay="0"/>
+                                          </p:stCondLst>
+                                        </p:cTn>
+                                        <p:tgtEl>
+                                          <p:spTgt spid="4">
+                                            <p:txEl>
+                                              <p:pRg st="3" end="3"/>
+                                            </p:txEl>
+                                          </p:spTgt>
+                                        </p:tgtEl>
+                                        <p:attrNameLst>
+                                          <p:attrName>style.visibility</p:attrName>
+                                        </p:attrNameLst>
+                                      </p:cBhvr>
+                                      <p:to>
+                                        <p:strVal val="visible"/>
+                                      </p:to>
+                                    </p:set>
+                                    <p:animEffect transition="in" filter="fade">
+                                      <p:cBhvr>
+                                        <p:cTn id="23" dur="500"/>
+                                        <p:tgtEl>
+                                          <p:spTgt spid="4">
+                                            <p:txEl>
+                                              <p:pRg st="3" end="3"/>
+                                            </p:txEl>
+                                          </p:spTgt>
+                                        </p:tgtEl>
+                                      </p:cBhvr>
+                                    </p:animEffect>
+                                  </p:childTnLst>
+                                </p:cTn>
+                              </p:par>
+                            </p:childTnLst>
+                          </p:cTn>
+                        </p:par>
+                      </p:childTnLst>
+                    </p:cTn>
+                  </p:par>
+                </p:childTnLst>
+              </p:cTn>
+              <p:prevCondLst>
+                <p:cond evt="onPrev" delay="0">
+                  <p:tgtEl>
+                    <p:sldTgt/>
+                  </p:tgtEl>
+                </p:cond>
+              </p:prevCondLst>
+              <p:nextCondLst>
+                <p:cond evt="onNext" delay="0">
+                  <p:tgtEl>
+                    <p:sldTgt/>
+                  </p:tgtEl>
+                </p:cond>
+              </p:nextCondLst>
+            </p:seq>
+          </p:childTnLst>
+        </p:cTn>
+      </p:par>
+    </p:tnLst>
+  </p:timing>
 </p:sld>
 </file>
 
-<file path=ppt/slides/slide18.xml><?xml version="1.0" encoding="utf-8"?>
+<file path=ppt/slides/slide19.xml><?xml version="1.0" encoding="utf-8"?>
 <p:sld xmlns:a="http://schemas.openxmlformats.org/drawingml/2006/main" xmlns:r="http://schemas.openxmlformats.org/officeDocument/2006/relationships" xmlns:p="http://schemas.openxmlformats.org/presentationml/2006/main">
   <p:cSld>
     <p:spTree>
       <p:nvGrpSpPr>
-        <p:cNvPr id="1" name=""/>
+        <p:cNvPr id="1" name="">
+          <a:extLst>
+            <a:ext uri="{FF2B5EF4-FFF2-40B4-BE49-F238E27FC236}">
+              <a16:creationId xmlns:a16="http://schemas.microsoft.com/office/drawing/2014/main" id="{DCE35451-C6F2-6450-AD81-023365723A43}"/>
+            </a:ext>
+          </a:extLst>
+        </p:cNvPr>
         <p:cNvGrpSpPr/>
         <p:nvPr/>
       </p:nvGrpSpPr>
@@ -6337,7 +9495,7 @@
           <p:cNvPr id="2" name="Title 1">
             <a:extLst>
               <a:ext uri="{FF2B5EF4-FFF2-40B4-BE49-F238E27FC236}">
-                <a16:creationId xmlns:a16="http://schemas.microsoft.com/office/drawing/2014/main" id="{19AA3EBD-DCAC-F2A4-A314-969FE541143B}"/>
+                <a16:creationId xmlns:a16="http://schemas.microsoft.com/office/drawing/2014/main" id="{BD07B32B-B814-4E29-C5E7-67E14787D4B7}"/>
               </a:ext>
             </a:extLst>
           </p:cNvPr>
@@ -6355,78 +9513,18 @@
           <a:p>
             <a:r>
               <a:rPr lang="sv-SE"/>
-              <a:t>Iterera över en array</a:t>
+              <a:t>Arrays (igen, med shorts)</a:t>
             </a:r>
             <a:endParaRPr lang="LID4096"/>
           </a:p>
         </p:txBody>
       </p:sp>
-      <p:pic>
-        <p:nvPicPr>
-          <p:cNvPr id="5" name="Picture 4">
+      <p:sp>
+        <p:nvSpPr>
+          <p:cNvPr id="3" name="Content Placeholder 2">
             <a:extLst>
               <a:ext uri="{FF2B5EF4-FFF2-40B4-BE49-F238E27FC236}">
-                <a16:creationId xmlns:a16="http://schemas.microsoft.com/office/drawing/2014/main" id="{3FA4E475-56FE-7E08-94B4-F52D4616EA6A}"/>
-              </a:ext>
-            </a:extLst>
-          </p:cNvPr>
-          <p:cNvPicPr>
-            <a:picLocks noChangeAspect="1"/>
-          </p:cNvPicPr>
-          <p:nvPr/>
-        </p:nvPicPr>
-        <p:blipFill>
-          <a:blip r:embed="rId2"/>
-          <a:stretch>
-            <a:fillRect/>
-          </a:stretch>
-        </p:blipFill>
-        <p:spPr>
-          <a:xfrm>
-            <a:off x="3038889" y="1906206"/>
-            <a:ext cx="6114222" cy="4456493"/>
-          </a:xfrm>
-          <a:prstGeom prst="rect">
-            <a:avLst/>
-          </a:prstGeom>
-        </p:spPr>
-      </p:pic>
-    </p:spTree>
-    <p:extLst>
-      <p:ext uri="{BB962C8B-B14F-4D97-AF65-F5344CB8AC3E}">
-        <p14:creationId xmlns:p14="http://schemas.microsoft.com/office/powerpoint/2010/main" val="3197991281"/>
-      </p:ext>
-    </p:extLst>
-  </p:cSld>
-  <p:clrMapOvr>
-    <a:masterClrMapping/>
-  </p:clrMapOvr>
-</p:sld>
-</file>
-
-<file path=ppt/slides/slide19.xml><?xml version="1.0" encoding="utf-8"?>
-<p:sld xmlns:a="http://schemas.openxmlformats.org/drawingml/2006/main" xmlns:r="http://schemas.openxmlformats.org/officeDocument/2006/relationships" xmlns:p="http://schemas.openxmlformats.org/presentationml/2006/main">
-  <p:cSld>
-    <p:spTree>
-      <p:nvGrpSpPr>
-        <p:cNvPr id="1" name=""/>
-        <p:cNvGrpSpPr/>
-        <p:nvPr/>
-      </p:nvGrpSpPr>
-      <p:grpSpPr>
-        <a:xfrm>
-          <a:off x="0" y="0"/>
-          <a:ext cx="0" cy="0"/>
-          <a:chOff x="0" y="0"/>
-          <a:chExt cx="0" cy="0"/>
-        </a:xfrm>
-      </p:grpSpPr>
-      <p:sp>
-        <p:nvSpPr>
-          <p:cNvPr id="2" name="Title 1">
-            <a:extLst>
-              <a:ext uri="{FF2B5EF4-FFF2-40B4-BE49-F238E27FC236}">
-                <a16:creationId xmlns:a16="http://schemas.microsoft.com/office/drawing/2014/main" id="{B71F8934-DA57-B8F3-DFB5-63AB034BF3DA}"/>
+                <a16:creationId xmlns:a16="http://schemas.microsoft.com/office/drawing/2014/main" id="{8261EAB1-A68F-9D22-B839-E5AA80E5E70E}"/>
               </a:ext>
             </a:extLst>
           </p:cNvPr>
@@ -6434,62 +9532,1223 @@
             <a:spLocks noGrp="1"/>
           </p:cNvSpPr>
           <p:nvPr>
-            <p:ph type="title"/>
+            <p:ph idx="1"/>
           </p:nvPr>
         </p:nvSpPr>
-        <p:spPr/>
+        <p:spPr>
+          <a:xfrm>
+            <a:off x="846786" y="1825625"/>
+            <a:ext cx="10515600" cy="1076414"/>
+          </a:xfrm>
+        </p:spPr>
         <p:txBody>
           <a:bodyPr/>
           <a:lstStyle/>
           <a:p>
             <a:r>
               <a:rPr lang="sv-SE"/>
-              <a:t>Lokala arrayer</a:t>
-            </a:r>
-            <a:endParaRPr lang="LID4096"/>
+              <a:t>I assembler finns inga speciella instruktioner för arrays. </a:t>
+            </a:r>
+          </a:p>
+          <a:p>
+            <a:r>
+              <a:rPr lang="sv-SE"/>
+              <a:t>En array är bara en rad variabler av samma typ.</a:t>
+            </a:r>
           </a:p>
         </p:txBody>
       </p:sp>
-      <p:pic>
-        <p:nvPicPr>
-          <p:cNvPr id="5" name="Picture 4">
+      <p:sp>
+        <p:nvSpPr>
+          <p:cNvPr id="4" name="TextBox 3">
             <a:extLst>
               <a:ext uri="{FF2B5EF4-FFF2-40B4-BE49-F238E27FC236}">
-                <a16:creationId xmlns:a16="http://schemas.microsoft.com/office/drawing/2014/main" id="{EC6C4A39-A9D3-3122-4AF0-12FF95D210ED}"/>
+                <a16:creationId xmlns:a16="http://schemas.microsoft.com/office/drawing/2014/main" id="{32F5049B-E606-00BB-DF30-54447186D08A}"/>
               </a:ext>
             </a:extLst>
           </p:cNvPr>
-          <p:cNvPicPr>
-            <a:picLocks noChangeAspect="1"/>
-          </p:cNvPicPr>
+          <p:cNvSpPr txBox="1"/>
           <p:nvPr/>
-        </p:nvPicPr>
-        <p:blipFill>
-          <a:blip r:embed="rId2"/>
-          <a:stretch>
-            <a:fillRect/>
-          </a:stretch>
-        </p:blipFill>
+        </p:nvSpPr>
         <p:spPr>
           <a:xfrm>
-            <a:off x="527861" y="2118868"/>
-            <a:ext cx="8133540" cy="4153741"/>
+            <a:off x="888641" y="3318714"/>
+            <a:ext cx="9255618" cy="2225353"/>
           </a:xfrm>
           <a:prstGeom prst="rect">
             <a:avLst/>
           </a:prstGeom>
+          <a:solidFill>
+            <a:schemeClr val="tx1">
+              <a:lumMod val="75000"/>
+              <a:lumOff val="25000"/>
+            </a:schemeClr>
+          </a:solidFill>
         </p:spPr>
-      </p:pic>
+        <p:txBody>
+          <a:bodyPr wrap="square" rtlCol="0">
+            <a:spAutoFit/>
+          </a:bodyPr>
+          <a:lstStyle/>
+          <a:p>
+            <a:pPr>
+              <a:buNone/>
+            </a:pPr>
+            <a:r>
+              <a:rPr lang="en-GB" b="0">
+                <a:solidFill>
+                  <a:srgbClr val="DCDCAA"/>
+                </a:solidFill>
+                <a:effectLst/>
+                <a:latin typeface="Consolas" panose="020B0609020204030204" pitchFamily="49" charset="0"/>
+              </a:rPr>
+              <a:t>main</a:t>
+            </a:r>
+            <a:r>
+              <a:rPr lang="en-GB" b="0">
+                <a:solidFill>
+                  <a:srgbClr val="CCCCCC"/>
+                </a:solidFill>
+                <a:effectLst/>
+                <a:latin typeface="Consolas" panose="020B0609020204030204" pitchFamily="49" charset="0"/>
+              </a:rPr>
+              <a:t>: </a:t>
+            </a:r>
+          </a:p>
+          <a:p>
+            <a:pPr>
+              <a:buNone/>
+            </a:pPr>
+            <a:r>
+              <a:rPr lang="en-GB" b="0">
+                <a:solidFill>
+                  <a:srgbClr val="CCCCCC"/>
+                </a:solidFill>
+                <a:effectLst/>
+                <a:latin typeface="Consolas" panose="020B0609020204030204" pitchFamily="49" charset="0"/>
+              </a:rPr>
+              <a:t>  </a:t>
+            </a:r>
+            <a:r>
+              <a:rPr lang="en-GB" b="0">
+                <a:solidFill>
+                  <a:srgbClr val="DCDCAA"/>
+                </a:solidFill>
+                <a:effectLst/>
+                <a:latin typeface="Consolas" panose="020B0609020204030204" pitchFamily="49" charset="0"/>
+              </a:rPr>
+              <a:t>la</a:t>
+            </a:r>
+            <a:r>
+              <a:rPr lang="en-GB" b="0">
+                <a:solidFill>
+                  <a:srgbClr val="CCCCCC"/>
+                </a:solidFill>
+                <a:effectLst/>
+                <a:latin typeface="Consolas" panose="020B0609020204030204" pitchFamily="49" charset="0"/>
+              </a:rPr>
+              <a:t> </a:t>
+            </a:r>
+            <a:r>
+              <a:rPr lang="en-GB" b="0">
+                <a:solidFill>
+                  <a:srgbClr val="9CDCFE"/>
+                </a:solidFill>
+                <a:effectLst/>
+                <a:latin typeface="Consolas" panose="020B0609020204030204" pitchFamily="49" charset="0"/>
+              </a:rPr>
+              <a:t>t0</a:t>
+            </a:r>
+            <a:r>
+              <a:rPr lang="en-GB" b="0">
+                <a:solidFill>
+                  <a:srgbClr val="CCCCCC"/>
+                </a:solidFill>
+                <a:effectLst/>
+                <a:latin typeface="Consolas" panose="020B0609020204030204" pitchFamily="49" charset="0"/>
+              </a:rPr>
+              <a:t>, numbers        </a:t>
+            </a:r>
+            <a:r>
+              <a:rPr lang="en-GB" b="0">
+                <a:solidFill>
+                  <a:srgbClr val="6A9955"/>
+                </a:solidFill>
+                <a:effectLst/>
+                <a:latin typeface="Consolas" panose="020B0609020204030204" pitchFamily="49" charset="0"/>
+              </a:rPr>
+              <a:t># Ladda addressen till arrayen i t0</a:t>
+            </a:r>
+            <a:endParaRPr lang="en-GB" b="0">
+              <a:solidFill>
+                <a:srgbClr val="CCCCCC"/>
+              </a:solidFill>
+              <a:effectLst/>
+              <a:latin typeface="Consolas" panose="020B0609020204030204" pitchFamily="49" charset="0"/>
+            </a:endParaRPr>
+          </a:p>
+          <a:p>
+            <a:pPr>
+              <a:buNone/>
+            </a:pPr>
+            <a:r>
+              <a:rPr lang="en-GB" b="0">
+                <a:solidFill>
+                  <a:srgbClr val="CCCCCC"/>
+                </a:solidFill>
+                <a:effectLst/>
+                <a:latin typeface="Consolas" panose="020B0609020204030204" pitchFamily="49" charset="0"/>
+              </a:rPr>
+              <a:t>  </a:t>
+            </a:r>
+            <a:r>
+              <a:rPr lang="en-GB" b="0">
+                <a:solidFill>
+                  <a:srgbClr val="DCDCAA"/>
+                </a:solidFill>
+                <a:effectLst/>
+                <a:latin typeface="Consolas" panose="020B0609020204030204" pitchFamily="49" charset="0"/>
+              </a:rPr>
+              <a:t>lw</a:t>
+            </a:r>
+            <a:r>
+              <a:rPr lang="en-GB" b="0">
+                <a:solidFill>
+                  <a:srgbClr val="CCCCCC"/>
+                </a:solidFill>
+                <a:effectLst/>
+                <a:latin typeface="Consolas" panose="020B0609020204030204" pitchFamily="49" charset="0"/>
+              </a:rPr>
+              <a:t> </a:t>
+            </a:r>
+            <a:r>
+              <a:rPr lang="en-GB" b="0">
+                <a:solidFill>
+                  <a:srgbClr val="9CDCFE"/>
+                </a:solidFill>
+                <a:effectLst/>
+                <a:latin typeface="Consolas" panose="020B0609020204030204" pitchFamily="49" charset="0"/>
+              </a:rPr>
+              <a:t>t1</a:t>
+            </a:r>
+            <a:r>
+              <a:rPr lang="en-GB" b="0">
+                <a:solidFill>
+                  <a:srgbClr val="CCCCCC"/>
+                </a:solidFill>
+                <a:effectLst/>
+                <a:latin typeface="Consolas" panose="020B0609020204030204" pitchFamily="49" charset="0"/>
+              </a:rPr>
+              <a:t>, </a:t>
+            </a:r>
+            <a:r>
+              <a:rPr lang="en-GB" b="0">
+                <a:solidFill>
+                  <a:srgbClr val="B5CEA8"/>
+                </a:solidFill>
+                <a:effectLst/>
+                <a:latin typeface="Consolas" panose="020B0609020204030204" pitchFamily="49" charset="0"/>
+              </a:rPr>
+              <a:t>0</a:t>
+            </a:r>
+            <a:r>
+              <a:rPr lang="en-GB" b="0">
+                <a:solidFill>
+                  <a:srgbClr val="CCCCCC"/>
+                </a:solidFill>
+                <a:effectLst/>
+                <a:latin typeface="Consolas" panose="020B0609020204030204" pitchFamily="49" charset="0"/>
+              </a:rPr>
+              <a:t>(</a:t>
+            </a:r>
+            <a:r>
+              <a:rPr lang="en-GB" b="0">
+                <a:solidFill>
+                  <a:srgbClr val="9CDCFE"/>
+                </a:solidFill>
+                <a:effectLst/>
+                <a:latin typeface="Consolas" panose="020B0609020204030204" pitchFamily="49" charset="0"/>
+              </a:rPr>
+              <a:t>t0</a:t>
+            </a:r>
+            <a:r>
+              <a:rPr lang="en-GB" b="0">
+                <a:solidFill>
+                  <a:srgbClr val="CCCCCC"/>
+                </a:solidFill>
+                <a:effectLst/>
+                <a:latin typeface="Consolas" panose="020B0609020204030204" pitchFamily="49" charset="0"/>
+              </a:rPr>
+              <a:t>)          </a:t>
+            </a:r>
+            <a:r>
+              <a:rPr lang="en-GB" b="0">
+                <a:solidFill>
+                  <a:srgbClr val="6A9955"/>
+                </a:solidFill>
+                <a:effectLst/>
+                <a:latin typeface="Consolas" panose="020B0609020204030204" pitchFamily="49" charset="0"/>
+              </a:rPr>
+              <a:t># t1 &lt;- numbers[0]</a:t>
+            </a:r>
+            <a:endParaRPr lang="en-GB" b="0">
+              <a:solidFill>
+                <a:srgbClr val="CCCCCC"/>
+              </a:solidFill>
+              <a:effectLst/>
+              <a:latin typeface="Consolas" panose="020B0609020204030204" pitchFamily="49" charset="0"/>
+            </a:endParaRPr>
+          </a:p>
+          <a:p>
+            <a:pPr>
+              <a:buNone/>
+            </a:pPr>
+            <a:r>
+              <a:rPr lang="en-GB" b="0">
+                <a:solidFill>
+                  <a:srgbClr val="CCCCCC"/>
+                </a:solidFill>
+                <a:effectLst/>
+                <a:latin typeface="Consolas" panose="020B0609020204030204" pitchFamily="49" charset="0"/>
+              </a:rPr>
+              <a:t>  </a:t>
+            </a:r>
+            <a:r>
+              <a:rPr lang="en-GB" b="0">
+                <a:solidFill>
+                  <a:srgbClr val="DCDCAA"/>
+                </a:solidFill>
+                <a:effectLst/>
+                <a:latin typeface="Consolas" panose="020B0609020204030204" pitchFamily="49" charset="0"/>
+              </a:rPr>
+              <a:t>lw</a:t>
+            </a:r>
+            <a:r>
+              <a:rPr lang="en-GB" b="0">
+                <a:solidFill>
+                  <a:srgbClr val="CCCCCC"/>
+                </a:solidFill>
+                <a:effectLst/>
+                <a:latin typeface="Consolas" panose="020B0609020204030204" pitchFamily="49" charset="0"/>
+              </a:rPr>
+              <a:t> </a:t>
+            </a:r>
+            <a:r>
+              <a:rPr lang="en-GB" b="0">
+                <a:solidFill>
+                  <a:srgbClr val="9CDCFE"/>
+                </a:solidFill>
+                <a:effectLst/>
+                <a:latin typeface="Consolas" panose="020B0609020204030204" pitchFamily="49" charset="0"/>
+              </a:rPr>
+              <a:t>t2</a:t>
+            </a:r>
+            <a:r>
+              <a:rPr lang="en-GB" b="0">
+                <a:solidFill>
+                  <a:srgbClr val="CCCCCC"/>
+                </a:solidFill>
+                <a:effectLst/>
+                <a:latin typeface="Consolas" panose="020B0609020204030204" pitchFamily="49" charset="0"/>
+              </a:rPr>
+              <a:t>, </a:t>
+            </a:r>
+            <a:r>
+              <a:rPr lang="en-GB" b="0">
+                <a:solidFill>
+                  <a:srgbClr val="B5CEA8"/>
+                </a:solidFill>
+                <a:effectLst/>
+                <a:latin typeface="Consolas" panose="020B0609020204030204" pitchFamily="49" charset="0"/>
+              </a:rPr>
+              <a:t>2</a:t>
+            </a:r>
+            <a:r>
+              <a:rPr lang="en-GB" b="0">
+                <a:solidFill>
+                  <a:srgbClr val="CCCCCC"/>
+                </a:solidFill>
+                <a:effectLst/>
+                <a:latin typeface="Consolas" panose="020B0609020204030204" pitchFamily="49" charset="0"/>
+              </a:rPr>
+              <a:t>(</a:t>
+            </a:r>
+            <a:r>
+              <a:rPr lang="en-GB" b="0">
+                <a:solidFill>
+                  <a:srgbClr val="9CDCFE"/>
+                </a:solidFill>
+                <a:effectLst/>
+                <a:latin typeface="Consolas" panose="020B0609020204030204" pitchFamily="49" charset="0"/>
+              </a:rPr>
+              <a:t>t0</a:t>
+            </a:r>
+            <a:r>
+              <a:rPr lang="en-GB" b="0">
+                <a:solidFill>
+                  <a:srgbClr val="CCCCCC"/>
+                </a:solidFill>
+                <a:effectLst/>
+                <a:latin typeface="Consolas" panose="020B0609020204030204" pitchFamily="49" charset="0"/>
+              </a:rPr>
+              <a:t>)          </a:t>
+            </a:r>
+            <a:r>
+              <a:rPr lang="en-GB" b="0">
+                <a:solidFill>
+                  <a:srgbClr val="6A9955"/>
+                </a:solidFill>
+                <a:effectLst/>
+                <a:latin typeface="Consolas" panose="020B0609020204030204" pitchFamily="49" charset="0"/>
+              </a:rPr>
+              <a:t># t2 &lt;- numbers[1]</a:t>
+            </a:r>
+            <a:endParaRPr lang="en-GB" b="0">
+              <a:solidFill>
+                <a:srgbClr val="CCCCCC"/>
+              </a:solidFill>
+              <a:effectLst/>
+              <a:latin typeface="Consolas" panose="020B0609020204030204" pitchFamily="49" charset="0"/>
+            </a:endParaRPr>
+          </a:p>
+          <a:p>
+            <a:pPr>
+              <a:buNone/>
+            </a:pPr>
+            <a:r>
+              <a:rPr lang="en-GB" b="0">
+                <a:solidFill>
+                  <a:srgbClr val="569CD6"/>
+                </a:solidFill>
+                <a:effectLst/>
+                <a:latin typeface="Consolas" panose="020B0609020204030204" pitchFamily="49" charset="0"/>
+              </a:rPr>
+              <a:t>.balign</a:t>
+            </a:r>
+            <a:r>
+              <a:rPr lang="en-GB" b="0">
+                <a:solidFill>
+                  <a:srgbClr val="CCCCCC"/>
+                </a:solidFill>
+                <a:effectLst/>
+                <a:latin typeface="Consolas" panose="020B0609020204030204" pitchFamily="49" charset="0"/>
+              </a:rPr>
+              <a:t> </a:t>
+            </a:r>
+            <a:r>
+              <a:rPr lang="en-GB" b="0">
+                <a:solidFill>
+                  <a:srgbClr val="B5CEA8"/>
+                </a:solidFill>
+                <a:effectLst/>
+                <a:latin typeface="Consolas" panose="020B0609020204030204" pitchFamily="49" charset="0"/>
+              </a:rPr>
+              <a:t>2 		  </a:t>
+            </a:r>
+            <a:r>
+              <a:rPr lang="en-GB">
+                <a:solidFill>
+                  <a:srgbClr val="6A9955"/>
+                </a:solidFill>
+                <a:latin typeface="Consolas" panose="020B0609020204030204" pitchFamily="49" charset="0"/>
+              </a:rPr>
+              <a:t>#</a:t>
+            </a:r>
+            <a:r>
+              <a:rPr lang="en-GB" b="0">
+                <a:solidFill>
+                  <a:srgbClr val="B5CEA8"/>
+                </a:solidFill>
+                <a:effectLst/>
+                <a:latin typeface="Consolas" panose="020B0609020204030204" pitchFamily="49" charset="0"/>
+              </a:rPr>
+              <a:t> Glöm inte align!</a:t>
+            </a:r>
+            <a:endParaRPr lang="en-GB" b="0">
+              <a:solidFill>
+                <a:srgbClr val="CCCCCC"/>
+              </a:solidFill>
+              <a:effectLst/>
+              <a:latin typeface="Consolas" panose="020B0609020204030204" pitchFamily="49" charset="0"/>
+            </a:endParaRPr>
+          </a:p>
+          <a:p>
+            <a:pPr>
+              <a:buNone/>
+            </a:pPr>
+            <a:r>
+              <a:rPr lang="en-GB" b="0">
+                <a:solidFill>
+                  <a:srgbClr val="DCDCAA"/>
+                </a:solidFill>
+                <a:effectLst/>
+                <a:latin typeface="Consolas" panose="020B0609020204030204" pitchFamily="49" charset="0"/>
+              </a:rPr>
+              <a:t>numbers</a:t>
+            </a:r>
+            <a:r>
+              <a:rPr lang="en-GB" b="0">
+                <a:solidFill>
+                  <a:srgbClr val="CCCCCC"/>
+                </a:solidFill>
+                <a:effectLst/>
+                <a:latin typeface="Consolas" panose="020B0609020204030204" pitchFamily="49" charset="0"/>
+              </a:rPr>
+              <a:t>:                </a:t>
+            </a:r>
+            <a:r>
+              <a:rPr lang="en-GB">
+                <a:solidFill>
+                  <a:srgbClr val="6A9955"/>
+                </a:solidFill>
+                <a:latin typeface="Consolas" panose="020B0609020204030204" pitchFamily="49" charset="0"/>
+              </a:rPr>
+              <a:t># Deklarera short numbers[5] = {10, 20, ..., 50}</a:t>
+            </a:r>
+            <a:endParaRPr lang="en-GB" b="0">
+              <a:solidFill>
+                <a:srgbClr val="CCCCCC"/>
+              </a:solidFill>
+              <a:effectLst/>
+              <a:latin typeface="Consolas" panose="020B0609020204030204" pitchFamily="49" charset="0"/>
+            </a:endParaRPr>
+          </a:p>
+          <a:p>
+            <a:pPr>
+              <a:buNone/>
+            </a:pPr>
+            <a:r>
+              <a:rPr lang="en-GB" b="0">
+                <a:solidFill>
+                  <a:srgbClr val="CCCCCC"/>
+                </a:solidFill>
+                <a:effectLst/>
+                <a:latin typeface="Consolas" panose="020B0609020204030204" pitchFamily="49" charset="0"/>
+              </a:rPr>
+              <a:t>.hword </a:t>
+            </a:r>
+            <a:r>
+              <a:rPr lang="en-GB" b="0">
+                <a:solidFill>
+                  <a:srgbClr val="B5CEA8"/>
+                </a:solidFill>
+                <a:effectLst/>
+                <a:latin typeface="Consolas" panose="020B0609020204030204" pitchFamily="49" charset="0"/>
+              </a:rPr>
+              <a:t>10</a:t>
+            </a:r>
+            <a:r>
+              <a:rPr lang="en-GB" b="0">
+                <a:solidFill>
+                  <a:srgbClr val="CCCCCC"/>
+                </a:solidFill>
+                <a:effectLst/>
+                <a:latin typeface="Consolas" panose="020B0609020204030204" pitchFamily="49" charset="0"/>
+              </a:rPr>
+              <a:t>, </a:t>
+            </a:r>
+            <a:r>
+              <a:rPr lang="en-GB" b="0">
+                <a:solidFill>
+                  <a:srgbClr val="B5CEA8"/>
+                </a:solidFill>
+                <a:effectLst/>
+                <a:latin typeface="Consolas" panose="020B0609020204030204" pitchFamily="49" charset="0"/>
+              </a:rPr>
+              <a:t>20</a:t>
+            </a:r>
+            <a:r>
+              <a:rPr lang="en-GB" b="0">
+                <a:solidFill>
+                  <a:srgbClr val="CCCCCC"/>
+                </a:solidFill>
+                <a:effectLst/>
+                <a:latin typeface="Consolas" panose="020B0609020204030204" pitchFamily="49" charset="0"/>
+              </a:rPr>
+              <a:t>, </a:t>
+            </a:r>
+            <a:r>
+              <a:rPr lang="en-GB" b="0">
+                <a:solidFill>
+                  <a:srgbClr val="B5CEA8"/>
+                </a:solidFill>
+                <a:effectLst/>
+                <a:latin typeface="Consolas" panose="020B0609020204030204" pitchFamily="49" charset="0"/>
+              </a:rPr>
+              <a:t>30</a:t>
+            </a:r>
+            <a:r>
+              <a:rPr lang="en-GB" b="0">
+                <a:solidFill>
+                  <a:srgbClr val="CCCCCC"/>
+                </a:solidFill>
+                <a:effectLst/>
+                <a:latin typeface="Consolas" panose="020B0609020204030204" pitchFamily="49" charset="0"/>
+              </a:rPr>
+              <a:t>, </a:t>
+            </a:r>
+            <a:r>
+              <a:rPr lang="en-GB" b="0">
+                <a:solidFill>
+                  <a:srgbClr val="B5CEA8"/>
+                </a:solidFill>
+                <a:effectLst/>
+                <a:latin typeface="Consolas" panose="020B0609020204030204" pitchFamily="49" charset="0"/>
+              </a:rPr>
+              <a:t>40</a:t>
+            </a:r>
+            <a:r>
+              <a:rPr lang="en-GB" b="0">
+                <a:solidFill>
+                  <a:srgbClr val="CCCCCC"/>
+                </a:solidFill>
+                <a:effectLst/>
+                <a:latin typeface="Consolas" panose="020B0609020204030204" pitchFamily="49" charset="0"/>
+              </a:rPr>
+              <a:t>, </a:t>
+            </a:r>
+            <a:r>
+              <a:rPr lang="en-GB" b="0">
+                <a:solidFill>
+                  <a:srgbClr val="B5CEA8"/>
+                </a:solidFill>
+                <a:effectLst/>
+                <a:latin typeface="Consolas" panose="020B0609020204030204" pitchFamily="49" charset="0"/>
+              </a:rPr>
+              <a:t>50</a:t>
+            </a:r>
+            <a:endParaRPr lang="en-GB" b="0">
+              <a:solidFill>
+                <a:srgbClr val="CCCCCC"/>
+              </a:solidFill>
+              <a:effectLst/>
+              <a:latin typeface="Consolas" panose="020B0609020204030204" pitchFamily="49" charset="0"/>
+            </a:endParaRPr>
+          </a:p>
+          <a:p>
+            <a:pPr>
+              <a:lnSpc>
+                <a:spcPts val="1425"/>
+              </a:lnSpc>
+              <a:buNone/>
+            </a:pPr>
+            <a:endParaRPr lang="en-GB" b="0">
+              <a:solidFill>
+                <a:srgbClr val="CCCCCC"/>
+              </a:solidFill>
+              <a:effectLst/>
+              <a:latin typeface="Consolas" panose="020B0609020204030204" pitchFamily="49" charset="0"/>
+            </a:endParaRPr>
+          </a:p>
+        </p:txBody>
+      </p:sp>
+      <p:grpSp>
+        <p:nvGrpSpPr>
+          <p:cNvPr id="9" name="Group 8">
+            <a:extLst>
+              <a:ext uri="{FF2B5EF4-FFF2-40B4-BE49-F238E27FC236}">
+                <a16:creationId xmlns:a16="http://schemas.microsoft.com/office/drawing/2014/main" id="{55320BBF-E931-4178-6D38-B7EED1406580}"/>
+              </a:ext>
+            </a:extLst>
+          </p:cNvPr>
+          <p:cNvGrpSpPr/>
+          <p:nvPr/>
+        </p:nvGrpSpPr>
+        <p:grpSpPr>
+          <a:xfrm>
+            <a:off x="2180419" y="4481848"/>
+            <a:ext cx="7401463" cy="1635686"/>
+            <a:chOff x="2180419" y="4481848"/>
+            <a:chExt cx="7401463" cy="1635686"/>
+          </a:xfrm>
+        </p:grpSpPr>
+        <p:sp>
+          <p:nvSpPr>
+            <p:cNvPr id="5" name="Freeform: Shape 4">
+              <a:extLst>
+                <a:ext uri="{FF2B5EF4-FFF2-40B4-BE49-F238E27FC236}">
+                  <a16:creationId xmlns:a16="http://schemas.microsoft.com/office/drawing/2014/main" id="{C1AFAE99-4A9B-63FC-471E-CF964236C3B2}"/>
+                </a:ext>
+              </a:extLst>
+            </p:cNvPr>
+            <p:cNvSpPr/>
+            <p:nvPr/>
+          </p:nvSpPr>
+          <p:spPr>
+            <a:xfrm>
+              <a:off x="2180419" y="4481848"/>
+              <a:ext cx="1275412" cy="1451020"/>
+            </a:xfrm>
+            <a:custGeom>
+              <a:avLst/>
+              <a:gdLst>
+                <a:gd name="csX0" fmla="*/ 0 w 1275008"/>
+                <a:gd name="csY0" fmla="*/ 0 h 1451020"/>
+                <a:gd name="csX1" fmla="*/ 1275008 w 1275008"/>
+                <a:gd name="csY1" fmla="*/ 1451020 h 1451020"/>
+                <a:gd name="csX0" fmla="*/ 142 w 1275150"/>
+                <a:gd name="csY0" fmla="*/ 0 h 1451020"/>
+                <a:gd name="csX1" fmla="*/ 1275150 w 1275150"/>
+                <a:gd name="csY1" fmla="*/ 1451020 h 1451020"/>
+                <a:gd name="csX0" fmla="*/ 248 w 1275256"/>
+                <a:gd name="csY0" fmla="*/ 0 h 1452435"/>
+                <a:gd name="csX1" fmla="*/ 1275256 w 1275256"/>
+                <a:gd name="csY1" fmla="*/ 1451020 h 1452435"/>
+                <a:gd name="csX0" fmla="*/ 404 w 1275412"/>
+                <a:gd name="csY0" fmla="*/ 0 h 1451020"/>
+                <a:gd name="csX1" fmla="*/ 1275412 w 1275412"/>
+                <a:gd name="csY1" fmla="*/ 1451020 h 1451020"/>
+              </a:gdLst>
+              <a:ahLst/>
+              <a:cxnLst>
+                <a:cxn ang="0">
+                  <a:pos x="csX0" y="csY0"/>
+                </a:cxn>
+                <a:cxn ang="0">
+                  <a:pos x="csX1" y="csY1"/>
+                </a:cxn>
+              </a:cxnLst>
+              <a:rect l="l" t="t" r="r" b="b"/>
+              <a:pathLst>
+                <a:path w="1275412" h="1451020">
+                  <a:moveTo>
+                    <a:pt x="404" y="0"/>
+                  </a:moveTo>
+                  <a:cubicBezTo>
+                    <a:pt x="-12474" y="672563"/>
+                    <a:pt x="279446" y="1405229"/>
+                    <a:pt x="1275412" y="1451020"/>
+                  </a:cubicBezTo>
+                </a:path>
+              </a:pathLst>
+            </a:custGeom>
+            <a:noFill/>
+            <a:ln w="38100">
+              <a:solidFill>
+                <a:srgbClr val="C00000"/>
+              </a:solidFill>
+              <a:headEnd type="stealth"/>
+            </a:ln>
+          </p:spPr>
+          <p:style>
+            <a:lnRef idx="2">
+              <a:schemeClr val="accent1">
+                <a:shade val="15000"/>
+              </a:schemeClr>
+            </a:lnRef>
+            <a:fillRef idx="1">
+              <a:schemeClr val="accent1"/>
+            </a:fillRef>
+            <a:effectRef idx="0">
+              <a:schemeClr val="accent1"/>
+            </a:effectRef>
+            <a:fontRef idx="minor">
+              <a:schemeClr val="lt1"/>
+            </a:fontRef>
+          </p:style>
+          <p:txBody>
+            <a:bodyPr rtlCol="0" anchor="ctr"/>
+            <a:lstStyle/>
+            <a:p>
+              <a:pPr algn="ctr"/>
+              <a:endParaRPr lang="LID4096"/>
+            </a:p>
+          </p:txBody>
+        </p:sp>
+        <p:sp>
+          <p:nvSpPr>
+            <p:cNvPr id="8" name="TextBox 7">
+              <a:extLst>
+                <a:ext uri="{FF2B5EF4-FFF2-40B4-BE49-F238E27FC236}">
+                  <a16:creationId xmlns:a16="http://schemas.microsoft.com/office/drawing/2014/main" id="{2F0EF53D-AEB0-1148-75E2-BB7AE4EBD6A3}"/>
+                </a:ext>
+              </a:extLst>
+            </p:cNvPr>
+            <p:cNvSpPr txBox="1"/>
+            <p:nvPr/>
+          </p:nvSpPr>
+          <p:spPr>
+            <a:xfrm>
+              <a:off x="3485882" y="5748202"/>
+              <a:ext cx="6096000" cy="369332"/>
+            </a:xfrm>
+            <a:prstGeom prst="rect">
+              <a:avLst/>
+            </a:prstGeom>
+            <a:noFill/>
+          </p:spPr>
+          <p:txBody>
+            <a:bodyPr wrap="square">
+              <a:spAutoFit/>
+            </a:bodyPr>
+            <a:lstStyle/>
+            <a:p>
+              <a:pPr>
+                <a:buNone/>
+              </a:pPr>
+              <a:r>
+                <a:rPr lang="en-GB" b="0">
+                  <a:effectLst/>
+                  <a:latin typeface="Consolas" panose="020B0609020204030204" pitchFamily="49" charset="0"/>
+                </a:rPr>
+                <a:t>offset är i </a:t>
+              </a:r>
+              <a:r>
+                <a:rPr lang="en-GB" b="1">
+                  <a:effectLst/>
+                  <a:latin typeface="Consolas" panose="020B0609020204030204" pitchFamily="49" charset="0"/>
+                </a:rPr>
+                <a:t>bytes</a:t>
+              </a:r>
+              <a:endParaRPr lang="en-GB" b="0">
+                <a:effectLst/>
+                <a:latin typeface="Consolas" panose="020B0609020204030204" pitchFamily="49" charset="0"/>
+              </a:endParaRPr>
+            </a:p>
+          </p:txBody>
+        </p:sp>
+      </p:grpSp>
     </p:spTree>
     <p:extLst>
       <p:ext uri="{BB962C8B-B14F-4D97-AF65-F5344CB8AC3E}">
-        <p14:creationId xmlns:p14="http://schemas.microsoft.com/office/powerpoint/2010/main" val="2752721831"/>
+        <p14:creationId xmlns:p14="http://schemas.microsoft.com/office/powerpoint/2010/main" val="239432472"/>
       </p:ext>
     </p:extLst>
   </p:cSld>
   <p:clrMapOvr>
     <a:masterClrMapping/>
   </p:clrMapOvr>
+  <p:timing>
+    <p:tnLst>
+      <p:par>
+        <p:cTn id="1" dur="indefinite" restart="never" nodeType="tmRoot">
+          <p:childTnLst>
+            <p:seq concurrent="1" nextAc="seek">
+              <p:cTn id="2" dur="indefinite" nodeType="mainSeq">
+                <p:childTnLst>
+                  <p:par>
+                    <p:cTn id="3" fill="hold">
+                      <p:stCondLst>
+                        <p:cond delay="indefinite"/>
+                      </p:stCondLst>
+                      <p:childTnLst>
+                        <p:par>
+                          <p:cTn id="4" fill="hold">
+                            <p:stCondLst>
+                              <p:cond delay="0"/>
+                            </p:stCondLst>
+                            <p:childTnLst>
+                              <p:par>
+                                <p:cTn id="5" presetID="10" presetClass="entr" presetSubtype="0" fill="hold" nodeType="clickEffect">
+                                  <p:stCondLst>
+                                    <p:cond delay="0"/>
+                                  </p:stCondLst>
+                                  <p:childTnLst>
+                                    <p:set>
+                                      <p:cBhvr>
+                                        <p:cTn id="6" dur="1" fill="hold">
+                                          <p:stCondLst>
+                                            <p:cond delay="0"/>
+                                          </p:stCondLst>
+                                        </p:cTn>
+                                        <p:tgtEl>
+                                          <p:spTgt spid="4">
+                                            <p:txEl>
+                                              <p:pRg st="5" end="5"/>
+                                            </p:txEl>
+                                          </p:spTgt>
+                                        </p:tgtEl>
+                                        <p:attrNameLst>
+                                          <p:attrName>style.visibility</p:attrName>
+                                        </p:attrNameLst>
+                                      </p:cBhvr>
+                                      <p:to>
+                                        <p:strVal val="visible"/>
+                                      </p:to>
+                                    </p:set>
+                                    <p:animEffect transition="in" filter="fade">
+                                      <p:cBhvr>
+                                        <p:cTn id="7" dur="500"/>
+                                        <p:tgtEl>
+                                          <p:spTgt spid="4">
+                                            <p:txEl>
+                                              <p:pRg st="5" end="5"/>
+                                            </p:txEl>
+                                          </p:spTgt>
+                                        </p:tgtEl>
+                                      </p:cBhvr>
+                                    </p:animEffect>
+                                  </p:childTnLst>
+                                </p:cTn>
+                              </p:par>
+                              <p:par>
+                                <p:cTn id="8" presetID="10" presetClass="entr" presetSubtype="0" fill="hold" nodeType="withEffect">
+                                  <p:stCondLst>
+                                    <p:cond delay="0"/>
+                                  </p:stCondLst>
+                                  <p:childTnLst>
+                                    <p:set>
+                                      <p:cBhvr>
+                                        <p:cTn id="9" dur="1" fill="hold">
+                                          <p:stCondLst>
+                                            <p:cond delay="0"/>
+                                          </p:stCondLst>
+                                        </p:cTn>
+                                        <p:tgtEl>
+                                          <p:spTgt spid="4">
+                                            <p:txEl>
+                                              <p:pRg st="6" end="6"/>
+                                            </p:txEl>
+                                          </p:spTgt>
+                                        </p:tgtEl>
+                                        <p:attrNameLst>
+                                          <p:attrName>style.visibility</p:attrName>
+                                        </p:attrNameLst>
+                                      </p:cBhvr>
+                                      <p:to>
+                                        <p:strVal val="visible"/>
+                                      </p:to>
+                                    </p:set>
+                                    <p:animEffect transition="in" filter="fade">
+                                      <p:cBhvr>
+                                        <p:cTn id="10" dur="500"/>
+                                        <p:tgtEl>
+                                          <p:spTgt spid="4">
+                                            <p:txEl>
+                                              <p:pRg st="6" end="6"/>
+                                            </p:txEl>
+                                          </p:spTgt>
+                                        </p:tgtEl>
+                                      </p:cBhvr>
+                                    </p:animEffect>
+                                  </p:childTnLst>
+                                </p:cTn>
+                              </p:par>
+                            </p:childTnLst>
+                          </p:cTn>
+                        </p:par>
+                      </p:childTnLst>
+                    </p:cTn>
+                  </p:par>
+                  <p:par>
+                    <p:cTn id="11" fill="hold">
+                      <p:stCondLst>
+                        <p:cond delay="indefinite"/>
+                      </p:stCondLst>
+                      <p:childTnLst>
+                        <p:par>
+                          <p:cTn id="12" fill="hold">
+                            <p:stCondLst>
+                              <p:cond delay="0"/>
+                            </p:stCondLst>
+                            <p:childTnLst>
+                              <p:par>
+                                <p:cTn id="13" presetID="10" presetClass="entr" presetSubtype="0" fill="hold" nodeType="clickEffect">
+                                  <p:stCondLst>
+                                    <p:cond delay="0"/>
+                                  </p:stCondLst>
+                                  <p:childTnLst>
+                                    <p:set>
+                                      <p:cBhvr>
+                                        <p:cTn id="14" dur="1" fill="hold">
+                                          <p:stCondLst>
+                                            <p:cond delay="0"/>
+                                          </p:stCondLst>
+                                        </p:cTn>
+                                        <p:tgtEl>
+                                          <p:spTgt spid="4">
+                                            <p:txEl>
+                                              <p:pRg st="4" end="4"/>
+                                            </p:txEl>
+                                          </p:spTgt>
+                                        </p:tgtEl>
+                                        <p:attrNameLst>
+                                          <p:attrName>style.visibility</p:attrName>
+                                        </p:attrNameLst>
+                                      </p:cBhvr>
+                                      <p:to>
+                                        <p:strVal val="visible"/>
+                                      </p:to>
+                                    </p:set>
+                                    <p:animEffect transition="in" filter="fade">
+                                      <p:cBhvr>
+                                        <p:cTn id="15" dur="500"/>
+                                        <p:tgtEl>
+                                          <p:spTgt spid="4">
+                                            <p:txEl>
+                                              <p:pRg st="4" end="4"/>
+                                            </p:txEl>
+                                          </p:spTgt>
+                                        </p:tgtEl>
+                                      </p:cBhvr>
+                                    </p:animEffect>
+                                  </p:childTnLst>
+                                </p:cTn>
+                              </p:par>
+                            </p:childTnLst>
+                          </p:cTn>
+                        </p:par>
+                      </p:childTnLst>
+                    </p:cTn>
+                  </p:par>
+                  <p:par>
+                    <p:cTn id="16" fill="hold">
+                      <p:stCondLst>
+                        <p:cond delay="indefinite"/>
+                      </p:stCondLst>
+                      <p:childTnLst>
+                        <p:par>
+                          <p:cTn id="17" fill="hold">
+                            <p:stCondLst>
+                              <p:cond delay="0"/>
+                            </p:stCondLst>
+                            <p:childTnLst>
+                              <p:par>
+                                <p:cTn id="18" presetID="10" presetClass="entr" presetSubtype="0" fill="hold" nodeType="clickEffect">
+                                  <p:stCondLst>
+                                    <p:cond delay="0"/>
+                                  </p:stCondLst>
+                                  <p:childTnLst>
+                                    <p:set>
+                                      <p:cBhvr>
+                                        <p:cTn id="19" dur="1" fill="hold">
+                                          <p:stCondLst>
+                                            <p:cond delay="0"/>
+                                          </p:stCondLst>
+                                        </p:cTn>
+                                        <p:tgtEl>
+                                          <p:spTgt spid="4">
+                                            <p:txEl>
+                                              <p:pRg st="1" end="1"/>
+                                            </p:txEl>
+                                          </p:spTgt>
+                                        </p:tgtEl>
+                                        <p:attrNameLst>
+                                          <p:attrName>style.visibility</p:attrName>
+                                        </p:attrNameLst>
+                                      </p:cBhvr>
+                                      <p:to>
+                                        <p:strVal val="visible"/>
+                                      </p:to>
+                                    </p:set>
+                                    <p:animEffect transition="in" filter="fade">
+                                      <p:cBhvr>
+                                        <p:cTn id="20" dur="500"/>
+                                        <p:tgtEl>
+                                          <p:spTgt spid="4">
+                                            <p:txEl>
+                                              <p:pRg st="1" end="1"/>
+                                            </p:txEl>
+                                          </p:spTgt>
+                                        </p:tgtEl>
+                                      </p:cBhvr>
+                                    </p:animEffect>
+                                  </p:childTnLst>
+                                </p:cTn>
+                              </p:par>
+                            </p:childTnLst>
+                          </p:cTn>
+                        </p:par>
+                      </p:childTnLst>
+                    </p:cTn>
+                  </p:par>
+                  <p:par>
+                    <p:cTn id="21" fill="hold">
+                      <p:stCondLst>
+                        <p:cond delay="indefinite"/>
+                      </p:stCondLst>
+                      <p:childTnLst>
+                        <p:par>
+                          <p:cTn id="22" fill="hold">
+                            <p:stCondLst>
+                              <p:cond delay="0"/>
+                            </p:stCondLst>
+                            <p:childTnLst>
+                              <p:par>
+                                <p:cTn id="23" presetID="10" presetClass="entr" presetSubtype="0" fill="hold" nodeType="clickEffect">
+                                  <p:stCondLst>
+                                    <p:cond delay="0"/>
+                                  </p:stCondLst>
+                                  <p:childTnLst>
+                                    <p:set>
+                                      <p:cBhvr>
+                                        <p:cTn id="24" dur="1" fill="hold">
+                                          <p:stCondLst>
+                                            <p:cond delay="0"/>
+                                          </p:stCondLst>
+                                        </p:cTn>
+                                        <p:tgtEl>
+                                          <p:spTgt spid="4">
+                                            <p:txEl>
+                                              <p:pRg st="2" end="2"/>
+                                            </p:txEl>
+                                          </p:spTgt>
+                                        </p:tgtEl>
+                                        <p:attrNameLst>
+                                          <p:attrName>style.visibility</p:attrName>
+                                        </p:attrNameLst>
+                                      </p:cBhvr>
+                                      <p:to>
+                                        <p:strVal val="visible"/>
+                                      </p:to>
+                                    </p:set>
+                                    <p:animEffect transition="in" filter="fade">
+                                      <p:cBhvr>
+                                        <p:cTn id="25" dur="500"/>
+                                        <p:tgtEl>
+                                          <p:spTgt spid="4">
+                                            <p:txEl>
+                                              <p:pRg st="2" end="2"/>
+                                            </p:txEl>
+                                          </p:spTgt>
+                                        </p:tgtEl>
+                                      </p:cBhvr>
+                                    </p:animEffect>
+                                  </p:childTnLst>
+                                </p:cTn>
+                              </p:par>
+                            </p:childTnLst>
+                          </p:cTn>
+                        </p:par>
+                      </p:childTnLst>
+                    </p:cTn>
+                  </p:par>
+                  <p:par>
+                    <p:cTn id="26" fill="hold">
+                      <p:stCondLst>
+                        <p:cond delay="indefinite"/>
+                      </p:stCondLst>
+                      <p:childTnLst>
+                        <p:par>
+                          <p:cTn id="27" fill="hold">
+                            <p:stCondLst>
+                              <p:cond delay="0"/>
+                            </p:stCondLst>
+                            <p:childTnLst>
+                              <p:par>
+                                <p:cTn id="28" presetID="10" presetClass="entr" presetSubtype="0" fill="hold" nodeType="clickEffect">
+                                  <p:stCondLst>
+                                    <p:cond delay="0"/>
+                                  </p:stCondLst>
+                                  <p:childTnLst>
+                                    <p:set>
+                                      <p:cBhvr>
+                                        <p:cTn id="29" dur="1" fill="hold">
+                                          <p:stCondLst>
+                                            <p:cond delay="0"/>
+                                          </p:stCondLst>
+                                        </p:cTn>
+                                        <p:tgtEl>
+                                          <p:spTgt spid="4">
+                                            <p:txEl>
+                                              <p:pRg st="3" end="3"/>
+                                            </p:txEl>
+                                          </p:spTgt>
+                                        </p:tgtEl>
+                                        <p:attrNameLst>
+                                          <p:attrName>style.visibility</p:attrName>
+                                        </p:attrNameLst>
+                                      </p:cBhvr>
+                                      <p:to>
+                                        <p:strVal val="visible"/>
+                                      </p:to>
+                                    </p:set>
+                                    <p:animEffect transition="in" filter="fade">
+                                      <p:cBhvr>
+                                        <p:cTn id="30" dur="500"/>
+                                        <p:tgtEl>
+                                          <p:spTgt spid="4">
+                                            <p:txEl>
+                                              <p:pRg st="3" end="3"/>
+                                            </p:txEl>
+                                          </p:spTgt>
+                                        </p:tgtEl>
+                                      </p:cBhvr>
+                                    </p:animEffect>
+                                  </p:childTnLst>
+                                </p:cTn>
+                              </p:par>
+                            </p:childTnLst>
+                          </p:cTn>
+                        </p:par>
+                      </p:childTnLst>
+                    </p:cTn>
+                  </p:par>
+                  <p:par>
+                    <p:cTn id="31" fill="hold">
+                      <p:stCondLst>
+                        <p:cond delay="indefinite"/>
+                      </p:stCondLst>
+                      <p:childTnLst>
+                        <p:par>
+                          <p:cTn id="32" fill="hold">
+                            <p:stCondLst>
+                              <p:cond delay="0"/>
+                            </p:stCondLst>
+                            <p:childTnLst>
+                              <p:par>
+                                <p:cTn id="33" presetID="10" presetClass="entr" presetSubtype="0" fill="hold" nodeType="clickEffect">
+                                  <p:stCondLst>
+                                    <p:cond delay="0"/>
+                                  </p:stCondLst>
+                                  <p:childTnLst>
+                                    <p:set>
+                                      <p:cBhvr>
+                                        <p:cTn id="34" dur="1" fill="hold">
+                                          <p:stCondLst>
+                                            <p:cond delay="0"/>
+                                          </p:stCondLst>
+                                        </p:cTn>
+                                        <p:tgtEl>
+                                          <p:spTgt spid="9"/>
+                                        </p:tgtEl>
+                                        <p:attrNameLst>
+                                          <p:attrName>style.visibility</p:attrName>
+                                        </p:attrNameLst>
+                                      </p:cBhvr>
+                                      <p:to>
+                                        <p:strVal val="visible"/>
+                                      </p:to>
+                                    </p:set>
+                                    <p:animEffect transition="in" filter="fade">
+                                      <p:cBhvr>
+                                        <p:cTn id="35" dur="500"/>
+                                        <p:tgtEl>
+                                          <p:spTgt spid="9"/>
+                                        </p:tgtEl>
+                                      </p:cBhvr>
+                                    </p:animEffect>
+                                  </p:childTnLst>
+                                </p:cTn>
+                              </p:par>
+                            </p:childTnLst>
+                          </p:cTn>
+                        </p:par>
+                      </p:childTnLst>
+                    </p:cTn>
+                  </p:par>
+                </p:childTnLst>
+              </p:cTn>
+              <p:prevCondLst>
+                <p:cond evt="onPrev" delay="0">
+                  <p:tgtEl>
+                    <p:sldTgt/>
+                  </p:tgtEl>
+                </p:cond>
+              </p:prevCondLst>
+              <p:nextCondLst>
+                <p:cond evt="onNext" delay="0">
+                  <p:tgtEl>
+                    <p:sldTgt/>
+                  </p:tgtEl>
+                </p:cond>
+              </p:nextCondLst>
+            </p:seq>
+          </p:childTnLst>
+        </p:cTn>
+      </p:par>
+    </p:tnLst>
+  </p:timing>
 </p:sld>
 </file>
 
@@ -8024,6 +12283,3429 @@
   <p:cSld>
     <p:spTree>
       <p:nvGrpSpPr>
+        <p:cNvPr id="1" name="">
+          <a:extLst>
+            <a:ext uri="{FF2B5EF4-FFF2-40B4-BE49-F238E27FC236}">
+              <a16:creationId xmlns:a16="http://schemas.microsoft.com/office/drawing/2014/main" id="{FFA3351A-8B4B-7EDA-9D87-4ADFF09545B9}"/>
+            </a:ext>
+          </a:extLst>
+        </p:cNvPr>
+        <p:cNvGrpSpPr/>
+        <p:nvPr/>
+      </p:nvGrpSpPr>
+      <p:grpSpPr>
+        <a:xfrm>
+          <a:off x="0" y="0"/>
+          <a:ext cx="0" cy="0"/>
+          <a:chOff x="0" y="0"/>
+          <a:chExt cx="0" cy="0"/>
+        </a:xfrm>
+      </p:grpSpPr>
+      <p:sp>
+        <p:nvSpPr>
+          <p:cNvPr id="2" name="Title 1">
+            <a:extLst>
+              <a:ext uri="{FF2B5EF4-FFF2-40B4-BE49-F238E27FC236}">
+                <a16:creationId xmlns:a16="http://schemas.microsoft.com/office/drawing/2014/main" id="{3048024E-6B80-A2ED-EE36-AB75424D5837}"/>
+              </a:ext>
+            </a:extLst>
+          </p:cNvPr>
+          <p:cNvSpPr>
+            <a:spLocks noGrp="1"/>
+          </p:cNvSpPr>
+          <p:nvPr>
+            <p:ph type="title"/>
+          </p:nvPr>
+        </p:nvSpPr>
+        <p:spPr/>
+        <p:txBody>
+          <a:bodyPr/>
+          <a:lstStyle/>
+          <a:p>
+            <a:r>
+              <a:rPr lang="sv-SE"/>
+              <a:t>Arrays (igen, med shorts)</a:t>
+            </a:r>
+            <a:endParaRPr lang="LID4096"/>
+          </a:p>
+        </p:txBody>
+      </p:sp>
+      <p:sp>
+        <p:nvSpPr>
+          <p:cNvPr id="3" name="Content Placeholder 2">
+            <a:extLst>
+              <a:ext uri="{FF2B5EF4-FFF2-40B4-BE49-F238E27FC236}">
+                <a16:creationId xmlns:a16="http://schemas.microsoft.com/office/drawing/2014/main" id="{9D64D730-FD6E-3622-6877-91A1DE004BDA}"/>
+              </a:ext>
+            </a:extLst>
+          </p:cNvPr>
+          <p:cNvSpPr>
+            <a:spLocks noGrp="1"/>
+          </p:cNvSpPr>
+          <p:nvPr>
+            <p:ph idx="1"/>
+          </p:nvPr>
+        </p:nvSpPr>
+        <p:spPr>
+          <a:xfrm>
+            <a:off x="846786" y="1825625"/>
+            <a:ext cx="10515600" cy="1076414"/>
+          </a:xfrm>
+        </p:spPr>
+        <p:txBody>
+          <a:bodyPr/>
+          <a:lstStyle/>
+          <a:p>
+            <a:r>
+              <a:rPr lang="sv-SE"/>
+              <a:t>I assembler finns inga speciella instruktioner för arrays. </a:t>
+            </a:r>
+          </a:p>
+          <a:p>
+            <a:r>
+              <a:rPr lang="sv-SE"/>
+              <a:t>En array är bara en rad variabler av samma typ.</a:t>
+            </a:r>
+          </a:p>
+        </p:txBody>
+      </p:sp>
+      <p:sp>
+        <p:nvSpPr>
+          <p:cNvPr id="4" name="TextBox 3">
+            <a:extLst>
+              <a:ext uri="{FF2B5EF4-FFF2-40B4-BE49-F238E27FC236}">
+                <a16:creationId xmlns:a16="http://schemas.microsoft.com/office/drawing/2014/main" id="{810AA64F-B93D-9FA8-880F-877BBB42C31F}"/>
+              </a:ext>
+            </a:extLst>
+          </p:cNvPr>
+          <p:cNvSpPr txBox="1"/>
+          <p:nvPr/>
+        </p:nvSpPr>
+        <p:spPr>
+          <a:xfrm>
+            <a:off x="888641" y="3318714"/>
+            <a:ext cx="9255618" cy="2225353"/>
+          </a:xfrm>
+          <a:prstGeom prst="rect">
+            <a:avLst/>
+          </a:prstGeom>
+          <a:solidFill>
+            <a:schemeClr val="tx1">
+              <a:lumMod val="75000"/>
+              <a:lumOff val="25000"/>
+            </a:schemeClr>
+          </a:solidFill>
+        </p:spPr>
+        <p:txBody>
+          <a:bodyPr wrap="square" rtlCol="0">
+            <a:spAutoFit/>
+          </a:bodyPr>
+          <a:lstStyle/>
+          <a:p>
+            <a:pPr>
+              <a:buNone/>
+            </a:pPr>
+            <a:r>
+              <a:rPr lang="en-GB" b="0">
+                <a:solidFill>
+                  <a:srgbClr val="DCDCAA"/>
+                </a:solidFill>
+                <a:effectLst/>
+                <a:latin typeface="Consolas" panose="020B0609020204030204" pitchFamily="49" charset="0"/>
+              </a:rPr>
+              <a:t>main</a:t>
+            </a:r>
+            <a:r>
+              <a:rPr lang="en-GB" b="0">
+                <a:solidFill>
+                  <a:srgbClr val="CCCCCC"/>
+                </a:solidFill>
+                <a:effectLst/>
+                <a:latin typeface="Consolas" panose="020B0609020204030204" pitchFamily="49" charset="0"/>
+              </a:rPr>
+              <a:t>: </a:t>
+            </a:r>
+          </a:p>
+          <a:p>
+            <a:pPr>
+              <a:buNone/>
+            </a:pPr>
+            <a:r>
+              <a:rPr lang="en-GB" b="0">
+                <a:solidFill>
+                  <a:srgbClr val="CCCCCC"/>
+                </a:solidFill>
+                <a:effectLst/>
+                <a:latin typeface="Consolas" panose="020B0609020204030204" pitchFamily="49" charset="0"/>
+              </a:rPr>
+              <a:t>  </a:t>
+            </a:r>
+            <a:r>
+              <a:rPr lang="en-GB" b="0">
+                <a:solidFill>
+                  <a:srgbClr val="DCDCAA"/>
+                </a:solidFill>
+                <a:effectLst/>
+                <a:latin typeface="Consolas" panose="020B0609020204030204" pitchFamily="49" charset="0"/>
+              </a:rPr>
+              <a:t>la</a:t>
+            </a:r>
+            <a:r>
+              <a:rPr lang="en-GB" b="0">
+                <a:solidFill>
+                  <a:srgbClr val="CCCCCC"/>
+                </a:solidFill>
+                <a:effectLst/>
+                <a:latin typeface="Consolas" panose="020B0609020204030204" pitchFamily="49" charset="0"/>
+              </a:rPr>
+              <a:t> </a:t>
+            </a:r>
+            <a:r>
+              <a:rPr lang="en-GB" b="0">
+                <a:solidFill>
+                  <a:srgbClr val="9CDCFE"/>
+                </a:solidFill>
+                <a:effectLst/>
+                <a:latin typeface="Consolas" panose="020B0609020204030204" pitchFamily="49" charset="0"/>
+              </a:rPr>
+              <a:t>t0</a:t>
+            </a:r>
+            <a:r>
+              <a:rPr lang="en-GB" b="0">
+                <a:solidFill>
+                  <a:srgbClr val="CCCCCC"/>
+                </a:solidFill>
+                <a:effectLst/>
+                <a:latin typeface="Consolas" panose="020B0609020204030204" pitchFamily="49" charset="0"/>
+              </a:rPr>
+              <a:t>, numbers        </a:t>
+            </a:r>
+            <a:r>
+              <a:rPr lang="en-GB" b="0">
+                <a:solidFill>
+                  <a:srgbClr val="6A9955"/>
+                </a:solidFill>
+                <a:effectLst/>
+                <a:latin typeface="Consolas" panose="020B0609020204030204" pitchFamily="49" charset="0"/>
+              </a:rPr>
+              <a:t># Ladda addressen till arrayen i t0</a:t>
+            </a:r>
+            <a:endParaRPr lang="en-GB" b="0">
+              <a:solidFill>
+                <a:srgbClr val="CCCCCC"/>
+              </a:solidFill>
+              <a:effectLst/>
+              <a:latin typeface="Consolas" panose="020B0609020204030204" pitchFamily="49" charset="0"/>
+            </a:endParaRPr>
+          </a:p>
+          <a:p>
+            <a:pPr>
+              <a:buNone/>
+            </a:pPr>
+            <a:r>
+              <a:rPr lang="en-GB" b="0">
+                <a:solidFill>
+                  <a:srgbClr val="CCCCCC"/>
+                </a:solidFill>
+                <a:effectLst/>
+                <a:latin typeface="Consolas" panose="020B0609020204030204" pitchFamily="49" charset="0"/>
+              </a:rPr>
+              <a:t>  </a:t>
+            </a:r>
+            <a:r>
+              <a:rPr lang="en-GB" b="0">
+                <a:solidFill>
+                  <a:srgbClr val="DCDCAA"/>
+                </a:solidFill>
+                <a:effectLst/>
+                <a:latin typeface="Consolas" panose="020B0609020204030204" pitchFamily="49" charset="0"/>
+              </a:rPr>
+              <a:t>lw</a:t>
+            </a:r>
+            <a:r>
+              <a:rPr lang="en-GB" b="0">
+                <a:solidFill>
+                  <a:srgbClr val="CCCCCC"/>
+                </a:solidFill>
+                <a:effectLst/>
+                <a:latin typeface="Consolas" panose="020B0609020204030204" pitchFamily="49" charset="0"/>
+              </a:rPr>
+              <a:t> </a:t>
+            </a:r>
+            <a:r>
+              <a:rPr lang="en-GB" b="0">
+                <a:solidFill>
+                  <a:srgbClr val="9CDCFE"/>
+                </a:solidFill>
+                <a:effectLst/>
+                <a:latin typeface="Consolas" panose="020B0609020204030204" pitchFamily="49" charset="0"/>
+              </a:rPr>
+              <a:t>t1</a:t>
+            </a:r>
+            <a:r>
+              <a:rPr lang="en-GB" b="0">
+                <a:solidFill>
+                  <a:srgbClr val="CCCCCC"/>
+                </a:solidFill>
+                <a:effectLst/>
+                <a:latin typeface="Consolas" panose="020B0609020204030204" pitchFamily="49" charset="0"/>
+              </a:rPr>
+              <a:t>, </a:t>
+            </a:r>
+            <a:r>
+              <a:rPr lang="en-GB" b="0">
+                <a:solidFill>
+                  <a:srgbClr val="B5CEA8"/>
+                </a:solidFill>
+                <a:effectLst/>
+                <a:latin typeface="Consolas" panose="020B0609020204030204" pitchFamily="49" charset="0"/>
+              </a:rPr>
+              <a:t>0</a:t>
+            </a:r>
+            <a:r>
+              <a:rPr lang="en-GB" b="0">
+                <a:solidFill>
+                  <a:srgbClr val="CCCCCC"/>
+                </a:solidFill>
+                <a:effectLst/>
+                <a:latin typeface="Consolas" panose="020B0609020204030204" pitchFamily="49" charset="0"/>
+              </a:rPr>
+              <a:t>(</a:t>
+            </a:r>
+            <a:r>
+              <a:rPr lang="en-GB" b="0">
+                <a:solidFill>
+                  <a:srgbClr val="9CDCFE"/>
+                </a:solidFill>
+                <a:effectLst/>
+                <a:latin typeface="Consolas" panose="020B0609020204030204" pitchFamily="49" charset="0"/>
+              </a:rPr>
+              <a:t>t0</a:t>
+            </a:r>
+            <a:r>
+              <a:rPr lang="en-GB" b="0">
+                <a:solidFill>
+                  <a:srgbClr val="CCCCCC"/>
+                </a:solidFill>
+                <a:effectLst/>
+                <a:latin typeface="Consolas" panose="020B0609020204030204" pitchFamily="49" charset="0"/>
+              </a:rPr>
+              <a:t>)          </a:t>
+            </a:r>
+            <a:r>
+              <a:rPr lang="en-GB" b="0">
+                <a:solidFill>
+                  <a:srgbClr val="6A9955"/>
+                </a:solidFill>
+                <a:effectLst/>
+                <a:latin typeface="Consolas" panose="020B0609020204030204" pitchFamily="49" charset="0"/>
+              </a:rPr>
+              <a:t># t1 &lt;- numbers[0]</a:t>
+            </a:r>
+            <a:endParaRPr lang="en-GB" b="0">
+              <a:solidFill>
+                <a:srgbClr val="CCCCCC"/>
+              </a:solidFill>
+              <a:effectLst/>
+              <a:latin typeface="Consolas" panose="020B0609020204030204" pitchFamily="49" charset="0"/>
+            </a:endParaRPr>
+          </a:p>
+          <a:p>
+            <a:pPr>
+              <a:buNone/>
+            </a:pPr>
+            <a:r>
+              <a:rPr lang="en-GB" b="0">
+                <a:solidFill>
+                  <a:srgbClr val="CCCCCC"/>
+                </a:solidFill>
+                <a:effectLst/>
+                <a:latin typeface="Consolas" panose="020B0609020204030204" pitchFamily="49" charset="0"/>
+              </a:rPr>
+              <a:t>  </a:t>
+            </a:r>
+            <a:r>
+              <a:rPr lang="en-GB" b="0">
+                <a:solidFill>
+                  <a:srgbClr val="DCDCAA"/>
+                </a:solidFill>
+                <a:effectLst/>
+                <a:latin typeface="Consolas" panose="020B0609020204030204" pitchFamily="49" charset="0"/>
+              </a:rPr>
+              <a:t>lw</a:t>
+            </a:r>
+            <a:r>
+              <a:rPr lang="en-GB" b="0">
+                <a:solidFill>
+                  <a:srgbClr val="CCCCCC"/>
+                </a:solidFill>
+                <a:effectLst/>
+                <a:latin typeface="Consolas" panose="020B0609020204030204" pitchFamily="49" charset="0"/>
+              </a:rPr>
+              <a:t> </a:t>
+            </a:r>
+            <a:r>
+              <a:rPr lang="en-GB" b="0">
+                <a:solidFill>
+                  <a:srgbClr val="9CDCFE"/>
+                </a:solidFill>
+                <a:effectLst/>
+                <a:latin typeface="Consolas" panose="020B0609020204030204" pitchFamily="49" charset="0"/>
+              </a:rPr>
+              <a:t>t2</a:t>
+            </a:r>
+            <a:r>
+              <a:rPr lang="en-GB" b="0">
+                <a:solidFill>
+                  <a:srgbClr val="CCCCCC"/>
+                </a:solidFill>
+                <a:effectLst/>
+                <a:latin typeface="Consolas" panose="020B0609020204030204" pitchFamily="49" charset="0"/>
+              </a:rPr>
+              <a:t>, </a:t>
+            </a:r>
+            <a:r>
+              <a:rPr lang="en-GB" b="0">
+                <a:solidFill>
+                  <a:srgbClr val="B5CEA8"/>
+                </a:solidFill>
+                <a:effectLst/>
+                <a:latin typeface="Consolas" panose="020B0609020204030204" pitchFamily="49" charset="0"/>
+              </a:rPr>
+              <a:t>2</a:t>
+            </a:r>
+            <a:r>
+              <a:rPr lang="en-GB" b="0">
+                <a:solidFill>
+                  <a:srgbClr val="CCCCCC"/>
+                </a:solidFill>
+                <a:effectLst/>
+                <a:latin typeface="Consolas" panose="020B0609020204030204" pitchFamily="49" charset="0"/>
+              </a:rPr>
+              <a:t>(</a:t>
+            </a:r>
+            <a:r>
+              <a:rPr lang="en-GB" b="0">
+                <a:solidFill>
+                  <a:srgbClr val="9CDCFE"/>
+                </a:solidFill>
+                <a:effectLst/>
+                <a:latin typeface="Consolas" panose="020B0609020204030204" pitchFamily="49" charset="0"/>
+              </a:rPr>
+              <a:t>t0</a:t>
+            </a:r>
+            <a:r>
+              <a:rPr lang="en-GB" b="0">
+                <a:solidFill>
+                  <a:srgbClr val="CCCCCC"/>
+                </a:solidFill>
+                <a:effectLst/>
+                <a:latin typeface="Consolas" panose="020B0609020204030204" pitchFamily="49" charset="0"/>
+              </a:rPr>
+              <a:t>)          </a:t>
+            </a:r>
+            <a:r>
+              <a:rPr lang="en-GB" b="0">
+                <a:solidFill>
+                  <a:srgbClr val="6A9955"/>
+                </a:solidFill>
+                <a:effectLst/>
+                <a:latin typeface="Consolas" panose="020B0609020204030204" pitchFamily="49" charset="0"/>
+              </a:rPr>
+              <a:t># t2 &lt;- numbers[1]</a:t>
+            </a:r>
+            <a:endParaRPr lang="en-GB" b="0">
+              <a:solidFill>
+                <a:srgbClr val="CCCCCC"/>
+              </a:solidFill>
+              <a:effectLst/>
+              <a:latin typeface="Consolas" panose="020B0609020204030204" pitchFamily="49" charset="0"/>
+            </a:endParaRPr>
+          </a:p>
+          <a:p>
+            <a:pPr>
+              <a:buNone/>
+            </a:pPr>
+            <a:r>
+              <a:rPr lang="en-GB" b="0">
+                <a:solidFill>
+                  <a:srgbClr val="569CD6"/>
+                </a:solidFill>
+                <a:effectLst/>
+                <a:latin typeface="Consolas" panose="020B0609020204030204" pitchFamily="49" charset="0"/>
+              </a:rPr>
+              <a:t>.balign</a:t>
+            </a:r>
+            <a:r>
+              <a:rPr lang="en-GB" b="0">
+                <a:solidFill>
+                  <a:srgbClr val="CCCCCC"/>
+                </a:solidFill>
+                <a:effectLst/>
+                <a:latin typeface="Consolas" panose="020B0609020204030204" pitchFamily="49" charset="0"/>
+              </a:rPr>
+              <a:t> </a:t>
+            </a:r>
+            <a:r>
+              <a:rPr lang="en-GB" b="0">
+                <a:solidFill>
+                  <a:srgbClr val="B5CEA8"/>
+                </a:solidFill>
+                <a:effectLst/>
+                <a:latin typeface="Consolas" panose="020B0609020204030204" pitchFamily="49" charset="0"/>
+              </a:rPr>
+              <a:t>2 		  </a:t>
+            </a:r>
+            <a:r>
+              <a:rPr lang="en-GB">
+                <a:solidFill>
+                  <a:srgbClr val="6A9955"/>
+                </a:solidFill>
+                <a:latin typeface="Consolas" panose="020B0609020204030204" pitchFamily="49" charset="0"/>
+              </a:rPr>
+              <a:t>#</a:t>
+            </a:r>
+            <a:r>
+              <a:rPr lang="en-GB" b="0">
+                <a:solidFill>
+                  <a:srgbClr val="B5CEA8"/>
+                </a:solidFill>
+                <a:effectLst/>
+                <a:latin typeface="Consolas" panose="020B0609020204030204" pitchFamily="49" charset="0"/>
+              </a:rPr>
+              <a:t> Glöm inte align!</a:t>
+            </a:r>
+            <a:endParaRPr lang="en-GB" b="0">
+              <a:solidFill>
+                <a:srgbClr val="CCCCCC"/>
+              </a:solidFill>
+              <a:effectLst/>
+              <a:latin typeface="Consolas" panose="020B0609020204030204" pitchFamily="49" charset="0"/>
+            </a:endParaRPr>
+          </a:p>
+          <a:p>
+            <a:pPr>
+              <a:buNone/>
+            </a:pPr>
+            <a:r>
+              <a:rPr lang="en-GB" b="0">
+                <a:solidFill>
+                  <a:srgbClr val="DCDCAA"/>
+                </a:solidFill>
+                <a:effectLst/>
+                <a:latin typeface="Consolas" panose="020B0609020204030204" pitchFamily="49" charset="0"/>
+              </a:rPr>
+              <a:t>numbers</a:t>
+            </a:r>
+            <a:r>
+              <a:rPr lang="en-GB" b="0">
+                <a:solidFill>
+                  <a:srgbClr val="CCCCCC"/>
+                </a:solidFill>
+                <a:effectLst/>
+                <a:latin typeface="Consolas" panose="020B0609020204030204" pitchFamily="49" charset="0"/>
+              </a:rPr>
+              <a:t>:                </a:t>
+            </a:r>
+            <a:r>
+              <a:rPr lang="en-GB">
+                <a:solidFill>
+                  <a:srgbClr val="6A9955"/>
+                </a:solidFill>
+                <a:latin typeface="Consolas" panose="020B0609020204030204" pitchFamily="49" charset="0"/>
+              </a:rPr>
+              <a:t># Deklarera short numbers[5]</a:t>
+            </a:r>
+            <a:endParaRPr lang="en-GB" b="0">
+              <a:solidFill>
+                <a:srgbClr val="CCCCCC"/>
+              </a:solidFill>
+              <a:effectLst/>
+              <a:latin typeface="Consolas" panose="020B0609020204030204" pitchFamily="49" charset="0"/>
+            </a:endParaRPr>
+          </a:p>
+          <a:p>
+            <a:pPr>
+              <a:buNone/>
+            </a:pPr>
+            <a:r>
+              <a:rPr lang="en-GB" b="0">
+                <a:solidFill>
+                  <a:srgbClr val="CCCCCC"/>
+                </a:solidFill>
+                <a:effectLst/>
+                <a:latin typeface="Consolas" panose="020B0609020204030204" pitchFamily="49" charset="0"/>
+              </a:rPr>
+              <a:t>.space 5*2		  </a:t>
+            </a:r>
+            <a:r>
+              <a:rPr lang="en-GB">
+                <a:solidFill>
+                  <a:srgbClr val="6A9955"/>
+                </a:solidFill>
+                <a:latin typeface="Consolas" panose="020B0609020204030204" pitchFamily="49" charset="0"/>
+              </a:rPr>
+              <a:t># Varje element </a:t>
+            </a:r>
+            <a:r>
+              <a:rPr lang="sv-SE">
+                <a:solidFill>
+                  <a:srgbClr val="6A9955"/>
+                </a:solidFill>
+                <a:latin typeface="Consolas" panose="020B0609020204030204" pitchFamily="49" charset="0"/>
+              </a:rPr>
+              <a:t>är 2 bytes</a:t>
+            </a:r>
+            <a:r>
+              <a:rPr lang="en-GB" b="0">
+                <a:solidFill>
+                  <a:srgbClr val="CCCCCC"/>
+                </a:solidFill>
+                <a:effectLst/>
+                <a:latin typeface="Consolas" panose="020B0609020204030204" pitchFamily="49" charset="0"/>
+              </a:rPr>
+              <a:t>	</a:t>
+            </a:r>
+          </a:p>
+          <a:p>
+            <a:pPr>
+              <a:lnSpc>
+                <a:spcPts val="1425"/>
+              </a:lnSpc>
+              <a:buNone/>
+            </a:pPr>
+            <a:endParaRPr lang="en-GB" b="0">
+              <a:solidFill>
+                <a:srgbClr val="CCCCCC"/>
+              </a:solidFill>
+              <a:effectLst/>
+              <a:latin typeface="Consolas" panose="020B0609020204030204" pitchFamily="49" charset="0"/>
+            </a:endParaRPr>
+          </a:p>
+        </p:txBody>
+      </p:sp>
+    </p:spTree>
+    <p:extLst>
+      <p:ext uri="{BB962C8B-B14F-4D97-AF65-F5344CB8AC3E}">
+        <p14:creationId xmlns:p14="http://schemas.microsoft.com/office/powerpoint/2010/main" val="2164590776"/>
+      </p:ext>
+    </p:extLst>
+  </p:cSld>
+  <p:clrMapOvr>
+    <a:masterClrMapping/>
+  </p:clrMapOvr>
+  <p:timing>
+    <p:tnLst>
+      <p:par>
+        <p:cTn id="1" dur="indefinite" restart="never" nodeType="tmRoot">
+          <p:childTnLst>
+            <p:seq concurrent="1" nextAc="seek">
+              <p:cTn id="2" dur="indefinite" nodeType="mainSeq">
+                <p:childTnLst>
+                  <p:par>
+                    <p:cTn id="3" fill="hold">
+                      <p:stCondLst>
+                        <p:cond delay="indefinite"/>
+                      </p:stCondLst>
+                      <p:childTnLst>
+                        <p:par>
+                          <p:cTn id="4" fill="hold">
+                            <p:stCondLst>
+                              <p:cond delay="0"/>
+                            </p:stCondLst>
+                            <p:childTnLst>
+                              <p:par>
+                                <p:cTn id="5" presetID="10" presetClass="entr" presetSubtype="0" fill="hold" nodeType="clickEffect">
+                                  <p:stCondLst>
+                                    <p:cond delay="0"/>
+                                  </p:stCondLst>
+                                  <p:childTnLst>
+                                    <p:set>
+                                      <p:cBhvr>
+                                        <p:cTn id="6" dur="1" fill="hold">
+                                          <p:stCondLst>
+                                            <p:cond delay="0"/>
+                                          </p:stCondLst>
+                                        </p:cTn>
+                                        <p:tgtEl>
+                                          <p:spTgt spid="4">
+                                            <p:txEl>
+                                              <p:pRg st="5" end="5"/>
+                                            </p:txEl>
+                                          </p:spTgt>
+                                        </p:tgtEl>
+                                        <p:attrNameLst>
+                                          <p:attrName>style.visibility</p:attrName>
+                                        </p:attrNameLst>
+                                      </p:cBhvr>
+                                      <p:to>
+                                        <p:strVal val="visible"/>
+                                      </p:to>
+                                    </p:set>
+                                    <p:animEffect transition="in" filter="fade">
+                                      <p:cBhvr>
+                                        <p:cTn id="7" dur="500"/>
+                                        <p:tgtEl>
+                                          <p:spTgt spid="4">
+                                            <p:txEl>
+                                              <p:pRg st="5" end="5"/>
+                                            </p:txEl>
+                                          </p:spTgt>
+                                        </p:tgtEl>
+                                      </p:cBhvr>
+                                    </p:animEffect>
+                                  </p:childTnLst>
+                                </p:cTn>
+                              </p:par>
+                              <p:par>
+                                <p:cTn id="8" presetID="10" presetClass="entr" presetSubtype="0" fill="hold" nodeType="withEffect">
+                                  <p:stCondLst>
+                                    <p:cond delay="0"/>
+                                  </p:stCondLst>
+                                  <p:childTnLst>
+                                    <p:set>
+                                      <p:cBhvr>
+                                        <p:cTn id="9" dur="1" fill="hold">
+                                          <p:stCondLst>
+                                            <p:cond delay="0"/>
+                                          </p:stCondLst>
+                                        </p:cTn>
+                                        <p:tgtEl>
+                                          <p:spTgt spid="4">
+                                            <p:txEl>
+                                              <p:pRg st="6" end="6"/>
+                                            </p:txEl>
+                                          </p:spTgt>
+                                        </p:tgtEl>
+                                        <p:attrNameLst>
+                                          <p:attrName>style.visibility</p:attrName>
+                                        </p:attrNameLst>
+                                      </p:cBhvr>
+                                      <p:to>
+                                        <p:strVal val="visible"/>
+                                      </p:to>
+                                    </p:set>
+                                    <p:animEffect transition="in" filter="fade">
+                                      <p:cBhvr>
+                                        <p:cTn id="10" dur="500"/>
+                                        <p:tgtEl>
+                                          <p:spTgt spid="4">
+                                            <p:txEl>
+                                              <p:pRg st="6" end="6"/>
+                                            </p:txEl>
+                                          </p:spTgt>
+                                        </p:tgtEl>
+                                      </p:cBhvr>
+                                    </p:animEffect>
+                                  </p:childTnLst>
+                                </p:cTn>
+                              </p:par>
+                            </p:childTnLst>
+                          </p:cTn>
+                        </p:par>
+                      </p:childTnLst>
+                    </p:cTn>
+                  </p:par>
+                  <p:par>
+                    <p:cTn id="11" fill="hold">
+                      <p:stCondLst>
+                        <p:cond delay="indefinite"/>
+                      </p:stCondLst>
+                      <p:childTnLst>
+                        <p:par>
+                          <p:cTn id="12" fill="hold">
+                            <p:stCondLst>
+                              <p:cond delay="0"/>
+                            </p:stCondLst>
+                            <p:childTnLst>
+                              <p:par>
+                                <p:cTn id="13" presetID="10" presetClass="entr" presetSubtype="0" fill="hold" nodeType="clickEffect">
+                                  <p:stCondLst>
+                                    <p:cond delay="0"/>
+                                  </p:stCondLst>
+                                  <p:childTnLst>
+                                    <p:set>
+                                      <p:cBhvr>
+                                        <p:cTn id="14" dur="1" fill="hold">
+                                          <p:stCondLst>
+                                            <p:cond delay="0"/>
+                                          </p:stCondLst>
+                                        </p:cTn>
+                                        <p:tgtEl>
+                                          <p:spTgt spid="4">
+                                            <p:txEl>
+                                              <p:pRg st="4" end="4"/>
+                                            </p:txEl>
+                                          </p:spTgt>
+                                        </p:tgtEl>
+                                        <p:attrNameLst>
+                                          <p:attrName>style.visibility</p:attrName>
+                                        </p:attrNameLst>
+                                      </p:cBhvr>
+                                      <p:to>
+                                        <p:strVal val="visible"/>
+                                      </p:to>
+                                    </p:set>
+                                    <p:animEffect transition="in" filter="fade">
+                                      <p:cBhvr>
+                                        <p:cTn id="15" dur="500"/>
+                                        <p:tgtEl>
+                                          <p:spTgt spid="4">
+                                            <p:txEl>
+                                              <p:pRg st="4" end="4"/>
+                                            </p:txEl>
+                                          </p:spTgt>
+                                        </p:tgtEl>
+                                      </p:cBhvr>
+                                    </p:animEffect>
+                                  </p:childTnLst>
+                                </p:cTn>
+                              </p:par>
+                            </p:childTnLst>
+                          </p:cTn>
+                        </p:par>
+                      </p:childTnLst>
+                    </p:cTn>
+                  </p:par>
+                  <p:par>
+                    <p:cTn id="16" fill="hold">
+                      <p:stCondLst>
+                        <p:cond delay="indefinite"/>
+                      </p:stCondLst>
+                      <p:childTnLst>
+                        <p:par>
+                          <p:cTn id="17" fill="hold">
+                            <p:stCondLst>
+                              <p:cond delay="0"/>
+                            </p:stCondLst>
+                            <p:childTnLst>
+                              <p:par>
+                                <p:cTn id="18" presetID="10" presetClass="entr" presetSubtype="0" fill="hold" nodeType="clickEffect">
+                                  <p:stCondLst>
+                                    <p:cond delay="0"/>
+                                  </p:stCondLst>
+                                  <p:childTnLst>
+                                    <p:set>
+                                      <p:cBhvr>
+                                        <p:cTn id="19" dur="1" fill="hold">
+                                          <p:stCondLst>
+                                            <p:cond delay="0"/>
+                                          </p:stCondLst>
+                                        </p:cTn>
+                                        <p:tgtEl>
+                                          <p:spTgt spid="4">
+                                            <p:txEl>
+                                              <p:pRg st="1" end="1"/>
+                                            </p:txEl>
+                                          </p:spTgt>
+                                        </p:tgtEl>
+                                        <p:attrNameLst>
+                                          <p:attrName>style.visibility</p:attrName>
+                                        </p:attrNameLst>
+                                      </p:cBhvr>
+                                      <p:to>
+                                        <p:strVal val="visible"/>
+                                      </p:to>
+                                    </p:set>
+                                    <p:animEffect transition="in" filter="fade">
+                                      <p:cBhvr>
+                                        <p:cTn id="20" dur="500"/>
+                                        <p:tgtEl>
+                                          <p:spTgt spid="4">
+                                            <p:txEl>
+                                              <p:pRg st="1" end="1"/>
+                                            </p:txEl>
+                                          </p:spTgt>
+                                        </p:tgtEl>
+                                      </p:cBhvr>
+                                    </p:animEffect>
+                                  </p:childTnLst>
+                                </p:cTn>
+                              </p:par>
+                            </p:childTnLst>
+                          </p:cTn>
+                        </p:par>
+                      </p:childTnLst>
+                    </p:cTn>
+                  </p:par>
+                  <p:par>
+                    <p:cTn id="21" fill="hold">
+                      <p:stCondLst>
+                        <p:cond delay="indefinite"/>
+                      </p:stCondLst>
+                      <p:childTnLst>
+                        <p:par>
+                          <p:cTn id="22" fill="hold">
+                            <p:stCondLst>
+                              <p:cond delay="0"/>
+                            </p:stCondLst>
+                            <p:childTnLst>
+                              <p:par>
+                                <p:cTn id="23" presetID="10" presetClass="entr" presetSubtype="0" fill="hold" nodeType="clickEffect">
+                                  <p:stCondLst>
+                                    <p:cond delay="0"/>
+                                  </p:stCondLst>
+                                  <p:childTnLst>
+                                    <p:set>
+                                      <p:cBhvr>
+                                        <p:cTn id="24" dur="1" fill="hold">
+                                          <p:stCondLst>
+                                            <p:cond delay="0"/>
+                                          </p:stCondLst>
+                                        </p:cTn>
+                                        <p:tgtEl>
+                                          <p:spTgt spid="4">
+                                            <p:txEl>
+                                              <p:pRg st="2" end="2"/>
+                                            </p:txEl>
+                                          </p:spTgt>
+                                        </p:tgtEl>
+                                        <p:attrNameLst>
+                                          <p:attrName>style.visibility</p:attrName>
+                                        </p:attrNameLst>
+                                      </p:cBhvr>
+                                      <p:to>
+                                        <p:strVal val="visible"/>
+                                      </p:to>
+                                    </p:set>
+                                    <p:animEffect transition="in" filter="fade">
+                                      <p:cBhvr>
+                                        <p:cTn id="25" dur="500"/>
+                                        <p:tgtEl>
+                                          <p:spTgt spid="4">
+                                            <p:txEl>
+                                              <p:pRg st="2" end="2"/>
+                                            </p:txEl>
+                                          </p:spTgt>
+                                        </p:tgtEl>
+                                      </p:cBhvr>
+                                    </p:animEffect>
+                                  </p:childTnLst>
+                                </p:cTn>
+                              </p:par>
+                            </p:childTnLst>
+                          </p:cTn>
+                        </p:par>
+                      </p:childTnLst>
+                    </p:cTn>
+                  </p:par>
+                  <p:par>
+                    <p:cTn id="26" fill="hold">
+                      <p:stCondLst>
+                        <p:cond delay="indefinite"/>
+                      </p:stCondLst>
+                      <p:childTnLst>
+                        <p:par>
+                          <p:cTn id="27" fill="hold">
+                            <p:stCondLst>
+                              <p:cond delay="0"/>
+                            </p:stCondLst>
+                            <p:childTnLst>
+                              <p:par>
+                                <p:cTn id="28" presetID="10" presetClass="entr" presetSubtype="0" fill="hold" nodeType="clickEffect">
+                                  <p:stCondLst>
+                                    <p:cond delay="0"/>
+                                  </p:stCondLst>
+                                  <p:childTnLst>
+                                    <p:set>
+                                      <p:cBhvr>
+                                        <p:cTn id="29" dur="1" fill="hold">
+                                          <p:stCondLst>
+                                            <p:cond delay="0"/>
+                                          </p:stCondLst>
+                                        </p:cTn>
+                                        <p:tgtEl>
+                                          <p:spTgt spid="4">
+                                            <p:txEl>
+                                              <p:pRg st="3" end="3"/>
+                                            </p:txEl>
+                                          </p:spTgt>
+                                        </p:tgtEl>
+                                        <p:attrNameLst>
+                                          <p:attrName>style.visibility</p:attrName>
+                                        </p:attrNameLst>
+                                      </p:cBhvr>
+                                      <p:to>
+                                        <p:strVal val="visible"/>
+                                      </p:to>
+                                    </p:set>
+                                    <p:animEffect transition="in" filter="fade">
+                                      <p:cBhvr>
+                                        <p:cTn id="30" dur="500"/>
+                                        <p:tgtEl>
+                                          <p:spTgt spid="4">
+                                            <p:txEl>
+                                              <p:pRg st="3" end="3"/>
+                                            </p:txEl>
+                                          </p:spTgt>
+                                        </p:tgtEl>
+                                      </p:cBhvr>
+                                    </p:animEffect>
+                                  </p:childTnLst>
+                                </p:cTn>
+                              </p:par>
+                            </p:childTnLst>
+                          </p:cTn>
+                        </p:par>
+                      </p:childTnLst>
+                    </p:cTn>
+                  </p:par>
+                </p:childTnLst>
+              </p:cTn>
+              <p:prevCondLst>
+                <p:cond evt="onPrev" delay="0">
+                  <p:tgtEl>
+                    <p:sldTgt/>
+                  </p:tgtEl>
+                </p:cond>
+              </p:prevCondLst>
+              <p:nextCondLst>
+                <p:cond evt="onNext" delay="0">
+                  <p:tgtEl>
+                    <p:sldTgt/>
+                  </p:tgtEl>
+                </p:cond>
+              </p:nextCondLst>
+            </p:seq>
+          </p:childTnLst>
+        </p:cTn>
+      </p:par>
+    </p:tnLst>
+  </p:timing>
+</p:sld>
+</file>
+
+<file path=ppt/slides/slide21.xml><?xml version="1.0" encoding="utf-8"?>
+<p:sld xmlns:a="http://schemas.openxmlformats.org/drawingml/2006/main" xmlns:r="http://schemas.openxmlformats.org/officeDocument/2006/relationships" xmlns:p="http://schemas.openxmlformats.org/presentationml/2006/main">
+  <p:cSld>
+    <p:spTree>
+      <p:nvGrpSpPr>
+        <p:cNvPr id="1" name=""/>
+        <p:cNvGrpSpPr/>
+        <p:nvPr/>
+      </p:nvGrpSpPr>
+      <p:grpSpPr>
+        <a:xfrm>
+          <a:off x="0" y="0"/>
+          <a:ext cx="0" cy="0"/>
+          <a:chOff x="0" y="0"/>
+          <a:chExt cx="0" cy="0"/>
+        </a:xfrm>
+      </p:grpSpPr>
+      <p:sp>
+        <p:nvSpPr>
+          <p:cNvPr id="2" name="Title 1">
+            <a:extLst>
+              <a:ext uri="{FF2B5EF4-FFF2-40B4-BE49-F238E27FC236}">
+                <a16:creationId xmlns:a16="http://schemas.microsoft.com/office/drawing/2014/main" id="{19AA3EBD-DCAC-F2A4-A314-969FE541143B}"/>
+              </a:ext>
+            </a:extLst>
+          </p:cNvPr>
+          <p:cNvSpPr>
+            <a:spLocks noGrp="1"/>
+          </p:cNvSpPr>
+          <p:nvPr>
+            <p:ph type="title"/>
+          </p:nvPr>
+        </p:nvSpPr>
+        <p:spPr/>
+        <p:txBody>
+          <a:bodyPr/>
+          <a:lstStyle/>
+          <a:p>
+            <a:r>
+              <a:rPr lang="sv-SE"/>
+              <a:t>Iterera över en array</a:t>
+            </a:r>
+            <a:endParaRPr lang="LID4096"/>
+          </a:p>
+        </p:txBody>
+      </p:sp>
+      <p:sp>
+        <p:nvSpPr>
+          <p:cNvPr id="3" name="TextBox 2">
+            <a:extLst>
+              <a:ext uri="{FF2B5EF4-FFF2-40B4-BE49-F238E27FC236}">
+                <a16:creationId xmlns:a16="http://schemas.microsoft.com/office/drawing/2014/main" id="{A4282E66-82DB-21FB-DC4A-D21E677972E2}"/>
+              </a:ext>
+            </a:extLst>
+          </p:cNvPr>
+          <p:cNvSpPr txBox="1"/>
+          <p:nvPr/>
+        </p:nvSpPr>
+        <p:spPr>
+          <a:xfrm>
+            <a:off x="1029235" y="2195591"/>
+            <a:ext cx="10324565" cy="4401205"/>
+          </a:xfrm>
+          <a:prstGeom prst="rect">
+            <a:avLst/>
+          </a:prstGeom>
+          <a:solidFill>
+            <a:schemeClr val="tx1">
+              <a:lumMod val="75000"/>
+              <a:lumOff val="25000"/>
+            </a:schemeClr>
+          </a:solidFill>
+        </p:spPr>
+        <p:txBody>
+          <a:bodyPr wrap="square" rtlCol="0">
+            <a:spAutoFit/>
+          </a:bodyPr>
+          <a:lstStyle/>
+          <a:p>
+            <a:pPr>
+              <a:buNone/>
+            </a:pPr>
+            <a:r>
+              <a:rPr lang="en-GB" sz="1400">
+                <a:solidFill>
+                  <a:srgbClr val="DCDCAA"/>
+                </a:solidFill>
+                <a:latin typeface="Consolas" panose="020B0609020204030204" pitchFamily="49" charset="0"/>
+              </a:rPr>
+              <a:t>main</a:t>
+            </a:r>
+            <a:r>
+              <a:rPr lang="en-GB" sz="1400">
+                <a:solidFill>
+                  <a:srgbClr val="CCCCCC"/>
+                </a:solidFill>
+                <a:latin typeface="Consolas" panose="020B0609020204030204" pitchFamily="49" charset="0"/>
+              </a:rPr>
+              <a:t>:</a:t>
+            </a:r>
+          </a:p>
+          <a:p>
+            <a:pPr>
+              <a:buNone/>
+            </a:pPr>
+            <a:r>
+              <a:rPr lang="en-GB" sz="1400">
+                <a:solidFill>
+                  <a:srgbClr val="CCCCCC"/>
+                </a:solidFill>
+                <a:latin typeface="Consolas" panose="020B0609020204030204" pitchFamily="49" charset="0"/>
+              </a:rPr>
+              <a:t> </a:t>
+            </a:r>
+            <a:r>
+              <a:rPr lang="en-GB" sz="1400">
+                <a:solidFill>
+                  <a:srgbClr val="DCDCAA"/>
+                </a:solidFill>
+                <a:latin typeface="Consolas" panose="020B0609020204030204" pitchFamily="49" charset="0"/>
+              </a:rPr>
+              <a:t>li</a:t>
+            </a:r>
+            <a:r>
+              <a:rPr lang="en-GB" sz="1400">
+                <a:solidFill>
+                  <a:srgbClr val="CCCCCC"/>
+                </a:solidFill>
+                <a:latin typeface="Consolas" panose="020B0609020204030204" pitchFamily="49" charset="0"/>
+              </a:rPr>
+              <a:t> </a:t>
+            </a:r>
+            <a:r>
+              <a:rPr lang="en-GB" sz="1400">
+                <a:solidFill>
+                  <a:srgbClr val="9CDCFE"/>
+                </a:solidFill>
+                <a:latin typeface="Consolas" panose="020B0609020204030204" pitchFamily="49" charset="0"/>
+              </a:rPr>
+              <a:t>t0</a:t>
+            </a:r>
+            <a:r>
+              <a:rPr lang="en-GB" sz="1400">
+                <a:solidFill>
+                  <a:srgbClr val="CCCCCC"/>
+                </a:solidFill>
+                <a:latin typeface="Consolas" panose="020B0609020204030204" pitchFamily="49" charset="0"/>
+              </a:rPr>
+              <a:t>, </a:t>
+            </a:r>
+            <a:r>
+              <a:rPr lang="en-GB" sz="1400">
+                <a:solidFill>
+                  <a:srgbClr val="B5CEA8"/>
+                </a:solidFill>
+                <a:latin typeface="Consolas" panose="020B0609020204030204" pitchFamily="49" charset="0"/>
+              </a:rPr>
+              <a:t>0</a:t>
+            </a:r>
+            <a:r>
+              <a:rPr lang="en-GB" sz="1400">
+                <a:solidFill>
+                  <a:srgbClr val="CCCCCC"/>
+                </a:solidFill>
+                <a:latin typeface="Consolas" panose="020B0609020204030204" pitchFamily="49" charset="0"/>
+              </a:rPr>
+              <a:t>                                            </a:t>
+            </a:r>
+            <a:r>
+              <a:rPr lang="en-GB" sz="1400">
+                <a:solidFill>
+                  <a:srgbClr val="6A9955"/>
+                </a:solidFill>
+                <a:latin typeface="Consolas" panose="020B0609020204030204" pitchFamily="49" charset="0"/>
+              </a:rPr>
+              <a:t># We use t0 for i</a:t>
+            </a:r>
+            <a:endParaRPr lang="en-GB" sz="1400">
+              <a:solidFill>
+                <a:srgbClr val="CCCCCC"/>
+              </a:solidFill>
+              <a:latin typeface="Consolas" panose="020B0609020204030204" pitchFamily="49" charset="0"/>
+            </a:endParaRPr>
+          </a:p>
+          <a:p>
+            <a:pPr>
+              <a:buNone/>
+            </a:pPr>
+            <a:r>
+              <a:rPr lang="en-GB" sz="1400">
+                <a:solidFill>
+                  <a:srgbClr val="CCCCCC"/>
+                </a:solidFill>
+                <a:latin typeface="Consolas" panose="020B0609020204030204" pitchFamily="49" charset="0"/>
+              </a:rPr>
+              <a:t> </a:t>
+            </a:r>
+            <a:r>
+              <a:rPr lang="en-GB" sz="1400">
+                <a:solidFill>
+                  <a:srgbClr val="DCDCAA"/>
+                </a:solidFill>
+                <a:latin typeface="Consolas" panose="020B0609020204030204" pitchFamily="49" charset="0"/>
+              </a:rPr>
+              <a:t>li</a:t>
+            </a:r>
+            <a:r>
+              <a:rPr lang="en-GB" sz="1400">
+                <a:solidFill>
+                  <a:srgbClr val="CCCCCC"/>
+                </a:solidFill>
+                <a:latin typeface="Consolas" panose="020B0609020204030204" pitchFamily="49" charset="0"/>
+              </a:rPr>
+              <a:t> </a:t>
+            </a:r>
+            <a:r>
+              <a:rPr lang="en-GB" sz="1400">
+                <a:solidFill>
+                  <a:srgbClr val="9CDCFE"/>
+                </a:solidFill>
+                <a:latin typeface="Consolas" panose="020B0609020204030204" pitchFamily="49" charset="0"/>
+              </a:rPr>
+              <a:t>t1</a:t>
+            </a:r>
+            <a:r>
+              <a:rPr lang="en-GB" sz="1400">
+                <a:solidFill>
+                  <a:srgbClr val="CCCCCC"/>
+                </a:solidFill>
+                <a:latin typeface="Consolas" panose="020B0609020204030204" pitchFamily="49" charset="0"/>
+              </a:rPr>
+              <a:t>, </a:t>
+            </a:r>
+            <a:r>
+              <a:rPr lang="en-GB" sz="1400">
+                <a:solidFill>
+                  <a:srgbClr val="B5CEA8"/>
+                </a:solidFill>
+                <a:latin typeface="Consolas" panose="020B0609020204030204" pitchFamily="49" charset="0"/>
+              </a:rPr>
+              <a:t>0</a:t>
+            </a:r>
+            <a:r>
+              <a:rPr lang="en-GB" sz="1400">
+                <a:solidFill>
+                  <a:srgbClr val="CCCCCC"/>
+                </a:solidFill>
+                <a:latin typeface="Consolas" panose="020B0609020204030204" pitchFamily="49" charset="0"/>
+              </a:rPr>
+              <a:t>                                            </a:t>
+            </a:r>
+            <a:r>
+              <a:rPr lang="en-GB" sz="1400">
+                <a:solidFill>
+                  <a:srgbClr val="6A9955"/>
+                </a:solidFill>
+                <a:latin typeface="Consolas" panose="020B0609020204030204" pitchFamily="49" charset="0"/>
+              </a:rPr>
+              <a:t># We use t1 for the sum</a:t>
+            </a:r>
+            <a:endParaRPr lang="en-GB" sz="1400">
+              <a:solidFill>
+                <a:srgbClr val="CCCCCC"/>
+              </a:solidFill>
+              <a:latin typeface="Consolas" panose="020B0609020204030204" pitchFamily="49" charset="0"/>
+            </a:endParaRPr>
+          </a:p>
+          <a:p>
+            <a:pPr>
+              <a:buNone/>
+            </a:pPr>
+            <a:r>
+              <a:rPr lang="en-GB" sz="1400">
+                <a:solidFill>
+                  <a:srgbClr val="CCCCCC"/>
+                </a:solidFill>
+                <a:latin typeface="Consolas" panose="020B0609020204030204" pitchFamily="49" charset="0"/>
+              </a:rPr>
+              <a:t> </a:t>
+            </a:r>
+            <a:r>
+              <a:rPr lang="en-GB" sz="1400">
+                <a:solidFill>
+                  <a:srgbClr val="DCDCAA"/>
+                </a:solidFill>
+                <a:latin typeface="Consolas" panose="020B0609020204030204" pitchFamily="49" charset="0"/>
+              </a:rPr>
+              <a:t>la</a:t>
+            </a:r>
+            <a:r>
+              <a:rPr lang="en-GB" sz="1400">
+                <a:solidFill>
+                  <a:srgbClr val="CCCCCC"/>
+                </a:solidFill>
+                <a:latin typeface="Consolas" panose="020B0609020204030204" pitchFamily="49" charset="0"/>
+              </a:rPr>
+              <a:t> </a:t>
+            </a:r>
+            <a:r>
+              <a:rPr lang="en-GB" sz="1400">
+                <a:solidFill>
+                  <a:srgbClr val="9CDCFE"/>
+                </a:solidFill>
+                <a:latin typeface="Consolas" panose="020B0609020204030204" pitchFamily="49" charset="0"/>
+              </a:rPr>
+              <a:t>t2</a:t>
+            </a:r>
+            <a:r>
+              <a:rPr lang="en-GB" sz="1400">
+                <a:solidFill>
+                  <a:srgbClr val="CCCCCC"/>
+                </a:solidFill>
+                <a:latin typeface="Consolas" panose="020B0609020204030204" pitchFamily="49" charset="0"/>
+              </a:rPr>
+              <a:t>, numbers                                      </a:t>
+            </a:r>
+            <a:r>
+              <a:rPr lang="en-GB" sz="1400">
+                <a:solidFill>
+                  <a:srgbClr val="6A9955"/>
+                </a:solidFill>
+                <a:latin typeface="Consolas" panose="020B0609020204030204" pitchFamily="49" charset="0"/>
+              </a:rPr>
+              <a:t># t2 &lt;- address of first element in array</a:t>
+            </a:r>
+            <a:endParaRPr lang="en-GB" sz="1400">
+              <a:solidFill>
+                <a:srgbClr val="CCCCCC"/>
+              </a:solidFill>
+              <a:latin typeface="Consolas" panose="020B0609020204030204" pitchFamily="49" charset="0"/>
+            </a:endParaRPr>
+          </a:p>
+          <a:p>
+            <a:pPr>
+              <a:buNone/>
+            </a:pPr>
+            <a:r>
+              <a:rPr lang="en-GB" sz="1400">
+                <a:solidFill>
+                  <a:srgbClr val="CCCCCC"/>
+                </a:solidFill>
+                <a:latin typeface="Consolas" panose="020B0609020204030204" pitchFamily="49" charset="0"/>
+              </a:rPr>
+              <a:t> </a:t>
+            </a:r>
+            <a:r>
+              <a:rPr lang="en-GB" sz="1400">
+                <a:solidFill>
+                  <a:srgbClr val="DCDCAA"/>
+                </a:solidFill>
+                <a:latin typeface="Consolas" panose="020B0609020204030204" pitchFamily="49" charset="0"/>
+              </a:rPr>
+              <a:t>loop</a:t>
+            </a:r>
+            <a:r>
+              <a:rPr lang="en-GB" sz="1400">
+                <a:solidFill>
+                  <a:srgbClr val="CCCCCC"/>
+                </a:solidFill>
+                <a:latin typeface="Consolas" panose="020B0609020204030204" pitchFamily="49" charset="0"/>
+              </a:rPr>
+              <a:t>:</a:t>
+            </a:r>
+          </a:p>
+          <a:p>
+            <a:pPr>
+              <a:buNone/>
+            </a:pPr>
+            <a:r>
+              <a:rPr lang="en-GB" sz="1400">
+                <a:solidFill>
+                  <a:srgbClr val="CCCCCC"/>
+                </a:solidFill>
+                <a:latin typeface="Consolas" panose="020B0609020204030204" pitchFamily="49" charset="0"/>
+              </a:rPr>
+              <a:t>   </a:t>
+            </a:r>
+            <a:r>
+              <a:rPr lang="en-GB" sz="1400">
+                <a:solidFill>
+                  <a:srgbClr val="DCDCAA"/>
+                </a:solidFill>
+                <a:latin typeface="Consolas" panose="020B0609020204030204" pitchFamily="49" charset="0"/>
+              </a:rPr>
+              <a:t>li</a:t>
+            </a:r>
+            <a:r>
+              <a:rPr lang="en-GB" sz="1400">
+                <a:solidFill>
+                  <a:srgbClr val="CCCCCC"/>
+                </a:solidFill>
+                <a:latin typeface="Consolas" panose="020B0609020204030204" pitchFamily="49" charset="0"/>
+              </a:rPr>
+              <a:t> </a:t>
+            </a:r>
+            <a:r>
+              <a:rPr lang="en-GB" sz="1400">
+                <a:solidFill>
+                  <a:srgbClr val="9CDCFE"/>
+                </a:solidFill>
+                <a:latin typeface="Consolas" panose="020B0609020204030204" pitchFamily="49" charset="0"/>
+              </a:rPr>
+              <a:t>t3</a:t>
+            </a:r>
+            <a:r>
+              <a:rPr lang="en-GB" sz="1400">
+                <a:solidFill>
+                  <a:srgbClr val="CCCCCC"/>
+                </a:solidFill>
+                <a:latin typeface="Consolas" panose="020B0609020204030204" pitchFamily="49" charset="0"/>
+              </a:rPr>
+              <a:t>, </a:t>
+            </a:r>
+            <a:r>
+              <a:rPr lang="en-GB" sz="1400">
+                <a:solidFill>
+                  <a:srgbClr val="B5CEA8"/>
+                </a:solidFill>
+                <a:latin typeface="Consolas" panose="020B0609020204030204" pitchFamily="49" charset="0"/>
+              </a:rPr>
+              <a:t>4</a:t>
+            </a:r>
+            <a:r>
+              <a:rPr lang="en-GB" sz="1400">
+                <a:solidFill>
+                  <a:srgbClr val="CCCCCC"/>
+                </a:solidFill>
+                <a:latin typeface="Consolas" panose="020B0609020204030204" pitchFamily="49" charset="0"/>
+              </a:rPr>
+              <a:t>                                          </a:t>
+            </a:r>
+            <a:r>
+              <a:rPr lang="en-GB" sz="1400">
+                <a:solidFill>
+                  <a:srgbClr val="6A9955"/>
+                </a:solidFill>
+                <a:latin typeface="Consolas" panose="020B0609020204030204" pitchFamily="49" charset="0"/>
+              </a:rPr>
+              <a:t># t3 &lt;- 4, the number of bytes per element</a:t>
+            </a:r>
+            <a:endParaRPr lang="en-GB" sz="1400">
+              <a:solidFill>
+                <a:srgbClr val="CCCCCC"/>
+              </a:solidFill>
+              <a:latin typeface="Consolas" panose="020B0609020204030204" pitchFamily="49" charset="0"/>
+            </a:endParaRPr>
+          </a:p>
+          <a:p>
+            <a:pPr>
+              <a:buNone/>
+            </a:pPr>
+            <a:r>
+              <a:rPr lang="en-GB" sz="1400">
+                <a:solidFill>
+                  <a:srgbClr val="CCCCCC"/>
+                </a:solidFill>
+                <a:latin typeface="Consolas" panose="020B0609020204030204" pitchFamily="49" charset="0"/>
+              </a:rPr>
+              <a:t>   </a:t>
+            </a:r>
+            <a:r>
+              <a:rPr lang="en-GB" sz="1400">
+                <a:solidFill>
+                  <a:srgbClr val="DCDCAA"/>
+                </a:solidFill>
+                <a:latin typeface="Consolas" panose="020B0609020204030204" pitchFamily="49" charset="0"/>
+              </a:rPr>
+              <a:t>mul</a:t>
+            </a:r>
+            <a:r>
+              <a:rPr lang="en-GB" sz="1400">
+                <a:solidFill>
+                  <a:srgbClr val="CCCCCC"/>
+                </a:solidFill>
+                <a:latin typeface="Consolas" panose="020B0609020204030204" pitchFamily="49" charset="0"/>
+              </a:rPr>
+              <a:t> </a:t>
+            </a:r>
+            <a:r>
+              <a:rPr lang="en-GB" sz="1400">
+                <a:solidFill>
+                  <a:srgbClr val="9CDCFE"/>
+                </a:solidFill>
+                <a:latin typeface="Consolas" panose="020B0609020204030204" pitchFamily="49" charset="0"/>
+              </a:rPr>
+              <a:t>t3</a:t>
+            </a:r>
+            <a:r>
+              <a:rPr lang="en-GB" sz="1400">
+                <a:solidFill>
+                  <a:srgbClr val="CCCCCC"/>
+                </a:solidFill>
+                <a:latin typeface="Consolas" panose="020B0609020204030204" pitchFamily="49" charset="0"/>
+              </a:rPr>
+              <a:t>, </a:t>
+            </a:r>
+            <a:r>
+              <a:rPr lang="en-GB" sz="1400">
+                <a:solidFill>
+                  <a:srgbClr val="9CDCFE"/>
+                </a:solidFill>
+                <a:latin typeface="Consolas" panose="020B0609020204030204" pitchFamily="49" charset="0"/>
+              </a:rPr>
+              <a:t>t0</a:t>
+            </a:r>
+            <a:r>
+              <a:rPr lang="en-GB" sz="1400">
+                <a:solidFill>
+                  <a:srgbClr val="CCCCCC"/>
+                </a:solidFill>
+                <a:latin typeface="Consolas" panose="020B0609020204030204" pitchFamily="49" charset="0"/>
+              </a:rPr>
+              <a:t>, </a:t>
+            </a:r>
+            <a:r>
+              <a:rPr lang="en-GB" sz="1400">
+                <a:solidFill>
+                  <a:srgbClr val="9CDCFE"/>
+                </a:solidFill>
+                <a:latin typeface="Consolas" panose="020B0609020204030204" pitchFamily="49" charset="0"/>
+              </a:rPr>
+              <a:t>t3</a:t>
+            </a:r>
+            <a:r>
+              <a:rPr lang="en-GB" sz="1400">
+                <a:solidFill>
+                  <a:srgbClr val="CCCCCC"/>
+                </a:solidFill>
+                <a:latin typeface="Consolas" panose="020B0609020204030204" pitchFamily="49" charset="0"/>
+              </a:rPr>
+              <a:t>                                    </a:t>
+            </a:r>
+            <a:r>
+              <a:rPr lang="en-GB" sz="1400">
+                <a:solidFill>
+                  <a:srgbClr val="6A9955"/>
+                </a:solidFill>
+                <a:latin typeface="Consolas" panose="020B0609020204030204" pitchFamily="49" charset="0"/>
+              </a:rPr>
+              <a:t># t3 &lt;- i * 4</a:t>
+            </a:r>
+            <a:endParaRPr lang="en-GB" sz="1400">
+              <a:solidFill>
+                <a:srgbClr val="CCCCCC"/>
+              </a:solidFill>
+              <a:latin typeface="Consolas" panose="020B0609020204030204" pitchFamily="49" charset="0"/>
+            </a:endParaRPr>
+          </a:p>
+          <a:p>
+            <a:pPr>
+              <a:buNone/>
+            </a:pPr>
+            <a:r>
+              <a:rPr lang="en-GB" sz="1400">
+                <a:solidFill>
+                  <a:srgbClr val="CCCCCC"/>
+                </a:solidFill>
+                <a:latin typeface="Consolas" panose="020B0609020204030204" pitchFamily="49" charset="0"/>
+              </a:rPr>
+              <a:t>   </a:t>
+            </a:r>
+            <a:r>
+              <a:rPr lang="en-GB" sz="1400">
+                <a:solidFill>
+                  <a:srgbClr val="DCDCAA"/>
+                </a:solidFill>
+                <a:latin typeface="Consolas" panose="020B0609020204030204" pitchFamily="49" charset="0"/>
+              </a:rPr>
+              <a:t>add</a:t>
+            </a:r>
+            <a:r>
+              <a:rPr lang="en-GB" sz="1400">
+                <a:solidFill>
+                  <a:srgbClr val="CCCCCC"/>
+                </a:solidFill>
+                <a:latin typeface="Consolas" panose="020B0609020204030204" pitchFamily="49" charset="0"/>
+              </a:rPr>
+              <a:t> </a:t>
+            </a:r>
+            <a:r>
+              <a:rPr lang="en-GB" sz="1400">
+                <a:solidFill>
+                  <a:srgbClr val="9CDCFE"/>
+                </a:solidFill>
+                <a:latin typeface="Consolas" panose="020B0609020204030204" pitchFamily="49" charset="0"/>
+              </a:rPr>
+              <a:t>t3</a:t>
+            </a:r>
+            <a:r>
+              <a:rPr lang="en-GB" sz="1400">
+                <a:solidFill>
+                  <a:srgbClr val="CCCCCC"/>
+                </a:solidFill>
+                <a:latin typeface="Consolas" panose="020B0609020204030204" pitchFamily="49" charset="0"/>
+              </a:rPr>
+              <a:t>, </a:t>
+            </a:r>
+            <a:r>
+              <a:rPr lang="en-GB" sz="1400">
+                <a:solidFill>
+                  <a:srgbClr val="9CDCFE"/>
+                </a:solidFill>
+                <a:latin typeface="Consolas" panose="020B0609020204030204" pitchFamily="49" charset="0"/>
+              </a:rPr>
+              <a:t>t2</a:t>
+            </a:r>
+            <a:r>
+              <a:rPr lang="en-GB" sz="1400">
+                <a:solidFill>
+                  <a:srgbClr val="CCCCCC"/>
+                </a:solidFill>
+                <a:latin typeface="Consolas" panose="020B0609020204030204" pitchFamily="49" charset="0"/>
+              </a:rPr>
+              <a:t>, </a:t>
+            </a:r>
+            <a:r>
+              <a:rPr lang="en-GB" sz="1400">
+                <a:solidFill>
+                  <a:srgbClr val="9CDCFE"/>
+                </a:solidFill>
+                <a:latin typeface="Consolas" panose="020B0609020204030204" pitchFamily="49" charset="0"/>
+              </a:rPr>
+              <a:t>t3</a:t>
+            </a:r>
+            <a:r>
+              <a:rPr lang="en-GB" sz="1400">
+                <a:solidFill>
+                  <a:srgbClr val="CCCCCC"/>
+                </a:solidFill>
+                <a:latin typeface="Consolas" panose="020B0609020204030204" pitchFamily="49" charset="0"/>
+              </a:rPr>
+              <a:t>                                    </a:t>
+            </a:r>
+            <a:r>
+              <a:rPr lang="en-GB" sz="1400">
+                <a:solidFill>
+                  <a:srgbClr val="6A9955"/>
+                </a:solidFill>
+                <a:latin typeface="Consolas" panose="020B0609020204030204" pitchFamily="49" charset="0"/>
+              </a:rPr>
+              <a:t># t3 &lt;- address of array + i * (4 bytes)</a:t>
+            </a:r>
+            <a:endParaRPr lang="en-GB" sz="1400">
+              <a:solidFill>
+                <a:srgbClr val="CCCCCC"/>
+              </a:solidFill>
+              <a:latin typeface="Consolas" panose="020B0609020204030204" pitchFamily="49" charset="0"/>
+            </a:endParaRPr>
+          </a:p>
+          <a:p>
+            <a:pPr>
+              <a:buNone/>
+            </a:pPr>
+            <a:r>
+              <a:rPr lang="en-GB" sz="1400">
+                <a:solidFill>
+                  <a:srgbClr val="CCCCCC"/>
+                </a:solidFill>
+                <a:latin typeface="Consolas" panose="020B0609020204030204" pitchFamily="49" charset="0"/>
+              </a:rPr>
+              <a:t>   </a:t>
+            </a:r>
+            <a:r>
+              <a:rPr lang="en-GB" sz="1400">
+                <a:solidFill>
+                  <a:srgbClr val="DCDCAA"/>
+                </a:solidFill>
+                <a:latin typeface="Consolas" panose="020B0609020204030204" pitchFamily="49" charset="0"/>
+              </a:rPr>
+              <a:t>lw</a:t>
+            </a:r>
+            <a:r>
+              <a:rPr lang="en-GB" sz="1400">
+                <a:solidFill>
+                  <a:srgbClr val="CCCCCC"/>
+                </a:solidFill>
+                <a:latin typeface="Consolas" panose="020B0609020204030204" pitchFamily="49" charset="0"/>
+              </a:rPr>
+              <a:t> </a:t>
+            </a:r>
+            <a:r>
+              <a:rPr lang="en-GB" sz="1400">
+                <a:solidFill>
+                  <a:srgbClr val="9CDCFE"/>
+                </a:solidFill>
+                <a:latin typeface="Consolas" panose="020B0609020204030204" pitchFamily="49" charset="0"/>
+              </a:rPr>
+              <a:t>t3</a:t>
+            </a:r>
+            <a:r>
+              <a:rPr lang="en-GB" sz="1400">
+                <a:solidFill>
+                  <a:srgbClr val="CCCCCC"/>
+                </a:solidFill>
+                <a:latin typeface="Consolas" panose="020B0609020204030204" pitchFamily="49" charset="0"/>
+              </a:rPr>
+              <a:t>, </a:t>
+            </a:r>
+            <a:r>
+              <a:rPr lang="en-GB" sz="1400">
+                <a:solidFill>
+                  <a:srgbClr val="B5CEA8"/>
+                </a:solidFill>
+                <a:latin typeface="Consolas" panose="020B0609020204030204" pitchFamily="49" charset="0"/>
+              </a:rPr>
+              <a:t>0</a:t>
+            </a:r>
+            <a:r>
+              <a:rPr lang="en-GB" sz="1400">
+                <a:solidFill>
+                  <a:srgbClr val="CCCCCC"/>
+                </a:solidFill>
+                <a:latin typeface="Consolas" panose="020B0609020204030204" pitchFamily="49" charset="0"/>
+              </a:rPr>
+              <a:t>(</a:t>
+            </a:r>
+            <a:r>
+              <a:rPr lang="en-GB" sz="1400">
+                <a:solidFill>
+                  <a:srgbClr val="9CDCFE"/>
+                </a:solidFill>
+                <a:latin typeface="Consolas" panose="020B0609020204030204" pitchFamily="49" charset="0"/>
+              </a:rPr>
+              <a:t>t3</a:t>
+            </a:r>
+            <a:r>
+              <a:rPr lang="en-GB" sz="1400">
+                <a:solidFill>
+                  <a:srgbClr val="CCCCCC"/>
+                </a:solidFill>
+                <a:latin typeface="Consolas" panose="020B0609020204030204" pitchFamily="49" charset="0"/>
+              </a:rPr>
+              <a:t>)                                      </a:t>
+            </a:r>
+            <a:r>
+              <a:rPr lang="en-GB" sz="1400">
+                <a:solidFill>
+                  <a:srgbClr val="6A9955"/>
+                </a:solidFill>
+                <a:latin typeface="Consolas" panose="020B0609020204030204" pitchFamily="49" charset="0"/>
+              </a:rPr>
+              <a:t># t3 &lt;- numbers[i]</a:t>
+            </a:r>
+            <a:endParaRPr lang="en-GB" sz="1400">
+              <a:solidFill>
+                <a:srgbClr val="CCCCCC"/>
+              </a:solidFill>
+              <a:latin typeface="Consolas" panose="020B0609020204030204" pitchFamily="49" charset="0"/>
+            </a:endParaRPr>
+          </a:p>
+          <a:p>
+            <a:pPr>
+              <a:buNone/>
+            </a:pPr>
+            <a:r>
+              <a:rPr lang="en-GB" sz="1400">
+                <a:solidFill>
+                  <a:srgbClr val="CCCCCC"/>
+                </a:solidFill>
+                <a:latin typeface="Consolas" panose="020B0609020204030204" pitchFamily="49" charset="0"/>
+              </a:rPr>
+              <a:t>   </a:t>
+            </a:r>
+            <a:r>
+              <a:rPr lang="en-GB" sz="1400">
+                <a:solidFill>
+                  <a:srgbClr val="DCDCAA"/>
+                </a:solidFill>
+                <a:latin typeface="Consolas" panose="020B0609020204030204" pitchFamily="49" charset="0"/>
+              </a:rPr>
+              <a:t>add</a:t>
+            </a:r>
+            <a:r>
+              <a:rPr lang="en-GB" sz="1400">
+                <a:solidFill>
+                  <a:srgbClr val="CCCCCC"/>
+                </a:solidFill>
+                <a:latin typeface="Consolas" panose="020B0609020204030204" pitchFamily="49" charset="0"/>
+              </a:rPr>
+              <a:t> </a:t>
+            </a:r>
+            <a:r>
+              <a:rPr lang="en-GB" sz="1400">
+                <a:solidFill>
+                  <a:srgbClr val="9CDCFE"/>
+                </a:solidFill>
+                <a:latin typeface="Consolas" panose="020B0609020204030204" pitchFamily="49" charset="0"/>
+              </a:rPr>
+              <a:t>t1</a:t>
+            </a:r>
+            <a:r>
+              <a:rPr lang="en-GB" sz="1400">
+                <a:solidFill>
+                  <a:srgbClr val="CCCCCC"/>
+                </a:solidFill>
+                <a:latin typeface="Consolas" panose="020B0609020204030204" pitchFamily="49" charset="0"/>
+              </a:rPr>
+              <a:t>, </a:t>
+            </a:r>
+            <a:r>
+              <a:rPr lang="en-GB" sz="1400">
+                <a:solidFill>
+                  <a:srgbClr val="9CDCFE"/>
+                </a:solidFill>
+                <a:latin typeface="Consolas" panose="020B0609020204030204" pitchFamily="49" charset="0"/>
+              </a:rPr>
+              <a:t>t1</a:t>
+            </a:r>
+            <a:r>
+              <a:rPr lang="en-GB" sz="1400">
+                <a:solidFill>
+                  <a:srgbClr val="CCCCCC"/>
+                </a:solidFill>
+                <a:latin typeface="Consolas" panose="020B0609020204030204" pitchFamily="49" charset="0"/>
+              </a:rPr>
+              <a:t>, </a:t>
+            </a:r>
+            <a:r>
+              <a:rPr lang="en-GB" sz="1400">
+                <a:solidFill>
+                  <a:srgbClr val="9CDCFE"/>
+                </a:solidFill>
+                <a:latin typeface="Consolas" panose="020B0609020204030204" pitchFamily="49" charset="0"/>
+              </a:rPr>
+              <a:t>t3</a:t>
+            </a:r>
+            <a:r>
+              <a:rPr lang="en-GB" sz="1400">
+                <a:solidFill>
+                  <a:srgbClr val="CCCCCC"/>
+                </a:solidFill>
+                <a:latin typeface="Consolas" panose="020B0609020204030204" pitchFamily="49" charset="0"/>
+              </a:rPr>
+              <a:t>                                    </a:t>
+            </a:r>
+            <a:r>
+              <a:rPr lang="en-GB" sz="1400">
+                <a:solidFill>
+                  <a:srgbClr val="6A9955"/>
+                </a:solidFill>
+                <a:latin typeface="Consolas" panose="020B0609020204030204" pitchFamily="49" charset="0"/>
+              </a:rPr>
+              <a:t># add element to sum</a:t>
+            </a:r>
+            <a:endParaRPr lang="en-GB" sz="1400">
+              <a:solidFill>
+                <a:srgbClr val="CCCCCC"/>
+              </a:solidFill>
+              <a:latin typeface="Consolas" panose="020B0609020204030204" pitchFamily="49" charset="0"/>
+            </a:endParaRPr>
+          </a:p>
+          <a:p>
+            <a:pPr>
+              <a:buNone/>
+            </a:pPr>
+            <a:r>
+              <a:rPr lang="en-GB" sz="1400">
+                <a:solidFill>
+                  <a:srgbClr val="CCCCCC"/>
+                </a:solidFill>
+                <a:latin typeface="Consolas" panose="020B0609020204030204" pitchFamily="49" charset="0"/>
+              </a:rPr>
+              <a:t>   </a:t>
+            </a:r>
+            <a:r>
+              <a:rPr lang="en-GB" sz="1400">
+                <a:solidFill>
+                  <a:srgbClr val="DCDCAA"/>
+                </a:solidFill>
+                <a:latin typeface="Consolas" panose="020B0609020204030204" pitchFamily="49" charset="0"/>
+              </a:rPr>
+              <a:t>addi</a:t>
+            </a:r>
+            <a:r>
+              <a:rPr lang="en-GB" sz="1400">
+                <a:solidFill>
+                  <a:srgbClr val="CCCCCC"/>
+                </a:solidFill>
+                <a:latin typeface="Consolas" panose="020B0609020204030204" pitchFamily="49" charset="0"/>
+              </a:rPr>
+              <a:t> </a:t>
+            </a:r>
+            <a:r>
+              <a:rPr lang="en-GB" sz="1400">
+                <a:solidFill>
+                  <a:srgbClr val="9CDCFE"/>
+                </a:solidFill>
+                <a:latin typeface="Consolas" panose="020B0609020204030204" pitchFamily="49" charset="0"/>
+              </a:rPr>
+              <a:t>t0</a:t>
+            </a:r>
+            <a:r>
+              <a:rPr lang="en-GB" sz="1400">
+                <a:solidFill>
+                  <a:srgbClr val="CCCCCC"/>
+                </a:solidFill>
+                <a:latin typeface="Consolas" panose="020B0609020204030204" pitchFamily="49" charset="0"/>
+              </a:rPr>
+              <a:t>, </a:t>
+            </a:r>
+            <a:r>
+              <a:rPr lang="en-GB" sz="1400">
+                <a:solidFill>
+                  <a:srgbClr val="9CDCFE"/>
+                </a:solidFill>
+                <a:latin typeface="Consolas" panose="020B0609020204030204" pitchFamily="49" charset="0"/>
+              </a:rPr>
+              <a:t>t0</a:t>
+            </a:r>
+            <a:r>
+              <a:rPr lang="en-GB" sz="1400">
+                <a:solidFill>
+                  <a:srgbClr val="CCCCCC"/>
+                </a:solidFill>
+                <a:latin typeface="Consolas" panose="020B0609020204030204" pitchFamily="49" charset="0"/>
+              </a:rPr>
+              <a:t>, </a:t>
+            </a:r>
+            <a:r>
+              <a:rPr lang="en-GB" sz="1400">
+                <a:solidFill>
+                  <a:srgbClr val="B5CEA8"/>
+                </a:solidFill>
+                <a:latin typeface="Consolas" panose="020B0609020204030204" pitchFamily="49" charset="0"/>
+              </a:rPr>
+              <a:t>1</a:t>
+            </a:r>
+            <a:r>
+              <a:rPr lang="en-GB" sz="1400">
+                <a:solidFill>
+                  <a:srgbClr val="CCCCCC"/>
+                </a:solidFill>
+                <a:latin typeface="Consolas" panose="020B0609020204030204" pitchFamily="49" charset="0"/>
+              </a:rPr>
+              <a:t>                                    </a:t>
+            </a:r>
+            <a:r>
+              <a:rPr lang="en-GB" sz="1400">
+                <a:solidFill>
+                  <a:srgbClr val="6A9955"/>
+                </a:solidFill>
+                <a:latin typeface="Consolas" panose="020B0609020204030204" pitchFamily="49" charset="0"/>
+              </a:rPr>
+              <a:t># i++</a:t>
+            </a:r>
+            <a:endParaRPr lang="en-GB" sz="1400">
+              <a:solidFill>
+                <a:srgbClr val="CCCCCC"/>
+              </a:solidFill>
+              <a:latin typeface="Consolas" panose="020B0609020204030204" pitchFamily="49" charset="0"/>
+            </a:endParaRPr>
+          </a:p>
+          <a:p>
+            <a:pPr>
+              <a:buNone/>
+            </a:pPr>
+            <a:r>
+              <a:rPr lang="en-GB" sz="1400">
+                <a:solidFill>
+                  <a:srgbClr val="CCCCCC"/>
+                </a:solidFill>
+                <a:latin typeface="Consolas" panose="020B0609020204030204" pitchFamily="49" charset="0"/>
+              </a:rPr>
+              <a:t>   </a:t>
+            </a:r>
+            <a:r>
+              <a:rPr lang="en-GB" sz="1400">
+                <a:solidFill>
+                  <a:srgbClr val="DCDCAA"/>
+                </a:solidFill>
+                <a:latin typeface="Consolas" panose="020B0609020204030204" pitchFamily="49" charset="0"/>
+              </a:rPr>
+              <a:t>li</a:t>
+            </a:r>
+            <a:r>
+              <a:rPr lang="en-GB" sz="1400">
+                <a:solidFill>
+                  <a:srgbClr val="CCCCCC"/>
+                </a:solidFill>
+                <a:latin typeface="Consolas" panose="020B0609020204030204" pitchFamily="49" charset="0"/>
+              </a:rPr>
+              <a:t> </a:t>
+            </a:r>
+            <a:r>
+              <a:rPr lang="en-GB" sz="1400">
+                <a:solidFill>
+                  <a:srgbClr val="9CDCFE"/>
+                </a:solidFill>
+                <a:latin typeface="Consolas" panose="020B0609020204030204" pitchFamily="49" charset="0"/>
+              </a:rPr>
+              <a:t>t3</a:t>
+            </a:r>
+            <a:r>
+              <a:rPr lang="en-GB" sz="1400">
+                <a:solidFill>
+                  <a:srgbClr val="CCCCCC"/>
+                </a:solidFill>
+                <a:latin typeface="Consolas" panose="020B0609020204030204" pitchFamily="49" charset="0"/>
+              </a:rPr>
+              <a:t>, </a:t>
+            </a:r>
+            <a:r>
+              <a:rPr lang="en-GB" sz="1400">
+                <a:solidFill>
+                  <a:srgbClr val="B5CEA8"/>
+                </a:solidFill>
+                <a:latin typeface="Consolas" panose="020B0609020204030204" pitchFamily="49" charset="0"/>
+              </a:rPr>
+              <a:t>10</a:t>
+            </a:r>
+            <a:r>
+              <a:rPr lang="en-GB" sz="1400">
+                <a:solidFill>
+                  <a:srgbClr val="CCCCCC"/>
+                </a:solidFill>
+                <a:latin typeface="Consolas" panose="020B0609020204030204" pitchFamily="49" charset="0"/>
+              </a:rPr>
+              <a:t>                                         </a:t>
+            </a:r>
+            <a:r>
+              <a:rPr lang="en-GB" sz="1400">
+                <a:solidFill>
+                  <a:srgbClr val="6A9955"/>
+                </a:solidFill>
+                <a:latin typeface="Consolas" panose="020B0609020204030204" pitchFamily="49" charset="0"/>
+              </a:rPr>
+              <a:t># t3 &lt;- 10</a:t>
+            </a:r>
+            <a:endParaRPr lang="en-GB" sz="1400">
+              <a:solidFill>
+                <a:srgbClr val="CCCCCC"/>
+              </a:solidFill>
+              <a:latin typeface="Consolas" panose="020B0609020204030204" pitchFamily="49" charset="0"/>
+            </a:endParaRPr>
+          </a:p>
+          <a:p>
+            <a:pPr>
+              <a:buNone/>
+            </a:pPr>
+            <a:r>
+              <a:rPr lang="en-GB" sz="1400">
+                <a:solidFill>
+                  <a:srgbClr val="CCCCCC"/>
+                </a:solidFill>
+                <a:latin typeface="Consolas" panose="020B0609020204030204" pitchFamily="49" charset="0"/>
+              </a:rPr>
+              <a:t>   </a:t>
+            </a:r>
+            <a:r>
+              <a:rPr lang="en-GB" sz="1400">
+                <a:solidFill>
+                  <a:srgbClr val="DCDCAA"/>
+                </a:solidFill>
+                <a:latin typeface="Consolas" panose="020B0609020204030204" pitchFamily="49" charset="0"/>
+              </a:rPr>
+              <a:t>blt</a:t>
+            </a:r>
+            <a:r>
+              <a:rPr lang="en-GB" sz="1400">
+                <a:solidFill>
+                  <a:srgbClr val="CCCCCC"/>
+                </a:solidFill>
+                <a:latin typeface="Consolas" panose="020B0609020204030204" pitchFamily="49" charset="0"/>
+              </a:rPr>
+              <a:t> </a:t>
+            </a:r>
+            <a:r>
+              <a:rPr lang="en-GB" sz="1400">
+                <a:solidFill>
+                  <a:srgbClr val="9CDCFE"/>
+                </a:solidFill>
+                <a:latin typeface="Consolas" panose="020B0609020204030204" pitchFamily="49" charset="0"/>
+              </a:rPr>
+              <a:t>t0</a:t>
+            </a:r>
+            <a:r>
+              <a:rPr lang="en-GB" sz="1400">
+                <a:solidFill>
+                  <a:srgbClr val="CCCCCC"/>
+                </a:solidFill>
+                <a:latin typeface="Consolas" panose="020B0609020204030204" pitchFamily="49" charset="0"/>
+              </a:rPr>
+              <a:t>, </a:t>
+            </a:r>
+            <a:r>
+              <a:rPr lang="en-GB" sz="1400">
+                <a:solidFill>
+                  <a:srgbClr val="9CDCFE"/>
+                </a:solidFill>
+                <a:latin typeface="Consolas" panose="020B0609020204030204" pitchFamily="49" charset="0"/>
+              </a:rPr>
+              <a:t>t3</a:t>
+            </a:r>
+            <a:r>
+              <a:rPr lang="en-GB" sz="1400">
+                <a:solidFill>
+                  <a:srgbClr val="CCCCCC"/>
+                </a:solidFill>
+                <a:latin typeface="Consolas" panose="020B0609020204030204" pitchFamily="49" charset="0"/>
+              </a:rPr>
+              <a:t>, loop                                  </a:t>
+            </a:r>
+            <a:r>
+              <a:rPr lang="en-GB" sz="1400">
+                <a:solidFill>
+                  <a:srgbClr val="6A9955"/>
+                </a:solidFill>
+                <a:latin typeface="Consolas" panose="020B0609020204030204" pitchFamily="49" charset="0"/>
+              </a:rPr>
+              <a:t># iterate while i &lt; 10</a:t>
+            </a:r>
+            <a:endParaRPr lang="en-GB" sz="1400">
+              <a:solidFill>
+                <a:srgbClr val="CCCCCC"/>
+              </a:solidFill>
+              <a:latin typeface="Consolas" panose="020B0609020204030204" pitchFamily="49" charset="0"/>
+            </a:endParaRPr>
+          </a:p>
+          <a:p>
+            <a:pPr>
+              <a:buNone/>
+            </a:pPr>
+            <a:br>
+              <a:rPr lang="en-GB" sz="1400">
+                <a:solidFill>
+                  <a:srgbClr val="CCCCCC"/>
+                </a:solidFill>
+                <a:latin typeface="Consolas" panose="020B0609020204030204" pitchFamily="49" charset="0"/>
+              </a:rPr>
+            </a:br>
+            <a:endParaRPr lang="en-GB" sz="1400">
+              <a:solidFill>
+                <a:srgbClr val="CCCCCC"/>
+              </a:solidFill>
+              <a:latin typeface="Consolas" panose="020B0609020204030204" pitchFamily="49" charset="0"/>
+            </a:endParaRPr>
+          </a:p>
+          <a:p>
+            <a:pPr>
+              <a:buNone/>
+            </a:pPr>
+            <a:r>
+              <a:rPr lang="en-GB" sz="1400">
+                <a:solidFill>
+                  <a:srgbClr val="DCDCAA"/>
+                </a:solidFill>
+                <a:latin typeface="Consolas" panose="020B0609020204030204" pitchFamily="49" charset="0"/>
+              </a:rPr>
+              <a:t>done</a:t>
+            </a:r>
+            <a:r>
+              <a:rPr lang="en-GB" sz="1400">
+                <a:solidFill>
+                  <a:srgbClr val="CCCCCC"/>
+                </a:solidFill>
+                <a:latin typeface="Consolas" panose="020B0609020204030204" pitchFamily="49" charset="0"/>
+              </a:rPr>
+              <a:t>: </a:t>
+            </a:r>
+            <a:r>
+              <a:rPr lang="en-GB" sz="1400">
+                <a:solidFill>
+                  <a:srgbClr val="6A9955"/>
+                </a:solidFill>
+                <a:latin typeface="Consolas" panose="020B0609020204030204" pitchFamily="49" charset="0"/>
+              </a:rPr>
+              <a:t># t1 now contains the sum</a:t>
+            </a:r>
+            <a:endParaRPr lang="en-GB" sz="1400">
+              <a:solidFill>
+                <a:srgbClr val="CCCCCC"/>
+              </a:solidFill>
+              <a:latin typeface="Consolas" panose="020B0609020204030204" pitchFamily="49" charset="0"/>
+            </a:endParaRPr>
+          </a:p>
+          <a:p>
+            <a:pPr>
+              <a:buNone/>
+            </a:pPr>
+            <a:br>
+              <a:rPr lang="en-GB" sz="1400">
+                <a:solidFill>
+                  <a:srgbClr val="CCCCCC"/>
+                </a:solidFill>
+                <a:latin typeface="Consolas" panose="020B0609020204030204" pitchFamily="49" charset="0"/>
+              </a:rPr>
+            </a:br>
+            <a:endParaRPr lang="en-GB" sz="1400">
+              <a:solidFill>
+                <a:srgbClr val="CCCCCC"/>
+              </a:solidFill>
+              <a:latin typeface="Consolas" panose="020B0609020204030204" pitchFamily="49" charset="0"/>
+            </a:endParaRPr>
+          </a:p>
+          <a:p>
+            <a:pPr>
+              <a:buNone/>
+            </a:pPr>
+            <a:r>
+              <a:rPr lang="en-GB" sz="1400">
+                <a:solidFill>
+                  <a:srgbClr val="569CD6"/>
+                </a:solidFill>
+                <a:latin typeface="Consolas" panose="020B0609020204030204" pitchFamily="49" charset="0"/>
+              </a:rPr>
+              <a:t>.balign</a:t>
+            </a:r>
+            <a:r>
+              <a:rPr lang="en-GB" sz="1400">
+                <a:solidFill>
+                  <a:srgbClr val="CCCCCC"/>
+                </a:solidFill>
+                <a:latin typeface="Consolas" panose="020B0609020204030204" pitchFamily="49" charset="0"/>
+              </a:rPr>
+              <a:t> </a:t>
+            </a:r>
+            <a:r>
+              <a:rPr lang="en-GB" sz="1400">
+                <a:solidFill>
+                  <a:srgbClr val="B5CEA8"/>
+                </a:solidFill>
+                <a:latin typeface="Consolas" panose="020B0609020204030204" pitchFamily="49" charset="0"/>
+              </a:rPr>
+              <a:t>4</a:t>
+            </a:r>
+            <a:r>
+              <a:rPr lang="en-GB" sz="1400">
+                <a:solidFill>
+                  <a:srgbClr val="CCCCCC"/>
+                </a:solidFill>
+                <a:latin typeface="Consolas" panose="020B0609020204030204" pitchFamily="49" charset="0"/>
+              </a:rPr>
+              <a:t>                                            </a:t>
+            </a:r>
+            <a:r>
+              <a:rPr lang="en-GB" sz="1400">
+                <a:solidFill>
+                  <a:srgbClr val="6A9955"/>
+                </a:solidFill>
+                <a:latin typeface="Consolas" panose="020B0609020204030204" pitchFamily="49" charset="0"/>
+              </a:rPr>
+              <a:t># Make sure our numbers are aligned to 4 bytes</a:t>
+            </a:r>
+            <a:endParaRPr lang="en-GB" sz="1400">
+              <a:solidFill>
+                <a:srgbClr val="CCCCCC"/>
+              </a:solidFill>
+              <a:latin typeface="Consolas" panose="020B0609020204030204" pitchFamily="49" charset="0"/>
+            </a:endParaRPr>
+          </a:p>
+          <a:p>
+            <a:pPr>
+              <a:buNone/>
+            </a:pPr>
+            <a:r>
+              <a:rPr lang="en-GB" sz="1400">
+                <a:solidFill>
+                  <a:srgbClr val="DCDCAA"/>
+                </a:solidFill>
+                <a:latin typeface="Consolas" panose="020B0609020204030204" pitchFamily="49" charset="0"/>
+              </a:rPr>
+              <a:t>numbers</a:t>
+            </a:r>
+            <a:r>
+              <a:rPr lang="en-GB" sz="1400">
+                <a:solidFill>
+                  <a:srgbClr val="CCCCCC"/>
+                </a:solidFill>
+                <a:latin typeface="Consolas" panose="020B0609020204030204" pitchFamily="49" charset="0"/>
+              </a:rPr>
+              <a:t>: </a:t>
+            </a:r>
+            <a:r>
+              <a:rPr lang="en-GB" sz="1400">
+                <a:solidFill>
+                  <a:srgbClr val="569CD6"/>
+                </a:solidFill>
+                <a:latin typeface="Consolas" panose="020B0609020204030204" pitchFamily="49" charset="0"/>
+              </a:rPr>
+              <a:t>.word</a:t>
+            </a:r>
+            <a:r>
+              <a:rPr lang="en-GB" sz="1400">
+                <a:solidFill>
+                  <a:srgbClr val="CCCCCC"/>
+                </a:solidFill>
+                <a:latin typeface="Consolas" panose="020B0609020204030204" pitchFamily="49" charset="0"/>
+              </a:rPr>
+              <a:t> </a:t>
+            </a:r>
+            <a:r>
+              <a:rPr lang="en-GB" sz="1400">
+                <a:solidFill>
+                  <a:srgbClr val="B5CEA8"/>
+                </a:solidFill>
+                <a:latin typeface="Consolas" panose="020B0609020204030204" pitchFamily="49" charset="0"/>
+              </a:rPr>
+              <a:t>2</a:t>
+            </a:r>
+            <a:r>
+              <a:rPr lang="en-GB" sz="1400">
+                <a:solidFill>
+                  <a:srgbClr val="CCCCCC"/>
+                </a:solidFill>
+                <a:latin typeface="Consolas" panose="020B0609020204030204" pitchFamily="49" charset="0"/>
+              </a:rPr>
+              <a:t>, </a:t>
+            </a:r>
+            <a:r>
+              <a:rPr lang="en-GB" sz="1400">
+                <a:solidFill>
+                  <a:srgbClr val="B5CEA8"/>
+                </a:solidFill>
+                <a:latin typeface="Consolas" panose="020B0609020204030204" pitchFamily="49" charset="0"/>
+              </a:rPr>
+              <a:t>4</a:t>
+            </a:r>
+            <a:r>
+              <a:rPr lang="en-GB" sz="1400">
+                <a:solidFill>
+                  <a:srgbClr val="CCCCCC"/>
+                </a:solidFill>
+                <a:latin typeface="Consolas" panose="020B0609020204030204" pitchFamily="49" charset="0"/>
+              </a:rPr>
+              <a:t>, </a:t>
+            </a:r>
+            <a:r>
+              <a:rPr lang="en-GB" sz="1400">
+                <a:solidFill>
+                  <a:srgbClr val="B5CEA8"/>
+                </a:solidFill>
+                <a:latin typeface="Consolas" panose="020B0609020204030204" pitchFamily="49" charset="0"/>
+              </a:rPr>
+              <a:t>6</a:t>
+            </a:r>
+            <a:r>
+              <a:rPr lang="en-GB" sz="1400">
+                <a:solidFill>
+                  <a:srgbClr val="CCCCCC"/>
+                </a:solidFill>
+                <a:latin typeface="Consolas" panose="020B0609020204030204" pitchFamily="49" charset="0"/>
+              </a:rPr>
+              <a:t>, </a:t>
+            </a:r>
+            <a:r>
+              <a:rPr lang="en-GB" sz="1400">
+                <a:solidFill>
+                  <a:srgbClr val="B5CEA8"/>
+                </a:solidFill>
+                <a:latin typeface="Consolas" panose="020B0609020204030204" pitchFamily="49" charset="0"/>
+              </a:rPr>
+              <a:t>8</a:t>
+            </a:r>
+            <a:r>
+              <a:rPr lang="en-GB" sz="1400">
+                <a:solidFill>
+                  <a:srgbClr val="CCCCCC"/>
+                </a:solidFill>
+                <a:latin typeface="Consolas" panose="020B0609020204030204" pitchFamily="49" charset="0"/>
+              </a:rPr>
+              <a:t>, </a:t>
+            </a:r>
+            <a:r>
+              <a:rPr lang="en-GB" sz="1400">
+                <a:solidFill>
+                  <a:srgbClr val="B5CEA8"/>
+                </a:solidFill>
+                <a:latin typeface="Consolas" panose="020B0609020204030204" pitchFamily="49" charset="0"/>
+              </a:rPr>
+              <a:t>0</a:t>
+            </a:r>
+            <a:r>
+              <a:rPr lang="en-GB" sz="1400">
+                <a:solidFill>
+                  <a:srgbClr val="CCCCCC"/>
+                </a:solidFill>
+                <a:latin typeface="Consolas" panose="020B0609020204030204" pitchFamily="49" charset="0"/>
+              </a:rPr>
+              <a:t>, </a:t>
+            </a:r>
+            <a:r>
+              <a:rPr lang="en-GB" sz="1400">
+                <a:solidFill>
+                  <a:srgbClr val="B5CEA8"/>
+                </a:solidFill>
+                <a:latin typeface="Consolas" panose="020B0609020204030204" pitchFamily="49" charset="0"/>
+              </a:rPr>
+              <a:t>1</a:t>
+            </a:r>
+            <a:r>
+              <a:rPr lang="en-GB" sz="1400">
+                <a:solidFill>
+                  <a:srgbClr val="CCCCCC"/>
+                </a:solidFill>
+                <a:latin typeface="Consolas" panose="020B0609020204030204" pitchFamily="49" charset="0"/>
+              </a:rPr>
+              <a:t>, </a:t>
+            </a:r>
+            <a:r>
+              <a:rPr lang="en-GB" sz="1400">
+                <a:solidFill>
+                  <a:srgbClr val="B5CEA8"/>
+                </a:solidFill>
+                <a:latin typeface="Consolas" panose="020B0609020204030204" pitchFamily="49" charset="0"/>
+              </a:rPr>
+              <a:t>2</a:t>
+            </a:r>
+            <a:r>
+              <a:rPr lang="en-GB" sz="1400">
+                <a:solidFill>
+                  <a:srgbClr val="CCCCCC"/>
+                </a:solidFill>
+                <a:latin typeface="Consolas" panose="020B0609020204030204" pitchFamily="49" charset="0"/>
+              </a:rPr>
+              <a:t>, </a:t>
+            </a:r>
+            <a:r>
+              <a:rPr lang="en-GB" sz="1400">
+                <a:solidFill>
+                  <a:srgbClr val="B5CEA8"/>
+                </a:solidFill>
+                <a:latin typeface="Consolas" panose="020B0609020204030204" pitchFamily="49" charset="0"/>
+              </a:rPr>
+              <a:t>3</a:t>
+            </a:r>
+            <a:r>
+              <a:rPr lang="en-GB" sz="1400">
+                <a:solidFill>
+                  <a:srgbClr val="CCCCCC"/>
+                </a:solidFill>
+                <a:latin typeface="Consolas" panose="020B0609020204030204" pitchFamily="49" charset="0"/>
+              </a:rPr>
+              <a:t>, </a:t>
+            </a:r>
+            <a:r>
+              <a:rPr lang="en-GB" sz="1400">
+                <a:solidFill>
+                  <a:srgbClr val="B5CEA8"/>
+                </a:solidFill>
+                <a:latin typeface="Consolas" panose="020B0609020204030204" pitchFamily="49" charset="0"/>
+              </a:rPr>
+              <a:t>4</a:t>
+            </a:r>
+            <a:r>
+              <a:rPr lang="en-GB" sz="1400">
+                <a:solidFill>
+                  <a:srgbClr val="CCCCCC"/>
+                </a:solidFill>
+                <a:latin typeface="Consolas" panose="020B0609020204030204" pitchFamily="49" charset="0"/>
+              </a:rPr>
+              <a:t>, </a:t>
+            </a:r>
+            <a:r>
+              <a:rPr lang="en-GB" sz="1400">
+                <a:solidFill>
+                  <a:srgbClr val="B5CEA8"/>
+                </a:solidFill>
+                <a:latin typeface="Consolas" panose="020B0609020204030204" pitchFamily="49" charset="0"/>
+              </a:rPr>
+              <a:t>5</a:t>
+            </a:r>
+            <a:r>
+              <a:rPr lang="en-GB" sz="1400">
+                <a:solidFill>
+                  <a:srgbClr val="CCCCCC"/>
+                </a:solidFill>
+                <a:latin typeface="Consolas" panose="020B0609020204030204" pitchFamily="49" charset="0"/>
+              </a:rPr>
+              <a:t>         </a:t>
+            </a:r>
+            <a:r>
+              <a:rPr lang="en-GB" sz="1400">
+                <a:solidFill>
+                  <a:srgbClr val="6A9955"/>
+                </a:solidFill>
+                <a:latin typeface="Consolas" panose="020B0609020204030204" pitchFamily="49" charset="0"/>
+              </a:rPr>
+              <a:t># Allocate 10*4 bytes for the array</a:t>
+            </a:r>
+            <a:endParaRPr lang="en-GB">
+              <a:solidFill>
+                <a:srgbClr val="CCCCCC"/>
+              </a:solidFill>
+              <a:latin typeface="Consolas" panose="020B0609020204030204" pitchFamily="49" charset="0"/>
+            </a:endParaRPr>
+          </a:p>
+        </p:txBody>
+      </p:sp>
+      <p:pic>
+        <p:nvPicPr>
+          <p:cNvPr id="6" name="Picture 5">
+            <a:extLst>
+              <a:ext uri="{FF2B5EF4-FFF2-40B4-BE49-F238E27FC236}">
+                <a16:creationId xmlns:a16="http://schemas.microsoft.com/office/drawing/2014/main" id="{350B96B3-BD46-112F-157B-DD9105B01E88}"/>
+              </a:ext>
+            </a:extLst>
+          </p:cNvPr>
+          <p:cNvPicPr>
+            <a:picLocks noChangeAspect="1"/>
+          </p:cNvPicPr>
+          <p:nvPr/>
+        </p:nvPicPr>
+        <p:blipFill>
+          <a:blip r:embed="rId2"/>
+          <a:stretch>
+            <a:fillRect/>
+          </a:stretch>
+        </p:blipFill>
+        <p:spPr>
+          <a:xfrm>
+            <a:off x="2685574" y="1768010"/>
+            <a:ext cx="2732139" cy="969223"/>
+          </a:xfrm>
+          <a:prstGeom prst="rect">
+            <a:avLst/>
+          </a:prstGeom>
+          <a:ln>
+            <a:solidFill>
+              <a:schemeClr val="tx1"/>
+            </a:solidFill>
+          </a:ln>
+          <a:effectLst>
+            <a:outerShdw blurRad="50800" dist="38100" dir="2700000" algn="tl" rotWithShape="0">
+              <a:prstClr val="black">
+                <a:alpha val="40000"/>
+              </a:prstClr>
+            </a:outerShdw>
+          </a:effectLst>
+        </p:spPr>
+      </p:pic>
+    </p:spTree>
+    <p:extLst>
+      <p:ext uri="{BB962C8B-B14F-4D97-AF65-F5344CB8AC3E}">
+        <p14:creationId xmlns:p14="http://schemas.microsoft.com/office/powerpoint/2010/main" val="3197991281"/>
+      </p:ext>
+    </p:extLst>
+  </p:cSld>
+  <p:clrMapOvr>
+    <a:masterClrMapping/>
+  </p:clrMapOvr>
+  <p:timing>
+    <p:tnLst>
+      <p:par>
+        <p:cTn id="1" dur="indefinite" restart="never" nodeType="tmRoot">
+          <p:childTnLst>
+            <p:seq concurrent="1" nextAc="seek">
+              <p:cTn id="2" dur="indefinite" nodeType="mainSeq">
+                <p:childTnLst>
+                  <p:par>
+                    <p:cTn id="3" fill="hold">
+                      <p:stCondLst>
+                        <p:cond delay="indefinite"/>
+                      </p:stCondLst>
+                      <p:childTnLst>
+                        <p:par>
+                          <p:cTn id="4" fill="hold">
+                            <p:stCondLst>
+                              <p:cond delay="0"/>
+                            </p:stCondLst>
+                            <p:childTnLst>
+                              <p:par>
+                                <p:cTn id="5" presetID="10" presetClass="entr" presetSubtype="0" fill="hold" nodeType="clickEffect">
+                                  <p:stCondLst>
+                                    <p:cond delay="0"/>
+                                  </p:stCondLst>
+                                  <p:childTnLst>
+                                    <p:set>
+                                      <p:cBhvr>
+                                        <p:cTn id="6" dur="1" fill="hold">
+                                          <p:stCondLst>
+                                            <p:cond delay="0"/>
+                                          </p:stCondLst>
+                                        </p:cTn>
+                                        <p:tgtEl>
+                                          <p:spTgt spid="3">
+                                            <p:txEl>
+                                              <p:pRg st="1" end="1"/>
+                                            </p:txEl>
+                                          </p:spTgt>
+                                        </p:tgtEl>
+                                        <p:attrNameLst>
+                                          <p:attrName>style.visibility</p:attrName>
+                                        </p:attrNameLst>
+                                      </p:cBhvr>
+                                      <p:to>
+                                        <p:strVal val="visible"/>
+                                      </p:to>
+                                    </p:set>
+                                    <p:animEffect transition="in" filter="fade">
+                                      <p:cBhvr>
+                                        <p:cTn id="7" dur="500"/>
+                                        <p:tgtEl>
+                                          <p:spTgt spid="3">
+                                            <p:txEl>
+                                              <p:pRg st="1" end="1"/>
+                                            </p:txEl>
+                                          </p:spTgt>
+                                        </p:tgtEl>
+                                      </p:cBhvr>
+                                    </p:animEffect>
+                                  </p:childTnLst>
+                                </p:cTn>
+                              </p:par>
+                            </p:childTnLst>
+                          </p:cTn>
+                        </p:par>
+                      </p:childTnLst>
+                    </p:cTn>
+                  </p:par>
+                  <p:par>
+                    <p:cTn id="8" fill="hold">
+                      <p:stCondLst>
+                        <p:cond delay="indefinite"/>
+                      </p:stCondLst>
+                      <p:childTnLst>
+                        <p:par>
+                          <p:cTn id="9" fill="hold">
+                            <p:stCondLst>
+                              <p:cond delay="0"/>
+                            </p:stCondLst>
+                            <p:childTnLst>
+                              <p:par>
+                                <p:cTn id="10" presetID="10" presetClass="entr" presetSubtype="0" fill="hold" nodeType="clickEffect">
+                                  <p:stCondLst>
+                                    <p:cond delay="0"/>
+                                  </p:stCondLst>
+                                  <p:childTnLst>
+                                    <p:set>
+                                      <p:cBhvr>
+                                        <p:cTn id="11" dur="1" fill="hold">
+                                          <p:stCondLst>
+                                            <p:cond delay="0"/>
+                                          </p:stCondLst>
+                                        </p:cTn>
+                                        <p:tgtEl>
+                                          <p:spTgt spid="3">
+                                            <p:txEl>
+                                              <p:pRg st="2" end="2"/>
+                                            </p:txEl>
+                                          </p:spTgt>
+                                        </p:tgtEl>
+                                        <p:attrNameLst>
+                                          <p:attrName>style.visibility</p:attrName>
+                                        </p:attrNameLst>
+                                      </p:cBhvr>
+                                      <p:to>
+                                        <p:strVal val="visible"/>
+                                      </p:to>
+                                    </p:set>
+                                    <p:animEffect transition="in" filter="fade">
+                                      <p:cBhvr>
+                                        <p:cTn id="12" dur="500"/>
+                                        <p:tgtEl>
+                                          <p:spTgt spid="3">
+                                            <p:txEl>
+                                              <p:pRg st="2" end="2"/>
+                                            </p:txEl>
+                                          </p:spTgt>
+                                        </p:tgtEl>
+                                      </p:cBhvr>
+                                    </p:animEffect>
+                                  </p:childTnLst>
+                                </p:cTn>
+                              </p:par>
+                            </p:childTnLst>
+                          </p:cTn>
+                        </p:par>
+                      </p:childTnLst>
+                    </p:cTn>
+                  </p:par>
+                  <p:par>
+                    <p:cTn id="13" fill="hold">
+                      <p:stCondLst>
+                        <p:cond delay="indefinite"/>
+                      </p:stCondLst>
+                      <p:childTnLst>
+                        <p:par>
+                          <p:cTn id="14" fill="hold">
+                            <p:stCondLst>
+                              <p:cond delay="0"/>
+                            </p:stCondLst>
+                            <p:childTnLst>
+                              <p:par>
+                                <p:cTn id="15" presetID="10" presetClass="entr" presetSubtype="0" fill="hold" nodeType="clickEffect">
+                                  <p:stCondLst>
+                                    <p:cond delay="0"/>
+                                  </p:stCondLst>
+                                  <p:childTnLst>
+                                    <p:set>
+                                      <p:cBhvr>
+                                        <p:cTn id="16" dur="1" fill="hold">
+                                          <p:stCondLst>
+                                            <p:cond delay="0"/>
+                                          </p:stCondLst>
+                                        </p:cTn>
+                                        <p:tgtEl>
+                                          <p:spTgt spid="3">
+                                            <p:txEl>
+                                              <p:pRg st="3" end="3"/>
+                                            </p:txEl>
+                                          </p:spTgt>
+                                        </p:tgtEl>
+                                        <p:attrNameLst>
+                                          <p:attrName>style.visibility</p:attrName>
+                                        </p:attrNameLst>
+                                      </p:cBhvr>
+                                      <p:to>
+                                        <p:strVal val="visible"/>
+                                      </p:to>
+                                    </p:set>
+                                    <p:animEffect transition="in" filter="fade">
+                                      <p:cBhvr>
+                                        <p:cTn id="17" dur="500"/>
+                                        <p:tgtEl>
+                                          <p:spTgt spid="3">
+                                            <p:txEl>
+                                              <p:pRg st="3" end="3"/>
+                                            </p:txEl>
+                                          </p:spTgt>
+                                        </p:tgtEl>
+                                      </p:cBhvr>
+                                    </p:animEffect>
+                                  </p:childTnLst>
+                                </p:cTn>
+                              </p:par>
+                            </p:childTnLst>
+                          </p:cTn>
+                        </p:par>
+                      </p:childTnLst>
+                    </p:cTn>
+                  </p:par>
+                  <p:par>
+                    <p:cTn id="18" fill="hold">
+                      <p:stCondLst>
+                        <p:cond delay="indefinite"/>
+                      </p:stCondLst>
+                      <p:childTnLst>
+                        <p:par>
+                          <p:cTn id="19" fill="hold">
+                            <p:stCondLst>
+                              <p:cond delay="0"/>
+                            </p:stCondLst>
+                            <p:childTnLst>
+                              <p:par>
+                                <p:cTn id="20" presetID="10" presetClass="entr" presetSubtype="0" fill="hold" nodeType="clickEffect">
+                                  <p:stCondLst>
+                                    <p:cond delay="0"/>
+                                  </p:stCondLst>
+                                  <p:childTnLst>
+                                    <p:set>
+                                      <p:cBhvr>
+                                        <p:cTn id="21" dur="1" fill="hold">
+                                          <p:stCondLst>
+                                            <p:cond delay="0"/>
+                                          </p:stCondLst>
+                                        </p:cTn>
+                                        <p:tgtEl>
+                                          <p:spTgt spid="3">
+                                            <p:txEl>
+                                              <p:pRg st="4" end="4"/>
+                                            </p:txEl>
+                                          </p:spTgt>
+                                        </p:tgtEl>
+                                        <p:attrNameLst>
+                                          <p:attrName>style.visibility</p:attrName>
+                                        </p:attrNameLst>
+                                      </p:cBhvr>
+                                      <p:to>
+                                        <p:strVal val="visible"/>
+                                      </p:to>
+                                    </p:set>
+                                    <p:animEffect transition="in" filter="fade">
+                                      <p:cBhvr>
+                                        <p:cTn id="22" dur="500"/>
+                                        <p:tgtEl>
+                                          <p:spTgt spid="3">
+                                            <p:txEl>
+                                              <p:pRg st="4" end="4"/>
+                                            </p:txEl>
+                                          </p:spTgt>
+                                        </p:tgtEl>
+                                      </p:cBhvr>
+                                    </p:animEffect>
+                                  </p:childTnLst>
+                                </p:cTn>
+                              </p:par>
+                            </p:childTnLst>
+                          </p:cTn>
+                        </p:par>
+                      </p:childTnLst>
+                    </p:cTn>
+                  </p:par>
+                  <p:par>
+                    <p:cTn id="23" fill="hold">
+                      <p:stCondLst>
+                        <p:cond delay="indefinite"/>
+                      </p:stCondLst>
+                      <p:childTnLst>
+                        <p:par>
+                          <p:cTn id="24" fill="hold">
+                            <p:stCondLst>
+                              <p:cond delay="0"/>
+                            </p:stCondLst>
+                            <p:childTnLst>
+                              <p:par>
+                                <p:cTn id="25" presetID="10" presetClass="entr" presetSubtype="0" fill="hold" nodeType="clickEffect">
+                                  <p:stCondLst>
+                                    <p:cond delay="0"/>
+                                  </p:stCondLst>
+                                  <p:childTnLst>
+                                    <p:set>
+                                      <p:cBhvr>
+                                        <p:cTn id="26" dur="1" fill="hold">
+                                          <p:stCondLst>
+                                            <p:cond delay="0"/>
+                                          </p:stCondLst>
+                                        </p:cTn>
+                                        <p:tgtEl>
+                                          <p:spTgt spid="3">
+                                            <p:txEl>
+                                              <p:pRg st="5" end="5"/>
+                                            </p:txEl>
+                                          </p:spTgt>
+                                        </p:tgtEl>
+                                        <p:attrNameLst>
+                                          <p:attrName>style.visibility</p:attrName>
+                                        </p:attrNameLst>
+                                      </p:cBhvr>
+                                      <p:to>
+                                        <p:strVal val="visible"/>
+                                      </p:to>
+                                    </p:set>
+                                    <p:animEffect transition="in" filter="fade">
+                                      <p:cBhvr>
+                                        <p:cTn id="27" dur="500"/>
+                                        <p:tgtEl>
+                                          <p:spTgt spid="3">
+                                            <p:txEl>
+                                              <p:pRg st="5" end="5"/>
+                                            </p:txEl>
+                                          </p:spTgt>
+                                        </p:tgtEl>
+                                      </p:cBhvr>
+                                    </p:animEffect>
+                                  </p:childTnLst>
+                                </p:cTn>
+                              </p:par>
+                              <p:par>
+                                <p:cTn id="28" presetID="10" presetClass="entr" presetSubtype="0" fill="hold" nodeType="withEffect">
+                                  <p:stCondLst>
+                                    <p:cond delay="0"/>
+                                  </p:stCondLst>
+                                  <p:childTnLst>
+                                    <p:set>
+                                      <p:cBhvr>
+                                        <p:cTn id="29" dur="1" fill="hold">
+                                          <p:stCondLst>
+                                            <p:cond delay="0"/>
+                                          </p:stCondLst>
+                                        </p:cTn>
+                                        <p:tgtEl>
+                                          <p:spTgt spid="3">
+                                            <p:txEl>
+                                              <p:pRg st="6" end="6"/>
+                                            </p:txEl>
+                                          </p:spTgt>
+                                        </p:tgtEl>
+                                        <p:attrNameLst>
+                                          <p:attrName>style.visibility</p:attrName>
+                                        </p:attrNameLst>
+                                      </p:cBhvr>
+                                      <p:to>
+                                        <p:strVal val="visible"/>
+                                      </p:to>
+                                    </p:set>
+                                    <p:animEffect transition="in" filter="fade">
+                                      <p:cBhvr>
+                                        <p:cTn id="30" dur="500"/>
+                                        <p:tgtEl>
+                                          <p:spTgt spid="3">
+                                            <p:txEl>
+                                              <p:pRg st="6" end="6"/>
+                                            </p:txEl>
+                                          </p:spTgt>
+                                        </p:tgtEl>
+                                      </p:cBhvr>
+                                    </p:animEffect>
+                                  </p:childTnLst>
+                                </p:cTn>
+                              </p:par>
+                              <p:par>
+                                <p:cTn id="31" presetID="10" presetClass="entr" presetSubtype="0" fill="hold" nodeType="withEffect">
+                                  <p:stCondLst>
+                                    <p:cond delay="0"/>
+                                  </p:stCondLst>
+                                  <p:childTnLst>
+                                    <p:set>
+                                      <p:cBhvr>
+                                        <p:cTn id="32" dur="1" fill="hold">
+                                          <p:stCondLst>
+                                            <p:cond delay="0"/>
+                                          </p:stCondLst>
+                                        </p:cTn>
+                                        <p:tgtEl>
+                                          <p:spTgt spid="3">
+                                            <p:txEl>
+                                              <p:pRg st="7" end="7"/>
+                                            </p:txEl>
+                                          </p:spTgt>
+                                        </p:tgtEl>
+                                        <p:attrNameLst>
+                                          <p:attrName>style.visibility</p:attrName>
+                                        </p:attrNameLst>
+                                      </p:cBhvr>
+                                      <p:to>
+                                        <p:strVal val="visible"/>
+                                      </p:to>
+                                    </p:set>
+                                    <p:animEffect transition="in" filter="fade">
+                                      <p:cBhvr>
+                                        <p:cTn id="33" dur="500"/>
+                                        <p:tgtEl>
+                                          <p:spTgt spid="3">
+                                            <p:txEl>
+                                              <p:pRg st="7" end="7"/>
+                                            </p:txEl>
+                                          </p:spTgt>
+                                        </p:tgtEl>
+                                      </p:cBhvr>
+                                    </p:animEffect>
+                                  </p:childTnLst>
+                                </p:cTn>
+                              </p:par>
+                              <p:par>
+                                <p:cTn id="34" presetID="10" presetClass="entr" presetSubtype="0" fill="hold" nodeType="withEffect">
+                                  <p:stCondLst>
+                                    <p:cond delay="0"/>
+                                  </p:stCondLst>
+                                  <p:childTnLst>
+                                    <p:set>
+                                      <p:cBhvr>
+                                        <p:cTn id="35" dur="1" fill="hold">
+                                          <p:stCondLst>
+                                            <p:cond delay="0"/>
+                                          </p:stCondLst>
+                                        </p:cTn>
+                                        <p:tgtEl>
+                                          <p:spTgt spid="3">
+                                            <p:txEl>
+                                              <p:pRg st="8" end="8"/>
+                                            </p:txEl>
+                                          </p:spTgt>
+                                        </p:tgtEl>
+                                        <p:attrNameLst>
+                                          <p:attrName>style.visibility</p:attrName>
+                                        </p:attrNameLst>
+                                      </p:cBhvr>
+                                      <p:to>
+                                        <p:strVal val="visible"/>
+                                      </p:to>
+                                    </p:set>
+                                    <p:animEffect transition="in" filter="fade">
+                                      <p:cBhvr>
+                                        <p:cTn id="36" dur="500"/>
+                                        <p:tgtEl>
+                                          <p:spTgt spid="3">
+                                            <p:txEl>
+                                              <p:pRg st="8" end="8"/>
+                                            </p:txEl>
+                                          </p:spTgt>
+                                        </p:tgtEl>
+                                      </p:cBhvr>
+                                    </p:animEffect>
+                                  </p:childTnLst>
+                                </p:cTn>
+                              </p:par>
+                            </p:childTnLst>
+                          </p:cTn>
+                        </p:par>
+                      </p:childTnLst>
+                    </p:cTn>
+                  </p:par>
+                  <p:par>
+                    <p:cTn id="37" fill="hold">
+                      <p:stCondLst>
+                        <p:cond delay="indefinite"/>
+                      </p:stCondLst>
+                      <p:childTnLst>
+                        <p:par>
+                          <p:cTn id="38" fill="hold">
+                            <p:stCondLst>
+                              <p:cond delay="0"/>
+                            </p:stCondLst>
+                            <p:childTnLst>
+                              <p:par>
+                                <p:cTn id="39" presetID="10" presetClass="entr" presetSubtype="0" fill="hold" nodeType="clickEffect">
+                                  <p:stCondLst>
+                                    <p:cond delay="0"/>
+                                  </p:stCondLst>
+                                  <p:childTnLst>
+                                    <p:set>
+                                      <p:cBhvr>
+                                        <p:cTn id="40" dur="1" fill="hold">
+                                          <p:stCondLst>
+                                            <p:cond delay="0"/>
+                                          </p:stCondLst>
+                                        </p:cTn>
+                                        <p:tgtEl>
+                                          <p:spTgt spid="3">
+                                            <p:txEl>
+                                              <p:pRg st="9" end="9"/>
+                                            </p:txEl>
+                                          </p:spTgt>
+                                        </p:tgtEl>
+                                        <p:attrNameLst>
+                                          <p:attrName>style.visibility</p:attrName>
+                                        </p:attrNameLst>
+                                      </p:cBhvr>
+                                      <p:to>
+                                        <p:strVal val="visible"/>
+                                      </p:to>
+                                    </p:set>
+                                    <p:animEffect transition="in" filter="fade">
+                                      <p:cBhvr>
+                                        <p:cTn id="41" dur="500"/>
+                                        <p:tgtEl>
+                                          <p:spTgt spid="3">
+                                            <p:txEl>
+                                              <p:pRg st="9" end="9"/>
+                                            </p:txEl>
+                                          </p:spTgt>
+                                        </p:tgtEl>
+                                      </p:cBhvr>
+                                    </p:animEffect>
+                                  </p:childTnLst>
+                                </p:cTn>
+                              </p:par>
+                            </p:childTnLst>
+                          </p:cTn>
+                        </p:par>
+                      </p:childTnLst>
+                    </p:cTn>
+                  </p:par>
+                  <p:par>
+                    <p:cTn id="42" fill="hold">
+                      <p:stCondLst>
+                        <p:cond delay="indefinite"/>
+                      </p:stCondLst>
+                      <p:childTnLst>
+                        <p:par>
+                          <p:cTn id="43" fill="hold">
+                            <p:stCondLst>
+                              <p:cond delay="0"/>
+                            </p:stCondLst>
+                            <p:childTnLst>
+                              <p:par>
+                                <p:cTn id="44" presetID="10" presetClass="entr" presetSubtype="0" fill="hold" nodeType="clickEffect">
+                                  <p:stCondLst>
+                                    <p:cond delay="0"/>
+                                  </p:stCondLst>
+                                  <p:childTnLst>
+                                    <p:set>
+                                      <p:cBhvr>
+                                        <p:cTn id="45" dur="1" fill="hold">
+                                          <p:stCondLst>
+                                            <p:cond delay="0"/>
+                                          </p:stCondLst>
+                                        </p:cTn>
+                                        <p:tgtEl>
+                                          <p:spTgt spid="3">
+                                            <p:txEl>
+                                              <p:pRg st="10" end="10"/>
+                                            </p:txEl>
+                                          </p:spTgt>
+                                        </p:tgtEl>
+                                        <p:attrNameLst>
+                                          <p:attrName>style.visibility</p:attrName>
+                                        </p:attrNameLst>
+                                      </p:cBhvr>
+                                      <p:to>
+                                        <p:strVal val="visible"/>
+                                      </p:to>
+                                    </p:set>
+                                    <p:animEffect transition="in" filter="fade">
+                                      <p:cBhvr>
+                                        <p:cTn id="46" dur="500"/>
+                                        <p:tgtEl>
+                                          <p:spTgt spid="3">
+                                            <p:txEl>
+                                              <p:pRg st="10" end="10"/>
+                                            </p:txEl>
+                                          </p:spTgt>
+                                        </p:tgtEl>
+                                      </p:cBhvr>
+                                    </p:animEffect>
+                                  </p:childTnLst>
+                                </p:cTn>
+                              </p:par>
+                            </p:childTnLst>
+                          </p:cTn>
+                        </p:par>
+                      </p:childTnLst>
+                    </p:cTn>
+                  </p:par>
+                  <p:par>
+                    <p:cTn id="47" fill="hold">
+                      <p:stCondLst>
+                        <p:cond delay="indefinite"/>
+                      </p:stCondLst>
+                      <p:childTnLst>
+                        <p:par>
+                          <p:cTn id="48" fill="hold">
+                            <p:stCondLst>
+                              <p:cond delay="0"/>
+                            </p:stCondLst>
+                            <p:childTnLst>
+                              <p:par>
+                                <p:cTn id="49" presetID="10" presetClass="entr" presetSubtype="0" fill="hold" nodeType="clickEffect">
+                                  <p:stCondLst>
+                                    <p:cond delay="0"/>
+                                  </p:stCondLst>
+                                  <p:childTnLst>
+                                    <p:set>
+                                      <p:cBhvr>
+                                        <p:cTn id="50" dur="1" fill="hold">
+                                          <p:stCondLst>
+                                            <p:cond delay="0"/>
+                                          </p:stCondLst>
+                                        </p:cTn>
+                                        <p:tgtEl>
+                                          <p:spTgt spid="3">
+                                            <p:txEl>
+                                              <p:pRg st="11" end="11"/>
+                                            </p:txEl>
+                                          </p:spTgt>
+                                        </p:tgtEl>
+                                        <p:attrNameLst>
+                                          <p:attrName>style.visibility</p:attrName>
+                                        </p:attrNameLst>
+                                      </p:cBhvr>
+                                      <p:to>
+                                        <p:strVal val="visible"/>
+                                      </p:to>
+                                    </p:set>
+                                    <p:animEffect transition="in" filter="fade">
+                                      <p:cBhvr>
+                                        <p:cTn id="51" dur="500"/>
+                                        <p:tgtEl>
+                                          <p:spTgt spid="3">
+                                            <p:txEl>
+                                              <p:pRg st="11" end="11"/>
+                                            </p:txEl>
+                                          </p:spTgt>
+                                        </p:tgtEl>
+                                      </p:cBhvr>
+                                    </p:animEffect>
+                                  </p:childTnLst>
+                                </p:cTn>
+                              </p:par>
+                              <p:par>
+                                <p:cTn id="52" presetID="10" presetClass="entr" presetSubtype="0" fill="hold" nodeType="withEffect">
+                                  <p:stCondLst>
+                                    <p:cond delay="0"/>
+                                  </p:stCondLst>
+                                  <p:childTnLst>
+                                    <p:set>
+                                      <p:cBhvr>
+                                        <p:cTn id="53" dur="1" fill="hold">
+                                          <p:stCondLst>
+                                            <p:cond delay="0"/>
+                                          </p:stCondLst>
+                                        </p:cTn>
+                                        <p:tgtEl>
+                                          <p:spTgt spid="3">
+                                            <p:txEl>
+                                              <p:pRg st="12" end="12"/>
+                                            </p:txEl>
+                                          </p:spTgt>
+                                        </p:tgtEl>
+                                        <p:attrNameLst>
+                                          <p:attrName>style.visibility</p:attrName>
+                                        </p:attrNameLst>
+                                      </p:cBhvr>
+                                      <p:to>
+                                        <p:strVal val="visible"/>
+                                      </p:to>
+                                    </p:set>
+                                    <p:animEffect transition="in" filter="fade">
+                                      <p:cBhvr>
+                                        <p:cTn id="54" dur="500"/>
+                                        <p:tgtEl>
+                                          <p:spTgt spid="3">
+                                            <p:txEl>
+                                              <p:pRg st="12" end="12"/>
+                                            </p:txEl>
+                                          </p:spTgt>
+                                        </p:tgtEl>
+                                      </p:cBhvr>
+                                    </p:animEffect>
+                                  </p:childTnLst>
+                                </p:cTn>
+                              </p:par>
+                              <p:par>
+                                <p:cTn id="55" presetID="10" presetClass="entr" presetSubtype="0" fill="hold" nodeType="withEffect">
+                                  <p:stCondLst>
+                                    <p:cond delay="0"/>
+                                  </p:stCondLst>
+                                  <p:childTnLst>
+                                    <p:set>
+                                      <p:cBhvr>
+                                        <p:cTn id="56" dur="1" fill="hold">
+                                          <p:stCondLst>
+                                            <p:cond delay="0"/>
+                                          </p:stCondLst>
+                                        </p:cTn>
+                                        <p:tgtEl>
+                                          <p:spTgt spid="3">
+                                            <p:txEl>
+                                              <p:pRg st="13" end="13"/>
+                                            </p:txEl>
+                                          </p:spTgt>
+                                        </p:tgtEl>
+                                        <p:attrNameLst>
+                                          <p:attrName>style.visibility</p:attrName>
+                                        </p:attrNameLst>
+                                      </p:cBhvr>
+                                      <p:to>
+                                        <p:strVal val="visible"/>
+                                      </p:to>
+                                    </p:set>
+                                    <p:animEffect transition="in" filter="fade">
+                                      <p:cBhvr>
+                                        <p:cTn id="57" dur="500"/>
+                                        <p:tgtEl>
+                                          <p:spTgt spid="3">
+                                            <p:txEl>
+                                              <p:pRg st="13" end="13"/>
+                                            </p:txEl>
+                                          </p:spTgt>
+                                        </p:tgtEl>
+                                      </p:cBhvr>
+                                    </p:animEffect>
+                                  </p:childTnLst>
+                                </p:cTn>
+                              </p:par>
+                            </p:childTnLst>
+                          </p:cTn>
+                        </p:par>
+                      </p:childTnLst>
+                    </p:cTn>
+                  </p:par>
+                  <p:par>
+                    <p:cTn id="58" fill="hold">
+                      <p:stCondLst>
+                        <p:cond delay="indefinite"/>
+                      </p:stCondLst>
+                      <p:childTnLst>
+                        <p:par>
+                          <p:cTn id="59" fill="hold">
+                            <p:stCondLst>
+                              <p:cond delay="0"/>
+                            </p:stCondLst>
+                            <p:childTnLst>
+                              <p:par>
+                                <p:cTn id="60" presetID="10" presetClass="entr" presetSubtype="0" fill="hold" nodeType="clickEffect">
+                                  <p:stCondLst>
+                                    <p:cond delay="0"/>
+                                  </p:stCondLst>
+                                  <p:childTnLst>
+                                    <p:set>
+                                      <p:cBhvr>
+                                        <p:cTn id="61" dur="1" fill="hold">
+                                          <p:stCondLst>
+                                            <p:cond delay="0"/>
+                                          </p:stCondLst>
+                                        </p:cTn>
+                                        <p:tgtEl>
+                                          <p:spTgt spid="3">
+                                            <p:txEl>
+                                              <p:pRg st="14" end="14"/>
+                                            </p:txEl>
+                                          </p:spTgt>
+                                        </p:tgtEl>
+                                        <p:attrNameLst>
+                                          <p:attrName>style.visibility</p:attrName>
+                                        </p:attrNameLst>
+                                      </p:cBhvr>
+                                      <p:to>
+                                        <p:strVal val="visible"/>
+                                      </p:to>
+                                    </p:set>
+                                    <p:animEffect transition="in" filter="fade">
+                                      <p:cBhvr>
+                                        <p:cTn id="62" dur="500"/>
+                                        <p:tgtEl>
+                                          <p:spTgt spid="3">
+                                            <p:txEl>
+                                              <p:pRg st="14" end="14"/>
+                                            </p:txEl>
+                                          </p:spTgt>
+                                        </p:tgtEl>
+                                      </p:cBhvr>
+                                    </p:animEffect>
+                                  </p:childTnLst>
+                                </p:cTn>
+                              </p:par>
+                            </p:childTnLst>
+                          </p:cTn>
+                        </p:par>
+                      </p:childTnLst>
+                    </p:cTn>
+                  </p:par>
+                </p:childTnLst>
+              </p:cTn>
+              <p:prevCondLst>
+                <p:cond evt="onPrev" delay="0">
+                  <p:tgtEl>
+                    <p:sldTgt/>
+                  </p:tgtEl>
+                </p:cond>
+              </p:prevCondLst>
+              <p:nextCondLst>
+                <p:cond evt="onNext" delay="0">
+                  <p:tgtEl>
+                    <p:sldTgt/>
+                  </p:tgtEl>
+                </p:cond>
+              </p:nextCondLst>
+            </p:seq>
+          </p:childTnLst>
+        </p:cTn>
+      </p:par>
+    </p:tnLst>
+  </p:timing>
+</p:sld>
+</file>
+
+<file path=ppt/slides/slide22.xml><?xml version="1.0" encoding="utf-8"?>
+<p:sld xmlns:a="http://schemas.openxmlformats.org/drawingml/2006/main" xmlns:r="http://schemas.openxmlformats.org/officeDocument/2006/relationships" xmlns:p="http://schemas.openxmlformats.org/presentationml/2006/main">
+  <p:cSld>
+    <p:spTree>
+      <p:nvGrpSpPr>
+        <p:cNvPr id="1" name=""/>
+        <p:cNvGrpSpPr/>
+        <p:nvPr/>
+      </p:nvGrpSpPr>
+      <p:grpSpPr>
+        <a:xfrm>
+          <a:off x="0" y="0"/>
+          <a:ext cx="0" cy="0"/>
+          <a:chOff x="0" y="0"/>
+          <a:chExt cx="0" cy="0"/>
+        </a:xfrm>
+      </p:grpSpPr>
+      <p:sp>
+        <p:nvSpPr>
+          <p:cNvPr id="2" name="Title 1">
+            <a:extLst>
+              <a:ext uri="{FF2B5EF4-FFF2-40B4-BE49-F238E27FC236}">
+                <a16:creationId xmlns:a16="http://schemas.microsoft.com/office/drawing/2014/main" id="{B71F8934-DA57-B8F3-DFB5-63AB034BF3DA}"/>
+              </a:ext>
+            </a:extLst>
+          </p:cNvPr>
+          <p:cNvSpPr>
+            <a:spLocks noGrp="1"/>
+          </p:cNvSpPr>
+          <p:nvPr>
+            <p:ph type="title"/>
+          </p:nvPr>
+        </p:nvSpPr>
+        <p:spPr/>
+        <p:txBody>
+          <a:bodyPr/>
+          <a:lstStyle/>
+          <a:p>
+            <a:r>
+              <a:rPr lang="sv-SE"/>
+              <a:t>Lokala arrayer</a:t>
+            </a:r>
+            <a:endParaRPr lang="LID4096"/>
+          </a:p>
+        </p:txBody>
+      </p:sp>
+      <p:pic>
+        <p:nvPicPr>
+          <p:cNvPr id="5" name="Picture 4">
+            <a:extLst>
+              <a:ext uri="{FF2B5EF4-FFF2-40B4-BE49-F238E27FC236}">
+                <a16:creationId xmlns:a16="http://schemas.microsoft.com/office/drawing/2014/main" id="{EC6C4A39-A9D3-3122-4AF0-12FF95D210ED}"/>
+              </a:ext>
+            </a:extLst>
+          </p:cNvPr>
+          <p:cNvPicPr>
+            <a:picLocks noChangeAspect="1"/>
+          </p:cNvPicPr>
+          <p:nvPr/>
+        </p:nvPicPr>
+        <p:blipFill>
+          <a:blip r:embed="rId2"/>
+          <a:stretch>
+            <a:fillRect/>
+          </a:stretch>
+        </p:blipFill>
+        <p:spPr>
+          <a:xfrm>
+            <a:off x="527861" y="2118868"/>
+            <a:ext cx="8133540" cy="4153741"/>
+          </a:xfrm>
+          <a:prstGeom prst="rect">
+            <a:avLst/>
+          </a:prstGeom>
+        </p:spPr>
+      </p:pic>
+    </p:spTree>
+    <p:extLst>
+      <p:ext uri="{BB962C8B-B14F-4D97-AF65-F5344CB8AC3E}">
+        <p14:creationId xmlns:p14="http://schemas.microsoft.com/office/powerpoint/2010/main" val="2752721831"/>
+      </p:ext>
+    </p:extLst>
+  </p:cSld>
+  <p:clrMapOvr>
+    <a:masterClrMapping/>
+  </p:clrMapOvr>
+</p:sld>
+</file>
+
+<file path=ppt/slides/slide23.xml><?xml version="1.0" encoding="utf-8"?>
+<p:sld xmlns:a="http://schemas.openxmlformats.org/drawingml/2006/main" xmlns:r="http://schemas.openxmlformats.org/officeDocument/2006/relationships" xmlns:p="http://schemas.openxmlformats.org/presentationml/2006/main">
+  <p:cSld>
+    <p:spTree>
+      <p:nvGrpSpPr>
         <p:cNvPr id="1" name=""/>
         <p:cNvGrpSpPr/>
         <p:nvPr/>
@@ -8107,7 +15789,7 @@
 </p:sld>
 </file>
 
-<file path=ppt/slides/slide21.xml><?xml version="1.0" encoding="utf-8"?>
+<file path=ppt/slides/slide24.xml><?xml version="1.0" encoding="utf-8"?>
 <p:sld xmlns:a="http://schemas.openxmlformats.org/drawingml/2006/main" xmlns:r="http://schemas.openxmlformats.org/officeDocument/2006/relationships" xmlns:p="http://schemas.openxmlformats.org/presentationml/2006/main">
   <p:cSld>
     <p:spTree>

--- a/slides/lecture03-assembly2.pptx
+++ b/slides/lecture03-assembly2.pptx
@@ -646,16 +646,8 @@
           <a:p>
             <a:r>
               <a:rPr lang="sv-SE"/>
-              <a:t>Nu skall vi byta spår en stund och prata om arrays istället. </a:t>
-            </a:r>
-          </a:p>
-          <a:p>
-            <a:r>
-              <a:rPr lang="sv-SE"/>
-              <a:t>Ni har stött på arrays förut (i Java) och skrivit sådana här saker. </a:t>
-            </a:r>
-          </a:p>
-          <a:p>
+              <a:t>Berätta kort om ascii codes. </a:t>
+            </a:r>
             <a:endParaRPr lang="LID4096"/>
           </a:p>
         </p:txBody>
@@ -677,6 +669,102 @@
           <a:p>
             <a:fld id="{01B4E41B-EE32-43AA-BF26-21D12108C66F}" type="slidenum">
               <a:rPr lang="LID4096" smtClean="0"/>
+              <a:t>18</a:t>
+            </a:fld>
+            <a:endParaRPr lang="LID4096"/>
+          </a:p>
+        </p:txBody>
+      </p:sp>
+    </p:spTree>
+    <p:extLst>
+      <p:ext uri="{BB962C8B-B14F-4D97-AF65-F5344CB8AC3E}">
+        <p14:creationId xmlns:p14="http://schemas.microsoft.com/office/powerpoint/2010/main" val="3735401211"/>
+      </p:ext>
+    </p:extLst>
+  </p:cSld>
+  <p:clrMapOvr>
+    <a:masterClrMapping/>
+  </p:clrMapOvr>
+</p:notes>
+</file>
+
+<file path=ppt/notesSlides/notesSlide11.xml><?xml version="1.0" encoding="utf-8"?>
+<p:notes xmlns:a="http://schemas.openxmlformats.org/drawingml/2006/main" xmlns:r="http://schemas.openxmlformats.org/officeDocument/2006/relationships" xmlns:p="http://schemas.openxmlformats.org/presentationml/2006/main">
+  <p:cSld>
+    <p:spTree>
+      <p:nvGrpSpPr>
+        <p:cNvPr id="1" name=""/>
+        <p:cNvGrpSpPr/>
+        <p:nvPr/>
+      </p:nvGrpSpPr>
+      <p:grpSpPr>
+        <a:xfrm>
+          <a:off x="0" y="0"/>
+          <a:ext cx="0" cy="0"/>
+          <a:chOff x="0" y="0"/>
+          <a:chExt cx="0" cy="0"/>
+        </a:xfrm>
+      </p:grpSpPr>
+      <p:sp>
+        <p:nvSpPr>
+          <p:cNvPr id="2" name="Slide Image Placeholder 1"/>
+          <p:cNvSpPr>
+            <a:spLocks noGrp="1" noRot="1" noChangeAspect="1"/>
+          </p:cNvSpPr>
+          <p:nvPr>
+            <p:ph type="sldImg"/>
+          </p:nvPr>
+        </p:nvSpPr>
+        <p:spPr/>
+      </p:sp>
+      <p:sp>
+        <p:nvSpPr>
+          <p:cNvPr id="3" name="Notes Placeholder 2"/>
+          <p:cNvSpPr>
+            <a:spLocks noGrp="1"/>
+          </p:cNvSpPr>
+          <p:nvPr>
+            <p:ph type="body" idx="1"/>
+          </p:nvPr>
+        </p:nvSpPr>
+        <p:spPr/>
+        <p:txBody>
+          <a:bodyPr/>
+          <a:lstStyle/>
+          <a:p>
+            <a:r>
+              <a:rPr lang="sv-SE"/>
+              <a:t>Nu skall vi byta spår en stund och prata om arrays istället. </a:t>
+            </a:r>
+          </a:p>
+          <a:p>
+            <a:r>
+              <a:rPr lang="sv-SE"/>
+              <a:t>Ni har stött på arrays förut (i Java) och skrivit sådana här saker. </a:t>
+            </a:r>
+          </a:p>
+          <a:p>
+            <a:endParaRPr lang="LID4096"/>
+          </a:p>
+        </p:txBody>
+      </p:sp>
+      <p:sp>
+        <p:nvSpPr>
+          <p:cNvPr id="4" name="Slide Number Placeholder 3"/>
+          <p:cNvSpPr>
+            <a:spLocks noGrp="1"/>
+          </p:cNvSpPr>
+          <p:nvPr>
+            <p:ph type="sldNum" sz="quarter" idx="5"/>
+          </p:nvPr>
+        </p:nvSpPr>
+        <p:spPr/>
+        <p:txBody>
+          <a:bodyPr/>
+          <a:lstStyle/>
+          <a:p>
+            <a:fld id="{01B4E41B-EE32-43AA-BF26-21D12108C66F}" type="slidenum">
+              <a:rPr lang="LID4096" smtClean="0"/>
               <a:t>20</a:t>
             </a:fld>
             <a:endParaRPr lang="LID4096"/>
@@ -696,7 +784,7 @@
 </p:notes>
 </file>
 
-<file path=ppt/notesSlides/notesSlide11.xml><?xml version="1.0" encoding="utf-8"?>
+<file path=ppt/notesSlides/notesSlide12.xml><?xml version="1.0" encoding="utf-8"?>
 <p:notes xmlns:a="http://schemas.openxmlformats.org/drawingml/2006/main" xmlns:r="http://schemas.openxmlformats.org/officeDocument/2006/relationships" xmlns:p="http://schemas.openxmlformats.org/presentationml/2006/main">
   <p:cSld>
     <p:spTree>
@@ -2209,10 +2297,22 @@
           <a:lstStyle/>
           <a:p>
             <a:r>
-              <a:rPr lang="sv-SE"/>
-              <a:t>Berätta kort om ascii codes. </a:t>
-            </a:r>
-            <a:endParaRPr lang="LID4096"/>
+              <a:rPr lang="en-US" dirty="0"/>
+              <a:t>H</a:t>
+            </a:r>
+            <a:r>
+              <a:rPr lang="sv-SE" dirty="0"/>
+              <a:t>är </a:t>
+            </a:r>
+            <a:r>
+              <a:rPr lang="sv-SE" dirty="0" err="1"/>
+              <a:t>är</a:t>
+            </a:r>
+            <a:r>
+              <a:rPr lang="sv-SE" dirty="0"/>
+              <a:t> hoppeligen dags för paus</a:t>
+            </a:r>
+            <a:endParaRPr lang="LID4096" dirty="0"/>
           </a:p>
         </p:txBody>
       </p:sp>
@@ -2233,7 +2333,7 @@
           <a:p>
             <a:fld id="{01B4E41B-EE32-43AA-BF26-21D12108C66F}" type="slidenum">
               <a:rPr lang="LID4096" smtClean="0"/>
-              <a:t>18</a:t>
+              <a:t>17</a:t>
             </a:fld>
             <a:endParaRPr lang="LID4096"/>
           </a:p>
@@ -2242,7 +2342,7 @@
     </p:spTree>
     <p:extLst>
       <p:ext uri="{BB962C8B-B14F-4D97-AF65-F5344CB8AC3E}">
-        <p14:creationId xmlns:p14="http://schemas.microsoft.com/office/powerpoint/2010/main" val="3735401211"/>
+        <p14:creationId xmlns:p14="http://schemas.microsoft.com/office/powerpoint/2010/main" val="493726078"/>
       </p:ext>
     </p:extLst>
   </p:cSld>
@@ -5830,6 +5930,249 @@
               <a:t>Mer assembler på RISC-V</a:t>
             </a:r>
             <a:endParaRPr lang="LID4096"/>
+          </a:p>
+        </p:txBody>
+      </p:sp>
+      <p:sp>
+        <p:nvSpPr>
+          <p:cNvPr id="4" name="Subtitle 2">
+            <a:extLst>
+              <a:ext uri="{FF2B5EF4-FFF2-40B4-BE49-F238E27FC236}">
+                <a16:creationId xmlns:a16="http://schemas.microsoft.com/office/drawing/2014/main" id="{FD1F8105-158B-FCD7-B65F-CF66AF3970DE}"/>
+              </a:ext>
+            </a:extLst>
+          </p:cNvPr>
+          <p:cNvSpPr txBox="1">
+            <a:spLocks/>
+          </p:cNvSpPr>
+          <p:nvPr/>
+        </p:nvSpPr>
+        <p:spPr>
+          <a:xfrm>
+            <a:off x="1455471" y="4374266"/>
+            <a:ext cx="9144000" cy="1655762"/>
+          </a:xfrm>
+          <a:prstGeom prst="rect">
+            <a:avLst/>
+          </a:prstGeom>
+        </p:spPr>
+        <p:txBody>
+          <a:bodyPr vert="horz" lIns="91440" tIns="45720" rIns="91440" bIns="45720" rtlCol="0">
+            <a:normAutofit lnSpcReduction="10000"/>
+          </a:bodyPr>
+          <a:lstStyle>
+            <a:lvl1pPr marL="0" indent="0" algn="ctr" defTabSz="914400" rtl="0" eaLnBrk="1" latinLnBrk="0" hangingPunct="1">
+              <a:lnSpc>
+                <a:spcPct val="90000"/>
+              </a:lnSpc>
+              <a:spcBef>
+                <a:spcPts val="1000"/>
+              </a:spcBef>
+              <a:buFont typeface="Arial" panose="020B0604020202020204" pitchFamily="34" charset="0"/>
+              <a:buNone/>
+              <a:defRPr sz="2400" kern="1200">
+                <a:solidFill>
+                  <a:schemeClr val="tx1"/>
+                </a:solidFill>
+                <a:latin typeface="+mn-lt"/>
+                <a:ea typeface="+mn-ea"/>
+                <a:cs typeface="+mn-cs"/>
+              </a:defRPr>
+            </a:lvl1pPr>
+            <a:lvl2pPr marL="457200" indent="0" algn="ctr" defTabSz="914400" rtl="0" eaLnBrk="1" latinLnBrk="0" hangingPunct="1">
+              <a:lnSpc>
+                <a:spcPct val="90000"/>
+              </a:lnSpc>
+              <a:spcBef>
+                <a:spcPts val="500"/>
+              </a:spcBef>
+              <a:buFont typeface="Arial" panose="020B0604020202020204" pitchFamily="34" charset="0"/>
+              <a:buNone/>
+              <a:defRPr sz="2000" kern="1200">
+                <a:solidFill>
+                  <a:schemeClr val="tx1"/>
+                </a:solidFill>
+                <a:latin typeface="+mn-lt"/>
+                <a:ea typeface="+mn-ea"/>
+                <a:cs typeface="+mn-cs"/>
+              </a:defRPr>
+            </a:lvl2pPr>
+            <a:lvl3pPr marL="914400" indent="0" algn="ctr" defTabSz="914400" rtl="0" eaLnBrk="1" latinLnBrk="0" hangingPunct="1">
+              <a:lnSpc>
+                <a:spcPct val="90000"/>
+              </a:lnSpc>
+              <a:spcBef>
+                <a:spcPts val="500"/>
+              </a:spcBef>
+              <a:buFont typeface="Arial" panose="020B0604020202020204" pitchFamily="34" charset="0"/>
+              <a:buNone/>
+              <a:defRPr sz="1800" kern="1200">
+                <a:solidFill>
+                  <a:schemeClr val="tx1"/>
+                </a:solidFill>
+                <a:latin typeface="+mn-lt"/>
+                <a:ea typeface="+mn-ea"/>
+                <a:cs typeface="+mn-cs"/>
+              </a:defRPr>
+            </a:lvl3pPr>
+            <a:lvl4pPr marL="1371600" indent="0" algn="ctr" defTabSz="914400" rtl="0" eaLnBrk="1" latinLnBrk="0" hangingPunct="1">
+              <a:lnSpc>
+                <a:spcPct val="90000"/>
+              </a:lnSpc>
+              <a:spcBef>
+                <a:spcPts val="500"/>
+              </a:spcBef>
+              <a:buFont typeface="Arial" panose="020B0604020202020204" pitchFamily="34" charset="0"/>
+              <a:buNone/>
+              <a:defRPr sz="1600" kern="1200">
+                <a:solidFill>
+                  <a:schemeClr val="tx1"/>
+                </a:solidFill>
+                <a:latin typeface="+mn-lt"/>
+                <a:ea typeface="+mn-ea"/>
+                <a:cs typeface="+mn-cs"/>
+              </a:defRPr>
+            </a:lvl4pPr>
+            <a:lvl5pPr marL="1828800" indent="0" algn="ctr" defTabSz="914400" rtl="0" eaLnBrk="1" latinLnBrk="0" hangingPunct="1">
+              <a:lnSpc>
+                <a:spcPct val="90000"/>
+              </a:lnSpc>
+              <a:spcBef>
+                <a:spcPts val="500"/>
+              </a:spcBef>
+              <a:buFont typeface="Arial" panose="020B0604020202020204" pitchFamily="34" charset="0"/>
+              <a:buNone/>
+              <a:defRPr sz="1600" kern="1200">
+                <a:solidFill>
+                  <a:schemeClr val="tx1"/>
+                </a:solidFill>
+                <a:latin typeface="+mn-lt"/>
+                <a:ea typeface="+mn-ea"/>
+                <a:cs typeface="+mn-cs"/>
+              </a:defRPr>
+            </a:lvl5pPr>
+            <a:lvl6pPr marL="2286000" indent="0" algn="ctr" defTabSz="914400" rtl="0" eaLnBrk="1" latinLnBrk="0" hangingPunct="1">
+              <a:lnSpc>
+                <a:spcPct val="90000"/>
+              </a:lnSpc>
+              <a:spcBef>
+                <a:spcPts val="500"/>
+              </a:spcBef>
+              <a:buFont typeface="Arial" panose="020B0604020202020204" pitchFamily="34" charset="0"/>
+              <a:buNone/>
+              <a:defRPr sz="1600" kern="1200">
+                <a:solidFill>
+                  <a:schemeClr val="tx1"/>
+                </a:solidFill>
+                <a:latin typeface="+mn-lt"/>
+                <a:ea typeface="+mn-ea"/>
+                <a:cs typeface="+mn-cs"/>
+              </a:defRPr>
+            </a:lvl6pPr>
+            <a:lvl7pPr marL="2743200" indent="0" algn="ctr" defTabSz="914400" rtl="0" eaLnBrk="1" latinLnBrk="0" hangingPunct="1">
+              <a:lnSpc>
+                <a:spcPct val="90000"/>
+              </a:lnSpc>
+              <a:spcBef>
+                <a:spcPts val="500"/>
+              </a:spcBef>
+              <a:buFont typeface="Arial" panose="020B0604020202020204" pitchFamily="34" charset="0"/>
+              <a:buNone/>
+              <a:defRPr sz="1600" kern="1200">
+                <a:solidFill>
+                  <a:schemeClr val="tx1"/>
+                </a:solidFill>
+                <a:latin typeface="+mn-lt"/>
+                <a:ea typeface="+mn-ea"/>
+                <a:cs typeface="+mn-cs"/>
+              </a:defRPr>
+            </a:lvl7pPr>
+            <a:lvl8pPr marL="3200400" indent="0" algn="ctr" defTabSz="914400" rtl="0" eaLnBrk="1" latinLnBrk="0" hangingPunct="1">
+              <a:lnSpc>
+                <a:spcPct val="90000"/>
+              </a:lnSpc>
+              <a:spcBef>
+                <a:spcPts val="500"/>
+              </a:spcBef>
+              <a:buFont typeface="Arial" panose="020B0604020202020204" pitchFamily="34" charset="0"/>
+              <a:buNone/>
+              <a:defRPr sz="1600" kern="1200">
+                <a:solidFill>
+                  <a:schemeClr val="tx1"/>
+                </a:solidFill>
+                <a:latin typeface="+mn-lt"/>
+                <a:ea typeface="+mn-ea"/>
+                <a:cs typeface="+mn-cs"/>
+              </a:defRPr>
+            </a:lvl8pPr>
+            <a:lvl9pPr marL="3657600" indent="0" algn="ctr" defTabSz="914400" rtl="0" eaLnBrk="1" latinLnBrk="0" hangingPunct="1">
+              <a:lnSpc>
+                <a:spcPct val="90000"/>
+              </a:lnSpc>
+              <a:spcBef>
+                <a:spcPts val="500"/>
+              </a:spcBef>
+              <a:buFont typeface="Arial" panose="020B0604020202020204" pitchFamily="34" charset="0"/>
+              <a:buNone/>
+              <a:defRPr sz="1600" kern="1200">
+                <a:solidFill>
+                  <a:schemeClr val="tx1"/>
+                </a:solidFill>
+                <a:latin typeface="+mn-lt"/>
+                <a:ea typeface="+mn-ea"/>
+                <a:cs typeface="+mn-cs"/>
+              </a:defRPr>
+            </a:lvl9pPr>
+          </a:lstStyle>
+          <a:p>
+            <a:r>
+              <a:rPr lang="sv-SE" dirty="0"/>
+              <a:t>3 BUGGAR!</a:t>
+            </a:r>
+          </a:p>
+          <a:p>
+            <a:r>
+              <a:rPr lang="sv-SE" dirty="0" err="1"/>
+              <a:t>lw</a:t>
+            </a:r>
+            <a:r>
+              <a:rPr lang="sv-SE" dirty="0"/>
+              <a:t> istället för </a:t>
+            </a:r>
+            <a:r>
+              <a:rPr lang="sv-SE" dirty="0" err="1"/>
+              <a:t>lh</a:t>
+            </a:r>
+            <a:endParaRPr lang="sv-SE" dirty="0"/>
+          </a:p>
+          <a:p>
+            <a:r>
+              <a:rPr lang="sv-SE" dirty="0"/>
+              <a:t>10 istället för </a:t>
+            </a:r>
+            <a:r>
+              <a:rPr lang="sv-SE" dirty="0" err="1"/>
+              <a:t>size</a:t>
+            </a:r>
+            <a:endParaRPr lang="sv-SE" dirty="0"/>
+          </a:p>
+          <a:p>
+            <a:r>
+              <a:rPr lang="sv-SE" dirty="0" err="1"/>
+              <a:t>sum</a:t>
+            </a:r>
+            <a:r>
+              <a:rPr lang="sv-SE" dirty="0"/>
+              <a:t> funktionen klarar inte en lista med </a:t>
+            </a:r>
+            <a:r>
+              <a:rPr lang="sv-SE"/>
+              <a:t>0 element!!</a:t>
+            </a:r>
+            <a:endParaRPr lang="sv-SE" dirty="0"/>
+          </a:p>
+          <a:p>
+            <a:endParaRPr lang="LID4096" dirty="0"/>
           </a:p>
         </p:txBody>
       </p:sp>
@@ -8091,7 +8434,9 @@
         </p:nvSpPr>
         <p:spPr/>
         <p:txBody>
-          <a:bodyPr/>
+          <a:bodyPr>
+            <a:normAutofit lnSpcReduction="10000"/>
+          </a:bodyPr>
           <a:lstStyle/>
           <a:p>
             <a:pPr marL="0" indent="0">
